--- a/presentation/presentation-v4-gradient-noir.pptx
+++ b/presentation/presentation-v4-gradient-noir.pptx
@@ -3354,8 +3354,8 @@
         </p:nvSpPr>
         <p:spPr>
           <a:xfrm>
-            <a:off x="1371600" y="2286000"/>
-            <a:ext cx="9601200" cy="2286000"/>
+            <a:off x="0" y="2286000"/>
+            <a:ext cx="12191695" cy="2286000"/>
           </a:xfrm>
           <a:prstGeom prst="rect">
             <a:avLst/>
@@ -3515,7 +3515,7 @@
         </p:nvSpPr>
         <p:spPr>
           <a:xfrm>
-            <a:off x="2606040" y="2971800"/>
+            <a:off x="2606040" y="3017520"/>
             <a:ext cx="365760" cy="548640"/>
           </a:xfrm>
           <a:prstGeom prst="rect">
@@ -3606,7 +3606,7 @@
         </p:nvSpPr>
         <p:spPr>
           <a:xfrm>
-            <a:off x="4892040" y="2971800"/>
+            <a:off x="4892040" y="3017520"/>
             <a:ext cx="365760" cy="548640"/>
           </a:xfrm>
           <a:prstGeom prst="rect">
@@ -3697,7 +3697,7 @@
         </p:nvSpPr>
         <p:spPr>
           <a:xfrm>
-            <a:off x="7178040" y="2971800"/>
+            <a:off x="7178040" y="3017520"/>
             <a:ext cx="365760" cy="548640"/>
           </a:xfrm>
           <a:prstGeom prst="rect">
@@ -3788,7 +3788,7 @@
         </p:nvSpPr>
         <p:spPr>
           <a:xfrm>
-            <a:off x="9464040" y="2971800"/>
+            <a:off x="9464040" y="3017520"/>
             <a:ext cx="365760" cy="548640"/>
           </a:xfrm>
           <a:prstGeom prst="rect">
@@ -3922,7 +3922,7 @@
         </p:nvSpPr>
         <p:spPr>
           <a:xfrm>
-            <a:off x="1638605" y="3840480"/>
+            <a:off x="10782605" y="3840480"/>
             <a:ext cx="13716" cy="288036"/>
           </a:xfrm>
           <a:prstGeom prst="rect">
@@ -3965,7 +3965,7 @@
         </p:nvSpPr>
         <p:spPr>
           <a:xfrm>
-            <a:off x="10782605" y="3840480"/>
+            <a:off x="1638605" y="3840480"/>
             <a:ext cx="13716" cy="288036"/>
           </a:xfrm>
           <a:prstGeom prst="rect">
@@ -4008,8 +4008,8 @@
         </p:nvSpPr>
         <p:spPr>
           <a:xfrm>
-            <a:off x="4114800" y="4206240"/>
-            <a:ext cx="4114800" cy="457200"/>
+            <a:off x="1417320" y="3703320"/>
+            <a:ext cx="457200" cy="365760"/>
           </a:xfrm>
           <a:prstGeom prst="rect">
             <a:avLst/>
@@ -4025,20 +4025,56 @@
             <a:pPr algn="ctr">
               <a:defRPr sz="1400" b="0" i="0">
                 <a:solidFill>
+                  <a:srgbClr val="D4D0C8"/>
+                </a:solidFill>
+                <a:latin typeface="Segoe UI"/>
+              </a:defRPr>
+            </a:pPr>
+            <a:r>
+              <a:t>▲</a:t>
+            </a:r>
+          </a:p>
+        </p:txBody>
+      </p:sp>
+      <p:sp>
+        <p:nvSpPr>
+          <p:cNvPr id="16" name="TextBox 15"/>
+          <p:cNvSpPr txBox="1"/>
+          <p:nvPr/>
+        </p:nvSpPr>
+        <p:spPr>
+          <a:xfrm>
+            <a:off x="4114800" y="4206240"/>
+            <a:ext cx="4114800" cy="457200"/>
+          </a:xfrm>
+          <a:prstGeom prst="rect">
+            <a:avLst/>
+          </a:prstGeom>
+          <a:noFill/>
+        </p:spPr>
+        <p:txBody>
+          <a:bodyPr wrap="square">
+            <a:spAutoFit/>
+          </a:bodyPr>
+          <a:lstStyle/>
+          <a:p>
+            <a:pPr algn="ctr">
+              <a:defRPr sz="1400" b="0" i="0">
+                <a:solidFill>
                   <a:srgbClr val="6B7280"/>
                 </a:solidFill>
                 <a:latin typeface="Segoe UI"/>
               </a:defRPr>
             </a:pPr>
             <a:r>
-              <a:t>Continuous feedback loop</a:t>
-            </a:r>
-          </a:p>
-        </p:txBody>
-      </p:sp>
-      <p:sp>
-        <p:nvSpPr>
-          <p:cNvPr id="16" name="TextBox 15"/>
+              <a:t>Continuous feedback</a:t>
+            </a:r>
+          </a:p>
+        </p:txBody>
+      </p:sp>
+      <p:sp>
+        <p:nvSpPr>
+          <p:cNvPr id="17" name="TextBox 16"/>
           <p:cNvSpPr txBox="1"/>
           <p:nvPr/>
         </p:nvSpPr>
@@ -4383,42 +4419,6 @@
           </a:p>
         </p:txBody>
       </p:sp>
-      <p:sp>
-        <p:nvSpPr>
-          <p:cNvPr id="8" name="TextBox 7"/>
-          <p:cNvSpPr txBox="1"/>
-          <p:nvPr/>
-        </p:nvSpPr>
-        <p:spPr>
-          <a:xfrm>
-            <a:off x="1097280" y="5852160"/>
-            <a:ext cx="10058400" cy="548640"/>
-          </a:xfrm>
-          <a:prstGeom prst="rect">
-            <a:avLst/>
-          </a:prstGeom>
-          <a:noFill/>
-        </p:spPr>
-        <p:txBody>
-          <a:bodyPr wrap="square">
-            <a:spAutoFit/>
-          </a:bodyPr>
-          <a:lstStyle/>
-          <a:p>
-            <a:pPr algn="l">
-              <a:defRPr sz="1800" b="0" i="1">
-                <a:solidFill>
-                  <a:srgbClr val="E8E4D9"/>
-                </a:solidFill>
-                <a:latin typeface="Segoe UI"/>
-              </a:defRPr>
-            </a:pPr>
-            <a:r>
-              <a:t>Everything below the top layer already exists.</a:t>
-            </a:r>
-          </a:p>
-        </p:txBody>
-      </p:sp>
     </p:spTree>
   </p:cSld>
   <p:clrMapOvr>
@@ -4932,7 +4932,7 @@
         </p:nvSpPr>
         <p:spPr>
           <a:xfrm>
-            <a:off x="1097280" y="2011680"/>
+            <a:off x="929487" y="2011680"/>
             <a:ext cx="3200400" cy="1828800"/>
           </a:xfrm>
           <a:prstGeom prst="roundRect">
@@ -4987,7 +4987,7 @@
         </p:nvSpPr>
         <p:spPr>
           <a:xfrm>
-            <a:off x="1097280" y="4023360"/>
+            <a:off x="929487" y="4023360"/>
             <a:ext cx="3200400" cy="548640"/>
           </a:xfrm>
           <a:prstGeom prst="rect">
@@ -5023,8 +5023,8 @@
         </p:nvSpPr>
         <p:spPr>
           <a:xfrm>
-            <a:off x="4206240" y="2468880"/>
-            <a:ext cx="640080" cy="731520"/>
+            <a:off x="4129887" y="2560320"/>
+            <a:ext cx="365760" cy="731520"/>
           </a:xfrm>
           <a:prstGeom prst="rect">
             <a:avLst/>
@@ -5059,7 +5059,7 @@
         </p:nvSpPr>
         <p:spPr>
           <a:xfrm>
-            <a:off x="4754880" y="2011680"/>
+            <a:off x="4495647" y="2011680"/>
             <a:ext cx="3200400" cy="1828800"/>
           </a:xfrm>
           <a:prstGeom prst="roundRect">
@@ -5114,7 +5114,7 @@
         </p:nvSpPr>
         <p:spPr>
           <a:xfrm>
-            <a:off x="4754880" y="4023360"/>
+            <a:off x="4495647" y="4023360"/>
             <a:ext cx="3200400" cy="548640"/>
           </a:xfrm>
           <a:prstGeom prst="rect">
@@ -5150,8 +5150,8 @@
         </p:nvSpPr>
         <p:spPr>
           <a:xfrm>
-            <a:off x="7863840" y="2468880"/>
-            <a:ext cx="640080" cy="731520"/>
+            <a:off x="7696047" y="2560320"/>
+            <a:ext cx="365760" cy="731520"/>
           </a:xfrm>
           <a:prstGeom prst="rect">
             <a:avLst/>
@@ -5186,7 +5186,7 @@
         </p:nvSpPr>
         <p:spPr>
           <a:xfrm>
-            <a:off x="8412480" y="2011680"/>
+            <a:off x="8061807" y="2011680"/>
             <a:ext cx="3200400" cy="1828800"/>
           </a:xfrm>
           <a:prstGeom prst="roundRect">
@@ -5241,7 +5241,7 @@
         </p:nvSpPr>
         <p:spPr>
           <a:xfrm>
-            <a:off x="8412480" y="4023360"/>
+            <a:off x="8061807" y="4023360"/>
             <a:ext cx="3200400" cy="548640"/>
           </a:xfrm>
           <a:prstGeom prst="rect">
@@ -5387,7 +5387,7 @@
         </p:nvSpPr>
         <p:spPr>
           <a:xfrm>
-            <a:off x="914400" y="1645920"/>
+            <a:off x="838047" y="1645920"/>
             <a:ext cx="3291840" cy="1188720"/>
           </a:xfrm>
           <a:prstGeom prst="roundRect">
@@ -5442,7 +5442,7 @@
         </p:nvSpPr>
         <p:spPr>
           <a:xfrm>
-            <a:off x="1188720" y="3108960"/>
+            <a:off x="1112367" y="3108960"/>
             <a:ext cx="2743200" cy="1828800"/>
           </a:xfrm>
           <a:prstGeom prst="rect">
@@ -5486,7 +5486,7 @@
         </p:nvSpPr>
         <p:spPr>
           <a:xfrm>
-            <a:off x="4663440" y="1645920"/>
+            <a:off x="4449927" y="1645920"/>
             <a:ext cx="3291840" cy="1188720"/>
           </a:xfrm>
           <a:prstGeom prst="roundRect">
@@ -5541,7 +5541,7 @@
         </p:nvSpPr>
         <p:spPr>
           <a:xfrm>
-            <a:off x="4937760" y="3108960"/>
+            <a:off x="4724247" y="3108960"/>
             <a:ext cx="2743200" cy="1828800"/>
           </a:xfrm>
           <a:prstGeom prst="rect">
@@ -5585,7 +5585,7 @@
         </p:nvSpPr>
         <p:spPr>
           <a:xfrm>
-            <a:off x="8412480" y="1645920"/>
+            <a:off x="8061807" y="1645920"/>
             <a:ext cx="3291840" cy="1188720"/>
           </a:xfrm>
           <a:prstGeom prst="roundRect">
@@ -5640,7 +5640,7 @@
         </p:nvSpPr>
         <p:spPr>
           <a:xfrm>
-            <a:off x="8686800" y="3108960"/>
+            <a:off x="8336127" y="3108960"/>
             <a:ext cx="2743200" cy="1828800"/>
           </a:xfrm>
           <a:prstGeom prst="rect">
@@ -6316,61 +6316,30 @@
           </a:p>
         </p:txBody>
       </p:sp>
-      <p:sp>
-        <p:nvSpPr>
-          <p:cNvPr id="3" name="Rounded Rectangle 2"/>
-          <p:cNvSpPr/>
-          <p:nvPr/>
-        </p:nvSpPr>
-        <p:spPr>
-          <a:xfrm>
-            <a:off x="4114800" y="2286000"/>
-            <a:ext cx="3931920" cy="3200400"/>
-          </a:xfrm>
-          <a:prstGeom prst="roundRect">
-            <a:avLst/>
-          </a:prstGeom>
-          <a:solidFill>
-            <a:srgbClr val="151D30"/>
-          </a:solidFill>
-          <a:ln w="19050">
-            <a:solidFill>
-              <a:srgbClr val="D4D0C8"/>
-            </a:solidFill>
-          </a:ln>
-        </p:spPr>
-        <p:style>
-          <a:lnRef idx="1">
-            <a:schemeClr val="accent1"/>
-          </a:lnRef>
-          <a:fillRef idx="3">
-            <a:schemeClr val="accent1"/>
-          </a:fillRef>
-          <a:effectRef idx="2">
-            <a:schemeClr val="accent1"/>
-          </a:effectRef>
-          <a:fontRef idx="minor">
-            <a:schemeClr val="lt1"/>
-          </a:fontRef>
-        </p:style>
-        <p:txBody>
-          <a:bodyPr rtlCol="0" anchor="ctr" wrap="square"/>
-          <a:lstStyle/>
-          <a:p>
-            <a:pPr algn="ctr">
-              <a:defRPr sz="2400" b="0">
-                <a:solidFill>
-                  <a:srgbClr val="6B7280"/>
-                </a:solidFill>
-                <a:latin typeface="Segoe UI"/>
-              </a:defRPr>
-            </a:pPr>
-            <a:r>
-              <a:t>[ QR Code ]</a:t>
-            </a:r>
-          </a:p>
-        </p:txBody>
-      </p:sp>
+      <p:pic>
+        <p:nvPicPr>
+          <p:cNvPr id="3" name="Picture 2" descr="qr-demo.png"/>
+          <p:cNvPicPr>
+            <a:picLocks noChangeAspect="1"/>
+          </p:cNvPicPr>
+          <p:nvPr/>
+        </p:nvPicPr>
+        <p:blipFill>
+          <a:blip r:embed="rId2"/>
+          <a:stretch>
+            <a:fillRect/>
+          </a:stretch>
+        </p:blipFill>
+        <p:spPr>
+          <a:xfrm>
+            <a:off x="4297680" y="2286000"/>
+            <a:ext cx="3566160" cy="3200400"/>
+          </a:xfrm>
+          <a:prstGeom prst="rect">
+            <a:avLst/>
+          </a:prstGeom>
+        </p:spPr>
+      </p:pic>
       <p:sp>
         <p:nvSpPr>
           <p:cNvPr id="4" name="Rounded Rectangle 3"/>
@@ -6532,6 +6501,42 @@
             </a:pPr>
             <a:r>
               <a:t>ADAS</a:t>
+            </a:r>
+          </a:p>
+        </p:txBody>
+      </p:sp>
+      <p:sp>
+        <p:nvSpPr>
+          <p:cNvPr id="7" name="TextBox 6"/>
+          <p:cNvSpPr txBox="1"/>
+          <p:nvPr/>
+        </p:nvSpPr>
+        <p:spPr>
+          <a:xfrm>
+            <a:off x="0" y="6355080"/>
+            <a:ext cx="12191695" cy="365760"/>
+          </a:xfrm>
+          <a:prstGeom prst="rect">
+            <a:avLst/>
+          </a:prstGeom>
+          <a:noFill/>
+        </p:spPr>
+        <p:txBody>
+          <a:bodyPr wrap="square">
+            <a:spAutoFit/>
+          </a:bodyPr>
+          <a:lstStyle/>
+          <a:p>
+            <a:pPr algn="ctr">
+              <a:defRPr sz="1400" b="0" i="0">
+                <a:solidFill>
+                  <a:srgbClr val="6B7280"/>
+                </a:solidFill>
+                <a:latin typeface="Segoe UI"/>
+              </a:defRPr>
+            </a:pPr>
+            <a:r>
+              <a:t>tonypdemo.it.com</a:t>
             </a:r>
           </a:p>
         </p:txBody>
@@ -6662,7 +6667,7 @@
         <p:spPr>
           <a:xfrm>
             <a:off x="1371600" y="3657600"/>
-            <a:ext cx="9144000" cy="914400"/>
+            <a:ext cx="5486400" cy="914400"/>
           </a:xfrm>
           <a:prstGeom prst="rect">
             <a:avLst/>
@@ -6698,7 +6703,7 @@
         <p:spPr>
           <a:xfrm>
             <a:off x="1371600" y="4480560"/>
-            <a:ext cx="9144000" cy="548640"/>
+            <a:ext cx="5486400" cy="548640"/>
           </a:xfrm>
           <a:prstGeom prst="rect">
             <a:avLst/>
@@ -6734,7 +6739,7 @@
         <p:spPr>
           <a:xfrm>
             <a:off x="1371600" y="5212080"/>
-            <a:ext cx="9144000" cy="457200"/>
+            <a:ext cx="5486400" cy="457200"/>
           </a:xfrm>
           <a:prstGeom prst="rect">
             <a:avLst/>
@@ -6756,7 +6761,7 @@
               </a:defRPr>
             </a:pPr>
             <a:r>
-              <a:t>anthonypoole.dev  ·  linkedin.com/in/anthonypoole</a:t>
+              <a:t>anthony50102.github.io  ·  linkedin.com/in/anthony-poole-079548206</a:t>
             </a:r>
           </a:p>
         </p:txBody>
@@ -6770,7 +6775,7 @@
         <p:spPr>
           <a:xfrm>
             <a:off x="1371600" y="5943600"/>
-            <a:ext cx="9144000" cy="457200"/>
+            <a:ext cx="5486400" cy="457200"/>
           </a:xfrm>
           <a:prstGeom prst="rect">
             <a:avLst/>
@@ -6793,6 +6798,66 @@
             </a:pPr>
             <a:r>
               <a:t>Thank you.</a:t>
+            </a:r>
+          </a:p>
+        </p:txBody>
+      </p:sp>
+      <p:pic>
+        <p:nvPicPr>
+          <p:cNvPr id="8" name="Picture 7" descr="qr-personal.png"/>
+          <p:cNvPicPr>
+            <a:picLocks noChangeAspect="1"/>
+          </p:cNvPicPr>
+          <p:nvPr/>
+        </p:nvPicPr>
+        <p:blipFill>
+          <a:blip r:embed="rId2"/>
+          <a:stretch>
+            <a:fillRect/>
+          </a:stretch>
+        </p:blipFill>
+        <p:spPr>
+          <a:xfrm>
+            <a:off x="8869680" y="3657600"/>
+            <a:ext cx="2194560" cy="2194560"/>
+          </a:xfrm>
+          <a:prstGeom prst="rect">
+            <a:avLst/>
+          </a:prstGeom>
+        </p:spPr>
+      </p:pic>
+      <p:sp>
+        <p:nvSpPr>
+          <p:cNvPr id="9" name="TextBox 8"/>
+          <p:cNvSpPr txBox="1"/>
+          <p:nvPr/>
+        </p:nvSpPr>
+        <p:spPr>
+          <a:xfrm>
+            <a:off x="8686800" y="5897880"/>
+            <a:ext cx="2560320" cy="365760"/>
+          </a:xfrm>
+          <a:prstGeom prst="rect">
+            <a:avLst/>
+          </a:prstGeom>
+          <a:noFill/>
+        </p:spPr>
+        <p:txBody>
+          <a:bodyPr wrap="square">
+            <a:spAutoFit/>
+          </a:bodyPr>
+          <a:lstStyle/>
+          <a:p>
+            <a:pPr algn="ctr">
+              <a:defRPr sz="1200" b="0" i="0">
+                <a:solidFill>
+                  <a:srgbClr val="6B7280"/>
+                </a:solidFill>
+                <a:latin typeface="Segoe UI"/>
+              </a:defRPr>
+            </a:pPr>
+            <a:r>
+              <a:t>anthony50102.github.io</a:t>
             </a:r>
           </a:p>
         </p:txBody>
@@ -6839,8 +6904,8 @@
         </p:nvSpPr>
         <p:spPr>
           <a:xfrm>
-            <a:off x="1371600" y="2286000"/>
-            <a:ext cx="9144000" cy="2743200"/>
+            <a:off x="1097280" y="457200"/>
+            <a:ext cx="4572000" cy="457200"/>
           </a:xfrm>
           <a:prstGeom prst="rect">
             <a:avLst/>
@@ -6854,7 +6919,102 @@
           <a:lstStyle/>
           <a:p>
             <a:pPr algn="l">
-              <a:defRPr sz="4200" b="1" i="0">
+              <a:defRPr sz="1400" b="0" i="0">
+                <a:solidFill>
+                  <a:srgbClr val="4B5563"/>
+                </a:solidFill>
+                <a:latin typeface="Segoe UI"/>
+              </a:defRPr>
+            </a:pPr>
+            <a:r>
+              <a:t>The Foundation</a:t>
+            </a:r>
+          </a:p>
+        </p:txBody>
+      </p:sp>
+      <p:sp>
+        <p:nvSpPr>
+          <p:cNvPr id="3" name="Rounded Rectangle 2"/>
+          <p:cNvSpPr/>
+          <p:nvPr/>
+        </p:nvSpPr>
+        <p:spPr>
+          <a:xfrm>
+            <a:off x="731520" y="1645920"/>
+            <a:ext cx="4389120" cy="3657600"/>
+          </a:xfrm>
+          <a:prstGeom prst="roundRect">
+            <a:avLst/>
+          </a:prstGeom>
+          <a:solidFill>
+            <a:srgbClr val="151D30"/>
+          </a:solidFill>
+          <a:ln w="19050">
+            <a:solidFill>
+              <a:srgbClr val="D4D0C8"/>
+            </a:solidFill>
+          </a:ln>
+        </p:spPr>
+        <p:style>
+          <a:lnRef idx="1">
+            <a:schemeClr val="accent1"/>
+          </a:lnRef>
+          <a:fillRef idx="3">
+            <a:schemeClr val="accent1"/>
+          </a:fillRef>
+          <a:effectRef idx="2">
+            <a:schemeClr val="accent1"/>
+          </a:effectRef>
+          <a:fontRef idx="minor">
+            <a:schemeClr val="lt1"/>
+          </a:fontRef>
+        </p:style>
+        <p:txBody>
+          <a:bodyPr rtlCol="0" anchor="ctr" wrap="square"/>
+          <a:lstStyle/>
+          <a:p>
+            <a:pPr algn="ctr">
+              <a:defRPr sz="3200" b="1">
+                <a:solidFill>
+                  <a:srgbClr val="F5F5F0"/>
+                </a:solidFill>
+                <a:latin typeface="Segoe UI"/>
+              </a:defRPr>
+            </a:pPr>
+            <a:r>
+              <a:t>Physical</a:t>
+            </a:r>
+            <a:br/>
+            <a:r>
+              <a:t>System</a:t>
+            </a:r>
+          </a:p>
+        </p:txBody>
+      </p:sp>
+      <p:sp>
+        <p:nvSpPr>
+          <p:cNvPr id="4" name="TextBox 3"/>
+          <p:cNvSpPr txBox="1"/>
+          <p:nvPr/>
+        </p:nvSpPr>
+        <p:spPr>
+          <a:xfrm>
+            <a:off x="5212080" y="2011680"/>
+            <a:ext cx="1828800" cy="914400"/>
+          </a:xfrm>
+          <a:prstGeom prst="rect">
+            <a:avLst/>
+          </a:prstGeom>
+          <a:noFill/>
+        </p:spPr>
+        <p:txBody>
+          <a:bodyPr wrap="square">
+            <a:spAutoFit/>
+          </a:bodyPr>
+          <a:lstStyle/>
+          <a:p>
+            <a:pPr algn="ctr">
+              <a:defRPr sz="4800" b="0" i="0">
                 <a:solidFill>
                   <a:srgbClr val="E8E4D9"/>
                 </a:solidFill>
@@ -6862,15 +7022,210 @@
               </a:defRPr>
             </a:pPr>
             <a:r>
-              <a:t>Your twins can see everything.</a:t>
+              <a:t>→</a:t>
+            </a:r>
+          </a:p>
+        </p:txBody>
+      </p:sp>
+      <p:sp>
+        <p:nvSpPr>
+          <p:cNvPr id="5" name="TextBox 4"/>
+          <p:cNvSpPr txBox="1"/>
+          <p:nvPr/>
+        </p:nvSpPr>
+        <p:spPr>
+          <a:xfrm>
+            <a:off x="5212080" y="2743200"/>
+            <a:ext cx="1828800" cy="457200"/>
+          </a:xfrm>
+          <a:prstGeom prst="rect">
+            <a:avLst/>
+          </a:prstGeom>
+          <a:noFill/>
+        </p:spPr>
+        <p:txBody>
+          <a:bodyPr wrap="square">
+            <a:spAutoFit/>
+          </a:bodyPr>
+          <a:lstStyle/>
+          <a:p>
+            <a:pPr algn="ctr">
+              <a:defRPr sz="1600" b="0" i="0">
+                <a:solidFill>
+                  <a:srgbClr val="6B7280"/>
+                </a:solidFill>
+                <a:latin typeface="Segoe UI"/>
+              </a:defRPr>
+            </a:pPr>
+            <a:r>
+              <a:t>Sensors &amp; Data</a:t>
+            </a:r>
+          </a:p>
+        </p:txBody>
+      </p:sp>
+      <p:sp>
+        <p:nvSpPr>
+          <p:cNvPr id="6" name="TextBox 5"/>
+          <p:cNvSpPr txBox="1"/>
+          <p:nvPr/>
+        </p:nvSpPr>
+        <p:spPr>
+          <a:xfrm>
+            <a:off x="5212080" y="3657600"/>
+            <a:ext cx="1828800" cy="914400"/>
+          </a:xfrm>
+          <a:prstGeom prst="rect">
+            <a:avLst/>
+          </a:prstGeom>
+          <a:noFill/>
+        </p:spPr>
+        <p:txBody>
+          <a:bodyPr wrap="square">
+            <a:spAutoFit/>
+          </a:bodyPr>
+          <a:lstStyle/>
+          <a:p>
+            <a:pPr algn="ctr">
+              <a:defRPr sz="4800" b="0" i="0">
+                <a:solidFill>
+                  <a:srgbClr val="E8E4D9"/>
+                </a:solidFill>
+                <a:latin typeface="Segoe UI"/>
+              </a:defRPr>
+            </a:pPr>
+            <a:r>
+              <a:t>←</a:t>
+            </a:r>
+          </a:p>
+        </p:txBody>
+      </p:sp>
+      <p:sp>
+        <p:nvSpPr>
+          <p:cNvPr id="7" name="TextBox 6"/>
+          <p:cNvSpPr txBox="1"/>
+          <p:nvPr/>
+        </p:nvSpPr>
+        <p:spPr>
+          <a:xfrm>
+            <a:off x="5212080" y="4389120"/>
+            <a:ext cx="1828800" cy="457200"/>
+          </a:xfrm>
+          <a:prstGeom prst="rect">
+            <a:avLst/>
+          </a:prstGeom>
+          <a:noFill/>
+        </p:spPr>
+        <p:txBody>
+          <a:bodyPr wrap="square">
+            <a:spAutoFit/>
+          </a:bodyPr>
+          <a:lstStyle/>
+          <a:p>
+            <a:pPr algn="ctr">
+              <a:defRPr sz="1600" b="0" i="0">
+                <a:solidFill>
+                  <a:srgbClr val="6B7280"/>
+                </a:solidFill>
+                <a:latin typeface="Segoe UI"/>
+              </a:defRPr>
+            </a:pPr>
+            <a:r>
+              <a:t>Simulation</a:t>
+            </a:r>
+          </a:p>
+        </p:txBody>
+      </p:sp>
+      <p:sp>
+        <p:nvSpPr>
+          <p:cNvPr id="8" name="Rounded Rectangle 7"/>
+          <p:cNvSpPr/>
+          <p:nvPr/>
+        </p:nvSpPr>
+        <p:spPr>
+          <a:xfrm>
+            <a:off x="7040880" y="1645920"/>
+            <a:ext cx="4389120" cy="3657600"/>
+          </a:xfrm>
+          <a:prstGeom prst="roundRect">
+            <a:avLst/>
+          </a:prstGeom>
+          <a:solidFill>
+            <a:srgbClr val="151D30"/>
+          </a:solidFill>
+          <a:ln w="19050">
+            <a:solidFill>
+              <a:srgbClr val="D4D0C8"/>
+            </a:solidFill>
+          </a:ln>
+        </p:spPr>
+        <p:style>
+          <a:lnRef idx="1">
+            <a:schemeClr val="accent1"/>
+          </a:lnRef>
+          <a:fillRef idx="3">
+            <a:schemeClr val="accent1"/>
+          </a:fillRef>
+          <a:effectRef idx="2">
+            <a:schemeClr val="accent1"/>
+          </a:effectRef>
+          <a:fontRef idx="minor">
+            <a:schemeClr val="lt1"/>
+          </a:fontRef>
+        </p:style>
+        <p:txBody>
+          <a:bodyPr rtlCol="0" anchor="ctr" wrap="square"/>
+          <a:lstStyle/>
+          <a:p>
+            <a:pPr algn="ctr">
+              <a:defRPr sz="3200" b="1">
+                <a:solidFill>
+                  <a:srgbClr val="F5F5F0"/>
+                </a:solidFill>
+                <a:latin typeface="Segoe UI"/>
+              </a:defRPr>
+            </a:pPr>
+            <a:r>
+              <a:t>Digital</a:t>
             </a:r>
             <a:br/>
             <a:r>
-              <a:t>They can't do anything</a:t>
-            </a:r>
-            <a:br/>
-            <a:r>
-              <a:t>about what they see.</a:t>
+              <a:t>Twin</a:t>
+            </a:r>
+          </a:p>
+        </p:txBody>
+      </p:sp>
+      <p:sp>
+        <p:nvSpPr>
+          <p:cNvPr id="9" name="TextBox 8"/>
+          <p:cNvSpPr txBox="1"/>
+          <p:nvPr/>
+        </p:nvSpPr>
+        <p:spPr>
+          <a:xfrm>
+            <a:off x="1097280" y="5669280"/>
+            <a:ext cx="10058400" cy="731520"/>
+          </a:xfrm>
+          <a:prstGeom prst="rect">
+            <a:avLst/>
+          </a:prstGeom>
+          <a:noFill/>
+        </p:spPr>
+        <p:txBody>
+          <a:bodyPr wrap="square">
+            <a:spAutoFit/>
+          </a:bodyPr>
+          <a:lstStyle/>
+          <a:p>
+            <a:pPr algn="l">
+              <a:defRPr sz="2000" b="0" i="0">
+                <a:solidFill>
+                  <a:srgbClr val="6B7280"/>
+                </a:solidFill>
+                <a:latin typeface="Segoe UI"/>
+              </a:defRPr>
+            </a:pPr>
+            <a:r>
+              <a:t>A virtual model, continuously synced with a physical system.</a:t>
             </a:r>
           </a:p>
         </p:txBody>
@@ -6917,8 +7272,8 @@
         </p:nvSpPr>
         <p:spPr>
           <a:xfrm>
-            <a:off x="1097280" y="457200"/>
-            <a:ext cx="4572000" cy="457200"/>
+            <a:off x="1097280" y="1188720"/>
+            <a:ext cx="3200400" cy="914400"/>
           </a:xfrm>
           <a:prstGeom prst="rect">
             <a:avLst/>
@@ -6932,40 +7287,230 @@
           <a:lstStyle/>
           <a:p>
             <a:pPr algn="l">
-              <a:defRPr sz="1400" b="0" i="0">
-                <a:solidFill>
-                  <a:srgbClr val="4B5563"/>
-                </a:solidFill>
-                <a:latin typeface="Segoe UI"/>
-              </a:defRPr>
-            </a:pPr>
-            <a:r>
-              <a:t>The Foundation</a:t>
-            </a:r>
-          </a:p>
-        </p:txBody>
-      </p:sp>
-      <p:sp>
-        <p:nvSpPr>
-          <p:cNvPr id="3" name="Rounded Rectangle 2"/>
+              <a:defRPr sz="4800" b="1" i="0">
+                <a:solidFill>
+                  <a:srgbClr val="F5F5F0"/>
+                </a:solidFill>
+                <a:latin typeface="Segoe UI"/>
+              </a:defRPr>
+            </a:pPr>
+            <a:r>
+              <a:t>$22K / min</a:t>
+            </a:r>
+          </a:p>
+        </p:txBody>
+      </p:sp>
+      <p:sp>
+        <p:nvSpPr>
+          <p:cNvPr id="3" name="TextBox 2"/>
+          <p:cNvSpPr txBox="1"/>
+          <p:nvPr/>
+        </p:nvSpPr>
+        <p:spPr>
+          <a:xfrm>
+            <a:off x="1097280" y="2194560"/>
+            <a:ext cx="3200400" cy="914400"/>
+          </a:xfrm>
+          <a:prstGeom prst="rect">
+            <a:avLst/>
+          </a:prstGeom>
+          <a:noFill/>
+        </p:spPr>
+        <p:txBody>
+          <a:bodyPr wrap="square">
+            <a:spAutoFit/>
+          </a:bodyPr>
+          <a:lstStyle/>
+          <a:p>
+            <a:pPr algn="l">
+              <a:defRPr sz="1600" b="0" i="0">
+                <a:solidFill>
+                  <a:srgbClr val="6B7280"/>
+                </a:solidFill>
+                <a:latin typeface="Segoe UI"/>
+              </a:defRPr>
+            </a:pPr>
+            <a:r>
+              <a:t>Automotive</a:t>
+            </a:r>
+            <a:br/>
+            <a:r>
+              <a:t>downtime</a:t>
+            </a:r>
+          </a:p>
+        </p:txBody>
+      </p:sp>
+      <p:sp>
+        <p:nvSpPr>
+          <p:cNvPr id="4" name="TextBox 3"/>
+          <p:cNvSpPr txBox="1"/>
+          <p:nvPr/>
+        </p:nvSpPr>
+        <p:spPr>
+          <a:xfrm>
+            <a:off x="4754880" y="1188720"/>
+            <a:ext cx="3200400" cy="914400"/>
+          </a:xfrm>
+          <a:prstGeom prst="rect">
+            <a:avLst/>
+          </a:prstGeom>
+          <a:noFill/>
+        </p:spPr>
+        <p:txBody>
+          <a:bodyPr wrap="square">
+            <a:spAutoFit/>
+          </a:bodyPr>
+          <a:lstStyle/>
+          <a:p>
+            <a:pPr algn="l">
+              <a:defRPr sz="4800" b="1" i="0">
+                <a:solidFill>
+                  <a:srgbClr val="F5F5F0"/>
+                </a:solidFill>
+                <a:latin typeface="Segoe UI"/>
+              </a:defRPr>
+            </a:pPr>
+            <a:r>
+              <a:t>$X / hour</a:t>
+            </a:r>
+          </a:p>
+        </p:txBody>
+      </p:sp>
+      <p:sp>
+        <p:nvSpPr>
+          <p:cNvPr id="5" name="TextBox 4"/>
+          <p:cNvSpPr txBox="1"/>
+          <p:nvPr/>
+        </p:nvSpPr>
+        <p:spPr>
+          <a:xfrm>
+            <a:off x="4754880" y="2194560"/>
+            <a:ext cx="3200400" cy="914400"/>
+          </a:xfrm>
+          <a:prstGeom prst="rect">
+            <a:avLst/>
+          </a:prstGeom>
+          <a:noFill/>
+        </p:spPr>
+        <p:txBody>
+          <a:bodyPr wrap="square">
+            <a:spAutoFit/>
+          </a:bodyPr>
+          <a:lstStyle/>
+          <a:p>
+            <a:pPr algn="l">
+              <a:defRPr sz="1600" b="0" i="0">
+                <a:solidFill>
+                  <a:srgbClr val="6B7280"/>
+                </a:solidFill>
+                <a:latin typeface="Segoe UI"/>
+              </a:defRPr>
+            </a:pPr>
+            <a:r>
+              <a:t>Semiconductor</a:t>
+            </a:r>
+            <a:br/>
+            <a:r>
+              <a:t>fab downtime</a:t>
+            </a:r>
+          </a:p>
+        </p:txBody>
+      </p:sp>
+      <p:sp>
+        <p:nvSpPr>
+          <p:cNvPr id="6" name="TextBox 5"/>
+          <p:cNvSpPr txBox="1"/>
+          <p:nvPr/>
+        </p:nvSpPr>
+        <p:spPr>
+          <a:xfrm>
+            <a:off x="8412480" y="1188720"/>
+            <a:ext cx="3200400" cy="914400"/>
+          </a:xfrm>
+          <a:prstGeom prst="rect">
+            <a:avLst/>
+          </a:prstGeom>
+          <a:noFill/>
+        </p:spPr>
+        <p:txBody>
+          <a:bodyPr wrap="square">
+            <a:spAutoFit/>
+          </a:bodyPr>
+          <a:lstStyle/>
+          <a:p>
+            <a:pPr algn="l">
+              <a:defRPr sz="4800" b="1" i="0">
+                <a:solidFill>
+                  <a:srgbClr val="F5F5F0"/>
+                </a:solidFill>
+                <a:latin typeface="Segoe UI"/>
+              </a:defRPr>
+            </a:pPr>
+            <a:r>
+              <a:t>$X / event</a:t>
+            </a:r>
+          </a:p>
+        </p:txBody>
+      </p:sp>
+      <p:sp>
+        <p:nvSpPr>
+          <p:cNvPr id="7" name="TextBox 6"/>
+          <p:cNvSpPr txBox="1"/>
+          <p:nvPr/>
+        </p:nvSpPr>
+        <p:spPr>
+          <a:xfrm>
+            <a:off x="8412480" y="2194560"/>
+            <a:ext cx="3200400" cy="914400"/>
+          </a:xfrm>
+          <a:prstGeom prst="rect">
+            <a:avLst/>
+          </a:prstGeom>
+          <a:noFill/>
+        </p:spPr>
+        <p:txBody>
+          <a:bodyPr wrap="square">
+            <a:spAutoFit/>
+          </a:bodyPr>
+          <a:lstStyle/>
+          <a:p>
+            <a:pPr algn="l">
+              <a:defRPr sz="1600" b="0" i="0">
+                <a:solidFill>
+                  <a:srgbClr val="6B7280"/>
+                </a:solidFill>
+                <a:latin typeface="Segoe UI"/>
+              </a:defRPr>
+            </a:pPr>
+            <a:r>
+              <a:t>Energy grid</a:t>
+            </a:r>
+            <a:br/>
+            <a:r>
+              <a:t>outage cost</a:t>
+            </a:r>
+          </a:p>
+        </p:txBody>
+      </p:sp>
+      <p:sp>
+        <p:nvSpPr>
+          <p:cNvPr id="8" name="Rectangle 7"/>
           <p:cNvSpPr/>
           <p:nvPr/>
         </p:nvSpPr>
         <p:spPr>
           <a:xfrm>
-            <a:off x="731520" y="1645920"/>
-            <a:ext cx="4389120" cy="3657600"/>
-          </a:xfrm>
-          <a:prstGeom prst="roundRect">
+            <a:off x="1097280" y="3657600"/>
+            <a:ext cx="1828800" cy="13716"/>
+          </a:xfrm>
+          <a:prstGeom prst="rect">
             <a:avLst/>
           </a:prstGeom>
           <a:solidFill>
-            <a:srgbClr val="151D30"/>
+            <a:srgbClr val="D4D0C8"/>
           </a:solidFill>
-          <a:ln w="19050">
-            <a:solidFill>
-              <a:srgbClr val="D4D0C8"/>
-            </a:solidFill>
+          <a:ln>
+            <a:noFill/>
           </a:ln>
         </p:spPr>
         <p:style>
@@ -6983,37 +7528,23 @@
           </a:fontRef>
         </p:style>
         <p:txBody>
-          <a:bodyPr rtlCol="0" anchor="ctr" wrap="square"/>
-          <a:lstStyle/>
-          <a:p>
-            <a:pPr algn="ctr">
-              <a:defRPr sz="3200" b="1">
-                <a:solidFill>
-                  <a:srgbClr val="F5F5F0"/>
-                </a:solidFill>
-                <a:latin typeface="Segoe UI"/>
-              </a:defRPr>
-            </a:pPr>
-            <a:r>
-              <a:t>Physical</a:t>
-            </a:r>
-            <a:br/>
-            <a:r>
-              <a:t>System</a:t>
-            </a:r>
-          </a:p>
-        </p:txBody>
-      </p:sp>
-      <p:sp>
-        <p:nvSpPr>
-          <p:cNvPr id="4" name="TextBox 3"/>
+          <a:bodyPr rtlCol="0" anchor="ctr"/>
+          <a:lstStyle/>
+          <a:p>
+            <a:pPr algn="ctr"/>
+          </a:p>
+        </p:txBody>
+      </p:sp>
+      <p:sp>
+        <p:nvSpPr>
+          <p:cNvPr id="9" name="TextBox 8"/>
           <p:cNvSpPr txBox="1"/>
           <p:nvPr/>
         </p:nvSpPr>
         <p:spPr>
           <a:xfrm>
-            <a:off x="5212080" y="2286000"/>
-            <a:ext cx="1828800" cy="914400"/>
+            <a:off x="1097280" y="4023360"/>
+            <a:ext cx="9601200" cy="1828800"/>
           </a:xfrm>
           <a:prstGeom prst="rect">
             <a:avLst/>
@@ -7026,8 +7557,8 @@
           </a:bodyPr>
           <a:lstStyle/>
           <a:p>
-            <a:pPr algn="ctr">
-              <a:defRPr sz="1800" b="0" i="0">
+            <a:pPr algn="l">
+              <a:defRPr sz="3000" b="1" i="0">
                 <a:solidFill>
                   <a:srgbClr val="E8E4D9"/>
                 </a:solidFill>
@@ -7035,138 +7566,11 @@
               </a:defRPr>
             </a:pPr>
             <a:r>
-              <a:t>Sensors &amp; Data  →</a:t>
-            </a:r>
-          </a:p>
-        </p:txBody>
-      </p:sp>
-      <p:sp>
-        <p:nvSpPr>
-          <p:cNvPr id="5" name="TextBox 4"/>
-          <p:cNvSpPr txBox="1"/>
-          <p:nvPr/>
-        </p:nvSpPr>
-        <p:spPr>
-          <a:xfrm>
-            <a:off x="5212080" y="3840480"/>
-            <a:ext cx="1828800" cy="914400"/>
-          </a:xfrm>
-          <a:prstGeom prst="rect">
-            <a:avLst/>
-          </a:prstGeom>
-          <a:noFill/>
-        </p:spPr>
-        <p:txBody>
-          <a:bodyPr wrap="square">
-            <a:spAutoFit/>
-          </a:bodyPr>
-          <a:lstStyle/>
-          <a:p>
-            <a:pPr algn="ctr">
-              <a:defRPr sz="1800" b="0" i="0">
-                <a:solidFill>
-                  <a:srgbClr val="E8E4D9"/>
-                </a:solidFill>
-                <a:latin typeface="Segoe UI"/>
-              </a:defRPr>
-            </a:pPr>
-            <a:r>
-              <a:t>←  Simulation</a:t>
-            </a:r>
-          </a:p>
-        </p:txBody>
-      </p:sp>
-      <p:sp>
-        <p:nvSpPr>
-          <p:cNvPr id="6" name="Rounded Rectangle 5"/>
-          <p:cNvSpPr/>
-          <p:nvPr/>
-        </p:nvSpPr>
-        <p:spPr>
-          <a:xfrm>
-            <a:off x="7040880" y="1645920"/>
-            <a:ext cx="4389120" cy="3657600"/>
-          </a:xfrm>
-          <a:prstGeom prst="roundRect">
-            <a:avLst/>
-          </a:prstGeom>
-          <a:solidFill>
-            <a:srgbClr val="151D30"/>
-          </a:solidFill>
-          <a:ln w="19050">
-            <a:solidFill>
-              <a:srgbClr val="D4D0C8"/>
-            </a:solidFill>
-          </a:ln>
-        </p:spPr>
-        <p:style>
-          <a:lnRef idx="1">
-            <a:schemeClr val="accent1"/>
-          </a:lnRef>
-          <a:fillRef idx="3">
-            <a:schemeClr val="accent1"/>
-          </a:fillRef>
-          <a:effectRef idx="2">
-            <a:schemeClr val="accent1"/>
-          </a:effectRef>
-          <a:fontRef idx="minor">
-            <a:schemeClr val="lt1"/>
-          </a:fontRef>
-        </p:style>
-        <p:txBody>
-          <a:bodyPr rtlCol="0" anchor="ctr" wrap="square"/>
-          <a:lstStyle/>
-          <a:p>
-            <a:pPr algn="ctr">
-              <a:defRPr sz="3200" b="1">
-                <a:solidFill>
-                  <a:srgbClr val="F5F5F0"/>
-                </a:solidFill>
-                <a:latin typeface="Segoe UI"/>
-              </a:defRPr>
-            </a:pPr>
-            <a:r>
-              <a:t>Digital</a:t>
+              <a:t>Your systems generate more data every hour</a:t>
             </a:r>
             <a:br/>
             <a:r>
-              <a:t>Twin</a:t>
-            </a:r>
-          </a:p>
-        </p:txBody>
-      </p:sp>
-      <p:sp>
-        <p:nvSpPr>
-          <p:cNvPr id="7" name="TextBox 6"/>
-          <p:cNvSpPr txBox="1"/>
-          <p:nvPr/>
-        </p:nvSpPr>
-        <p:spPr>
-          <a:xfrm>
-            <a:off x="1097280" y="5669280"/>
-            <a:ext cx="10058400" cy="731520"/>
-          </a:xfrm>
-          <a:prstGeom prst="rect">
-            <a:avLst/>
-          </a:prstGeom>
-          <a:noFill/>
-        </p:spPr>
-        <p:txBody>
-          <a:bodyPr wrap="square">
-            <a:spAutoFit/>
-          </a:bodyPr>
-          <a:lstStyle/>
-          <a:p>
-            <a:pPr algn="l">
-              <a:defRPr sz="2000" b="0" i="0">
-                <a:solidFill>
-                  <a:srgbClr val="6B7280"/>
-                </a:solidFill>
-                <a:latin typeface="Segoe UI"/>
-              </a:defRPr>
-            </a:pPr>
-            <a:r>
-              <a:t>A virtual model, continuously synced with a physical system.</a:t>
+              <a:t>than your teams can act on in a week.</a:t>
             </a:r>
           </a:p>
         </p:txBody>
@@ -7213,8 +7617,8 @@
         </p:nvSpPr>
         <p:spPr>
           <a:xfrm>
-            <a:off x="1097280" y="1188720"/>
-            <a:ext cx="3200400" cy="914400"/>
+            <a:off x="1097280" y="457200"/>
+            <a:ext cx="4572000" cy="457200"/>
           </a:xfrm>
           <a:prstGeom prst="rect">
             <a:avLst/>
@@ -7228,230 +7632,40 @@
           <a:lstStyle/>
           <a:p>
             <a:pPr algn="l">
-              <a:defRPr sz="4800" b="1" i="0">
-                <a:solidFill>
-                  <a:srgbClr val="F5F5F0"/>
-                </a:solidFill>
-                <a:latin typeface="Segoe UI"/>
-              </a:defRPr>
-            </a:pPr>
-            <a:r>
-              <a:t>$22K / min</a:t>
-            </a:r>
-          </a:p>
-        </p:txBody>
-      </p:sp>
-      <p:sp>
-        <p:nvSpPr>
-          <p:cNvPr id="3" name="TextBox 2"/>
-          <p:cNvSpPr txBox="1"/>
-          <p:nvPr/>
-        </p:nvSpPr>
-        <p:spPr>
-          <a:xfrm>
-            <a:off x="1097280" y="2194560"/>
-            <a:ext cx="3200400" cy="914400"/>
-          </a:xfrm>
-          <a:prstGeom prst="rect">
-            <a:avLst/>
-          </a:prstGeom>
-          <a:noFill/>
-        </p:spPr>
-        <p:txBody>
-          <a:bodyPr wrap="square">
-            <a:spAutoFit/>
-          </a:bodyPr>
-          <a:lstStyle/>
-          <a:p>
-            <a:pPr algn="l">
-              <a:defRPr sz="1600" b="0" i="0">
-                <a:solidFill>
-                  <a:srgbClr val="6B7280"/>
-                </a:solidFill>
-                <a:latin typeface="Segoe UI"/>
-              </a:defRPr>
-            </a:pPr>
-            <a:r>
-              <a:t>Automotive</a:t>
-            </a:r>
-            <a:br/>
-            <a:r>
-              <a:t>downtime</a:t>
-            </a:r>
-          </a:p>
-        </p:txBody>
-      </p:sp>
-      <p:sp>
-        <p:nvSpPr>
-          <p:cNvPr id="4" name="TextBox 3"/>
-          <p:cNvSpPr txBox="1"/>
-          <p:nvPr/>
-        </p:nvSpPr>
-        <p:spPr>
-          <a:xfrm>
-            <a:off x="4754880" y="1188720"/>
-            <a:ext cx="3200400" cy="914400"/>
-          </a:xfrm>
-          <a:prstGeom prst="rect">
-            <a:avLst/>
-          </a:prstGeom>
-          <a:noFill/>
-        </p:spPr>
-        <p:txBody>
-          <a:bodyPr wrap="square">
-            <a:spAutoFit/>
-          </a:bodyPr>
-          <a:lstStyle/>
-          <a:p>
-            <a:pPr algn="l">
-              <a:defRPr sz="4800" b="1" i="0">
-                <a:solidFill>
-                  <a:srgbClr val="F5F5F0"/>
-                </a:solidFill>
-                <a:latin typeface="Segoe UI"/>
-              </a:defRPr>
-            </a:pPr>
-            <a:r>
-              <a:t>$X / hour</a:t>
-            </a:r>
-          </a:p>
-        </p:txBody>
-      </p:sp>
-      <p:sp>
-        <p:nvSpPr>
-          <p:cNvPr id="5" name="TextBox 4"/>
-          <p:cNvSpPr txBox="1"/>
-          <p:nvPr/>
-        </p:nvSpPr>
-        <p:spPr>
-          <a:xfrm>
-            <a:off x="4754880" y="2194560"/>
-            <a:ext cx="3200400" cy="914400"/>
-          </a:xfrm>
-          <a:prstGeom prst="rect">
-            <a:avLst/>
-          </a:prstGeom>
-          <a:noFill/>
-        </p:spPr>
-        <p:txBody>
-          <a:bodyPr wrap="square">
-            <a:spAutoFit/>
-          </a:bodyPr>
-          <a:lstStyle/>
-          <a:p>
-            <a:pPr algn="l">
-              <a:defRPr sz="1600" b="0" i="0">
-                <a:solidFill>
-                  <a:srgbClr val="6B7280"/>
-                </a:solidFill>
-                <a:latin typeface="Segoe UI"/>
-              </a:defRPr>
-            </a:pPr>
-            <a:r>
-              <a:t>Semiconductor</a:t>
-            </a:r>
-            <a:br/>
-            <a:r>
-              <a:t>fab downtime</a:t>
-            </a:r>
-          </a:p>
-        </p:txBody>
-      </p:sp>
-      <p:sp>
-        <p:nvSpPr>
-          <p:cNvPr id="6" name="TextBox 5"/>
-          <p:cNvSpPr txBox="1"/>
-          <p:nvPr/>
-        </p:nvSpPr>
-        <p:spPr>
-          <a:xfrm>
-            <a:off x="8412480" y="1188720"/>
-            <a:ext cx="3200400" cy="914400"/>
-          </a:xfrm>
-          <a:prstGeom prst="rect">
-            <a:avLst/>
-          </a:prstGeom>
-          <a:noFill/>
-        </p:spPr>
-        <p:txBody>
-          <a:bodyPr wrap="square">
-            <a:spAutoFit/>
-          </a:bodyPr>
-          <a:lstStyle/>
-          <a:p>
-            <a:pPr algn="l">
-              <a:defRPr sz="4800" b="1" i="0">
-                <a:solidFill>
-                  <a:srgbClr val="F5F5F0"/>
-                </a:solidFill>
-                <a:latin typeface="Segoe UI"/>
-              </a:defRPr>
-            </a:pPr>
-            <a:r>
-              <a:t>$X / event</a:t>
-            </a:r>
-          </a:p>
-        </p:txBody>
-      </p:sp>
-      <p:sp>
-        <p:nvSpPr>
-          <p:cNvPr id="7" name="TextBox 6"/>
-          <p:cNvSpPr txBox="1"/>
-          <p:nvPr/>
-        </p:nvSpPr>
-        <p:spPr>
-          <a:xfrm>
-            <a:off x="8412480" y="2194560"/>
-            <a:ext cx="3200400" cy="914400"/>
-          </a:xfrm>
-          <a:prstGeom prst="rect">
-            <a:avLst/>
-          </a:prstGeom>
-          <a:noFill/>
-        </p:spPr>
-        <p:txBody>
-          <a:bodyPr wrap="square">
-            <a:spAutoFit/>
-          </a:bodyPr>
-          <a:lstStyle/>
-          <a:p>
-            <a:pPr algn="l">
-              <a:defRPr sz="1600" b="0" i="0">
-                <a:solidFill>
-                  <a:srgbClr val="6B7280"/>
-                </a:solidFill>
-                <a:latin typeface="Segoe UI"/>
-              </a:defRPr>
-            </a:pPr>
-            <a:r>
-              <a:t>Energy grid</a:t>
-            </a:r>
-            <a:br/>
-            <a:r>
-              <a:t>outage cost</a:t>
-            </a:r>
-          </a:p>
-        </p:txBody>
-      </p:sp>
-      <p:sp>
-        <p:nvSpPr>
-          <p:cNvPr id="8" name="Rectangle 7"/>
+              <a:defRPr sz="1400" b="0" i="0">
+                <a:solidFill>
+                  <a:srgbClr val="4B5563"/>
+                </a:solidFill>
+                <a:latin typeface="Segoe UI"/>
+              </a:defRPr>
+            </a:pPr>
+            <a:r>
+              <a:t>The Evolution</a:t>
+            </a:r>
+          </a:p>
+        </p:txBody>
+      </p:sp>
+      <p:sp>
+        <p:nvSpPr>
+          <p:cNvPr id="3" name="Rounded Rectangle 2"/>
           <p:cNvSpPr/>
           <p:nvPr/>
         </p:nvSpPr>
         <p:spPr>
           <a:xfrm>
-            <a:off x="1097280" y="3657600"/>
-            <a:ext cx="1828800" cy="13716"/>
-          </a:xfrm>
-          <a:prstGeom prst="rect">
+            <a:off x="746607" y="1645920"/>
+            <a:ext cx="2468880" cy="1188720"/>
+          </a:xfrm>
+          <a:prstGeom prst="roundRect">
             <a:avLst/>
           </a:prstGeom>
           <a:solidFill>
-            <a:srgbClr val="D4D0C8"/>
+            <a:srgbClr val="151D30"/>
           </a:solidFill>
-          <a:ln>
-            <a:noFill/>
+          <a:ln w="19050">
+            <a:solidFill>
+              <a:srgbClr val="4B5563"/>
+            </a:solidFill>
           </a:ln>
         </p:spPr>
         <p:style>
@@ -7469,23 +7683,33 @@
           </a:fontRef>
         </p:style>
         <p:txBody>
-          <a:bodyPr rtlCol="0" anchor="ctr"/>
-          <a:lstStyle/>
-          <a:p>
-            <a:pPr algn="ctr"/>
-          </a:p>
-        </p:txBody>
-      </p:sp>
-      <p:sp>
-        <p:nvSpPr>
-          <p:cNvPr id="9" name="TextBox 8"/>
+          <a:bodyPr rtlCol="0" anchor="ctr" wrap="square"/>
+          <a:lstStyle/>
+          <a:p>
+            <a:pPr algn="ctr">
+              <a:defRPr sz="2000" b="1">
+                <a:solidFill>
+                  <a:srgbClr val="F5F5F0"/>
+                </a:solidFill>
+                <a:latin typeface="Segoe UI"/>
+              </a:defRPr>
+            </a:pPr>
+            <a:r>
+              <a:t>Gen 1: Static</a:t>
+            </a:r>
+          </a:p>
+        </p:txBody>
+      </p:sp>
+      <p:sp>
+        <p:nvSpPr>
+          <p:cNvPr id="4" name="TextBox 3"/>
           <p:cNvSpPr txBox="1"/>
           <p:nvPr/>
         </p:nvSpPr>
         <p:spPr>
           <a:xfrm>
-            <a:off x="1097280" y="4023360"/>
-            <a:ext cx="9601200" cy="1828800"/>
+            <a:off x="746607" y="3017520"/>
+            <a:ext cx="2468880" cy="1097280"/>
           </a:xfrm>
           <a:prstGeom prst="rect">
             <a:avLst/>
@@ -7498,8 +7722,399 @@
           </a:bodyPr>
           <a:lstStyle/>
           <a:p>
+            <a:pPr algn="ctr">
+              <a:defRPr sz="1500" b="0" i="0">
+                <a:solidFill>
+                  <a:srgbClr val="6B7280"/>
+                </a:solidFill>
+                <a:latin typeface="Segoe UI"/>
+              </a:defRPr>
+            </a:pPr>
+            <a:r>
+              <a:t>"Here's what</a:t>
+            </a:r>
+            <a:br/>
+            <a:r>
+              <a:t>it looks like"</a:t>
+            </a:r>
+          </a:p>
+        </p:txBody>
+      </p:sp>
+      <p:sp>
+        <p:nvSpPr>
+          <p:cNvPr id="5" name="TextBox 4"/>
+          <p:cNvSpPr txBox="1"/>
+          <p:nvPr/>
+        </p:nvSpPr>
+        <p:spPr>
+          <a:xfrm>
+            <a:off x="3215487" y="1920240"/>
+            <a:ext cx="274320" cy="914400"/>
+          </a:xfrm>
+          <a:prstGeom prst="rect">
+            <a:avLst/>
+          </a:prstGeom>
+          <a:noFill/>
+        </p:spPr>
+        <p:txBody>
+          <a:bodyPr wrap="square">
+            <a:spAutoFit/>
+          </a:bodyPr>
+          <a:lstStyle/>
+          <a:p>
+            <a:pPr algn="ctr">
+              <a:defRPr sz="2400" b="0" i="0">
+                <a:solidFill>
+                  <a:srgbClr val="4B5563"/>
+                </a:solidFill>
+                <a:latin typeface="Segoe UI"/>
+              </a:defRPr>
+            </a:pPr>
+            <a:r>
+              <a:t>→</a:t>
+            </a:r>
+          </a:p>
+        </p:txBody>
+      </p:sp>
+      <p:sp>
+        <p:nvSpPr>
+          <p:cNvPr id="6" name="Rounded Rectangle 5"/>
+          <p:cNvSpPr/>
+          <p:nvPr/>
+        </p:nvSpPr>
+        <p:spPr>
+          <a:xfrm>
+            <a:off x="3489807" y="1645920"/>
+            <a:ext cx="2468880" cy="1188720"/>
+          </a:xfrm>
+          <a:prstGeom prst="roundRect">
+            <a:avLst/>
+          </a:prstGeom>
+          <a:solidFill>
+            <a:srgbClr val="151D30"/>
+          </a:solidFill>
+          <a:ln w="19050">
+            <a:solidFill>
+              <a:srgbClr val="4B5563"/>
+            </a:solidFill>
+          </a:ln>
+        </p:spPr>
+        <p:style>
+          <a:lnRef idx="1">
+            <a:schemeClr val="accent1"/>
+          </a:lnRef>
+          <a:fillRef idx="3">
+            <a:schemeClr val="accent1"/>
+          </a:fillRef>
+          <a:effectRef idx="2">
+            <a:schemeClr val="accent1"/>
+          </a:effectRef>
+          <a:fontRef idx="minor">
+            <a:schemeClr val="lt1"/>
+          </a:fontRef>
+        </p:style>
+        <p:txBody>
+          <a:bodyPr rtlCol="0" anchor="ctr" wrap="square"/>
+          <a:lstStyle/>
+          <a:p>
+            <a:pPr algn="ctr">
+              <a:defRPr sz="2000" b="1">
+                <a:solidFill>
+                  <a:srgbClr val="F5F5F0"/>
+                </a:solidFill>
+                <a:latin typeface="Segoe UI"/>
+              </a:defRPr>
+            </a:pPr>
+            <a:r>
+              <a:t>Gen 2: Reactive</a:t>
+            </a:r>
+          </a:p>
+        </p:txBody>
+      </p:sp>
+      <p:sp>
+        <p:nvSpPr>
+          <p:cNvPr id="7" name="TextBox 6"/>
+          <p:cNvSpPr txBox="1"/>
+          <p:nvPr/>
+        </p:nvSpPr>
+        <p:spPr>
+          <a:xfrm>
+            <a:off x="3489807" y="3017520"/>
+            <a:ext cx="2468880" cy="1097280"/>
+          </a:xfrm>
+          <a:prstGeom prst="rect">
+            <a:avLst/>
+          </a:prstGeom>
+          <a:noFill/>
+        </p:spPr>
+        <p:txBody>
+          <a:bodyPr wrap="square">
+            <a:spAutoFit/>
+          </a:bodyPr>
+          <a:lstStyle/>
+          <a:p>
+            <a:pPr algn="ctr">
+              <a:defRPr sz="1500" b="0" i="0">
+                <a:solidFill>
+                  <a:srgbClr val="6B7280"/>
+                </a:solidFill>
+                <a:latin typeface="Segoe UI"/>
+              </a:defRPr>
+            </a:pPr>
+            <a:r>
+              <a:t>"Something</a:t>
+            </a:r>
+            <a:br/>
+            <a:r>
+              <a:t>went wrong"</a:t>
+            </a:r>
+          </a:p>
+        </p:txBody>
+      </p:sp>
+      <p:sp>
+        <p:nvSpPr>
+          <p:cNvPr id="8" name="TextBox 7"/>
+          <p:cNvSpPr txBox="1"/>
+          <p:nvPr/>
+        </p:nvSpPr>
+        <p:spPr>
+          <a:xfrm>
+            <a:off x="5958687" y="1920240"/>
+            <a:ext cx="274320" cy="914400"/>
+          </a:xfrm>
+          <a:prstGeom prst="rect">
+            <a:avLst/>
+          </a:prstGeom>
+          <a:noFill/>
+        </p:spPr>
+        <p:txBody>
+          <a:bodyPr wrap="square">
+            <a:spAutoFit/>
+          </a:bodyPr>
+          <a:lstStyle/>
+          <a:p>
+            <a:pPr algn="ctr">
+              <a:defRPr sz="2400" b="0" i="0">
+                <a:solidFill>
+                  <a:srgbClr val="4B5563"/>
+                </a:solidFill>
+                <a:latin typeface="Segoe UI"/>
+              </a:defRPr>
+            </a:pPr>
+            <a:r>
+              <a:t>→</a:t>
+            </a:r>
+          </a:p>
+        </p:txBody>
+      </p:sp>
+      <p:sp>
+        <p:nvSpPr>
+          <p:cNvPr id="9" name="Rounded Rectangle 8"/>
+          <p:cNvSpPr/>
+          <p:nvPr/>
+        </p:nvSpPr>
+        <p:spPr>
+          <a:xfrm>
+            <a:off x="6233007" y="1645920"/>
+            <a:ext cx="2468880" cy="1188720"/>
+          </a:xfrm>
+          <a:prstGeom prst="roundRect">
+            <a:avLst/>
+          </a:prstGeom>
+          <a:solidFill>
+            <a:srgbClr val="151D30"/>
+          </a:solidFill>
+          <a:ln w="19050">
+            <a:solidFill>
+              <a:srgbClr val="4B5563"/>
+            </a:solidFill>
+          </a:ln>
+        </p:spPr>
+        <p:style>
+          <a:lnRef idx="1">
+            <a:schemeClr val="accent1"/>
+          </a:lnRef>
+          <a:fillRef idx="3">
+            <a:schemeClr val="accent1"/>
+          </a:fillRef>
+          <a:effectRef idx="2">
+            <a:schemeClr val="accent1"/>
+          </a:effectRef>
+          <a:fontRef idx="minor">
+            <a:schemeClr val="lt1"/>
+          </a:fontRef>
+        </p:style>
+        <p:txBody>
+          <a:bodyPr rtlCol="0" anchor="ctr" wrap="square"/>
+          <a:lstStyle/>
+          <a:p>
+            <a:pPr algn="ctr">
+              <a:defRPr sz="2000" b="1">
+                <a:solidFill>
+                  <a:srgbClr val="F5F5F0"/>
+                </a:solidFill>
+                <a:latin typeface="Segoe UI"/>
+              </a:defRPr>
+            </a:pPr>
+            <a:r>
+              <a:t>Gen 3: Predictive</a:t>
+            </a:r>
+          </a:p>
+        </p:txBody>
+      </p:sp>
+      <p:sp>
+        <p:nvSpPr>
+          <p:cNvPr id="10" name="TextBox 9"/>
+          <p:cNvSpPr txBox="1"/>
+          <p:nvPr/>
+        </p:nvSpPr>
+        <p:spPr>
+          <a:xfrm>
+            <a:off x="6233007" y="3017520"/>
+            <a:ext cx="2468880" cy="1097280"/>
+          </a:xfrm>
+          <a:prstGeom prst="rect">
+            <a:avLst/>
+          </a:prstGeom>
+          <a:noFill/>
+        </p:spPr>
+        <p:txBody>
+          <a:bodyPr wrap="square">
+            <a:spAutoFit/>
+          </a:bodyPr>
+          <a:lstStyle/>
+          <a:p>
+            <a:pPr algn="ctr">
+              <a:defRPr sz="1500" b="0" i="0">
+                <a:solidFill>
+                  <a:srgbClr val="6B7280"/>
+                </a:solidFill>
+                <a:latin typeface="Segoe UI"/>
+              </a:defRPr>
+            </a:pPr>
+            <a:r>
+              <a:t>"Something</a:t>
+            </a:r>
+            <a:br/>
+            <a:r>
+              <a:t>will go wrong"</a:t>
+            </a:r>
+          </a:p>
+        </p:txBody>
+      </p:sp>
+      <p:sp>
+        <p:nvSpPr>
+          <p:cNvPr id="11" name="TextBox 10"/>
+          <p:cNvSpPr txBox="1"/>
+          <p:nvPr/>
+        </p:nvSpPr>
+        <p:spPr>
+          <a:xfrm>
+            <a:off x="8701887" y="1920240"/>
+            <a:ext cx="274320" cy="914400"/>
+          </a:xfrm>
+          <a:prstGeom prst="rect">
+            <a:avLst/>
+          </a:prstGeom>
+          <a:noFill/>
+        </p:spPr>
+        <p:txBody>
+          <a:bodyPr wrap="square">
+            <a:spAutoFit/>
+          </a:bodyPr>
+          <a:lstStyle/>
+          <a:p>
+            <a:pPr algn="ctr">
+              <a:defRPr sz="2400" b="0" i="0">
+                <a:solidFill>
+                  <a:srgbClr val="4B5563"/>
+                </a:solidFill>
+                <a:latin typeface="Segoe UI"/>
+              </a:defRPr>
+            </a:pPr>
+            <a:r>
+              <a:t>→</a:t>
+            </a:r>
+          </a:p>
+        </p:txBody>
+      </p:sp>
+      <p:sp>
+        <p:nvSpPr>
+          <p:cNvPr id="12" name="Rounded Rectangle 11"/>
+          <p:cNvSpPr/>
+          <p:nvPr/>
+        </p:nvSpPr>
+        <p:spPr>
+          <a:xfrm>
+            <a:off x="8976207" y="1645920"/>
+            <a:ext cx="2468880" cy="1188720"/>
+          </a:xfrm>
+          <a:prstGeom prst="roundRect">
+            <a:avLst/>
+          </a:prstGeom>
+          <a:noFill/>
+          <a:ln w="19050">
+            <a:solidFill>
+              <a:srgbClr val="D4D0C8"/>
+            </a:solidFill>
+          </a:ln>
+        </p:spPr>
+        <p:style>
+          <a:lnRef idx="1">
+            <a:schemeClr val="accent1"/>
+          </a:lnRef>
+          <a:fillRef idx="3">
+            <a:schemeClr val="accent1"/>
+          </a:fillRef>
+          <a:effectRef idx="2">
+            <a:schemeClr val="accent1"/>
+          </a:effectRef>
+          <a:fontRef idx="minor">
+            <a:schemeClr val="lt1"/>
+          </a:fontRef>
+        </p:style>
+        <p:txBody>
+          <a:bodyPr rtlCol="0" anchor="ctr" wrap="square"/>
+          <a:lstStyle/>
+          <a:p>
+            <a:pPr algn="ctr">
+              <a:defRPr sz="2000" b="1">
+                <a:solidFill>
+                  <a:srgbClr val="E8E4D9"/>
+                </a:solidFill>
+                <a:latin typeface="Segoe UI"/>
+              </a:defRPr>
+            </a:pPr>
+            <a:r>
+              <a:t>Gen 4: ?</a:t>
+            </a:r>
+          </a:p>
+        </p:txBody>
+      </p:sp>
+      <p:sp>
+        <p:nvSpPr>
+          <p:cNvPr id="13" name="TextBox 12"/>
+          <p:cNvSpPr txBox="1"/>
+          <p:nvPr/>
+        </p:nvSpPr>
+        <p:spPr>
+          <a:xfrm>
+            <a:off x="914400" y="4754880"/>
+            <a:ext cx="10058400" cy="1371600"/>
+          </a:xfrm>
+          <a:prstGeom prst="rect">
+            <a:avLst/>
+          </a:prstGeom>
+          <a:noFill/>
+        </p:spPr>
+        <p:txBody>
+          <a:bodyPr wrap="square">
+            <a:spAutoFit/>
+          </a:bodyPr>
+          <a:lstStyle/>
+          <a:p>
             <a:pPr algn="l">
-              <a:defRPr sz="3000" b="1" i="0">
+              <a:defRPr sz="2200" b="0" i="0">
                 <a:solidFill>
                   <a:srgbClr val="E8E4D9"/>
                 </a:solidFill>
@@ -7507,11 +8122,11 @@
               </a:defRPr>
             </a:pPr>
             <a:r>
-              <a:t>Your systems generate more data every hour</a:t>
+              <a:t>Each generation gets smarter about what's happening.</a:t>
             </a:r>
             <a:br/>
             <a:r>
-              <a:t>than your teams can act on in a week.</a:t>
+              <a:t>But the human is still the one who decides what to do about it.</a:t>
             </a:r>
           </a:p>
         </p:txBody>
@@ -7558,8 +8173,8 @@
         </p:nvSpPr>
         <p:spPr>
           <a:xfrm>
-            <a:off x="1097280" y="457200"/>
-            <a:ext cx="4572000" cy="457200"/>
+            <a:off x="1371600" y="2286000"/>
+            <a:ext cx="9144000" cy="2743200"/>
           </a:xfrm>
           <a:prstGeom prst="rect">
             <a:avLst/>
@@ -7573,501 +8188,23 @@
           <a:lstStyle/>
           <a:p>
             <a:pPr algn="l">
-              <a:defRPr sz="1400" b="0" i="0">
-                <a:solidFill>
-                  <a:srgbClr val="4B5563"/>
-                </a:solidFill>
-                <a:latin typeface="Segoe UI"/>
-              </a:defRPr>
-            </a:pPr>
-            <a:r>
-              <a:t>The Evolution</a:t>
-            </a:r>
-          </a:p>
-        </p:txBody>
-      </p:sp>
-      <p:sp>
-        <p:nvSpPr>
-          <p:cNvPr id="3" name="Rounded Rectangle 2"/>
-          <p:cNvSpPr/>
-          <p:nvPr/>
-        </p:nvSpPr>
-        <p:spPr>
-          <a:xfrm>
-            <a:off x="914400" y="1645920"/>
-            <a:ext cx="2468880" cy="1188720"/>
-          </a:xfrm>
-          <a:prstGeom prst="roundRect">
-            <a:avLst/>
-          </a:prstGeom>
-          <a:solidFill>
-            <a:srgbClr val="151D30"/>
-          </a:solidFill>
-          <a:ln w="19050">
-            <a:solidFill>
-              <a:srgbClr val="4B5563"/>
-            </a:solidFill>
-          </a:ln>
-        </p:spPr>
-        <p:style>
-          <a:lnRef idx="1">
-            <a:schemeClr val="accent1"/>
-          </a:lnRef>
-          <a:fillRef idx="3">
-            <a:schemeClr val="accent1"/>
-          </a:fillRef>
-          <a:effectRef idx="2">
-            <a:schemeClr val="accent1"/>
-          </a:effectRef>
-          <a:fontRef idx="minor">
-            <a:schemeClr val="lt1"/>
-          </a:fontRef>
-        </p:style>
-        <p:txBody>
-          <a:bodyPr rtlCol="0" anchor="ctr" wrap="square"/>
-          <a:lstStyle/>
-          <a:p>
-            <a:pPr algn="ctr">
-              <a:defRPr sz="2000" b="1">
-                <a:solidFill>
-                  <a:srgbClr val="F5F5F0"/>
-                </a:solidFill>
-                <a:latin typeface="Segoe UI"/>
-              </a:defRPr>
-            </a:pPr>
-            <a:r>
-              <a:t>Gen 1: Static</a:t>
-            </a:r>
-          </a:p>
-        </p:txBody>
-      </p:sp>
-      <p:sp>
-        <p:nvSpPr>
-          <p:cNvPr id="4" name="TextBox 3"/>
-          <p:cNvSpPr txBox="1"/>
-          <p:nvPr/>
-        </p:nvSpPr>
-        <p:spPr>
-          <a:xfrm>
-            <a:off x="914400" y="3017520"/>
-            <a:ext cx="2468880" cy="1097280"/>
-          </a:xfrm>
-          <a:prstGeom prst="rect">
-            <a:avLst/>
-          </a:prstGeom>
-          <a:noFill/>
-        </p:spPr>
-        <p:txBody>
-          <a:bodyPr wrap="square">
-            <a:spAutoFit/>
-          </a:bodyPr>
-          <a:lstStyle/>
-          <a:p>
-            <a:pPr algn="ctr">
-              <a:defRPr sz="1500" b="0" i="0">
-                <a:solidFill>
-                  <a:srgbClr val="6B7280"/>
-                </a:solidFill>
-                <a:latin typeface="Segoe UI"/>
-              </a:defRPr>
-            </a:pPr>
-            <a:r>
-              <a:t>"Here's what</a:t>
+              <a:defRPr sz="4200" b="1" i="0">
+                <a:solidFill>
+                  <a:srgbClr val="E8E4D9"/>
+                </a:solidFill>
+                <a:latin typeface="Segoe UI"/>
+              </a:defRPr>
+            </a:pPr>
+            <a:r>
+              <a:t>Digital twins can see everything.</a:t>
             </a:r>
             <a:br/>
             <a:r>
-              <a:t>it looks like"</a:t>
-            </a:r>
-          </a:p>
-        </p:txBody>
-      </p:sp>
-      <p:sp>
-        <p:nvSpPr>
-          <p:cNvPr id="5" name="TextBox 4"/>
-          <p:cNvSpPr txBox="1"/>
-          <p:nvPr/>
-        </p:nvSpPr>
-        <p:spPr>
-          <a:xfrm>
-            <a:off x="3291840" y="1828800"/>
-            <a:ext cx="548640" cy="731520"/>
-          </a:xfrm>
-          <a:prstGeom prst="rect">
-            <a:avLst/>
-          </a:prstGeom>
-          <a:noFill/>
-        </p:spPr>
-        <p:txBody>
-          <a:bodyPr wrap="square">
-            <a:spAutoFit/>
-          </a:bodyPr>
-          <a:lstStyle/>
-          <a:p>
-            <a:pPr algn="ctr">
-              <a:defRPr sz="2400" b="0" i="0">
-                <a:solidFill>
-                  <a:srgbClr val="4B5563"/>
-                </a:solidFill>
-                <a:latin typeface="Segoe UI"/>
-              </a:defRPr>
-            </a:pPr>
-            <a:r>
-              <a:t>→</a:t>
-            </a:r>
-          </a:p>
-        </p:txBody>
-      </p:sp>
-      <p:sp>
-        <p:nvSpPr>
-          <p:cNvPr id="6" name="Rounded Rectangle 5"/>
-          <p:cNvSpPr/>
-          <p:nvPr/>
-        </p:nvSpPr>
-        <p:spPr>
-          <a:xfrm>
-            <a:off x="3749039" y="1645920"/>
-            <a:ext cx="2468880" cy="1188720"/>
-          </a:xfrm>
-          <a:prstGeom prst="roundRect">
-            <a:avLst/>
-          </a:prstGeom>
-          <a:solidFill>
-            <a:srgbClr val="151D30"/>
-          </a:solidFill>
-          <a:ln w="19050">
-            <a:solidFill>
-              <a:srgbClr val="4B5563"/>
-            </a:solidFill>
-          </a:ln>
-        </p:spPr>
-        <p:style>
-          <a:lnRef idx="1">
-            <a:schemeClr val="accent1"/>
-          </a:lnRef>
-          <a:fillRef idx="3">
-            <a:schemeClr val="accent1"/>
-          </a:fillRef>
-          <a:effectRef idx="2">
-            <a:schemeClr val="accent1"/>
-          </a:effectRef>
-          <a:fontRef idx="minor">
-            <a:schemeClr val="lt1"/>
-          </a:fontRef>
-        </p:style>
-        <p:txBody>
-          <a:bodyPr rtlCol="0" anchor="ctr" wrap="square"/>
-          <a:lstStyle/>
-          <a:p>
-            <a:pPr algn="ctr">
-              <a:defRPr sz="2000" b="1">
-                <a:solidFill>
-                  <a:srgbClr val="F5F5F0"/>
-                </a:solidFill>
-                <a:latin typeface="Segoe UI"/>
-              </a:defRPr>
-            </a:pPr>
-            <a:r>
-              <a:t>Gen 2: Reactive</a:t>
-            </a:r>
-          </a:p>
-        </p:txBody>
-      </p:sp>
-      <p:sp>
-        <p:nvSpPr>
-          <p:cNvPr id="7" name="TextBox 6"/>
-          <p:cNvSpPr txBox="1"/>
-          <p:nvPr/>
-        </p:nvSpPr>
-        <p:spPr>
-          <a:xfrm>
-            <a:off x="3749039" y="3017520"/>
-            <a:ext cx="2468880" cy="1097280"/>
-          </a:xfrm>
-          <a:prstGeom prst="rect">
-            <a:avLst/>
-          </a:prstGeom>
-          <a:noFill/>
-        </p:spPr>
-        <p:txBody>
-          <a:bodyPr wrap="square">
-            <a:spAutoFit/>
-          </a:bodyPr>
-          <a:lstStyle/>
-          <a:p>
-            <a:pPr algn="ctr">
-              <a:defRPr sz="1500" b="0" i="0">
-                <a:solidFill>
-                  <a:srgbClr val="6B7280"/>
-                </a:solidFill>
-                <a:latin typeface="Segoe UI"/>
-              </a:defRPr>
-            </a:pPr>
-            <a:r>
-              <a:t>"Something</a:t>
+              <a:t>They can't do anything</a:t>
             </a:r>
             <a:br/>
             <a:r>
-              <a:t>went wrong"</a:t>
-            </a:r>
-          </a:p>
-        </p:txBody>
-      </p:sp>
-      <p:sp>
-        <p:nvSpPr>
-          <p:cNvPr id="8" name="TextBox 7"/>
-          <p:cNvSpPr txBox="1"/>
-          <p:nvPr/>
-        </p:nvSpPr>
-        <p:spPr>
-          <a:xfrm>
-            <a:off x="6126479" y="1828800"/>
-            <a:ext cx="548640" cy="731520"/>
-          </a:xfrm>
-          <a:prstGeom prst="rect">
-            <a:avLst/>
-          </a:prstGeom>
-          <a:noFill/>
-        </p:spPr>
-        <p:txBody>
-          <a:bodyPr wrap="square">
-            <a:spAutoFit/>
-          </a:bodyPr>
-          <a:lstStyle/>
-          <a:p>
-            <a:pPr algn="ctr">
-              <a:defRPr sz="2400" b="0" i="0">
-                <a:solidFill>
-                  <a:srgbClr val="4B5563"/>
-                </a:solidFill>
-                <a:latin typeface="Segoe UI"/>
-              </a:defRPr>
-            </a:pPr>
-            <a:r>
-              <a:t>→</a:t>
-            </a:r>
-          </a:p>
-        </p:txBody>
-      </p:sp>
-      <p:sp>
-        <p:nvSpPr>
-          <p:cNvPr id="9" name="Rounded Rectangle 8"/>
-          <p:cNvSpPr/>
-          <p:nvPr/>
-        </p:nvSpPr>
-        <p:spPr>
-          <a:xfrm>
-            <a:off x="6583680" y="1645920"/>
-            <a:ext cx="2468880" cy="1188720"/>
-          </a:xfrm>
-          <a:prstGeom prst="roundRect">
-            <a:avLst/>
-          </a:prstGeom>
-          <a:solidFill>
-            <a:srgbClr val="151D30"/>
-          </a:solidFill>
-          <a:ln w="19050">
-            <a:solidFill>
-              <a:srgbClr val="4B5563"/>
-            </a:solidFill>
-          </a:ln>
-        </p:spPr>
-        <p:style>
-          <a:lnRef idx="1">
-            <a:schemeClr val="accent1"/>
-          </a:lnRef>
-          <a:fillRef idx="3">
-            <a:schemeClr val="accent1"/>
-          </a:fillRef>
-          <a:effectRef idx="2">
-            <a:schemeClr val="accent1"/>
-          </a:effectRef>
-          <a:fontRef idx="minor">
-            <a:schemeClr val="lt1"/>
-          </a:fontRef>
-        </p:style>
-        <p:txBody>
-          <a:bodyPr rtlCol="0" anchor="ctr" wrap="square"/>
-          <a:lstStyle/>
-          <a:p>
-            <a:pPr algn="ctr">
-              <a:defRPr sz="2000" b="1">
-                <a:solidFill>
-                  <a:srgbClr val="F5F5F0"/>
-                </a:solidFill>
-                <a:latin typeface="Segoe UI"/>
-              </a:defRPr>
-            </a:pPr>
-            <a:r>
-              <a:t>Gen 3: Predictive</a:t>
-            </a:r>
-          </a:p>
-        </p:txBody>
-      </p:sp>
-      <p:sp>
-        <p:nvSpPr>
-          <p:cNvPr id="10" name="TextBox 9"/>
-          <p:cNvSpPr txBox="1"/>
-          <p:nvPr/>
-        </p:nvSpPr>
-        <p:spPr>
-          <a:xfrm>
-            <a:off x="6583680" y="3017520"/>
-            <a:ext cx="2468880" cy="1097280"/>
-          </a:xfrm>
-          <a:prstGeom prst="rect">
-            <a:avLst/>
-          </a:prstGeom>
-          <a:noFill/>
-        </p:spPr>
-        <p:txBody>
-          <a:bodyPr wrap="square">
-            <a:spAutoFit/>
-          </a:bodyPr>
-          <a:lstStyle/>
-          <a:p>
-            <a:pPr algn="ctr">
-              <a:defRPr sz="1500" b="0" i="0">
-                <a:solidFill>
-                  <a:srgbClr val="6B7280"/>
-                </a:solidFill>
-                <a:latin typeface="Segoe UI"/>
-              </a:defRPr>
-            </a:pPr>
-            <a:r>
-              <a:t>"Something</a:t>
-            </a:r>
-            <a:br/>
-            <a:r>
-              <a:t>will go wrong"</a:t>
-            </a:r>
-          </a:p>
-        </p:txBody>
-      </p:sp>
-      <p:sp>
-        <p:nvSpPr>
-          <p:cNvPr id="11" name="TextBox 10"/>
-          <p:cNvSpPr txBox="1"/>
-          <p:nvPr/>
-        </p:nvSpPr>
-        <p:spPr>
-          <a:xfrm>
-            <a:off x="8961120" y="1828800"/>
-            <a:ext cx="548640" cy="731520"/>
-          </a:xfrm>
-          <a:prstGeom prst="rect">
-            <a:avLst/>
-          </a:prstGeom>
-          <a:noFill/>
-        </p:spPr>
-        <p:txBody>
-          <a:bodyPr wrap="square">
-            <a:spAutoFit/>
-          </a:bodyPr>
-          <a:lstStyle/>
-          <a:p>
-            <a:pPr algn="ctr">
-              <a:defRPr sz="2400" b="0" i="0">
-                <a:solidFill>
-                  <a:srgbClr val="4B5563"/>
-                </a:solidFill>
-                <a:latin typeface="Segoe UI"/>
-              </a:defRPr>
-            </a:pPr>
-            <a:r>
-              <a:t>→</a:t>
-            </a:r>
-          </a:p>
-        </p:txBody>
-      </p:sp>
-      <p:sp>
-        <p:nvSpPr>
-          <p:cNvPr id="12" name="Rounded Rectangle 11"/>
-          <p:cNvSpPr/>
-          <p:nvPr/>
-        </p:nvSpPr>
-        <p:spPr>
-          <a:xfrm>
-            <a:off x="9418320" y="1645920"/>
-            <a:ext cx="2468880" cy="1188720"/>
-          </a:xfrm>
-          <a:prstGeom prst="roundRect">
-            <a:avLst/>
-          </a:prstGeom>
-          <a:noFill/>
-          <a:ln w="19050">
-            <a:solidFill>
-              <a:srgbClr val="D4D0C8"/>
-            </a:solidFill>
-          </a:ln>
-        </p:spPr>
-        <p:style>
-          <a:lnRef idx="1">
-            <a:schemeClr val="accent1"/>
-          </a:lnRef>
-          <a:fillRef idx="3">
-            <a:schemeClr val="accent1"/>
-          </a:fillRef>
-          <a:effectRef idx="2">
-            <a:schemeClr val="accent1"/>
-          </a:effectRef>
-          <a:fontRef idx="minor">
-            <a:schemeClr val="lt1"/>
-          </a:fontRef>
-        </p:style>
-        <p:txBody>
-          <a:bodyPr rtlCol="0" anchor="ctr" wrap="square"/>
-          <a:lstStyle/>
-          <a:p>
-            <a:pPr algn="ctr">
-              <a:defRPr sz="2000" b="1">
-                <a:solidFill>
-                  <a:srgbClr val="E8E4D9"/>
-                </a:solidFill>
-                <a:latin typeface="Segoe UI"/>
-              </a:defRPr>
-            </a:pPr>
-            <a:r>
-              <a:t>Gen 4: ?</a:t>
-            </a:r>
-          </a:p>
-        </p:txBody>
-      </p:sp>
-      <p:sp>
-        <p:nvSpPr>
-          <p:cNvPr id="13" name="TextBox 12"/>
-          <p:cNvSpPr txBox="1"/>
-          <p:nvPr/>
-        </p:nvSpPr>
-        <p:spPr>
-          <a:xfrm>
-            <a:off x="914400" y="4754880"/>
-            <a:ext cx="10058400" cy="1371600"/>
-          </a:xfrm>
-          <a:prstGeom prst="rect">
-            <a:avLst/>
-          </a:prstGeom>
-          <a:noFill/>
-        </p:spPr>
-        <p:txBody>
-          <a:bodyPr wrap="square">
-            <a:spAutoFit/>
-          </a:bodyPr>
-          <a:lstStyle/>
-          <a:p>
-            <a:pPr algn="l">
-              <a:defRPr sz="2200" b="0" i="0">
-                <a:solidFill>
-                  <a:srgbClr val="E8E4D9"/>
-                </a:solidFill>
-                <a:latin typeface="Segoe UI"/>
-              </a:defRPr>
-            </a:pPr>
-            <a:r>
-              <a:t>Each generation gets smarter about what's happening.</a:t>
-            </a:r>
-            <a:br/>
-            <a:r>
-              <a:t>But the human is still the one who decides what to do about it.</a:t>
+              <a:t>about what they see.</a:t>
             </a:r>
           </a:p>
         </p:txBody>
@@ -8108,59 +8245,14 @@
       <p:grpSpPr/>
       <p:sp>
         <p:nvSpPr>
-          <p:cNvPr id="2" name="Rounded Rectangle 1"/>
-          <p:cNvSpPr/>
-          <p:nvPr/>
-        </p:nvSpPr>
-        <p:spPr>
-          <a:xfrm>
-            <a:off x="457200" y="274320"/>
-            <a:ext cx="11247120" cy="6309360"/>
-          </a:xfrm>
-          <a:prstGeom prst="roundRect">
-            <a:avLst/>
-          </a:prstGeom>
-          <a:solidFill>
-            <a:srgbClr val="0B1120"/>
-          </a:solidFill>
-          <a:ln w="19050">
-            <a:solidFill>
-              <a:srgbClr val="4B5563"/>
-            </a:solidFill>
-          </a:ln>
-        </p:spPr>
-        <p:style>
-          <a:lnRef idx="1">
-            <a:schemeClr val="accent1"/>
-          </a:lnRef>
-          <a:fillRef idx="3">
-            <a:schemeClr val="accent1"/>
-          </a:fillRef>
-          <a:effectRef idx="2">
-            <a:schemeClr val="accent1"/>
-          </a:effectRef>
-          <a:fontRef idx="minor">
-            <a:schemeClr val="lt1"/>
-          </a:fontRef>
-        </p:style>
-        <p:txBody>
-          <a:bodyPr rtlCol="0" anchor="ctr"/>
-          <a:lstStyle/>
-          <a:p>
-            <a:pPr algn="ctr"/>
-          </a:p>
-        </p:txBody>
-      </p:sp>
-      <p:sp>
-        <p:nvSpPr>
-          <p:cNvPr id="3" name="TextBox 2"/>
+          <p:cNvPr id="2" name="TextBox 1"/>
           <p:cNvSpPr txBox="1"/>
           <p:nvPr/>
         </p:nvSpPr>
         <p:spPr>
           <a:xfrm>
-            <a:off x="1371600" y="914400"/>
-            <a:ext cx="4572000" cy="731520"/>
+            <a:off x="1371600" y="2011680"/>
+            <a:ext cx="9144000" cy="1371600"/>
           </a:xfrm>
           <a:prstGeom prst="rect">
             <a:avLst/>
@@ -8174,7 +8266,7 @@
           <a:lstStyle/>
           <a:p>
             <a:pPr algn="l">
-              <a:defRPr sz="5200" b="1" i="0">
+              <a:defRPr sz="7200" b="1" i="0">
                 <a:solidFill>
                   <a:srgbClr val="F5F5F0"/>
                 </a:solidFill>
@@ -8182,21 +8274,21 @@
               </a:defRPr>
             </a:pPr>
             <a:r>
-              <a:t>2:00 AM</a:t>
-            </a:r>
-          </a:p>
-        </p:txBody>
-      </p:sp>
-      <p:sp>
-        <p:nvSpPr>
-          <p:cNvPr id="4" name="TextBox 3"/>
+              <a:t>2:14 AM</a:t>
+            </a:r>
+          </a:p>
+        </p:txBody>
+      </p:sp>
+      <p:sp>
+        <p:nvSpPr>
+          <p:cNvPr id="3" name="TextBox 2"/>
           <p:cNvSpPr txBox="1"/>
           <p:nvPr/>
         </p:nvSpPr>
         <p:spPr>
           <a:xfrm>
-            <a:off x="1371600" y="1737360"/>
-            <a:ext cx="7315200" cy="457200"/>
+            <a:off x="1371600" y="3657600"/>
+            <a:ext cx="9144000" cy="731520"/>
           </a:xfrm>
           <a:prstGeom prst="rect">
             <a:avLst/>
@@ -8210,7 +8302,7 @@
           <a:lstStyle/>
           <a:p>
             <a:pPr algn="l">
-              <a:defRPr sz="2000" b="0" i="0">
+              <a:defRPr sz="2400" b="0" i="0">
                 <a:solidFill>
                   <a:srgbClr val="6B7280"/>
                 </a:solidFill>
@@ -8218,382 +8310,7 @@
               </a:defRPr>
             </a:pPr>
             <a:r>
-              <a:t>Etch chamber 3 — temperature drift detected</a:t>
-            </a:r>
-          </a:p>
-        </p:txBody>
-      </p:sp>
-      <p:sp>
-        <p:nvSpPr>
-          <p:cNvPr id="5" name="Rectangle 4"/>
-          <p:cNvSpPr/>
-          <p:nvPr/>
-        </p:nvSpPr>
-        <p:spPr>
-          <a:xfrm>
-            <a:off x="1371600" y="2560320"/>
-            <a:ext cx="1371600" cy="10972"/>
-          </a:xfrm>
-          <a:prstGeom prst="rect">
-            <a:avLst/>
-          </a:prstGeom>
-          <a:solidFill>
-            <a:srgbClr val="D4D0C8"/>
-          </a:solidFill>
-          <a:ln>
-            <a:noFill/>
-          </a:ln>
-        </p:spPr>
-        <p:style>
-          <a:lnRef idx="1">
-            <a:schemeClr val="accent1"/>
-          </a:lnRef>
-          <a:fillRef idx="3">
-            <a:schemeClr val="accent1"/>
-          </a:fillRef>
-          <a:effectRef idx="2">
-            <a:schemeClr val="accent1"/>
-          </a:effectRef>
-          <a:fontRef idx="minor">
-            <a:schemeClr val="lt1"/>
-          </a:fontRef>
-        </p:style>
-        <p:txBody>
-          <a:bodyPr rtlCol="0" anchor="ctr"/>
-          <a:lstStyle/>
-          <a:p>
-            <a:pPr algn="ctr"/>
-          </a:p>
-        </p:txBody>
-      </p:sp>
-      <p:sp>
-        <p:nvSpPr>
-          <p:cNvPr id="6" name="TextBox 5"/>
-          <p:cNvSpPr txBox="1"/>
-          <p:nvPr/>
-        </p:nvSpPr>
-        <p:spPr>
-          <a:xfrm>
-            <a:off x="1371600" y="2926080"/>
-            <a:ext cx="4572000" cy="457200"/>
-          </a:xfrm>
-          <a:prstGeom prst="rect">
-            <a:avLst/>
-          </a:prstGeom>
-          <a:noFill/>
-        </p:spPr>
-        <p:txBody>
-          <a:bodyPr wrap="square">
-            <a:spAutoFit/>
-          </a:bodyPr>
-          <a:lstStyle/>
-          <a:p>
-            <a:pPr algn="l">
-              <a:defRPr sz="1800" b="1" i="0">
-                <a:solidFill>
-                  <a:srgbClr val="E8E4D9"/>
-                </a:solidFill>
-                <a:latin typeface="Segoe UI"/>
-              </a:defRPr>
-            </a:pPr>
-            <a:r>
-              <a:t>The twin detected:</a:t>
-            </a:r>
-          </a:p>
-        </p:txBody>
-      </p:sp>
-      <p:sp>
-        <p:nvSpPr>
-          <p:cNvPr id="7" name="TextBox 6"/>
-          <p:cNvSpPr txBox="1"/>
-          <p:nvPr/>
-        </p:nvSpPr>
-        <p:spPr>
-          <a:xfrm>
-            <a:off x="1371600" y="3383280"/>
-            <a:ext cx="4572000" cy="457200"/>
-          </a:xfrm>
-          <a:prstGeom prst="rect">
-            <a:avLst/>
-          </a:prstGeom>
-          <a:noFill/>
-        </p:spPr>
-        <p:txBody>
-          <a:bodyPr wrap="square">
-            <a:spAutoFit/>
-          </a:bodyPr>
-          <a:lstStyle/>
-          <a:p>
-            <a:pPr algn="l">
-              <a:defRPr sz="1600" b="0" i="0">
-                <a:solidFill>
-                  <a:srgbClr val="6B7280"/>
-                </a:solidFill>
-                <a:latin typeface="Segoe UI"/>
-              </a:defRPr>
-            </a:pPr>
-            <a:r>
-              <a:t>Temperature crossing a threshold. That's it.</a:t>
-            </a:r>
-          </a:p>
-        </p:txBody>
-      </p:sp>
-      <p:sp>
-        <p:nvSpPr>
-          <p:cNvPr id="8" name="TextBox 7"/>
-          <p:cNvSpPr txBox="1"/>
-          <p:nvPr/>
-        </p:nvSpPr>
-        <p:spPr>
-          <a:xfrm>
-            <a:off x="1371600" y="4114800"/>
-            <a:ext cx="4572000" cy="457200"/>
-          </a:xfrm>
-          <a:prstGeom prst="rect">
-            <a:avLst/>
-          </a:prstGeom>
-          <a:noFill/>
-        </p:spPr>
-        <p:txBody>
-          <a:bodyPr wrap="square">
-            <a:spAutoFit/>
-          </a:bodyPr>
-          <a:lstStyle/>
-          <a:p>
-            <a:pPr algn="l">
-              <a:defRPr sz="1800" b="1" i="0">
-                <a:solidFill>
-                  <a:srgbClr val="E8E4D9"/>
-                </a:solidFill>
-                <a:latin typeface="Segoe UI"/>
-              </a:defRPr>
-            </a:pPr>
-            <a:r>
-              <a:t>The twin didn't know:</a:t>
-            </a:r>
-          </a:p>
-        </p:txBody>
-      </p:sp>
-      <p:sp>
-        <p:nvSpPr>
-          <p:cNvPr id="9" name="TextBox 8"/>
-          <p:cNvSpPr txBox="1"/>
-          <p:nvPr/>
-        </p:nvSpPr>
-        <p:spPr>
-          <a:xfrm>
-            <a:off x="1371600" y="4572000"/>
-            <a:ext cx="4572000" cy="1828800"/>
-          </a:xfrm>
-          <a:prstGeom prst="rect">
-            <a:avLst/>
-          </a:prstGeom>
-          <a:noFill/>
-        </p:spPr>
-        <p:txBody>
-          <a:bodyPr wrap="square">
-            <a:spAutoFit/>
-          </a:bodyPr>
-          <a:lstStyle/>
-          <a:p>
-            <a:pPr algn="l">
-              <a:spcBef>
-                <a:spcPts val="600"/>
-              </a:spcBef>
-              <a:spcAft>
-                <a:spcPts val="600"/>
-              </a:spcAft>
-              <a:defRPr sz="1600" b="0">
-                <a:solidFill>
-                  <a:srgbClr val="6B7280"/>
-                </a:solidFill>
-                <a:latin typeface="Segoe UI"/>
-              </a:defRPr>
-            </a:pPr>
-            <a:r>
-              <a:t>It was a failing heater element.</a:t>
-            </a:r>
-          </a:p>
-          <a:p>
-            <a:pPr algn="l">
-              <a:spcBef>
-                <a:spcPts val="600"/>
-              </a:spcBef>
-              <a:spcAft>
-                <a:spcPts val="600"/>
-              </a:spcAft>
-              <a:defRPr sz="1600" b="0">
-                <a:solidFill>
-                  <a:srgbClr val="6B7280"/>
-                </a:solidFill>
-                <a:latin typeface="Segoe UI"/>
-              </a:defRPr>
-            </a:pPr>
-            <a:r>
-              <a:t>This happened 6 months ago on another chamber.</a:t>
-            </a:r>
-          </a:p>
-          <a:p>
-            <a:pPr algn="l">
-              <a:spcBef>
-                <a:spcPts val="600"/>
-              </a:spcBef>
-              <a:spcAft>
-                <a:spcPts val="600"/>
-              </a:spcAft>
-              <a:defRPr sz="1600" b="0">
-                <a:solidFill>
-                  <a:srgbClr val="6B7280"/>
-                </a:solidFill>
-                <a:latin typeface="Segoe UI"/>
-              </a:defRPr>
-            </a:pPr>
-            <a:r>
-              <a:t>A replacement part was already in inventory.</a:t>
-            </a:r>
-          </a:p>
-        </p:txBody>
-      </p:sp>
-      <p:sp>
-        <p:nvSpPr>
-          <p:cNvPr id="10" name="TextBox 9"/>
-          <p:cNvSpPr txBox="1"/>
-          <p:nvPr/>
-        </p:nvSpPr>
-        <p:spPr>
-          <a:xfrm>
-            <a:off x="6858000" y="2926080"/>
-            <a:ext cx="4114800" cy="457200"/>
-          </a:xfrm>
-          <a:prstGeom prst="rect">
-            <a:avLst/>
-          </a:prstGeom>
-          <a:noFill/>
-        </p:spPr>
-        <p:txBody>
-          <a:bodyPr wrap="square">
-            <a:spAutoFit/>
-          </a:bodyPr>
-          <a:lstStyle/>
-          <a:p>
-            <a:pPr algn="l">
-              <a:defRPr sz="1600" b="0" i="0">
-                <a:solidFill>
-                  <a:srgbClr val="6B7280"/>
-                </a:solidFill>
-                <a:latin typeface="Segoe UI"/>
-              </a:defRPr>
-            </a:pPr>
-            <a:r>
-              <a:t>Detected in</a:t>
-            </a:r>
-          </a:p>
-        </p:txBody>
-      </p:sp>
-      <p:sp>
-        <p:nvSpPr>
-          <p:cNvPr id="11" name="TextBox 10"/>
-          <p:cNvSpPr txBox="1"/>
-          <p:nvPr/>
-        </p:nvSpPr>
-        <p:spPr>
-          <a:xfrm>
-            <a:off x="6858000" y="3383280"/>
-            <a:ext cx="4114800" cy="731520"/>
-          </a:xfrm>
-          <a:prstGeom prst="rect">
-            <a:avLst/>
-          </a:prstGeom>
-          <a:noFill/>
-        </p:spPr>
-        <p:txBody>
-          <a:bodyPr wrap="square">
-            <a:spAutoFit/>
-          </a:bodyPr>
-          <a:lstStyle/>
-          <a:p>
-            <a:pPr algn="l">
-              <a:defRPr sz="3600" b="1" i="0">
-                <a:solidFill>
-                  <a:srgbClr val="E8E4D9"/>
-                </a:solidFill>
-                <a:latin typeface="Segoe UI"/>
-              </a:defRPr>
-            </a:pPr>
-            <a:r>
-              <a:t>30 seconds</a:t>
-            </a:r>
-          </a:p>
-        </p:txBody>
-      </p:sp>
-      <p:sp>
-        <p:nvSpPr>
-          <p:cNvPr id="12" name="TextBox 11"/>
-          <p:cNvSpPr txBox="1"/>
-          <p:nvPr/>
-        </p:nvSpPr>
-        <p:spPr>
-          <a:xfrm>
-            <a:off x="6858000" y="4389120"/>
-            <a:ext cx="4114800" cy="457200"/>
-          </a:xfrm>
-          <a:prstGeom prst="rect">
-            <a:avLst/>
-          </a:prstGeom>
-          <a:noFill/>
-        </p:spPr>
-        <p:txBody>
-          <a:bodyPr wrap="square">
-            <a:spAutoFit/>
-          </a:bodyPr>
-          <a:lstStyle/>
-          <a:p>
-            <a:pPr algn="l">
-              <a:defRPr sz="1600" b="0" i="0">
-                <a:solidFill>
-                  <a:srgbClr val="6B7280"/>
-                </a:solidFill>
-                <a:latin typeface="Segoe UI"/>
-              </a:defRPr>
-            </a:pPr>
-            <a:r>
-              <a:t>Resolved in</a:t>
-            </a:r>
-          </a:p>
-        </p:txBody>
-      </p:sp>
-      <p:sp>
-        <p:nvSpPr>
-          <p:cNvPr id="13" name="TextBox 12"/>
-          <p:cNvSpPr txBox="1"/>
-          <p:nvPr/>
-        </p:nvSpPr>
-        <p:spPr>
-          <a:xfrm>
-            <a:off x="6858000" y="4846320"/>
-            <a:ext cx="4114800" cy="731520"/>
-          </a:xfrm>
-          <a:prstGeom prst="rect">
-            <a:avLst/>
-          </a:prstGeom>
-          <a:noFill/>
-        </p:spPr>
-        <p:txBody>
-          <a:bodyPr wrap="square">
-            <a:spAutoFit/>
-          </a:bodyPr>
-          <a:lstStyle/>
-          <a:p>
-            <a:pPr algn="l">
-              <a:defRPr sz="3600" b="1" i="0">
-                <a:solidFill>
-                  <a:srgbClr val="F5F5F0"/>
-                </a:solidFill>
-                <a:latin typeface="Segoe UI"/>
-              </a:defRPr>
-            </a:pPr>
-            <a:r>
-              <a:t>14 hours</a:t>
+              <a:t>Etch chamber 3.</a:t>
             </a:r>
           </a:p>
         </p:txBody>
@@ -8782,7 +8499,7 @@
         </p:nvSpPr>
         <p:spPr>
           <a:xfrm>
-            <a:off x="914400" y="1828800"/>
+            <a:off x="746607" y="1828800"/>
             <a:ext cx="2468880" cy="1097280"/>
           </a:xfrm>
           <a:prstGeom prst="roundRect">
@@ -8837,7 +8554,7 @@
         </p:nvSpPr>
         <p:spPr>
           <a:xfrm>
-            <a:off x="1051560" y="3200400"/>
+            <a:off x="883767" y="3200400"/>
             <a:ext cx="2286000" cy="1645920"/>
           </a:xfrm>
           <a:prstGeom prst="rect">
@@ -8881,7 +8598,7 @@
         </p:nvSpPr>
         <p:spPr>
           <a:xfrm>
-            <a:off x="3749039" y="1828800"/>
+            <a:off x="3489807" y="1828800"/>
             <a:ext cx="2468880" cy="1097280"/>
           </a:xfrm>
           <a:prstGeom prst="roundRect">
@@ -8936,7 +8653,7 @@
         </p:nvSpPr>
         <p:spPr>
           <a:xfrm>
-            <a:off x="3886199" y="3200400"/>
+            <a:off x="3626967" y="3200400"/>
             <a:ext cx="2286000" cy="1645920"/>
           </a:xfrm>
           <a:prstGeom prst="rect">
@@ -8980,7 +8697,7 @@
         </p:nvSpPr>
         <p:spPr>
           <a:xfrm>
-            <a:off x="6583680" y="1828800"/>
+            <a:off x="6233007" y="1828800"/>
             <a:ext cx="2468880" cy="1097280"/>
           </a:xfrm>
           <a:prstGeom prst="roundRect">
@@ -9035,7 +8752,7 @@
         </p:nvSpPr>
         <p:spPr>
           <a:xfrm>
-            <a:off x="6720840" y="3200400"/>
+            <a:off x="6370167" y="3200400"/>
             <a:ext cx="2286000" cy="1645920"/>
           </a:xfrm>
           <a:prstGeom prst="rect">
@@ -9079,7 +8796,7 @@
         </p:nvSpPr>
         <p:spPr>
           <a:xfrm>
-            <a:off x="9418320" y="1828800"/>
+            <a:off x="8976207" y="1828800"/>
             <a:ext cx="2468880" cy="1097280"/>
           </a:xfrm>
           <a:prstGeom prst="roundRect">
@@ -9134,7 +8851,7 @@
         </p:nvSpPr>
         <p:spPr>
           <a:xfrm>
-            <a:off x="9555480" y="3200400"/>
+            <a:off x="9113367" y="3200400"/>
             <a:ext cx="2286000" cy="1645920"/>
           </a:xfrm>
           <a:prstGeom prst="rect">
@@ -9218,9 +8935,7 @@
           <a:prstGeom prst="ellipse">
             <a:avLst/>
           </a:prstGeom>
-          <a:solidFill>
-            <a:srgbClr val="151D30"/>
-          </a:solidFill>
+          <a:noFill/>
           <a:ln w="19050">
             <a:solidFill>
               <a:srgbClr val="D4D0C8"/>
@@ -9347,9 +9062,7 @@
           <a:prstGeom prst="ellipse">
             <a:avLst/>
           </a:prstGeom>
-          <a:solidFill>
-            <a:srgbClr val="151D30"/>
-          </a:solidFill>
+          <a:noFill/>
           <a:ln w="19050">
             <a:solidFill>
               <a:srgbClr val="D4D0C8"/>

--- a/presentation/presentation-v4-gradient-noir.pptx
+++ b/presentation/presentation-v4-gradient-noir.pptx
@@ -8251,8 +8251,8 @@
         </p:nvSpPr>
         <p:spPr>
           <a:xfrm>
-            <a:off x="1371600" y="2011680"/>
-            <a:ext cx="9144000" cy="1371600"/>
+            <a:off x="0" y="2286000"/>
+            <a:ext cx="12191695" cy="2286000"/>
           </a:xfrm>
           <a:prstGeom prst="rect">
             <a:avLst/>
@@ -8265,7 +8265,7 @@
           </a:bodyPr>
           <a:lstStyle/>
           <a:p>
-            <a:pPr algn="l">
+            <a:pPr algn="ctr">
               <a:defRPr sz="7200" b="1" i="0">
                 <a:solidFill>
                   <a:srgbClr val="F5F5F0"/>
@@ -8275,42 +8275,6 @@
             </a:pPr>
             <a:r>
               <a:t>2:14 AM</a:t>
-            </a:r>
-          </a:p>
-        </p:txBody>
-      </p:sp>
-      <p:sp>
-        <p:nvSpPr>
-          <p:cNvPr id="3" name="TextBox 2"/>
-          <p:cNvSpPr txBox="1"/>
-          <p:nvPr/>
-        </p:nvSpPr>
-        <p:spPr>
-          <a:xfrm>
-            <a:off x="1371600" y="3657600"/>
-            <a:ext cx="9144000" cy="731520"/>
-          </a:xfrm>
-          <a:prstGeom prst="rect">
-            <a:avLst/>
-          </a:prstGeom>
-          <a:noFill/>
-        </p:spPr>
-        <p:txBody>
-          <a:bodyPr wrap="square">
-            <a:spAutoFit/>
-          </a:bodyPr>
-          <a:lstStyle/>
-          <a:p>
-            <a:pPr algn="l">
-              <a:defRPr sz="2400" b="0" i="0">
-                <a:solidFill>
-                  <a:srgbClr val="6B7280"/>
-                </a:solidFill>
-                <a:latin typeface="Segoe UI"/>
-              </a:defRPr>
-            </a:pPr>
-            <a:r>
-              <a:t>Etch chamber 3.</a:t>
             </a:r>
           </a:p>
         </p:txBody>

--- a/presentation/presentation-v4-gradient-noir.pptx
+++ b/presentation/presentation-v4-gradient-noir.pptx
@@ -23,6 +23,8 @@
     <p:sldId id="271" r:id="rId22"/>
     <p:sldId id="272" r:id="rId23"/>
     <p:sldId id="273" r:id="rId24"/>
+    <p:sldId id="274" r:id="rId25"/>
+    <p:sldId id="275" r:id="rId26"/>
   </p:sldIdLst>
   <p:sldSz cx="12191695" cy="6858000" type="screen4x3"/>
   <p:notesSz cx="6858000" cy="9144000"/>
@@ -3249,7 +3251,7 @@
         <p:spPr>
           <a:xfrm>
             <a:off x="1371600" y="5166360"/>
-            <a:ext cx="4572000" cy="365760"/>
+            <a:ext cx="6400800" cy="365760"/>
           </a:xfrm>
           <a:prstGeom prst="rect">
             <a:avLst/>
@@ -3265,13 +3267,13 @@
             <a:pPr algn="l">
               <a:defRPr sz="1800" b="0" i="0">
                 <a:solidFill>
-                  <a:srgbClr val="6B7280"/>
-                </a:solidFill>
-                <a:latin typeface="Segoe UI"/>
-              </a:defRPr>
-            </a:pPr>
-            <a:r>
-              <a:t>Anthony Poole  ·  AI Engineer, Microsoft</a:t>
+                  <a:srgbClr val="8B919C"/>
+                </a:solidFill>
+                <a:latin typeface="Segoe UI"/>
+              </a:defRPr>
+            </a:pPr>
+            <a:r>
+              <a:t>Anthony Poole  ·  Software Engineer, Microsoft</a:t>
             </a:r>
           </a:p>
         </p:txBody>
@@ -3301,7 +3303,7 @@
             <a:pPr algn="l">
               <a:defRPr sz="1400" b="0" i="0">
                 <a:solidFill>
-                  <a:srgbClr val="4B5563"/>
+                  <a:srgbClr val="6B7280"/>
                 </a:solidFill>
                 <a:latin typeface="Segoe UI"/>
               </a:defRPr>
@@ -3348,14 +3350,57 @@
       <p:grpSpPr/>
       <p:sp>
         <p:nvSpPr>
-          <p:cNvPr id="2" name="TextBox 1"/>
+          <p:cNvPr id="2" name="Oval 1"/>
+          <p:cNvSpPr/>
+          <p:nvPr/>
+        </p:nvSpPr>
+        <p:spPr>
+          <a:xfrm>
+            <a:off x="1645920" y="1097280"/>
+            <a:ext cx="5029200" cy="5029200"/>
+          </a:xfrm>
+          <a:prstGeom prst="ellipse">
+            <a:avLst/>
+          </a:prstGeom>
+          <a:noFill/>
+          <a:ln w="19050">
+            <a:solidFill>
+              <a:srgbClr val="D4D0C8"/>
+            </a:solidFill>
+          </a:ln>
+        </p:spPr>
+        <p:style>
+          <a:lnRef idx="1">
+            <a:schemeClr val="accent1"/>
+          </a:lnRef>
+          <a:fillRef idx="3">
+            <a:schemeClr val="accent1"/>
+          </a:fillRef>
+          <a:effectRef idx="2">
+            <a:schemeClr val="accent1"/>
+          </a:effectRef>
+          <a:fontRef idx="minor">
+            <a:schemeClr val="lt1"/>
+          </a:fontRef>
+        </p:style>
+        <p:txBody>
+          <a:bodyPr rtlCol="0" anchor="ctr"/>
+          <a:lstStyle/>
+          <a:p>
+            <a:pPr algn="ctr"/>
+          </a:p>
+        </p:txBody>
+      </p:sp>
+      <p:sp>
+        <p:nvSpPr>
+          <p:cNvPr id="3" name="TextBox 2"/>
           <p:cNvSpPr txBox="1"/>
           <p:nvPr/>
         </p:nvSpPr>
         <p:spPr>
           <a:xfrm>
-            <a:off x="0" y="2286000"/>
-            <a:ext cx="12191695" cy="2286000"/>
+            <a:off x="2103120" y="2926080"/>
+            <a:ext cx="3200400" cy="914400"/>
           </a:xfrm>
           <a:prstGeom prst="rect">
             <a:avLst/>
@@ -3368,16 +3413,227 @@
           </a:bodyPr>
           <a:lstStyle/>
           <a:p>
+            <a:pPr algn="l">
+              <a:defRPr sz="3000" b="1" i="0">
+                <a:solidFill>
+                  <a:srgbClr val="F5F5F0"/>
+                </a:solidFill>
+                <a:latin typeface="Segoe UI"/>
+              </a:defRPr>
+            </a:pPr>
+            <a:r>
+              <a:t>Digital</a:t>
+            </a:r>
+            <a:br/>
+            <a:r>
+              <a:t>Twins</a:t>
+            </a:r>
+          </a:p>
+        </p:txBody>
+      </p:sp>
+      <p:sp>
+        <p:nvSpPr>
+          <p:cNvPr id="4" name="TextBox 3"/>
+          <p:cNvSpPr txBox="1"/>
+          <p:nvPr/>
+        </p:nvSpPr>
+        <p:spPr>
+          <a:xfrm>
+            <a:off x="2103120" y="4114800"/>
+            <a:ext cx="2926080" cy="914400"/>
+          </a:xfrm>
+          <a:prstGeom prst="rect">
+            <a:avLst/>
+          </a:prstGeom>
+          <a:noFill/>
+        </p:spPr>
+        <p:txBody>
+          <a:bodyPr wrap="square">
+            <a:spAutoFit/>
+          </a:bodyPr>
+          <a:lstStyle/>
+          <a:p>
+            <a:pPr algn="l">
+              <a:defRPr sz="1600" b="0" i="0">
+                <a:solidFill>
+                  <a:srgbClr val="8B919C"/>
+                </a:solidFill>
+                <a:latin typeface="Segoe UI"/>
+              </a:defRPr>
+            </a:pPr>
+            <a:r>
+              <a:t>The data</a:t>
+            </a:r>
+            <a:br/>
+            <a:r>
+              <a:t>The models</a:t>
+            </a:r>
+            <a:br/>
+            <a:r>
+              <a:t>The simulation</a:t>
+            </a:r>
+          </a:p>
+        </p:txBody>
+      </p:sp>
+      <p:sp>
+        <p:nvSpPr>
+          <p:cNvPr id="5" name="Oval 4"/>
+          <p:cNvSpPr/>
+          <p:nvPr/>
+        </p:nvSpPr>
+        <p:spPr>
+          <a:xfrm>
+            <a:off x="5486400" y="1097280"/>
+            <a:ext cx="5029200" cy="5029200"/>
+          </a:xfrm>
+          <a:prstGeom prst="ellipse">
+            <a:avLst/>
+          </a:prstGeom>
+          <a:noFill/>
+          <a:ln w="19050">
+            <a:solidFill>
+              <a:srgbClr val="D4D0C8"/>
+            </a:solidFill>
+          </a:ln>
+        </p:spPr>
+        <p:style>
+          <a:lnRef idx="1">
+            <a:schemeClr val="accent1"/>
+          </a:lnRef>
+          <a:fillRef idx="3">
+            <a:schemeClr val="accent1"/>
+          </a:fillRef>
+          <a:effectRef idx="2">
+            <a:schemeClr val="accent1"/>
+          </a:effectRef>
+          <a:fontRef idx="minor">
+            <a:schemeClr val="lt1"/>
+          </a:fontRef>
+        </p:style>
+        <p:txBody>
+          <a:bodyPr rtlCol="0" anchor="ctr"/>
+          <a:lstStyle/>
+          <a:p>
+            <a:pPr algn="ctr"/>
+          </a:p>
+        </p:txBody>
+      </p:sp>
+      <p:sp>
+        <p:nvSpPr>
+          <p:cNvPr id="6" name="TextBox 5"/>
+          <p:cNvSpPr txBox="1"/>
+          <p:nvPr/>
+        </p:nvSpPr>
+        <p:spPr>
+          <a:xfrm>
+            <a:off x="7132320" y="2926080"/>
+            <a:ext cx="3200400" cy="914400"/>
+          </a:xfrm>
+          <a:prstGeom prst="rect">
+            <a:avLst/>
+          </a:prstGeom>
+          <a:noFill/>
+        </p:spPr>
+        <p:txBody>
+          <a:bodyPr wrap="square">
+            <a:spAutoFit/>
+          </a:bodyPr>
+          <a:lstStyle/>
+          <a:p>
+            <a:pPr algn="l">
+              <a:defRPr sz="3000" b="1" i="0">
+                <a:solidFill>
+                  <a:srgbClr val="F5F5F0"/>
+                </a:solidFill>
+                <a:latin typeface="Segoe UI"/>
+              </a:defRPr>
+            </a:pPr>
+            <a:r>
+              <a:t>Agentic</a:t>
+            </a:r>
+            <a:br/>
+            <a:r>
+              <a:t>AI</a:t>
+            </a:r>
+          </a:p>
+        </p:txBody>
+      </p:sp>
+      <p:sp>
+        <p:nvSpPr>
+          <p:cNvPr id="7" name="TextBox 6"/>
+          <p:cNvSpPr txBox="1"/>
+          <p:nvPr/>
+        </p:nvSpPr>
+        <p:spPr>
+          <a:xfrm>
+            <a:off x="7132320" y="4114800"/>
+            <a:ext cx="2926080" cy="914400"/>
+          </a:xfrm>
+          <a:prstGeom prst="rect">
+            <a:avLst/>
+          </a:prstGeom>
+          <a:noFill/>
+        </p:spPr>
+        <p:txBody>
+          <a:bodyPr wrap="square">
+            <a:spAutoFit/>
+          </a:bodyPr>
+          <a:lstStyle/>
+          <a:p>
+            <a:pPr algn="l">
+              <a:defRPr sz="1600" b="0" i="0">
+                <a:solidFill>
+                  <a:srgbClr val="8B919C"/>
+                </a:solidFill>
+                <a:latin typeface="Segoe UI"/>
+              </a:defRPr>
+            </a:pPr>
+            <a:r>
+              <a:t>The reasoning</a:t>
+            </a:r>
+            <a:br/>
+            <a:r>
+              <a:t>The planning</a:t>
+            </a:r>
+            <a:br/>
+            <a:r>
+              <a:t>The action</a:t>
+            </a:r>
+          </a:p>
+        </p:txBody>
+      </p:sp>
+      <p:sp>
+        <p:nvSpPr>
+          <p:cNvPr id="8" name="TextBox 7"/>
+          <p:cNvSpPr txBox="1"/>
+          <p:nvPr/>
+        </p:nvSpPr>
+        <p:spPr>
+          <a:xfrm>
+            <a:off x="5029200" y="3017520"/>
+            <a:ext cx="2103120" cy="1371600"/>
+          </a:xfrm>
+          <a:prstGeom prst="rect">
+            <a:avLst/>
+          </a:prstGeom>
+          <a:noFill/>
+        </p:spPr>
+        <p:txBody>
+          <a:bodyPr wrap="square">
+            <a:spAutoFit/>
+          </a:bodyPr>
+          <a:lstStyle/>
+          <a:p>
             <a:pPr algn="ctr">
               <a:defRPr sz="5600" b="1" i="0">
                 <a:solidFill>
-                  <a:srgbClr val="F5F5F0"/>
-                </a:solidFill>
-                <a:latin typeface="Segoe UI"/>
-              </a:defRPr>
-            </a:pPr>
-            <a:r>
-              <a:t>The twin that thinks.</a:t>
+                  <a:srgbClr val="E8E4D9"/>
+                </a:solidFill>
+                <a:latin typeface="Segoe UI"/>
+              </a:defRPr>
+            </a:pPr>
+            <a:r>
+              <a:t>?</a:t>
             </a:r>
           </a:p>
         </p:txBody>
@@ -3424,8 +3680,8 @@
         </p:nvSpPr>
         <p:spPr>
           <a:xfrm>
-            <a:off x="1097280" y="457200"/>
-            <a:ext cx="4572000" cy="457200"/>
+            <a:off x="0" y="2286000"/>
+            <a:ext cx="12191695" cy="2286000"/>
           </a:xfrm>
           <a:prstGeom prst="rect">
             <a:avLst/>
@@ -3438,63 +3694,8 @@
           </a:bodyPr>
           <a:lstStyle/>
           <a:p>
-            <a:pPr algn="l">
-              <a:defRPr sz="1400" b="0" i="0">
-                <a:solidFill>
-                  <a:srgbClr val="4B5563"/>
-                </a:solidFill>
-                <a:latin typeface="Segoe UI"/>
-              </a:defRPr>
-            </a:pPr>
-            <a:r>
-              <a:t>The Agentic Control Loop</a:t>
-            </a:r>
-          </a:p>
-        </p:txBody>
-      </p:sp>
-      <p:sp>
-        <p:nvSpPr>
-          <p:cNvPr id="3" name="Rounded Rectangle 2"/>
-          <p:cNvSpPr/>
-          <p:nvPr/>
-        </p:nvSpPr>
-        <p:spPr>
-          <a:xfrm>
-            <a:off x="731520" y="2743200"/>
-            <a:ext cx="1828800" cy="1097280"/>
-          </a:xfrm>
-          <a:prstGeom prst="roundRect">
-            <a:avLst/>
-          </a:prstGeom>
-          <a:solidFill>
-            <a:srgbClr val="151D30"/>
-          </a:solidFill>
-          <a:ln w="19050">
-            <a:solidFill>
-              <a:srgbClr val="D4D0C8"/>
-            </a:solidFill>
-          </a:ln>
-        </p:spPr>
-        <p:style>
-          <a:lnRef idx="1">
-            <a:schemeClr val="accent1"/>
-          </a:lnRef>
-          <a:fillRef idx="3">
-            <a:schemeClr val="accent1"/>
-          </a:fillRef>
-          <a:effectRef idx="2">
-            <a:schemeClr val="accent1"/>
-          </a:effectRef>
-          <a:fontRef idx="minor">
-            <a:schemeClr val="lt1"/>
-          </a:fontRef>
-        </p:style>
-        <p:txBody>
-          <a:bodyPr rtlCol="0" anchor="ctr" wrap="square"/>
-          <a:lstStyle/>
-          <a:p>
             <a:pPr algn="ctr">
-              <a:defRPr sz="2000" b="1">
+              <a:defRPr sz="5600" b="1" i="0">
                 <a:solidFill>
                   <a:srgbClr val="F5F5F0"/>
                 </a:solidFill>
@@ -3502,612 +3703,7 @@
               </a:defRPr>
             </a:pPr>
             <a:r>
-              <a:t>Perceive</a:t>
-            </a:r>
-          </a:p>
-        </p:txBody>
-      </p:sp>
-      <p:sp>
-        <p:nvSpPr>
-          <p:cNvPr id="4" name="TextBox 3"/>
-          <p:cNvSpPr txBox="1"/>
-          <p:nvPr/>
-        </p:nvSpPr>
-        <p:spPr>
-          <a:xfrm>
-            <a:off x="2606040" y="3017520"/>
-            <a:ext cx="365760" cy="548640"/>
-          </a:xfrm>
-          <a:prstGeom prst="rect">
-            <a:avLst/>
-          </a:prstGeom>
-          <a:noFill/>
-        </p:spPr>
-        <p:txBody>
-          <a:bodyPr wrap="square">
-            <a:spAutoFit/>
-          </a:bodyPr>
-          <a:lstStyle/>
-          <a:p>
-            <a:pPr algn="ctr">
-              <a:defRPr sz="2200" b="0" i="0">
-                <a:solidFill>
-                  <a:srgbClr val="D4D0C8"/>
-                </a:solidFill>
-                <a:latin typeface="Segoe UI"/>
-              </a:defRPr>
-            </a:pPr>
-            <a:r>
-              <a:t>→</a:t>
-            </a:r>
-          </a:p>
-        </p:txBody>
-      </p:sp>
-      <p:sp>
-        <p:nvSpPr>
-          <p:cNvPr id="5" name="Rounded Rectangle 4"/>
-          <p:cNvSpPr/>
-          <p:nvPr/>
-        </p:nvSpPr>
-        <p:spPr>
-          <a:xfrm>
-            <a:off x="3017520" y="2743200"/>
-            <a:ext cx="1828800" cy="1097280"/>
-          </a:xfrm>
-          <a:prstGeom prst="roundRect">
-            <a:avLst/>
-          </a:prstGeom>
-          <a:solidFill>
-            <a:srgbClr val="151D30"/>
-          </a:solidFill>
-          <a:ln w="19050">
-            <a:solidFill>
-              <a:srgbClr val="D4D0C8"/>
-            </a:solidFill>
-          </a:ln>
-        </p:spPr>
-        <p:style>
-          <a:lnRef idx="1">
-            <a:schemeClr val="accent1"/>
-          </a:lnRef>
-          <a:fillRef idx="3">
-            <a:schemeClr val="accent1"/>
-          </a:fillRef>
-          <a:effectRef idx="2">
-            <a:schemeClr val="accent1"/>
-          </a:effectRef>
-          <a:fontRef idx="minor">
-            <a:schemeClr val="lt1"/>
-          </a:fontRef>
-        </p:style>
-        <p:txBody>
-          <a:bodyPr rtlCol="0" anchor="ctr" wrap="square"/>
-          <a:lstStyle/>
-          <a:p>
-            <a:pPr algn="ctr">
-              <a:defRPr sz="2000" b="1">
-                <a:solidFill>
-                  <a:srgbClr val="F5F5F0"/>
-                </a:solidFill>
-                <a:latin typeface="Segoe UI"/>
-              </a:defRPr>
-            </a:pPr>
-            <a:r>
-              <a:t>Reason</a:t>
-            </a:r>
-          </a:p>
-        </p:txBody>
-      </p:sp>
-      <p:sp>
-        <p:nvSpPr>
-          <p:cNvPr id="6" name="TextBox 5"/>
-          <p:cNvSpPr txBox="1"/>
-          <p:nvPr/>
-        </p:nvSpPr>
-        <p:spPr>
-          <a:xfrm>
-            <a:off x="4892040" y="3017520"/>
-            <a:ext cx="365760" cy="548640"/>
-          </a:xfrm>
-          <a:prstGeom prst="rect">
-            <a:avLst/>
-          </a:prstGeom>
-          <a:noFill/>
-        </p:spPr>
-        <p:txBody>
-          <a:bodyPr wrap="square">
-            <a:spAutoFit/>
-          </a:bodyPr>
-          <a:lstStyle/>
-          <a:p>
-            <a:pPr algn="ctr">
-              <a:defRPr sz="2200" b="0" i="0">
-                <a:solidFill>
-                  <a:srgbClr val="D4D0C8"/>
-                </a:solidFill>
-                <a:latin typeface="Segoe UI"/>
-              </a:defRPr>
-            </a:pPr>
-            <a:r>
-              <a:t>→</a:t>
-            </a:r>
-          </a:p>
-        </p:txBody>
-      </p:sp>
-      <p:sp>
-        <p:nvSpPr>
-          <p:cNvPr id="7" name="Rounded Rectangle 6"/>
-          <p:cNvSpPr/>
-          <p:nvPr/>
-        </p:nvSpPr>
-        <p:spPr>
-          <a:xfrm>
-            <a:off x="5303520" y="2743200"/>
-            <a:ext cx="1828800" cy="1097280"/>
-          </a:xfrm>
-          <a:prstGeom prst="roundRect">
-            <a:avLst/>
-          </a:prstGeom>
-          <a:solidFill>
-            <a:srgbClr val="151D30"/>
-          </a:solidFill>
-          <a:ln w="19050">
-            <a:solidFill>
-              <a:srgbClr val="D4D0C8"/>
-            </a:solidFill>
-          </a:ln>
-        </p:spPr>
-        <p:style>
-          <a:lnRef idx="1">
-            <a:schemeClr val="accent1"/>
-          </a:lnRef>
-          <a:fillRef idx="3">
-            <a:schemeClr val="accent1"/>
-          </a:fillRef>
-          <a:effectRef idx="2">
-            <a:schemeClr val="accent1"/>
-          </a:effectRef>
-          <a:fontRef idx="minor">
-            <a:schemeClr val="lt1"/>
-          </a:fontRef>
-        </p:style>
-        <p:txBody>
-          <a:bodyPr rtlCol="0" anchor="ctr" wrap="square"/>
-          <a:lstStyle/>
-          <a:p>
-            <a:pPr algn="ctr">
-              <a:defRPr sz="2000" b="1">
-                <a:solidFill>
-                  <a:srgbClr val="F5F5F0"/>
-                </a:solidFill>
-                <a:latin typeface="Segoe UI"/>
-              </a:defRPr>
-            </a:pPr>
-            <a:r>
-              <a:t>Plan</a:t>
-            </a:r>
-          </a:p>
-        </p:txBody>
-      </p:sp>
-      <p:sp>
-        <p:nvSpPr>
-          <p:cNvPr id="8" name="TextBox 7"/>
-          <p:cNvSpPr txBox="1"/>
-          <p:nvPr/>
-        </p:nvSpPr>
-        <p:spPr>
-          <a:xfrm>
-            <a:off x="7178040" y="3017520"/>
-            <a:ext cx="365760" cy="548640"/>
-          </a:xfrm>
-          <a:prstGeom prst="rect">
-            <a:avLst/>
-          </a:prstGeom>
-          <a:noFill/>
-        </p:spPr>
-        <p:txBody>
-          <a:bodyPr wrap="square">
-            <a:spAutoFit/>
-          </a:bodyPr>
-          <a:lstStyle/>
-          <a:p>
-            <a:pPr algn="ctr">
-              <a:defRPr sz="2200" b="0" i="0">
-                <a:solidFill>
-                  <a:srgbClr val="D4D0C8"/>
-                </a:solidFill>
-                <a:latin typeface="Segoe UI"/>
-              </a:defRPr>
-            </a:pPr>
-            <a:r>
-              <a:t>→</a:t>
-            </a:r>
-          </a:p>
-        </p:txBody>
-      </p:sp>
-      <p:sp>
-        <p:nvSpPr>
-          <p:cNvPr id="9" name="Rounded Rectangle 8"/>
-          <p:cNvSpPr/>
-          <p:nvPr/>
-        </p:nvSpPr>
-        <p:spPr>
-          <a:xfrm>
-            <a:off x="7589520" y="2743200"/>
-            <a:ext cx="1828800" cy="1097280"/>
-          </a:xfrm>
-          <a:prstGeom prst="roundRect">
-            <a:avLst/>
-          </a:prstGeom>
-          <a:solidFill>
-            <a:srgbClr val="151D30"/>
-          </a:solidFill>
-          <a:ln w="19050">
-            <a:solidFill>
-              <a:srgbClr val="D4D0C8"/>
-            </a:solidFill>
-          </a:ln>
-        </p:spPr>
-        <p:style>
-          <a:lnRef idx="1">
-            <a:schemeClr val="accent1"/>
-          </a:lnRef>
-          <a:fillRef idx="3">
-            <a:schemeClr val="accent1"/>
-          </a:fillRef>
-          <a:effectRef idx="2">
-            <a:schemeClr val="accent1"/>
-          </a:effectRef>
-          <a:fontRef idx="minor">
-            <a:schemeClr val="lt1"/>
-          </a:fontRef>
-        </p:style>
-        <p:txBody>
-          <a:bodyPr rtlCol="0" anchor="ctr" wrap="square"/>
-          <a:lstStyle/>
-          <a:p>
-            <a:pPr algn="ctr">
-              <a:defRPr sz="2000" b="1">
-                <a:solidFill>
-                  <a:srgbClr val="F5F5F0"/>
-                </a:solidFill>
-                <a:latin typeface="Segoe UI"/>
-              </a:defRPr>
-            </a:pPr>
-            <a:r>
-              <a:t>Act</a:t>
-            </a:r>
-          </a:p>
-        </p:txBody>
-      </p:sp>
-      <p:sp>
-        <p:nvSpPr>
-          <p:cNvPr id="10" name="TextBox 9"/>
-          <p:cNvSpPr txBox="1"/>
-          <p:nvPr/>
-        </p:nvSpPr>
-        <p:spPr>
-          <a:xfrm>
-            <a:off x="9464040" y="3017520"/>
-            <a:ext cx="365760" cy="548640"/>
-          </a:xfrm>
-          <a:prstGeom prst="rect">
-            <a:avLst/>
-          </a:prstGeom>
-          <a:noFill/>
-        </p:spPr>
-        <p:txBody>
-          <a:bodyPr wrap="square">
-            <a:spAutoFit/>
-          </a:bodyPr>
-          <a:lstStyle/>
-          <a:p>
-            <a:pPr algn="ctr">
-              <a:defRPr sz="2200" b="0" i="0">
-                <a:solidFill>
-                  <a:srgbClr val="D4D0C8"/>
-                </a:solidFill>
-                <a:latin typeface="Segoe UI"/>
-              </a:defRPr>
-            </a:pPr>
-            <a:r>
-              <a:t>→</a:t>
-            </a:r>
-          </a:p>
-        </p:txBody>
-      </p:sp>
-      <p:sp>
-        <p:nvSpPr>
-          <p:cNvPr id="11" name="Rounded Rectangle 10"/>
-          <p:cNvSpPr/>
-          <p:nvPr/>
-        </p:nvSpPr>
-        <p:spPr>
-          <a:xfrm>
-            <a:off x="9875520" y="2743200"/>
-            <a:ext cx="1828800" cy="1097280"/>
-          </a:xfrm>
-          <a:prstGeom prst="roundRect">
-            <a:avLst/>
-          </a:prstGeom>
-          <a:solidFill>
-            <a:srgbClr val="151D30"/>
-          </a:solidFill>
-          <a:ln w="19050">
-            <a:solidFill>
-              <a:srgbClr val="D4D0C8"/>
-            </a:solidFill>
-          </a:ln>
-        </p:spPr>
-        <p:style>
-          <a:lnRef idx="1">
-            <a:schemeClr val="accent1"/>
-          </a:lnRef>
-          <a:fillRef idx="3">
-            <a:schemeClr val="accent1"/>
-          </a:fillRef>
-          <a:effectRef idx="2">
-            <a:schemeClr val="accent1"/>
-          </a:effectRef>
-          <a:fontRef idx="minor">
-            <a:schemeClr val="lt1"/>
-          </a:fontRef>
-        </p:style>
-        <p:txBody>
-          <a:bodyPr rtlCol="0" anchor="ctr" wrap="square"/>
-          <a:lstStyle/>
-          <a:p>
-            <a:pPr algn="ctr">
-              <a:defRPr sz="2000" b="1">
-                <a:solidFill>
-                  <a:srgbClr val="F5F5F0"/>
-                </a:solidFill>
-                <a:latin typeface="Segoe UI"/>
-              </a:defRPr>
-            </a:pPr>
-            <a:r>
-              <a:t>Reflect</a:t>
-            </a:r>
-          </a:p>
-        </p:txBody>
-      </p:sp>
-      <p:sp>
-        <p:nvSpPr>
-          <p:cNvPr id="12" name="Rectangle 11"/>
-          <p:cNvSpPr/>
-          <p:nvPr/>
-        </p:nvSpPr>
-        <p:spPr>
-          <a:xfrm>
-            <a:off x="1645920" y="4114800"/>
-            <a:ext cx="9144000" cy="13716"/>
-          </a:xfrm>
-          <a:prstGeom prst="rect">
-            <a:avLst/>
-          </a:prstGeom>
-          <a:solidFill>
-            <a:srgbClr val="D4D0C8"/>
-          </a:solidFill>
-          <a:ln>
-            <a:noFill/>
-          </a:ln>
-        </p:spPr>
-        <p:style>
-          <a:lnRef idx="1">
-            <a:schemeClr val="accent1"/>
-          </a:lnRef>
-          <a:fillRef idx="3">
-            <a:schemeClr val="accent1"/>
-          </a:fillRef>
-          <a:effectRef idx="2">
-            <a:schemeClr val="accent1"/>
-          </a:effectRef>
-          <a:fontRef idx="minor">
-            <a:schemeClr val="lt1"/>
-          </a:fontRef>
-        </p:style>
-        <p:txBody>
-          <a:bodyPr rtlCol="0" anchor="ctr"/>
-          <a:lstStyle/>
-          <a:p>
-            <a:pPr algn="ctr"/>
-          </a:p>
-        </p:txBody>
-      </p:sp>
-      <p:sp>
-        <p:nvSpPr>
-          <p:cNvPr id="13" name="Rectangle 12"/>
-          <p:cNvSpPr/>
-          <p:nvPr/>
-        </p:nvSpPr>
-        <p:spPr>
-          <a:xfrm>
-            <a:off x="10782605" y="3840480"/>
-            <a:ext cx="13716" cy="288036"/>
-          </a:xfrm>
-          <a:prstGeom prst="rect">
-            <a:avLst/>
-          </a:prstGeom>
-          <a:solidFill>
-            <a:srgbClr val="D4D0C8"/>
-          </a:solidFill>
-          <a:ln>
-            <a:noFill/>
-          </a:ln>
-        </p:spPr>
-        <p:style>
-          <a:lnRef idx="1">
-            <a:schemeClr val="accent1"/>
-          </a:lnRef>
-          <a:fillRef idx="3">
-            <a:schemeClr val="accent1"/>
-          </a:fillRef>
-          <a:effectRef idx="2">
-            <a:schemeClr val="accent1"/>
-          </a:effectRef>
-          <a:fontRef idx="minor">
-            <a:schemeClr val="lt1"/>
-          </a:fontRef>
-        </p:style>
-        <p:txBody>
-          <a:bodyPr rtlCol="0" anchor="ctr"/>
-          <a:lstStyle/>
-          <a:p>
-            <a:pPr algn="ctr"/>
-          </a:p>
-        </p:txBody>
-      </p:sp>
-      <p:sp>
-        <p:nvSpPr>
-          <p:cNvPr id="14" name="Rectangle 13"/>
-          <p:cNvSpPr/>
-          <p:nvPr/>
-        </p:nvSpPr>
-        <p:spPr>
-          <a:xfrm>
-            <a:off x="1638605" y="3840480"/>
-            <a:ext cx="13716" cy="288036"/>
-          </a:xfrm>
-          <a:prstGeom prst="rect">
-            <a:avLst/>
-          </a:prstGeom>
-          <a:solidFill>
-            <a:srgbClr val="D4D0C8"/>
-          </a:solidFill>
-          <a:ln>
-            <a:noFill/>
-          </a:ln>
-        </p:spPr>
-        <p:style>
-          <a:lnRef idx="1">
-            <a:schemeClr val="accent1"/>
-          </a:lnRef>
-          <a:fillRef idx="3">
-            <a:schemeClr val="accent1"/>
-          </a:fillRef>
-          <a:effectRef idx="2">
-            <a:schemeClr val="accent1"/>
-          </a:effectRef>
-          <a:fontRef idx="minor">
-            <a:schemeClr val="lt1"/>
-          </a:fontRef>
-        </p:style>
-        <p:txBody>
-          <a:bodyPr rtlCol="0" anchor="ctr"/>
-          <a:lstStyle/>
-          <a:p>
-            <a:pPr algn="ctr"/>
-          </a:p>
-        </p:txBody>
-      </p:sp>
-      <p:sp>
-        <p:nvSpPr>
-          <p:cNvPr id="15" name="TextBox 14"/>
-          <p:cNvSpPr txBox="1"/>
-          <p:nvPr/>
-        </p:nvSpPr>
-        <p:spPr>
-          <a:xfrm>
-            <a:off x="1417320" y="3703320"/>
-            <a:ext cx="457200" cy="365760"/>
-          </a:xfrm>
-          <a:prstGeom prst="rect">
-            <a:avLst/>
-          </a:prstGeom>
-          <a:noFill/>
-        </p:spPr>
-        <p:txBody>
-          <a:bodyPr wrap="square">
-            <a:spAutoFit/>
-          </a:bodyPr>
-          <a:lstStyle/>
-          <a:p>
-            <a:pPr algn="ctr">
-              <a:defRPr sz="1400" b="0" i="0">
-                <a:solidFill>
-                  <a:srgbClr val="D4D0C8"/>
-                </a:solidFill>
-                <a:latin typeface="Segoe UI"/>
-              </a:defRPr>
-            </a:pPr>
-            <a:r>
-              <a:t>▲</a:t>
-            </a:r>
-          </a:p>
-        </p:txBody>
-      </p:sp>
-      <p:sp>
-        <p:nvSpPr>
-          <p:cNvPr id="16" name="TextBox 15"/>
-          <p:cNvSpPr txBox="1"/>
-          <p:nvPr/>
-        </p:nvSpPr>
-        <p:spPr>
-          <a:xfrm>
-            <a:off x="4114800" y="4206240"/>
-            <a:ext cx="4114800" cy="457200"/>
-          </a:xfrm>
-          <a:prstGeom prst="rect">
-            <a:avLst/>
-          </a:prstGeom>
-          <a:noFill/>
-        </p:spPr>
-        <p:txBody>
-          <a:bodyPr wrap="square">
-            <a:spAutoFit/>
-          </a:bodyPr>
-          <a:lstStyle/>
-          <a:p>
-            <a:pPr algn="ctr">
-              <a:defRPr sz="1400" b="0" i="0">
-                <a:solidFill>
-                  <a:srgbClr val="6B7280"/>
-                </a:solidFill>
-                <a:latin typeface="Segoe UI"/>
-              </a:defRPr>
-            </a:pPr>
-            <a:r>
-              <a:t>Continuous feedback</a:t>
-            </a:r>
-          </a:p>
-        </p:txBody>
-      </p:sp>
-      <p:sp>
-        <p:nvSpPr>
-          <p:cNvPr id="17" name="TextBox 16"/>
-          <p:cNvSpPr txBox="1"/>
-          <p:nvPr/>
-        </p:nvSpPr>
-        <p:spPr>
-          <a:xfrm>
-            <a:off x="1097280" y="5029200"/>
-            <a:ext cx="10058400" cy="914400"/>
-          </a:xfrm>
-          <a:prstGeom prst="rect">
-            <a:avLst/>
-          </a:prstGeom>
-          <a:noFill/>
-        </p:spPr>
-        <p:txBody>
-          <a:bodyPr wrap="square">
-            <a:spAutoFit/>
-          </a:bodyPr>
-          <a:lstStyle/>
-          <a:p>
-            <a:pPr algn="l">
-              <a:defRPr sz="1800" b="0" i="0">
-                <a:solidFill>
-                  <a:srgbClr val="E8E4D9"/>
-                </a:solidFill>
-                <a:latin typeface="Segoe UI"/>
-              </a:defRPr>
-            </a:pPr>
-            <a:r>
-              <a:t>Perceive the environment. Reason about causes. Plan a response.</a:t>
-            </a:r>
-            <a:br/>
-            <a:r>
-              <a:t>Act through connected systems. Reflect on outcomes.</a:t>
+              <a:t>What if the twin could think?</a:t>
             </a:r>
           </a:p>
         </p:txBody>
@@ -4148,14 +3744,50 @@
       <p:grpSpPr/>
       <p:sp>
         <p:nvSpPr>
-          <p:cNvPr id="2" name="Rounded Rectangle 1"/>
+          <p:cNvPr id="2" name="TextBox 1"/>
+          <p:cNvSpPr txBox="1"/>
+          <p:nvPr/>
+        </p:nvSpPr>
+        <p:spPr>
+          <a:xfrm>
+            <a:off x="1097280" y="457200"/>
+            <a:ext cx="4572000" cy="457200"/>
+          </a:xfrm>
+          <a:prstGeom prst="rect">
+            <a:avLst/>
+          </a:prstGeom>
+          <a:noFill/>
+        </p:spPr>
+        <p:txBody>
+          <a:bodyPr wrap="square">
+            <a:spAutoFit/>
+          </a:bodyPr>
+          <a:lstStyle/>
+          <a:p>
+            <a:pPr algn="l">
+              <a:defRPr sz="2000" b="0" i="0">
+                <a:solidFill>
+                  <a:srgbClr val="8B919C"/>
+                </a:solidFill>
+                <a:latin typeface="Segoe UI"/>
+              </a:defRPr>
+            </a:pPr>
+            <a:r>
+              <a:t>The Agentic Control Loop</a:t>
+            </a:r>
+          </a:p>
+        </p:txBody>
+      </p:sp>
+      <p:sp>
+        <p:nvSpPr>
+          <p:cNvPr id="3" name="Rounded Rectangle 2"/>
           <p:cNvSpPr/>
           <p:nvPr/>
         </p:nvSpPr>
         <p:spPr>
           <a:xfrm>
-            <a:off x="2926080" y="1188720"/>
-            <a:ext cx="7772400" cy="1188720"/>
+            <a:off x="731520" y="2743200"/>
+            <a:ext cx="1828800" cy="1097280"/>
           </a:xfrm>
           <a:prstGeom prst="roundRect">
             <a:avLst/>
@@ -4188,29 +3820,29 @@
           <a:lstStyle/>
           <a:p>
             <a:pPr algn="ctr">
-              <a:defRPr sz="2800" b="1">
-                <a:solidFill>
-                  <a:srgbClr val="E8E4D9"/>
-                </a:solidFill>
-                <a:latin typeface="Segoe UI"/>
-              </a:defRPr>
-            </a:pPr>
-            <a:r>
-              <a:t>Cognitive Layer</a:t>
-            </a:r>
-          </a:p>
-        </p:txBody>
-      </p:sp>
-      <p:sp>
-        <p:nvSpPr>
-          <p:cNvPr id="3" name="TextBox 2"/>
+              <a:defRPr sz="2000" b="1">
+                <a:solidFill>
+                  <a:srgbClr val="F5F5F0"/>
+                </a:solidFill>
+                <a:latin typeface="Segoe UI"/>
+              </a:defRPr>
+            </a:pPr>
+            <a:r>
+              <a:t>Perceive</a:t>
+            </a:r>
+          </a:p>
+        </p:txBody>
+      </p:sp>
+      <p:sp>
+        <p:nvSpPr>
+          <p:cNvPr id="4" name="TextBox 3"/>
           <p:cNvSpPr txBox="1"/>
           <p:nvPr/>
         </p:nvSpPr>
         <p:spPr>
           <a:xfrm>
-            <a:off x="548640" y="1463040"/>
-            <a:ext cx="2194560" cy="640080"/>
+            <a:off x="2606040" y="3017520"/>
+            <a:ext cx="365760" cy="548640"/>
           </a:xfrm>
           <a:prstGeom prst="rect">
             <a:avLst/>
@@ -4223,30 +3855,30 @@
           </a:bodyPr>
           <a:lstStyle/>
           <a:p>
-            <a:pPr algn="r">
-              <a:defRPr sz="2200" b="1" i="0">
-                <a:solidFill>
-                  <a:srgbClr val="E8E4D9"/>
-                </a:solidFill>
-                <a:latin typeface="Segoe UI"/>
-              </a:defRPr>
-            </a:pPr>
-            <a:r>
-              <a:t>The Mind</a:t>
-            </a:r>
-          </a:p>
-        </p:txBody>
-      </p:sp>
-      <p:sp>
-        <p:nvSpPr>
-          <p:cNvPr id="4" name="Rounded Rectangle 3"/>
+            <a:pPr algn="ctr">
+              <a:defRPr sz="2200" b="0" i="0">
+                <a:solidFill>
+                  <a:srgbClr val="D4D0C8"/>
+                </a:solidFill>
+                <a:latin typeface="Segoe UI"/>
+              </a:defRPr>
+            </a:pPr>
+            <a:r>
+              <a:t>→</a:t>
+            </a:r>
+          </a:p>
+        </p:txBody>
+      </p:sp>
+      <p:sp>
+        <p:nvSpPr>
+          <p:cNvPr id="5" name="Rounded Rectangle 4"/>
           <p:cNvSpPr/>
           <p:nvPr/>
         </p:nvSpPr>
         <p:spPr>
           <a:xfrm>
-            <a:off x="2926080" y="2743200"/>
-            <a:ext cx="7772400" cy="1188720"/>
+            <a:off x="3017520" y="2743200"/>
+            <a:ext cx="1828800" cy="1097280"/>
           </a:xfrm>
           <a:prstGeom prst="roundRect">
             <a:avLst/>
@@ -4256,7 +3888,7 @@
           </a:solidFill>
           <a:ln w="19050">
             <a:solidFill>
-              <a:srgbClr val="4B5563"/>
+              <a:srgbClr val="D4D0C8"/>
             </a:solidFill>
           </a:ln>
         </p:spPr>
@@ -4279,7 +3911,7 @@
           <a:lstStyle/>
           <a:p>
             <a:pPr algn="ctr">
-              <a:defRPr sz="2800" b="1">
+              <a:defRPr sz="2000" b="1">
                 <a:solidFill>
                   <a:srgbClr val="F5F5F0"/>
                 </a:solidFill>
@@ -4287,21 +3919,21 @@
               </a:defRPr>
             </a:pPr>
             <a:r>
-              <a:t>Digital Twin</a:t>
-            </a:r>
-          </a:p>
-        </p:txBody>
-      </p:sp>
-      <p:sp>
-        <p:nvSpPr>
-          <p:cNvPr id="5" name="TextBox 4"/>
+              <a:t>Reason</a:t>
+            </a:r>
+          </a:p>
+        </p:txBody>
+      </p:sp>
+      <p:sp>
+        <p:nvSpPr>
+          <p:cNvPr id="6" name="TextBox 5"/>
           <p:cNvSpPr txBox="1"/>
           <p:nvPr/>
         </p:nvSpPr>
         <p:spPr>
           <a:xfrm>
-            <a:off x="548640" y="3017520"/>
-            <a:ext cx="2194560" cy="640080"/>
+            <a:off x="4892040" y="3017520"/>
+            <a:ext cx="365760" cy="548640"/>
           </a:xfrm>
           <a:prstGeom prst="rect">
             <a:avLst/>
@@ -4314,30 +3946,30 @@
           </a:bodyPr>
           <a:lstStyle/>
           <a:p>
-            <a:pPr algn="r">
+            <a:pPr algn="ctr">
               <a:defRPr sz="2200" b="0" i="0">
                 <a:solidFill>
-                  <a:srgbClr val="6B7280"/>
-                </a:solidFill>
-                <a:latin typeface="Segoe UI"/>
-              </a:defRPr>
-            </a:pPr>
-            <a:r>
-              <a:t>The Mirror</a:t>
-            </a:r>
-          </a:p>
-        </p:txBody>
-      </p:sp>
-      <p:sp>
-        <p:nvSpPr>
-          <p:cNvPr id="6" name="Rounded Rectangle 5"/>
+                  <a:srgbClr val="D4D0C8"/>
+                </a:solidFill>
+                <a:latin typeface="Segoe UI"/>
+              </a:defRPr>
+            </a:pPr>
+            <a:r>
+              <a:t>→</a:t>
+            </a:r>
+          </a:p>
+        </p:txBody>
+      </p:sp>
+      <p:sp>
+        <p:nvSpPr>
+          <p:cNvPr id="7" name="Rounded Rectangle 6"/>
           <p:cNvSpPr/>
           <p:nvPr/>
         </p:nvSpPr>
         <p:spPr>
           <a:xfrm>
-            <a:off x="2926080" y="4297680"/>
-            <a:ext cx="7772400" cy="1188720"/>
+            <a:off x="5303520" y="2743200"/>
+            <a:ext cx="1828800" cy="1097280"/>
           </a:xfrm>
           <a:prstGeom prst="roundRect">
             <a:avLst/>
@@ -4347,7 +3979,7 @@
           </a:solidFill>
           <a:ln w="19050">
             <a:solidFill>
-              <a:srgbClr val="4B5563"/>
+              <a:srgbClr val="D4D0C8"/>
             </a:solidFill>
           </a:ln>
         </p:spPr>
@@ -4370,7 +4002,7 @@
           <a:lstStyle/>
           <a:p>
             <a:pPr algn="ctr">
-              <a:defRPr sz="2800" b="1">
+              <a:defRPr sz="2000" b="1">
                 <a:solidFill>
                   <a:srgbClr val="F5F5F0"/>
                 </a:solidFill>
@@ -4378,21 +4010,21 @@
               </a:defRPr>
             </a:pPr>
             <a:r>
-              <a:t>Physical System</a:t>
-            </a:r>
-          </a:p>
-        </p:txBody>
-      </p:sp>
-      <p:sp>
-        <p:nvSpPr>
-          <p:cNvPr id="7" name="TextBox 6"/>
+              <a:t>Plan</a:t>
+            </a:r>
+          </a:p>
+        </p:txBody>
+      </p:sp>
+      <p:sp>
+        <p:nvSpPr>
+          <p:cNvPr id="8" name="TextBox 7"/>
           <p:cNvSpPr txBox="1"/>
           <p:nvPr/>
         </p:nvSpPr>
         <p:spPr>
           <a:xfrm>
-            <a:off x="548640" y="4572000"/>
-            <a:ext cx="2194560" cy="640080"/>
+            <a:off x="7178040" y="3017520"/>
+            <a:ext cx="365760" cy="548640"/>
           </a:xfrm>
           <a:prstGeom prst="rect">
             <a:avLst/>
@@ -4405,16 +4037,403 @@
           </a:bodyPr>
           <a:lstStyle/>
           <a:p>
-            <a:pPr algn="r">
+            <a:pPr algn="ctr">
               <a:defRPr sz="2200" b="0" i="0">
                 <a:solidFill>
-                  <a:srgbClr val="6B7280"/>
-                </a:solidFill>
-                <a:latin typeface="Segoe UI"/>
-              </a:defRPr>
-            </a:pPr>
-            <a:r>
-              <a:t>The Real Thing</a:t>
+                  <a:srgbClr val="D4D0C8"/>
+                </a:solidFill>
+                <a:latin typeface="Segoe UI"/>
+              </a:defRPr>
+            </a:pPr>
+            <a:r>
+              <a:t>→</a:t>
+            </a:r>
+          </a:p>
+        </p:txBody>
+      </p:sp>
+      <p:sp>
+        <p:nvSpPr>
+          <p:cNvPr id="9" name="Rounded Rectangle 8"/>
+          <p:cNvSpPr/>
+          <p:nvPr/>
+        </p:nvSpPr>
+        <p:spPr>
+          <a:xfrm>
+            <a:off x="7589520" y="2743200"/>
+            <a:ext cx="1828800" cy="1097280"/>
+          </a:xfrm>
+          <a:prstGeom prst="roundRect">
+            <a:avLst/>
+          </a:prstGeom>
+          <a:solidFill>
+            <a:srgbClr val="151D30"/>
+          </a:solidFill>
+          <a:ln w="19050">
+            <a:solidFill>
+              <a:srgbClr val="D4D0C8"/>
+            </a:solidFill>
+          </a:ln>
+        </p:spPr>
+        <p:style>
+          <a:lnRef idx="1">
+            <a:schemeClr val="accent1"/>
+          </a:lnRef>
+          <a:fillRef idx="3">
+            <a:schemeClr val="accent1"/>
+          </a:fillRef>
+          <a:effectRef idx="2">
+            <a:schemeClr val="accent1"/>
+          </a:effectRef>
+          <a:fontRef idx="minor">
+            <a:schemeClr val="lt1"/>
+          </a:fontRef>
+        </p:style>
+        <p:txBody>
+          <a:bodyPr rtlCol="0" anchor="ctr" wrap="square"/>
+          <a:lstStyle/>
+          <a:p>
+            <a:pPr algn="ctr">
+              <a:defRPr sz="2000" b="1">
+                <a:solidFill>
+                  <a:srgbClr val="F5F5F0"/>
+                </a:solidFill>
+                <a:latin typeface="Segoe UI"/>
+              </a:defRPr>
+            </a:pPr>
+            <a:r>
+              <a:t>Act</a:t>
+            </a:r>
+          </a:p>
+        </p:txBody>
+      </p:sp>
+      <p:sp>
+        <p:nvSpPr>
+          <p:cNvPr id="10" name="TextBox 9"/>
+          <p:cNvSpPr txBox="1"/>
+          <p:nvPr/>
+        </p:nvSpPr>
+        <p:spPr>
+          <a:xfrm>
+            <a:off x="9464040" y="3017520"/>
+            <a:ext cx="365760" cy="548640"/>
+          </a:xfrm>
+          <a:prstGeom prst="rect">
+            <a:avLst/>
+          </a:prstGeom>
+          <a:noFill/>
+        </p:spPr>
+        <p:txBody>
+          <a:bodyPr wrap="square">
+            <a:spAutoFit/>
+          </a:bodyPr>
+          <a:lstStyle/>
+          <a:p>
+            <a:pPr algn="ctr">
+              <a:defRPr sz="2200" b="0" i="0">
+                <a:solidFill>
+                  <a:srgbClr val="D4D0C8"/>
+                </a:solidFill>
+                <a:latin typeface="Segoe UI"/>
+              </a:defRPr>
+            </a:pPr>
+            <a:r>
+              <a:t>→</a:t>
+            </a:r>
+          </a:p>
+        </p:txBody>
+      </p:sp>
+      <p:sp>
+        <p:nvSpPr>
+          <p:cNvPr id="11" name="Rounded Rectangle 10"/>
+          <p:cNvSpPr/>
+          <p:nvPr/>
+        </p:nvSpPr>
+        <p:spPr>
+          <a:xfrm>
+            <a:off x="9875520" y="2743200"/>
+            <a:ext cx="1828800" cy="1097280"/>
+          </a:xfrm>
+          <a:prstGeom prst="roundRect">
+            <a:avLst/>
+          </a:prstGeom>
+          <a:solidFill>
+            <a:srgbClr val="151D30"/>
+          </a:solidFill>
+          <a:ln w="19050">
+            <a:solidFill>
+              <a:srgbClr val="D4D0C8"/>
+            </a:solidFill>
+          </a:ln>
+        </p:spPr>
+        <p:style>
+          <a:lnRef idx="1">
+            <a:schemeClr val="accent1"/>
+          </a:lnRef>
+          <a:fillRef idx="3">
+            <a:schemeClr val="accent1"/>
+          </a:fillRef>
+          <a:effectRef idx="2">
+            <a:schemeClr val="accent1"/>
+          </a:effectRef>
+          <a:fontRef idx="minor">
+            <a:schemeClr val="lt1"/>
+          </a:fontRef>
+        </p:style>
+        <p:txBody>
+          <a:bodyPr rtlCol="0" anchor="ctr" wrap="square"/>
+          <a:lstStyle/>
+          <a:p>
+            <a:pPr algn="ctr">
+              <a:defRPr sz="2000" b="1">
+                <a:solidFill>
+                  <a:srgbClr val="F5F5F0"/>
+                </a:solidFill>
+                <a:latin typeface="Segoe UI"/>
+              </a:defRPr>
+            </a:pPr>
+            <a:r>
+              <a:t>Reflect</a:t>
+            </a:r>
+          </a:p>
+        </p:txBody>
+      </p:sp>
+      <p:sp>
+        <p:nvSpPr>
+          <p:cNvPr id="12" name="Rectangle 11"/>
+          <p:cNvSpPr/>
+          <p:nvPr/>
+        </p:nvSpPr>
+        <p:spPr>
+          <a:xfrm>
+            <a:off x="1645920" y="4114800"/>
+            <a:ext cx="9144000" cy="13716"/>
+          </a:xfrm>
+          <a:prstGeom prst="rect">
+            <a:avLst/>
+          </a:prstGeom>
+          <a:solidFill>
+            <a:srgbClr val="D4D0C8"/>
+          </a:solidFill>
+          <a:ln>
+            <a:noFill/>
+          </a:ln>
+        </p:spPr>
+        <p:style>
+          <a:lnRef idx="1">
+            <a:schemeClr val="accent1"/>
+          </a:lnRef>
+          <a:fillRef idx="3">
+            <a:schemeClr val="accent1"/>
+          </a:fillRef>
+          <a:effectRef idx="2">
+            <a:schemeClr val="accent1"/>
+          </a:effectRef>
+          <a:fontRef idx="minor">
+            <a:schemeClr val="lt1"/>
+          </a:fontRef>
+        </p:style>
+        <p:txBody>
+          <a:bodyPr rtlCol="0" anchor="ctr"/>
+          <a:lstStyle/>
+          <a:p>
+            <a:pPr algn="ctr"/>
+          </a:p>
+        </p:txBody>
+      </p:sp>
+      <p:sp>
+        <p:nvSpPr>
+          <p:cNvPr id="13" name="Rectangle 12"/>
+          <p:cNvSpPr/>
+          <p:nvPr/>
+        </p:nvSpPr>
+        <p:spPr>
+          <a:xfrm>
+            <a:off x="10782605" y="3840480"/>
+            <a:ext cx="13716" cy="288036"/>
+          </a:xfrm>
+          <a:prstGeom prst="rect">
+            <a:avLst/>
+          </a:prstGeom>
+          <a:solidFill>
+            <a:srgbClr val="D4D0C8"/>
+          </a:solidFill>
+          <a:ln>
+            <a:noFill/>
+          </a:ln>
+        </p:spPr>
+        <p:style>
+          <a:lnRef idx="1">
+            <a:schemeClr val="accent1"/>
+          </a:lnRef>
+          <a:fillRef idx="3">
+            <a:schemeClr val="accent1"/>
+          </a:fillRef>
+          <a:effectRef idx="2">
+            <a:schemeClr val="accent1"/>
+          </a:effectRef>
+          <a:fontRef idx="minor">
+            <a:schemeClr val="lt1"/>
+          </a:fontRef>
+        </p:style>
+        <p:txBody>
+          <a:bodyPr rtlCol="0" anchor="ctr"/>
+          <a:lstStyle/>
+          <a:p>
+            <a:pPr algn="ctr"/>
+          </a:p>
+        </p:txBody>
+      </p:sp>
+      <p:sp>
+        <p:nvSpPr>
+          <p:cNvPr id="14" name="Rectangle 13"/>
+          <p:cNvSpPr/>
+          <p:nvPr/>
+        </p:nvSpPr>
+        <p:spPr>
+          <a:xfrm>
+            <a:off x="1638605" y="3840480"/>
+            <a:ext cx="13716" cy="288036"/>
+          </a:xfrm>
+          <a:prstGeom prst="rect">
+            <a:avLst/>
+          </a:prstGeom>
+          <a:solidFill>
+            <a:srgbClr val="D4D0C8"/>
+          </a:solidFill>
+          <a:ln>
+            <a:noFill/>
+          </a:ln>
+        </p:spPr>
+        <p:style>
+          <a:lnRef idx="1">
+            <a:schemeClr val="accent1"/>
+          </a:lnRef>
+          <a:fillRef idx="3">
+            <a:schemeClr val="accent1"/>
+          </a:fillRef>
+          <a:effectRef idx="2">
+            <a:schemeClr val="accent1"/>
+          </a:effectRef>
+          <a:fontRef idx="minor">
+            <a:schemeClr val="lt1"/>
+          </a:fontRef>
+        </p:style>
+        <p:txBody>
+          <a:bodyPr rtlCol="0" anchor="ctr"/>
+          <a:lstStyle/>
+          <a:p>
+            <a:pPr algn="ctr"/>
+          </a:p>
+        </p:txBody>
+      </p:sp>
+      <p:sp>
+        <p:nvSpPr>
+          <p:cNvPr id="15" name="TextBox 14"/>
+          <p:cNvSpPr txBox="1"/>
+          <p:nvPr/>
+        </p:nvSpPr>
+        <p:spPr>
+          <a:xfrm>
+            <a:off x="1417320" y="3703320"/>
+            <a:ext cx="457200" cy="365760"/>
+          </a:xfrm>
+          <a:prstGeom prst="rect">
+            <a:avLst/>
+          </a:prstGeom>
+          <a:noFill/>
+        </p:spPr>
+        <p:txBody>
+          <a:bodyPr wrap="square">
+            <a:spAutoFit/>
+          </a:bodyPr>
+          <a:lstStyle/>
+          <a:p>
+            <a:pPr algn="ctr">
+              <a:defRPr sz="1400" b="0" i="0">
+                <a:solidFill>
+                  <a:srgbClr val="D4D0C8"/>
+                </a:solidFill>
+                <a:latin typeface="Segoe UI"/>
+              </a:defRPr>
+            </a:pPr>
+            <a:r>
+              <a:t>▲</a:t>
+            </a:r>
+          </a:p>
+        </p:txBody>
+      </p:sp>
+      <p:sp>
+        <p:nvSpPr>
+          <p:cNvPr id="16" name="TextBox 15"/>
+          <p:cNvSpPr txBox="1"/>
+          <p:nvPr/>
+        </p:nvSpPr>
+        <p:spPr>
+          <a:xfrm>
+            <a:off x="4114800" y="4206240"/>
+            <a:ext cx="4114800" cy="457200"/>
+          </a:xfrm>
+          <a:prstGeom prst="rect">
+            <a:avLst/>
+          </a:prstGeom>
+          <a:noFill/>
+        </p:spPr>
+        <p:txBody>
+          <a:bodyPr wrap="square">
+            <a:spAutoFit/>
+          </a:bodyPr>
+          <a:lstStyle/>
+          <a:p>
+            <a:pPr algn="ctr">
+              <a:defRPr sz="1400" b="0" i="0">
+                <a:solidFill>
+                  <a:srgbClr val="8B919C"/>
+                </a:solidFill>
+                <a:latin typeface="Segoe UI"/>
+              </a:defRPr>
+            </a:pPr>
+            <a:r>
+              <a:t>Continuous feedback</a:t>
+            </a:r>
+          </a:p>
+        </p:txBody>
+      </p:sp>
+      <p:sp>
+        <p:nvSpPr>
+          <p:cNvPr id="17" name="TextBox 16"/>
+          <p:cNvSpPr txBox="1"/>
+          <p:nvPr/>
+        </p:nvSpPr>
+        <p:spPr>
+          <a:xfrm>
+            <a:off x="1097280" y="5029200"/>
+            <a:ext cx="10058400" cy="914400"/>
+          </a:xfrm>
+          <a:prstGeom prst="rect">
+            <a:avLst/>
+          </a:prstGeom>
+          <a:noFill/>
+        </p:spPr>
+        <p:txBody>
+          <a:bodyPr wrap="square">
+            <a:spAutoFit/>
+          </a:bodyPr>
+          <a:lstStyle/>
+          <a:p>
+            <a:pPr algn="l">
+              <a:defRPr sz="1800" b="0" i="0">
+                <a:solidFill>
+                  <a:srgbClr val="E8E4D9"/>
+                </a:solidFill>
+                <a:latin typeface="Segoe UI"/>
+              </a:defRPr>
+            </a:pPr>
+            <a:r>
+              <a:t>Perceive the environment. Reason about causes. Plan a response.</a:t>
+            </a:r>
+            <a:br/>
+            <a:r>
+              <a:t>Act through connected systems. Reflect on outcomes.</a:t>
             </a:r>
           </a:p>
         </p:txBody>
@@ -4455,59 +4474,25 @@
       <p:grpSpPr/>
       <p:sp>
         <p:nvSpPr>
-          <p:cNvPr id="2" name="TextBox 1"/>
-          <p:cNvSpPr txBox="1"/>
-          <p:nvPr/>
-        </p:nvSpPr>
-        <p:spPr>
-          <a:xfrm>
-            <a:off x="1097280" y="457200"/>
-            <a:ext cx="4572000" cy="457200"/>
-          </a:xfrm>
-          <a:prstGeom prst="rect">
-            <a:avLst/>
-          </a:prstGeom>
-          <a:noFill/>
-        </p:spPr>
-        <p:txBody>
-          <a:bodyPr wrap="square">
-            <a:spAutoFit/>
-          </a:bodyPr>
-          <a:lstStyle/>
-          <a:p>
-            <a:pPr algn="l">
-              <a:defRPr sz="1400" b="0" i="0">
-                <a:solidFill>
-                  <a:srgbClr val="4B5563"/>
-                </a:solidFill>
-                <a:latin typeface="Segoe UI"/>
-              </a:defRPr>
-            </a:pPr>
-            <a:r>
-              <a:t>The Evidence</a:t>
-            </a:r>
-          </a:p>
-        </p:txBody>
-      </p:sp>
-      <p:sp>
-        <p:nvSpPr>
-          <p:cNvPr id="3" name="Rectangle 2"/>
+          <p:cNvPr id="2" name="Rounded Rectangle 1"/>
           <p:cNvSpPr/>
           <p:nvPr/>
         </p:nvSpPr>
         <p:spPr>
           <a:xfrm>
-            <a:off x="1371600" y="1280160"/>
-            <a:ext cx="73152" cy="1280160"/>
-          </a:xfrm>
-          <a:prstGeom prst="rect">
+            <a:off x="2926080" y="1188720"/>
+            <a:ext cx="7772400" cy="1188720"/>
+          </a:xfrm>
+          <a:prstGeom prst="roundRect">
             <a:avLst/>
           </a:prstGeom>
           <a:solidFill>
-            <a:srgbClr val="D4D0C8"/>
+            <a:srgbClr val="151D30"/>
           </a:solidFill>
-          <a:ln>
-            <a:noFill/>
+          <a:ln w="19050">
+            <a:solidFill>
+              <a:srgbClr val="D4D0C8"/>
+            </a:solidFill>
           </a:ln>
         </p:spPr>
         <p:style>
@@ -4525,23 +4510,33 @@
           </a:fontRef>
         </p:style>
         <p:txBody>
-          <a:bodyPr rtlCol="0" anchor="ctr"/>
-          <a:lstStyle/>
-          <a:p>
-            <a:pPr algn="ctr"/>
-          </a:p>
-        </p:txBody>
-      </p:sp>
-      <p:sp>
-        <p:nvSpPr>
-          <p:cNvPr id="4" name="TextBox 3"/>
+          <a:bodyPr rtlCol="0" anchor="ctr" wrap="square"/>
+          <a:lstStyle/>
+          <a:p>
+            <a:pPr algn="ctr">
+              <a:defRPr sz="2800" b="1">
+                <a:solidFill>
+                  <a:srgbClr val="E8E4D9"/>
+                </a:solidFill>
+                <a:latin typeface="Segoe UI"/>
+              </a:defRPr>
+            </a:pPr>
+            <a:r>
+              <a:t>Cognitive Layer</a:t>
+            </a:r>
+          </a:p>
+        </p:txBody>
+      </p:sp>
+      <p:sp>
+        <p:nvSpPr>
+          <p:cNvPr id="3" name="TextBox 2"/>
           <p:cNvSpPr txBox="1"/>
           <p:nvPr/>
         </p:nvSpPr>
         <p:spPr>
           <a:xfrm>
-            <a:off x="1828800" y="1280160"/>
-            <a:ext cx="8229600" cy="457200"/>
+            <a:off x="548640" y="1463040"/>
+            <a:ext cx="2194560" cy="640080"/>
           </a:xfrm>
           <a:prstGeom prst="rect">
             <a:avLst/>
@@ -4554,83 +4549,41 @@
           </a:bodyPr>
           <a:lstStyle/>
           <a:p>
-            <a:pPr algn="l">
+            <a:pPr algn="r">
               <a:defRPr sz="2200" b="1" i="0">
                 <a:solidFill>
-                  <a:srgbClr val="F5F5F0"/>
-                </a:solidFill>
-                <a:latin typeface="Segoe UI"/>
-              </a:defRPr>
-            </a:pPr>
-            <a:r>
-              <a:t>IBM — AAAI 2025</a:t>
-            </a:r>
-          </a:p>
-        </p:txBody>
-      </p:sp>
-      <p:sp>
-        <p:nvSpPr>
-          <p:cNvPr id="5" name="TextBox 4"/>
-          <p:cNvSpPr txBox="1"/>
-          <p:nvPr/>
-        </p:nvSpPr>
-        <p:spPr>
-          <a:xfrm>
-            <a:off x="1828800" y="1737360"/>
-            <a:ext cx="8229600" cy="914400"/>
-          </a:xfrm>
-          <a:prstGeom prst="rect">
-            <a:avLst/>
-          </a:prstGeom>
-          <a:noFill/>
-        </p:spPr>
-        <p:txBody>
-          <a:bodyPr wrap="square">
-            <a:spAutoFit/>
-          </a:bodyPr>
-          <a:lstStyle/>
-          <a:p>
-            <a:pPr algn="l">
-              <a:defRPr sz="1600" b="0" i="0">
-                <a:solidFill>
-                  <a:srgbClr val="6B7280"/>
-                </a:solidFill>
-                <a:latin typeface="Segoe UI"/>
-              </a:defRPr>
-            </a:pPr>
-            <a:r>
-              <a:t>First major academic paper on agentic digital twins.</a:t>
-            </a:r>
-            <a:br/>
-            <a:r>
-              <a:t>LLM agents for shipping fleet management —</a:t>
-            </a:r>
-            <a:br/>
-            <a:r>
-              <a:t>autonomously plan, execute, reflect.</a:t>
-            </a:r>
-          </a:p>
-        </p:txBody>
-      </p:sp>
-      <p:sp>
-        <p:nvSpPr>
-          <p:cNvPr id="6" name="Rectangle 5"/>
+                  <a:srgbClr val="E8E4D9"/>
+                </a:solidFill>
+                <a:latin typeface="Segoe UI"/>
+              </a:defRPr>
+            </a:pPr>
+            <a:r>
+              <a:t>The Mind</a:t>
+            </a:r>
+          </a:p>
+        </p:txBody>
+      </p:sp>
+      <p:sp>
+        <p:nvSpPr>
+          <p:cNvPr id="4" name="Rounded Rectangle 3"/>
           <p:cNvSpPr/>
           <p:nvPr/>
         </p:nvSpPr>
         <p:spPr>
           <a:xfrm>
-            <a:off x="1371600" y="3017520"/>
-            <a:ext cx="73152" cy="1280160"/>
-          </a:xfrm>
-          <a:prstGeom prst="rect">
+            <a:off x="2926080" y="2743200"/>
+            <a:ext cx="7772400" cy="1188720"/>
+          </a:xfrm>
+          <a:prstGeom prst="roundRect">
             <a:avLst/>
           </a:prstGeom>
           <a:solidFill>
-            <a:srgbClr val="D4D0C8"/>
+            <a:srgbClr val="151D30"/>
           </a:solidFill>
-          <a:ln>
-            <a:noFill/>
+          <a:ln w="19050">
+            <a:solidFill>
+              <a:srgbClr val="6B7280"/>
+            </a:solidFill>
           </a:ln>
         </p:spPr>
         <p:style>
@@ -4648,23 +4601,33 @@
           </a:fontRef>
         </p:style>
         <p:txBody>
-          <a:bodyPr rtlCol="0" anchor="ctr"/>
-          <a:lstStyle/>
-          <a:p>
-            <a:pPr algn="ctr"/>
-          </a:p>
-        </p:txBody>
-      </p:sp>
-      <p:sp>
-        <p:nvSpPr>
-          <p:cNvPr id="7" name="TextBox 6"/>
+          <a:bodyPr rtlCol="0" anchor="ctr" wrap="square"/>
+          <a:lstStyle/>
+          <a:p>
+            <a:pPr algn="ctr">
+              <a:defRPr sz="2800" b="1">
+                <a:solidFill>
+                  <a:srgbClr val="F5F5F0"/>
+                </a:solidFill>
+                <a:latin typeface="Segoe UI"/>
+              </a:defRPr>
+            </a:pPr>
+            <a:r>
+              <a:t>Digital Twin</a:t>
+            </a:r>
+          </a:p>
+        </p:txBody>
+      </p:sp>
+      <p:sp>
+        <p:nvSpPr>
+          <p:cNvPr id="5" name="TextBox 4"/>
           <p:cNvSpPr txBox="1"/>
           <p:nvPr/>
         </p:nvSpPr>
         <p:spPr>
           <a:xfrm>
-            <a:off x="1828800" y="3017520"/>
-            <a:ext cx="8229600" cy="457200"/>
+            <a:off x="548640" y="3017520"/>
+            <a:ext cx="2194560" cy="640080"/>
           </a:xfrm>
           <a:prstGeom prst="rect">
             <a:avLst/>
@@ -4677,83 +4640,41 @@
           </a:bodyPr>
           <a:lstStyle/>
           <a:p>
-            <a:pPr algn="l">
-              <a:defRPr sz="2200" b="1" i="0">
-                <a:solidFill>
-                  <a:srgbClr val="F5F5F0"/>
-                </a:solidFill>
-                <a:latin typeface="Segoe UI"/>
-              </a:defRPr>
-            </a:pPr>
-            <a:r>
-              <a:t>XMPro MAGS</a:t>
-            </a:r>
-          </a:p>
-        </p:txBody>
-      </p:sp>
-      <p:sp>
-        <p:nvSpPr>
-          <p:cNvPr id="8" name="TextBox 7"/>
-          <p:cNvSpPr txBox="1"/>
-          <p:nvPr/>
-        </p:nvSpPr>
-        <p:spPr>
-          <a:xfrm>
-            <a:off x="1828800" y="3474720"/>
-            <a:ext cx="8229600" cy="914400"/>
-          </a:xfrm>
-          <a:prstGeom prst="rect">
-            <a:avLst/>
-          </a:prstGeom>
-          <a:noFill/>
-        </p:spPr>
-        <p:txBody>
-          <a:bodyPr wrap="square">
-            <a:spAutoFit/>
-          </a:bodyPr>
-          <a:lstStyle/>
-          <a:p>
-            <a:pPr algn="l">
-              <a:defRPr sz="1600" b="0" i="0">
-                <a:solidFill>
-                  <a:srgbClr val="6B7280"/>
-                </a:solidFill>
-                <a:latin typeface="Segoe UI"/>
-              </a:defRPr>
-            </a:pPr>
-            <a:r>
-              <a:t>Production multi-agent system for manufacturing.</a:t>
-            </a:r>
-            <a:br/>
-            <a:r>
-              <a:t>30–40% reduction in unplanned downtime.</a:t>
-            </a:r>
-            <a:br/>
-            <a:r>
-              <a:t>Open source.</a:t>
-            </a:r>
-          </a:p>
-        </p:txBody>
-      </p:sp>
-      <p:sp>
-        <p:nvSpPr>
-          <p:cNvPr id="9" name="Rectangle 8"/>
+            <a:pPr algn="r">
+              <a:defRPr sz="2200" b="0" i="0">
+                <a:solidFill>
+                  <a:srgbClr val="8B919C"/>
+                </a:solidFill>
+                <a:latin typeface="Segoe UI"/>
+              </a:defRPr>
+            </a:pPr>
+            <a:r>
+              <a:t>The Mirror</a:t>
+            </a:r>
+          </a:p>
+        </p:txBody>
+      </p:sp>
+      <p:sp>
+        <p:nvSpPr>
+          <p:cNvPr id="6" name="Rounded Rectangle 5"/>
           <p:cNvSpPr/>
           <p:nvPr/>
         </p:nvSpPr>
         <p:spPr>
           <a:xfrm>
-            <a:off x="1371600" y="4754879"/>
-            <a:ext cx="73152" cy="1280160"/>
-          </a:xfrm>
-          <a:prstGeom prst="rect">
+            <a:off x="2926080" y="4297680"/>
+            <a:ext cx="7772400" cy="1188720"/>
+          </a:xfrm>
+          <a:prstGeom prst="roundRect">
             <a:avLst/>
           </a:prstGeom>
           <a:solidFill>
-            <a:srgbClr val="D4D0C8"/>
+            <a:srgbClr val="151D30"/>
           </a:solidFill>
-          <a:ln>
-            <a:noFill/>
+          <a:ln w="19050">
+            <a:solidFill>
+              <a:srgbClr val="6B7280"/>
+            </a:solidFill>
           </a:ln>
         </p:spPr>
         <p:style>
@@ -4771,23 +4692,33 @@
           </a:fontRef>
         </p:style>
         <p:txBody>
-          <a:bodyPr rtlCol="0" anchor="ctr"/>
-          <a:lstStyle/>
-          <a:p>
-            <a:pPr algn="ctr"/>
-          </a:p>
-        </p:txBody>
-      </p:sp>
-      <p:sp>
-        <p:nvSpPr>
-          <p:cNvPr id="10" name="TextBox 9"/>
+          <a:bodyPr rtlCol="0" anchor="ctr" wrap="square"/>
+          <a:lstStyle/>
+          <a:p>
+            <a:pPr algn="ctr">
+              <a:defRPr sz="2800" b="1">
+                <a:solidFill>
+                  <a:srgbClr val="F5F5F0"/>
+                </a:solidFill>
+                <a:latin typeface="Segoe UI"/>
+              </a:defRPr>
+            </a:pPr>
+            <a:r>
+              <a:t>Physical System</a:t>
+            </a:r>
+          </a:p>
+        </p:txBody>
+      </p:sp>
+      <p:sp>
+        <p:nvSpPr>
+          <p:cNvPr id="7" name="TextBox 6"/>
           <p:cNvSpPr txBox="1"/>
           <p:nvPr/>
         </p:nvSpPr>
         <p:spPr>
           <a:xfrm>
-            <a:off x="1828800" y="4754879"/>
-            <a:ext cx="8229600" cy="457200"/>
+            <a:off x="548640" y="4572000"/>
+            <a:ext cx="2194560" cy="640080"/>
           </a:xfrm>
           <a:prstGeom prst="rect">
             <a:avLst/>
@@ -4800,56 +4731,16 @@
           </a:bodyPr>
           <a:lstStyle/>
           <a:p>
-            <a:pPr algn="l">
-              <a:defRPr sz="2200" b="1" i="0">
-                <a:solidFill>
-                  <a:srgbClr val="F5F5F0"/>
-                </a:solidFill>
-                <a:latin typeface="Segoe UI"/>
-              </a:defRPr>
-            </a:pPr>
-            <a:r>
-              <a:t>Nature Computational Science</a:t>
-            </a:r>
-          </a:p>
-        </p:txBody>
-      </p:sp>
-      <p:sp>
-        <p:nvSpPr>
-          <p:cNvPr id="11" name="TextBox 10"/>
-          <p:cNvSpPr txBox="1"/>
-          <p:nvPr/>
-        </p:nvSpPr>
-        <p:spPr>
-          <a:xfrm>
-            <a:off x="1828800" y="5212079"/>
-            <a:ext cx="8229600" cy="914400"/>
-          </a:xfrm>
-          <a:prstGeom prst="rect">
-            <a:avLst/>
-          </a:prstGeom>
-          <a:noFill/>
-        </p:spPr>
-        <p:txBody>
-          <a:bodyPr wrap="square">
-            <a:spAutoFit/>
-          </a:bodyPr>
-          <a:lstStyle/>
-          <a:p>
-            <a:pPr algn="l">
-              <a:defRPr sz="1600" b="0" i="0">
-                <a:solidFill>
-                  <a:srgbClr val="6B7280"/>
-                </a:solidFill>
-                <a:latin typeface="Segoe UI"/>
-              </a:defRPr>
-            </a:pPr>
-            <a:r>
-              <a:t>Published a formal evolutionary framework.</a:t>
-            </a:r>
-            <a:br/>
-            <a:r>
-              <a:t>This field has its own taxonomy now.</a:t>
+            <a:pPr algn="r">
+              <a:defRPr sz="2200" b="0" i="0">
+                <a:solidFill>
+                  <a:srgbClr val="8B919C"/>
+                </a:solidFill>
+                <a:latin typeface="Segoe UI"/>
+              </a:defRPr>
+            </a:pPr>
+            <a:r>
+              <a:t>The Real Thing</a:t>
             </a:r>
           </a:p>
         </p:txBody>
@@ -4897,7 +4788,7 @@
         <p:spPr>
           <a:xfrm>
             <a:off x="1097280" y="457200"/>
-            <a:ext cx="7315200" cy="457200"/>
+            <a:ext cx="4572000" cy="457200"/>
           </a:xfrm>
           <a:prstGeom prst="rect">
             <a:avLst/>
@@ -4911,40 +4802,38 @@
           <a:lstStyle/>
           <a:p>
             <a:pPr algn="l">
-              <a:defRPr sz="1400" b="0" i="0">
-                <a:solidFill>
-                  <a:srgbClr val="4B5563"/>
-                </a:solidFill>
-                <a:latin typeface="Segoe UI"/>
-              </a:defRPr>
-            </a:pPr>
-            <a:r>
-              <a:t>Multi-Agent Systems</a:t>
-            </a:r>
-          </a:p>
-        </p:txBody>
-      </p:sp>
-      <p:sp>
-        <p:nvSpPr>
-          <p:cNvPr id="3" name="Rounded Rectangle 2"/>
+              <a:defRPr sz="2000" b="0" i="0">
+                <a:solidFill>
+                  <a:srgbClr val="8B919C"/>
+                </a:solidFill>
+                <a:latin typeface="Segoe UI"/>
+              </a:defRPr>
+            </a:pPr>
+            <a:r>
+              <a:t>The Evidence</a:t>
+            </a:r>
+          </a:p>
+        </p:txBody>
+      </p:sp>
+      <p:sp>
+        <p:nvSpPr>
+          <p:cNvPr id="3" name="Rectangle 2"/>
           <p:cNvSpPr/>
           <p:nvPr/>
         </p:nvSpPr>
         <p:spPr>
           <a:xfrm>
-            <a:off x="929487" y="2011680"/>
-            <a:ext cx="3200400" cy="1828800"/>
-          </a:xfrm>
-          <a:prstGeom prst="roundRect">
+            <a:off x="1371600" y="1280160"/>
+            <a:ext cx="73152" cy="1280160"/>
+          </a:xfrm>
+          <a:prstGeom prst="rect">
             <a:avLst/>
           </a:prstGeom>
           <a:solidFill>
-            <a:srgbClr val="151D30"/>
+            <a:srgbClr val="D4D0C8"/>
           </a:solidFill>
-          <a:ln w="19050">
-            <a:solidFill>
-              <a:srgbClr val="D4D0C8"/>
-            </a:solidFill>
+          <a:ln>
+            <a:noFill/>
           </a:ln>
         </p:spPr>
         <p:style>
@@ -4962,20 +4851,10 @@
           </a:fontRef>
         </p:style>
         <p:txBody>
-          <a:bodyPr rtlCol="0" anchor="ctr" wrap="square"/>
-          <a:lstStyle/>
-          <a:p>
-            <a:pPr algn="ctr">
-              <a:defRPr sz="2800" b="1">
-                <a:solidFill>
-                  <a:srgbClr val="F5F5F0"/>
-                </a:solidFill>
-                <a:latin typeface="Segoe UI"/>
-              </a:defRPr>
-            </a:pPr>
-            <a:r>
-              <a:t>Monitor</a:t>
-            </a:r>
+          <a:bodyPr rtlCol="0" anchor="ctr"/>
+          <a:lstStyle/>
+          <a:p>
+            <a:pPr algn="ctr"/>
           </a:p>
         </p:txBody>
       </p:sp>
@@ -4987,8 +4866,8 @@
         </p:nvSpPr>
         <p:spPr>
           <a:xfrm>
-            <a:off x="929487" y="4023360"/>
-            <a:ext cx="3200400" cy="548640"/>
+            <a:off x="1828800" y="1280160"/>
+            <a:ext cx="8229600" cy="457200"/>
           </a:xfrm>
           <a:prstGeom prst="rect">
             <a:avLst/>
@@ -5001,16 +4880,16 @@
           </a:bodyPr>
           <a:lstStyle/>
           <a:p>
-            <a:pPr algn="ctr">
-              <a:defRPr sz="1700" b="0" i="0">
-                <a:solidFill>
-                  <a:srgbClr val="6B7280"/>
-                </a:solidFill>
-                <a:latin typeface="Segoe UI"/>
-              </a:defRPr>
-            </a:pPr>
-            <a:r>
-              <a:t>Detects anomalies</a:t>
+            <a:pPr algn="l">
+              <a:defRPr sz="2200" b="1" i="0">
+                <a:solidFill>
+                  <a:srgbClr val="F5F5F0"/>
+                </a:solidFill>
+                <a:latin typeface="Segoe UI"/>
+              </a:defRPr>
+            </a:pPr>
+            <a:r>
+              <a:t>IBM — AAAI 2025</a:t>
             </a:r>
           </a:p>
         </p:txBody>
@@ -5023,8 +4902,8 @@
         </p:nvSpPr>
         <p:spPr>
           <a:xfrm>
-            <a:off x="4129887" y="2560320"/>
-            <a:ext cx="365760" cy="731520"/>
+            <a:off x="1828800" y="1737360"/>
+            <a:ext cx="8229600" cy="914400"/>
           </a:xfrm>
           <a:prstGeom prst="rect">
             <a:avLst/>
@@ -5037,41 +4916,47 @@
           </a:bodyPr>
           <a:lstStyle/>
           <a:p>
-            <a:pPr algn="ctr">
-              <a:defRPr sz="2800" b="0" i="0">
-                <a:solidFill>
-                  <a:srgbClr val="D4D0C8"/>
-                </a:solidFill>
-                <a:latin typeface="Segoe UI"/>
-              </a:defRPr>
-            </a:pPr>
-            <a:r>
-              <a:t>→</a:t>
-            </a:r>
-          </a:p>
-        </p:txBody>
-      </p:sp>
-      <p:sp>
-        <p:nvSpPr>
-          <p:cNvPr id="6" name="Rounded Rectangle 5"/>
+            <a:pPr algn="l">
+              <a:defRPr sz="1600" b="0" i="0">
+                <a:solidFill>
+                  <a:srgbClr val="8B919C"/>
+                </a:solidFill>
+                <a:latin typeface="Segoe UI"/>
+              </a:defRPr>
+            </a:pPr>
+            <a:r>
+              <a:t>First major academic paper on agentic digital twins.</a:t>
+            </a:r>
+            <a:br/>
+            <a:r>
+              <a:t>LLM agents for shipping fleet management —</a:t>
+            </a:r>
+            <a:br/>
+            <a:r>
+              <a:t>autonomously plan, execute, reflect.</a:t>
+            </a:r>
+          </a:p>
+        </p:txBody>
+      </p:sp>
+      <p:sp>
+        <p:nvSpPr>
+          <p:cNvPr id="6" name="Rectangle 5"/>
           <p:cNvSpPr/>
           <p:nvPr/>
         </p:nvSpPr>
         <p:spPr>
           <a:xfrm>
-            <a:off x="4495647" y="2011680"/>
-            <a:ext cx="3200400" cy="1828800"/>
-          </a:xfrm>
-          <a:prstGeom prst="roundRect">
+            <a:off x="1371600" y="3017520"/>
+            <a:ext cx="73152" cy="1280160"/>
+          </a:xfrm>
+          <a:prstGeom prst="rect">
             <a:avLst/>
           </a:prstGeom>
           <a:solidFill>
-            <a:srgbClr val="151D30"/>
+            <a:srgbClr val="D4D0C8"/>
           </a:solidFill>
-          <a:ln w="19050">
-            <a:solidFill>
-              <a:srgbClr val="D4D0C8"/>
-            </a:solidFill>
+          <a:ln>
+            <a:noFill/>
           </a:ln>
         </p:spPr>
         <p:style>
@@ -5089,20 +4974,10 @@
           </a:fontRef>
         </p:style>
         <p:txBody>
-          <a:bodyPr rtlCol="0" anchor="ctr" wrap="square"/>
-          <a:lstStyle/>
-          <a:p>
-            <a:pPr algn="ctr">
-              <a:defRPr sz="2800" b="1">
-                <a:solidFill>
-                  <a:srgbClr val="F5F5F0"/>
-                </a:solidFill>
-                <a:latin typeface="Segoe UI"/>
-              </a:defRPr>
-            </a:pPr>
-            <a:r>
-              <a:t>Analyst</a:t>
-            </a:r>
+          <a:bodyPr rtlCol="0" anchor="ctr"/>
+          <a:lstStyle/>
+          <a:p>
+            <a:pPr algn="ctr"/>
           </a:p>
         </p:txBody>
       </p:sp>
@@ -5114,8 +4989,8 @@
         </p:nvSpPr>
         <p:spPr>
           <a:xfrm>
-            <a:off x="4495647" y="4023360"/>
-            <a:ext cx="3200400" cy="548640"/>
+            <a:off x="1828800" y="3017520"/>
+            <a:ext cx="8229600" cy="457200"/>
           </a:xfrm>
           <a:prstGeom prst="rect">
             <a:avLst/>
@@ -5128,16 +5003,16 @@
           </a:bodyPr>
           <a:lstStyle/>
           <a:p>
-            <a:pPr algn="ctr">
-              <a:defRPr sz="1700" b="0" i="0">
-                <a:solidFill>
-                  <a:srgbClr val="6B7280"/>
-                </a:solidFill>
-                <a:latin typeface="Segoe UI"/>
-              </a:defRPr>
-            </a:pPr>
-            <a:r>
-              <a:t>Finds root causes</a:t>
+            <a:pPr algn="l">
+              <a:defRPr sz="2200" b="1" i="0">
+                <a:solidFill>
+                  <a:srgbClr val="F5F5F0"/>
+                </a:solidFill>
+                <a:latin typeface="Segoe UI"/>
+              </a:defRPr>
+            </a:pPr>
+            <a:r>
+              <a:t>XMPro MAGS</a:t>
             </a:r>
           </a:p>
         </p:txBody>
@@ -5150,8 +5025,8 @@
         </p:nvSpPr>
         <p:spPr>
           <a:xfrm>
-            <a:off x="7696047" y="2560320"/>
-            <a:ext cx="365760" cy="731520"/>
+            <a:off x="1828800" y="3474720"/>
+            <a:ext cx="8229600" cy="914400"/>
           </a:xfrm>
           <a:prstGeom prst="rect">
             <a:avLst/>
@@ -5164,41 +5039,43 @@
           </a:bodyPr>
           <a:lstStyle/>
           <a:p>
-            <a:pPr algn="ctr">
-              <a:defRPr sz="2800" b="0" i="0">
-                <a:solidFill>
-                  <a:srgbClr val="D4D0C8"/>
-                </a:solidFill>
-                <a:latin typeface="Segoe UI"/>
-              </a:defRPr>
-            </a:pPr>
-            <a:r>
-              <a:t>→</a:t>
-            </a:r>
-          </a:p>
-        </p:txBody>
-      </p:sp>
-      <p:sp>
-        <p:nvSpPr>
-          <p:cNvPr id="9" name="Rounded Rectangle 8"/>
+            <a:pPr algn="l">
+              <a:defRPr sz="1600" b="0" i="0">
+                <a:solidFill>
+                  <a:srgbClr val="8B919C"/>
+                </a:solidFill>
+                <a:latin typeface="Segoe UI"/>
+              </a:defRPr>
+            </a:pPr>
+            <a:r>
+              <a:t>Production multi-agent system for manufacturing.</a:t>
+            </a:r>
+            <a:br/>
+            <a:r>
+              <a:t>Potential 30–40% reduction in unplanned downtime.</a:t>
+            </a:r>
+          </a:p>
+        </p:txBody>
+      </p:sp>
+      <p:sp>
+        <p:nvSpPr>
+          <p:cNvPr id="9" name="Rectangle 8"/>
           <p:cNvSpPr/>
           <p:nvPr/>
         </p:nvSpPr>
         <p:spPr>
           <a:xfrm>
-            <a:off x="8061807" y="2011680"/>
-            <a:ext cx="3200400" cy="1828800"/>
-          </a:xfrm>
-          <a:prstGeom prst="roundRect">
+            <a:off x="1371600" y="4754879"/>
+            <a:ext cx="73152" cy="1280160"/>
+          </a:xfrm>
+          <a:prstGeom prst="rect">
             <a:avLst/>
           </a:prstGeom>
           <a:solidFill>
-            <a:srgbClr val="151D30"/>
+            <a:srgbClr val="D4D0C8"/>
           </a:solidFill>
-          <a:ln w="19050">
-            <a:solidFill>
-              <a:srgbClr val="D4D0C8"/>
-            </a:solidFill>
+          <a:ln>
+            <a:noFill/>
           </a:ln>
         </p:spPr>
         <p:style>
@@ -5216,20 +5093,10 @@
           </a:fontRef>
         </p:style>
         <p:txBody>
-          <a:bodyPr rtlCol="0" anchor="ctr" wrap="square"/>
-          <a:lstStyle/>
-          <a:p>
-            <a:pPr algn="ctr">
-              <a:defRPr sz="2800" b="1">
-                <a:solidFill>
-                  <a:srgbClr val="F5F5F0"/>
-                </a:solidFill>
-                <a:latin typeface="Segoe UI"/>
-              </a:defRPr>
-            </a:pPr>
-            <a:r>
-              <a:t>Planner</a:t>
-            </a:r>
+          <a:bodyPr rtlCol="0" anchor="ctr"/>
+          <a:lstStyle/>
+          <a:p>
+            <a:pPr algn="ctr"/>
           </a:p>
         </p:txBody>
       </p:sp>
@@ -5241,8 +5108,8 @@
         </p:nvSpPr>
         <p:spPr>
           <a:xfrm>
-            <a:off x="8061807" y="4023360"/>
-            <a:ext cx="3200400" cy="548640"/>
+            <a:off x="1828800" y="4754879"/>
+            <a:ext cx="8229600" cy="457200"/>
           </a:xfrm>
           <a:prstGeom prst="rect">
             <a:avLst/>
@@ -5255,16 +5122,16 @@
           </a:bodyPr>
           <a:lstStyle/>
           <a:p>
-            <a:pPr algn="ctr">
-              <a:defRPr sz="1700" b="0" i="0">
-                <a:solidFill>
-                  <a:srgbClr val="6B7280"/>
-                </a:solidFill>
-                <a:latin typeface="Segoe UI"/>
-              </a:defRPr>
-            </a:pPr>
-            <a:r>
-              <a:t>Schedules responses</a:t>
+            <a:pPr algn="l">
+              <a:defRPr sz="2200" b="1" i="0">
+                <a:solidFill>
+                  <a:srgbClr val="F5F5F0"/>
+                </a:solidFill>
+                <a:latin typeface="Segoe UI"/>
+              </a:defRPr>
+            </a:pPr>
+            <a:r>
+              <a:t>Nature Computational Science (2026)</a:t>
             </a:r>
           </a:p>
         </p:txBody>
@@ -5277,8 +5144,8 @@
         </p:nvSpPr>
         <p:spPr>
           <a:xfrm>
-            <a:off x="1097280" y="5120640"/>
-            <a:ext cx="10058400" cy="914400"/>
+            <a:off x="1828800" y="5212079"/>
+            <a:ext cx="8229600" cy="914400"/>
           </a:xfrm>
           <a:prstGeom prst="rect">
             <a:avLst/>
@@ -5292,19 +5159,23 @@
           <a:lstStyle/>
           <a:p>
             <a:pPr algn="l">
-              <a:defRPr sz="1800" b="0" i="0">
-                <a:solidFill>
-                  <a:srgbClr val="E8E4D9"/>
-                </a:solidFill>
-                <a:latin typeface="Segoe UI"/>
-              </a:defRPr>
-            </a:pPr>
-            <a:r>
-              <a:t>Specialized agents. Collaborate and check each other's work.</a:t>
+              <a:defRPr sz="1600" b="0" i="0">
+                <a:solidFill>
+                  <a:srgbClr val="8B919C"/>
+                </a:solidFill>
+                <a:latin typeface="Segoe UI"/>
+              </a:defRPr>
+            </a:pPr>
+            <a:r>
+              <a:t>Mapped Digital Twin evolution from reactive to agentic,</a:t>
             </a:r>
             <a:br/>
             <a:r>
-              <a:t>The agent that proposes is never the one that approves.</a:t>
+              <a:t>naming six capability levels: Standalone · Descriptive ·</a:t>
+            </a:r>
+            <a:br/>
+            <a:r>
+              <a:t>Diagnostic · Predictive · Prescriptive · Autonomous</a:t>
             </a:r>
           </a:p>
         </p:txBody>
@@ -5366,15 +5237,15 @@
           <a:lstStyle/>
           <a:p>
             <a:pPr algn="l">
-              <a:defRPr sz="1400" b="0" i="0">
-                <a:solidFill>
-                  <a:srgbClr val="4B5563"/>
-                </a:solidFill>
-                <a:latin typeface="Segoe UI"/>
-              </a:defRPr>
-            </a:pPr>
-            <a:r>
-              <a:t>One Pattern, Three Worlds</a:t>
+              <a:defRPr sz="2000" b="0" i="0">
+                <a:solidFill>
+                  <a:srgbClr val="8B919C"/>
+                </a:solidFill>
+                <a:latin typeface="Segoe UI"/>
+              </a:defRPr>
+            </a:pPr>
+            <a:r>
+              <a:t>Multi-Agent Systems</a:t>
             </a:r>
           </a:p>
         </p:txBody>
@@ -5387,8 +5258,8 @@
         </p:nvSpPr>
         <p:spPr>
           <a:xfrm>
-            <a:off x="838047" y="1645920"/>
-            <a:ext cx="3291840" cy="1188720"/>
+            <a:off x="929487" y="2011680"/>
+            <a:ext cx="3200400" cy="1828800"/>
           </a:xfrm>
           <a:prstGeom prst="roundRect">
             <a:avLst/>
@@ -5421,7 +5292,7 @@
           <a:lstStyle/>
           <a:p>
             <a:pPr algn="ctr">
-              <a:defRPr sz="2400" b="1">
+              <a:defRPr sz="2800" b="1">
                 <a:solidFill>
                   <a:srgbClr val="F5F5F0"/>
                 </a:solidFill>
@@ -5429,7 +5300,7 @@
               </a:defRPr>
             </a:pPr>
             <a:r>
-              <a:t>Edge AI Device</a:t>
+              <a:t>Monitor</a:t>
             </a:r>
           </a:p>
         </p:txBody>
@@ -5442,8 +5313,8 @@
         </p:nvSpPr>
         <p:spPr>
           <a:xfrm>
-            <a:off x="1112367" y="3108960"/>
-            <a:ext cx="2743200" cy="1828800"/>
+            <a:off x="929487" y="4023360"/>
+            <a:ext cx="3200400" cy="548640"/>
           </a:xfrm>
           <a:prstGeom prst="rect">
             <a:avLst/>
@@ -5456,38 +5327,66 @@
           </a:bodyPr>
           <a:lstStyle/>
           <a:p>
-            <a:pPr algn="l">
-              <a:defRPr sz="1800" b="0" i="0">
-                <a:solidFill>
-                  <a:srgbClr val="6B7280"/>
-                </a:solidFill>
-                <a:latin typeface="Segoe UI"/>
-              </a:defRPr>
-            </a:pPr>
-            <a:r>
-              <a:t>Model drift</a:t>
-            </a:r>
-            <a:br/>
-            <a:r>
-              <a:t>→ Diagnose</a:t>
-            </a:r>
-            <a:br/>
-            <a:r>
-              <a:t>→ Retrain</a:t>
-            </a:r>
-          </a:p>
-        </p:txBody>
-      </p:sp>
-      <p:sp>
-        <p:nvSpPr>
-          <p:cNvPr id="5" name="Rounded Rectangle 4"/>
+            <a:pPr algn="ctr">
+              <a:defRPr sz="1700" b="0" i="0">
+                <a:solidFill>
+                  <a:srgbClr val="8B919C"/>
+                </a:solidFill>
+                <a:latin typeface="Segoe UI"/>
+              </a:defRPr>
+            </a:pPr>
+            <a:r>
+              <a:t>Detects anomalies</a:t>
+            </a:r>
+          </a:p>
+        </p:txBody>
+      </p:sp>
+      <p:sp>
+        <p:nvSpPr>
+          <p:cNvPr id="5" name="TextBox 4"/>
+          <p:cNvSpPr txBox="1"/>
+          <p:nvPr/>
+        </p:nvSpPr>
+        <p:spPr>
+          <a:xfrm>
+            <a:off x="4129887" y="2560320"/>
+            <a:ext cx="365760" cy="731520"/>
+          </a:xfrm>
+          <a:prstGeom prst="rect">
+            <a:avLst/>
+          </a:prstGeom>
+          <a:noFill/>
+        </p:spPr>
+        <p:txBody>
+          <a:bodyPr wrap="square">
+            <a:spAutoFit/>
+          </a:bodyPr>
+          <a:lstStyle/>
+          <a:p>
+            <a:pPr algn="ctr">
+              <a:defRPr sz="2800" b="0" i="0">
+                <a:solidFill>
+                  <a:srgbClr val="D4D0C8"/>
+                </a:solidFill>
+                <a:latin typeface="Segoe UI"/>
+              </a:defRPr>
+            </a:pPr>
+            <a:r>
+              <a:t>→</a:t>
+            </a:r>
+          </a:p>
+        </p:txBody>
+      </p:sp>
+      <p:sp>
+        <p:nvSpPr>
+          <p:cNvPr id="6" name="Rounded Rectangle 5"/>
           <p:cNvSpPr/>
           <p:nvPr/>
         </p:nvSpPr>
         <p:spPr>
           <a:xfrm>
-            <a:off x="4449927" y="1645920"/>
-            <a:ext cx="3291840" cy="1188720"/>
+            <a:off x="4495647" y="2011680"/>
+            <a:ext cx="3200400" cy="1828800"/>
           </a:xfrm>
           <a:prstGeom prst="roundRect">
             <a:avLst/>
@@ -5520,7 +5419,7 @@
           <a:lstStyle/>
           <a:p>
             <a:pPr algn="ctr">
-              <a:defRPr sz="2400" b="1">
+              <a:defRPr sz="2800" b="1">
                 <a:solidFill>
                   <a:srgbClr val="F5F5F0"/>
                 </a:solidFill>
@@ -5528,21 +5427,21 @@
               </a:defRPr>
             </a:pPr>
             <a:r>
-              <a:t>Robotic Arm</a:t>
-            </a:r>
-          </a:p>
-        </p:txBody>
-      </p:sp>
-      <p:sp>
-        <p:nvSpPr>
-          <p:cNvPr id="6" name="TextBox 5"/>
+              <a:t>Analyst</a:t>
+            </a:r>
+          </a:p>
+        </p:txBody>
+      </p:sp>
+      <p:sp>
+        <p:nvSpPr>
+          <p:cNvPr id="7" name="TextBox 6"/>
           <p:cNvSpPr txBox="1"/>
           <p:nvPr/>
         </p:nvSpPr>
         <p:spPr>
           <a:xfrm>
-            <a:off x="4724247" y="3108960"/>
-            <a:ext cx="2743200" cy="1828800"/>
+            <a:off x="4495647" y="4023360"/>
+            <a:ext cx="3200400" cy="548640"/>
           </a:xfrm>
           <a:prstGeom prst="rect">
             <a:avLst/>
@@ -5555,38 +5454,66 @@
           </a:bodyPr>
           <a:lstStyle/>
           <a:p>
-            <a:pPr algn="l">
-              <a:defRPr sz="1800" b="0" i="0">
-                <a:solidFill>
-                  <a:srgbClr val="6B7280"/>
-                </a:solidFill>
-                <a:latin typeface="Segoe UI"/>
-              </a:defRPr>
-            </a:pPr>
-            <a:r>
-              <a:t>Bearing wear</a:t>
-            </a:r>
-            <a:br/>
-            <a:r>
-              <a:t>→ Predict</a:t>
-            </a:r>
-            <a:br/>
-            <a:r>
-              <a:t>→ Schedule</a:t>
-            </a:r>
-          </a:p>
-        </p:txBody>
-      </p:sp>
-      <p:sp>
-        <p:nvSpPr>
-          <p:cNvPr id="7" name="Rounded Rectangle 6"/>
+            <a:pPr algn="ctr">
+              <a:defRPr sz="1700" b="0" i="0">
+                <a:solidFill>
+                  <a:srgbClr val="8B919C"/>
+                </a:solidFill>
+                <a:latin typeface="Segoe UI"/>
+              </a:defRPr>
+            </a:pPr>
+            <a:r>
+              <a:t>Finds root causes</a:t>
+            </a:r>
+          </a:p>
+        </p:txBody>
+      </p:sp>
+      <p:sp>
+        <p:nvSpPr>
+          <p:cNvPr id="8" name="TextBox 7"/>
+          <p:cNvSpPr txBox="1"/>
+          <p:nvPr/>
+        </p:nvSpPr>
+        <p:spPr>
+          <a:xfrm>
+            <a:off x="7696047" y="2560320"/>
+            <a:ext cx="365760" cy="731520"/>
+          </a:xfrm>
+          <a:prstGeom prst="rect">
+            <a:avLst/>
+          </a:prstGeom>
+          <a:noFill/>
+        </p:spPr>
+        <p:txBody>
+          <a:bodyPr wrap="square">
+            <a:spAutoFit/>
+          </a:bodyPr>
+          <a:lstStyle/>
+          <a:p>
+            <a:pPr algn="ctr">
+              <a:defRPr sz="2800" b="0" i="0">
+                <a:solidFill>
+                  <a:srgbClr val="D4D0C8"/>
+                </a:solidFill>
+                <a:latin typeface="Segoe UI"/>
+              </a:defRPr>
+            </a:pPr>
+            <a:r>
+              <a:t>→</a:t>
+            </a:r>
+          </a:p>
+        </p:txBody>
+      </p:sp>
+      <p:sp>
+        <p:nvSpPr>
+          <p:cNvPr id="9" name="Rounded Rectangle 8"/>
           <p:cNvSpPr/>
           <p:nvPr/>
         </p:nvSpPr>
         <p:spPr>
           <a:xfrm>
-            <a:off x="8061807" y="1645920"/>
-            <a:ext cx="3291840" cy="1188720"/>
+            <a:off x="8061807" y="2011680"/>
+            <a:ext cx="3200400" cy="1828800"/>
           </a:xfrm>
           <a:prstGeom prst="roundRect">
             <a:avLst/>
@@ -5619,7 +5546,7 @@
           <a:lstStyle/>
           <a:p>
             <a:pPr algn="ctr">
-              <a:defRPr sz="2400" b="1">
+              <a:defRPr sz="2800" b="1">
                 <a:solidFill>
                   <a:srgbClr val="F5F5F0"/>
                 </a:solidFill>
@@ -5627,21 +5554,21 @@
               </a:defRPr>
             </a:pPr>
             <a:r>
-              <a:t>ADAS Sensor Suite</a:t>
-            </a:r>
-          </a:p>
-        </p:txBody>
-      </p:sp>
-      <p:sp>
-        <p:nvSpPr>
-          <p:cNvPr id="8" name="TextBox 7"/>
+              <a:t>Planner</a:t>
+            </a:r>
+          </a:p>
+        </p:txBody>
+      </p:sp>
+      <p:sp>
+        <p:nvSpPr>
+          <p:cNvPr id="10" name="TextBox 9"/>
           <p:cNvSpPr txBox="1"/>
           <p:nvPr/>
         </p:nvSpPr>
         <p:spPr>
           <a:xfrm>
-            <a:off x="8336127" y="3108960"/>
-            <a:ext cx="2743200" cy="1828800"/>
+            <a:off x="8061807" y="4023360"/>
+            <a:ext cx="3200400" cy="548640"/>
           </a:xfrm>
           <a:prstGeom prst="rect">
             <a:avLst/>
@@ -5654,37 +5581,29 @@
           </a:bodyPr>
           <a:lstStyle/>
           <a:p>
-            <a:pPr algn="l">
-              <a:defRPr sz="1800" b="0" i="0">
-                <a:solidFill>
-                  <a:srgbClr val="6B7280"/>
-                </a:solidFill>
-                <a:latin typeface="Segoe UI"/>
-              </a:defRPr>
-            </a:pPr>
-            <a:r>
-              <a:t>Sensor fusion</a:t>
-            </a:r>
-            <a:br/>
-            <a:r>
-              <a:t>→ Safety</a:t>
-            </a:r>
-            <a:br/>
-            <a:r>
-              <a:t>→ Adapt</a:t>
-            </a:r>
-          </a:p>
-        </p:txBody>
-      </p:sp>
-      <p:sp>
-        <p:nvSpPr>
-          <p:cNvPr id="9" name="TextBox 8"/>
+            <a:pPr algn="ctr">
+              <a:defRPr sz="1700" b="0" i="0">
+                <a:solidFill>
+                  <a:srgbClr val="8B919C"/>
+                </a:solidFill>
+                <a:latin typeface="Segoe UI"/>
+              </a:defRPr>
+            </a:pPr>
+            <a:r>
+              <a:t>Schedules responses</a:t>
+            </a:r>
+          </a:p>
+        </p:txBody>
+      </p:sp>
+      <p:sp>
+        <p:nvSpPr>
+          <p:cNvPr id="11" name="TextBox 10"/>
           <p:cNvSpPr txBox="1"/>
           <p:nvPr/>
         </p:nvSpPr>
         <p:spPr>
           <a:xfrm>
-            <a:off x="914400" y="5303520"/>
+            <a:off x="1097280" y="5120640"/>
             <a:ext cx="10058400" cy="914400"/>
           </a:xfrm>
           <a:prstGeom prst="rect">
@@ -5699,7 +5618,7 @@
           <a:lstStyle/>
           <a:p>
             <a:pPr algn="l">
-              <a:defRPr sz="2200" b="1" i="0">
+              <a:defRPr sz="1800" b="0" i="0">
                 <a:solidFill>
                   <a:srgbClr val="E8E4D9"/>
                 </a:solidFill>
@@ -5707,11 +5626,11 @@
               </a:defRPr>
             </a:pPr>
             <a:r>
-              <a:t>Same loop. Same architecture. Different worlds.</a:t>
+              <a:t>Specialized agents. Collaborate and check each other's work.</a:t>
             </a:r>
             <a:br/>
             <a:r>
-              <a:t>The pattern is universal.</a:t>
+              <a:t>The agent that proposes is never the one that approves.</a:t>
             </a:r>
           </a:p>
         </p:txBody>
@@ -5759,7 +5678,7 @@
         <p:spPr>
           <a:xfrm>
             <a:off x="1097280" y="457200"/>
-            <a:ext cx="4572000" cy="457200"/>
+            <a:ext cx="7315200" cy="457200"/>
           </a:xfrm>
           <a:prstGeom prst="rect">
             <a:avLst/>
@@ -5773,38 +5692,40 @@
           <a:lstStyle/>
           <a:p>
             <a:pPr algn="l">
-              <a:defRPr sz="1400" b="0" i="0">
-                <a:solidFill>
-                  <a:srgbClr val="4B5563"/>
-                </a:solidFill>
-                <a:latin typeface="Segoe UI"/>
-              </a:defRPr>
-            </a:pPr>
-            <a:r>
-              <a:t>Let's Be Honest</a:t>
-            </a:r>
-          </a:p>
-        </p:txBody>
-      </p:sp>
-      <p:sp>
-        <p:nvSpPr>
-          <p:cNvPr id="3" name="Rectangle 2"/>
+              <a:defRPr sz="2000" b="0" i="0">
+                <a:solidFill>
+                  <a:srgbClr val="8B919C"/>
+                </a:solidFill>
+                <a:latin typeface="Segoe UI"/>
+              </a:defRPr>
+            </a:pPr>
+            <a:r>
+              <a:t>One Pattern, Every System</a:t>
+            </a:r>
+          </a:p>
+        </p:txBody>
+      </p:sp>
+      <p:sp>
+        <p:nvSpPr>
+          <p:cNvPr id="3" name="Rounded Rectangle 2"/>
           <p:cNvSpPr/>
           <p:nvPr/>
         </p:nvSpPr>
         <p:spPr>
           <a:xfrm>
-            <a:off x="1371600" y="1325880"/>
-            <a:ext cx="73152" cy="731520"/>
-          </a:xfrm>
-          <a:prstGeom prst="rect">
+            <a:off x="838047" y="1645920"/>
+            <a:ext cx="3291840" cy="1188720"/>
+          </a:xfrm>
+          <a:prstGeom prst="roundRect">
             <a:avLst/>
           </a:prstGeom>
           <a:solidFill>
-            <a:srgbClr val="D4D0C8"/>
+            <a:srgbClr val="151D30"/>
           </a:solidFill>
-          <a:ln>
-            <a:noFill/>
+          <a:ln w="19050">
+            <a:solidFill>
+              <a:srgbClr val="D4D0C8"/>
+            </a:solidFill>
           </a:ln>
         </p:spPr>
         <p:style>
@@ -5822,10 +5743,20 @@
           </a:fontRef>
         </p:style>
         <p:txBody>
-          <a:bodyPr rtlCol="0" anchor="ctr"/>
-          <a:lstStyle/>
-          <a:p>
-            <a:pPr algn="ctr"/>
+          <a:bodyPr rtlCol="0" anchor="ctr" wrap="square"/>
+          <a:lstStyle/>
+          <a:p>
+            <a:pPr algn="ctr">
+              <a:defRPr sz="2400" b="1">
+                <a:solidFill>
+                  <a:srgbClr val="F5F5F0"/>
+                </a:solidFill>
+                <a:latin typeface="Segoe UI"/>
+              </a:defRPr>
+            </a:pPr>
+            <a:r>
+              <a:t>Edge AI Device</a:t>
+            </a:r>
           </a:p>
         </p:txBody>
       </p:sp>
@@ -5837,8 +5768,8 @@
         </p:nvSpPr>
         <p:spPr>
           <a:xfrm>
-            <a:off x="1828800" y="1280160"/>
-            <a:ext cx="3657600" cy="457200"/>
+            <a:off x="1112367" y="3108960"/>
+            <a:ext cx="2743200" cy="1828800"/>
           </a:xfrm>
           <a:prstGeom prst="rect">
             <a:avLst/>
@@ -5852,74 +5783,48 @@
           <a:lstStyle/>
           <a:p>
             <a:pPr algn="l">
-              <a:defRPr sz="2200" b="1" i="0">
-                <a:solidFill>
-                  <a:srgbClr val="F5F5F0"/>
-                </a:solidFill>
-                <a:latin typeface="Segoe UI"/>
-              </a:defRPr>
-            </a:pPr>
-            <a:r>
-              <a:t>Accountability</a:t>
-            </a:r>
-          </a:p>
-        </p:txBody>
-      </p:sp>
-      <p:sp>
-        <p:nvSpPr>
-          <p:cNvPr id="5" name="TextBox 4"/>
-          <p:cNvSpPr txBox="1"/>
-          <p:nvPr/>
-        </p:nvSpPr>
-        <p:spPr>
-          <a:xfrm>
-            <a:off x="1828800" y="1691640"/>
-            <a:ext cx="8229600" cy="457200"/>
-          </a:xfrm>
-          <a:prstGeom prst="rect">
-            <a:avLst/>
-          </a:prstGeom>
-          <a:noFill/>
-        </p:spPr>
-        <p:txBody>
-          <a:bodyPr wrap="square">
-            <a:spAutoFit/>
-          </a:bodyPr>
-          <a:lstStyle/>
-          <a:p>
-            <a:pPr algn="l">
-              <a:defRPr sz="1700" b="0" i="0">
-                <a:solidFill>
-                  <a:srgbClr val="6B7280"/>
-                </a:solidFill>
-                <a:latin typeface="Segoe UI"/>
-              </a:defRPr>
-            </a:pPr>
-            <a:r>
-              <a:t>When the agent decides wrong, who owns it?</a:t>
-            </a:r>
-          </a:p>
-        </p:txBody>
-      </p:sp>
-      <p:sp>
-        <p:nvSpPr>
-          <p:cNvPr id="6" name="Rectangle 5"/>
+              <a:defRPr sz="1800" b="0" i="0">
+                <a:solidFill>
+                  <a:srgbClr val="8B919C"/>
+                </a:solidFill>
+                <a:latin typeface="Segoe UI"/>
+              </a:defRPr>
+            </a:pPr>
+            <a:r>
+              <a:t>Model drift</a:t>
+            </a:r>
+            <a:br/>
+            <a:r>
+              <a:t>→ Diagnose</a:t>
+            </a:r>
+            <a:br/>
+            <a:r>
+              <a:t>→ Retrain</a:t>
+            </a:r>
+          </a:p>
+        </p:txBody>
+      </p:sp>
+      <p:sp>
+        <p:nvSpPr>
+          <p:cNvPr id="5" name="Rounded Rectangle 4"/>
           <p:cNvSpPr/>
           <p:nvPr/>
         </p:nvSpPr>
         <p:spPr>
           <a:xfrm>
-            <a:off x="1371600" y="2514600"/>
-            <a:ext cx="73152" cy="731520"/>
-          </a:xfrm>
-          <a:prstGeom prst="rect">
+            <a:off x="4449927" y="1645920"/>
+            <a:ext cx="3291840" cy="1188720"/>
+          </a:xfrm>
+          <a:prstGeom prst="roundRect">
             <a:avLst/>
           </a:prstGeom>
           <a:solidFill>
-            <a:srgbClr val="D4D0C8"/>
+            <a:srgbClr val="151D30"/>
           </a:solidFill>
-          <a:ln>
-            <a:noFill/>
+          <a:ln w="19050">
+            <a:solidFill>
+              <a:srgbClr val="D4D0C8"/>
+            </a:solidFill>
           </a:ln>
         </p:spPr>
         <p:style>
@@ -5937,23 +5842,33 @@
           </a:fontRef>
         </p:style>
         <p:txBody>
-          <a:bodyPr rtlCol="0" anchor="ctr"/>
-          <a:lstStyle/>
-          <a:p>
-            <a:pPr algn="ctr"/>
-          </a:p>
-        </p:txBody>
-      </p:sp>
-      <p:sp>
-        <p:nvSpPr>
-          <p:cNvPr id="7" name="TextBox 6"/>
+          <a:bodyPr rtlCol="0" anchor="ctr" wrap="square"/>
+          <a:lstStyle/>
+          <a:p>
+            <a:pPr algn="ctr">
+              <a:defRPr sz="2400" b="1">
+                <a:solidFill>
+                  <a:srgbClr val="F5F5F0"/>
+                </a:solidFill>
+                <a:latin typeface="Segoe UI"/>
+              </a:defRPr>
+            </a:pPr>
+            <a:r>
+              <a:t>Robotic Arm</a:t>
+            </a:r>
+          </a:p>
+        </p:txBody>
+      </p:sp>
+      <p:sp>
+        <p:nvSpPr>
+          <p:cNvPr id="6" name="TextBox 5"/>
           <p:cNvSpPr txBox="1"/>
           <p:nvPr/>
         </p:nvSpPr>
         <p:spPr>
           <a:xfrm>
-            <a:off x="1828800" y="2468880"/>
-            <a:ext cx="3657600" cy="457200"/>
+            <a:off x="4724247" y="3108960"/>
+            <a:ext cx="2743200" cy="1828800"/>
           </a:xfrm>
           <a:prstGeom prst="rect">
             <a:avLst/>
@@ -5967,74 +5882,48 @@
           <a:lstStyle/>
           <a:p>
             <a:pPr algn="l">
-              <a:defRPr sz="2200" b="1" i="0">
-                <a:solidFill>
-                  <a:srgbClr val="F5F5F0"/>
-                </a:solidFill>
-                <a:latin typeface="Segoe UI"/>
-              </a:defRPr>
-            </a:pPr>
-            <a:r>
-              <a:t>Explainability</a:t>
-            </a:r>
-          </a:p>
-        </p:txBody>
-      </p:sp>
-      <p:sp>
-        <p:nvSpPr>
-          <p:cNvPr id="8" name="TextBox 7"/>
-          <p:cNvSpPr txBox="1"/>
-          <p:nvPr/>
-        </p:nvSpPr>
-        <p:spPr>
-          <a:xfrm>
-            <a:off x="1828800" y="2880360"/>
-            <a:ext cx="8229600" cy="457200"/>
-          </a:xfrm>
-          <a:prstGeom prst="rect">
-            <a:avLst/>
-          </a:prstGeom>
-          <a:noFill/>
-        </p:spPr>
-        <p:txBody>
-          <a:bodyPr wrap="square">
-            <a:spAutoFit/>
-          </a:bodyPr>
-          <a:lstStyle/>
-          <a:p>
-            <a:pPr algn="l">
-              <a:defRPr sz="1700" b="0" i="0">
-                <a:solidFill>
-                  <a:srgbClr val="6B7280"/>
-                </a:solidFill>
-                <a:latin typeface="Segoe UI"/>
-              </a:defRPr>
-            </a:pPr>
-            <a:r>
-              <a:t>Can you trace why it made that call?</a:t>
-            </a:r>
-          </a:p>
-        </p:txBody>
-      </p:sp>
-      <p:sp>
-        <p:nvSpPr>
-          <p:cNvPr id="9" name="Rectangle 8"/>
+              <a:defRPr sz="1800" b="0" i="0">
+                <a:solidFill>
+                  <a:srgbClr val="8B919C"/>
+                </a:solidFill>
+                <a:latin typeface="Segoe UI"/>
+              </a:defRPr>
+            </a:pPr>
+            <a:r>
+              <a:t>Bearing wear</a:t>
+            </a:r>
+            <a:br/>
+            <a:r>
+              <a:t>→ Predict</a:t>
+            </a:r>
+            <a:br/>
+            <a:r>
+              <a:t>→ Schedule</a:t>
+            </a:r>
+          </a:p>
+        </p:txBody>
+      </p:sp>
+      <p:sp>
+        <p:nvSpPr>
+          <p:cNvPr id="7" name="Rounded Rectangle 6"/>
           <p:cNvSpPr/>
           <p:nvPr/>
         </p:nvSpPr>
         <p:spPr>
           <a:xfrm>
-            <a:off x="1371600" y="3703320"/>
-            <a:ext cx="73152" cy="731520"/>
-          </a:xfrm>
-          <a:prstGeom prst="rect">
+            <a:off x="8061807" y="1645920"/>
+            <a:ext cx="3291840" cy="1188720"/>
+          </a:xfrm>
+          <a:prstGeom prst="roundRect">
             <a:avLst/>
           </a:prstGeom>
           <a:solidFill>
-            <a:srgbClr val="D4D0C8"/>
+            <a:srgbClr val="151D30"/>
           </a:solidFill>
-          <a:ln>
-            <a:noFill/>
+          <a:ln w="19050">
+            <a:solidFill>
+              <a:srgbClr val="D4D0C8"/>
+            </a:solidFill>
           </a:ln>
         </p:spPr>
         <p:style>
@@ -6052,23 +5941,33 @@
           </a:fontRef>
         </p:style>
         <p:txBody>
-          <a:bodyPr rtlCol="0" anchor="ctr"/>
-          <a:lstStyle/>
-          <a:p>
-            <a:pPr algn="ctr"/>
-          </a:p>
-        </p:txBody>
-      </p:sp>
-      <p:sp>
-        <p:nvSpPr>
-          <p:cNvPr id="10" name="TextBox 9"/>
+          <a:bodyPr rtlCol="0" anchor="ctr" wrap="square"/>
+          <a:lstStyle/>
+          <a:p>
+            <a:pPr algn="ctr">
+              <a:defRPr sz="2400" b="1">
+                <a:solidFill>
+                  <a:srgbClr val="F5F5F0"/>
+                </a:solidFill>
+                <a:latin typeface="Segoe UI"/>
+              </a:defRPr>
+            </a:pPr>
+            <a:r>
+              <a:t>ADAS Sensor Suite</a:t>
+            </a:r>
+          </a:p>
+        </p:txBody>
+      </p:sp>
+      <p:sp>
+        <p:nvSpPr>
+          <p:cNvPr id="8" name="TextBox 7"/>
           <p:cNvSpPr txBox="1"/>
           <p:nvPr/>
         </p:nvSpPr>
         <p:spPr>
           <a:xfrm>
-            <a:off x="1828800" y="3657600"/>
-            <a:ext cx="3657600" cy="457200"/>
+            <a:off x="8336127" y="3108960"/>
+            <a:ext cx="2743200" cy="1828800"/>
           </a:xfrm>
           <a:prstGeom prst="rect">
             <a:avLst/>
@@ -6082,29 +5981,37 @@
           <a:lstStyle/>
           <a:p>
             <a:pPr algn="l">
-              <a:defRPr sz="2200" b="1" i="0">
-                <a:solidFill>
-                  <a:srgbClr val="F5F5F0"/>
-                </a:solidFill>
-                <a:latin typeface="Segoe UI"/>
-              </a:defRPr>
-            </a:pPr>
-            <a:r>
-              <a:t>Security</a:t>
-            </a:r>
-          </a:p>
-        </p:txBody>
-      </p:sp>
-      <p:sp>
-        <p:nvSpPr>
-          <p:cNvPr id="11" name="TextBox 10"/>
+              <a:defRPr sz="1800" b="0" i="0">
+                <a:solidFill>
+                  <a:srgbClr val="8B919C"/>
+                </a:solidFill>
+                <a:latin typeface="Segoe UI"/>
+              </a:defRPr>
+            </a:pPr>
+            <a:r>
+              <a:t>Sensor fusion</a:t>
+            </a:r>
+            <a:br/>
+            <a:r>
+              <a:t>→ Safety</a:t>
+            </a:r>
+            <a:br/>
+            <a:r>
+              <a:t>→ Adapt</a:t>
+            </a:r>
+          </a:p>
+        </p:txBody>
+      </p:sp>
+      <p:sp>
+        <p:nvSpPr>
+          <p:cNvPr id="9" name="TextBox 8"/>
           <p:cNvSpPr txBox="1"/>
           <p:nvPr/>
         </p:nvSpPr>
         <p:spPr>
           <a:xfrm>
-            <a:off x="1828800" y="4069080"/>
-            <a:ext cx="8229600" cy="457200"/>
+            <a:off x="914400" y="5303520"/>
+            <a:ext cx="10058400" cy="914400"/>
           </a:xfrm>
           <a:prstGeom prst="rect">
             <a:avLst/>
@@ -6118,130 +6025,19 @@
           <a:lstStyle/>
           <a:p>
             <a:pPr algn="l">
-              <a:defRPr sz="1700" b="0" i="0">
-                <a:solidFill>
-                  <a:srgbClr val="6B7280"/>
-                </a:solidFill>
-                <a:latin typeface="Segoe UI"/>
-              </a:defRPr>
-            </a:pPr>
-            <a:r>
-              <a:t>New attack surfaces we haven't fully mapped.</a:t>
-            </a:r>
-          </a:p>
-        </p:txBody>
-      </p:sp>
-      <p:sp>
-        <p:nvSpPr>
-          <p:cNvPr id="12" name="Rectangle 11"/>
-          <p:cNvSpPr/>
-          <p:nvPr/>
-        </p:nvSpPr>
-        <p:spPr>
-          <a:xfrm>
-            <a:off x="1371600" y="4892040"/>
-            <a:ext cx="73152" cy="731520"/>
-          </a:xfrm>
-          <a:prstGeom prst="rect">
-            <a:avLst/>
-          </a:prstGeom>
-          <a:solidFill>
-            <a:srgbClr val="D4D0C8"/>
-          </a:solidFill>
-          <a:ln>
-            <a:noFill/>
-          </a:ln>
-        </p:spPr>
-        <p:style>
-          <a:lnRef idx="1">
-            <a:schemeClr val="accent1"/>
-          </a:lnRef>
-          <a:fillRef idx="3">
-            <a:schemeClr val="accent1"/>
-          </a:fillRef>
-          <a:effectRef idx="2">
-            <a:schemeClr val="accent1"/>
-          </a:effectRef>
-          <a:fontRef idx="minor">
-            <a:schemeClr val="lt1"/>
-          </a:fontRef>
-        </p:style>
-        <p:txBody>
-          <a:bodyPr rtlCol="0" anchor="ctr"/>
-          <a:lstStyle/>
-          <a:p>
-            <a:pPr algn="ctr"/>
-          </a:p>
-        </p:txBody>
-      </p:sp>
-      <p:sp>
-        <p:nvSpPr>
-          <p:cNvPr id="13" name="TextBox 12"/>
-          <p:cNvSpPr txBox="1"/>
-          <p:nvPr/>
-        </p:nvSpPr>
-        <p:spPr>
-          <a:xfrm>
-            <a:off x="1828800" y="4846320"/>
-            <a:ext cx="3657600" cy="457200"/>
-          </a:xfrm>
-          <a:prstGeom prst="rect">
-            <a:avLst/>
-          </a:prstGeom>
-          <a:noFill/>
-        </p:spPr>
-        <p:txBody>
-          <a:bodyPr wrap="square">
-            <a:spAutoFit/>
-          </a:bodyPr>
-          <a:lstStyle/>
-          <a:p>
-            <a:pPr algn="l">
               <a:defRPr sz="2200" b="1" i="0">
                 <a:solidFill>
-                  <a:srgbClr val="F5F5F0"/>
-                </a:solidFill>
-                <a:latin typeface="Segoe UI"/>
-              </a:defRPr>
-            </a:pPr>
-            <a:r>
-              <a:t>Governance</a:t>
-            </a:r>
-          </a:p>
-        </p:txBody>
-      </p:sp>
-      <p:sp>
-        <p:nvSpPr>
-          <p:cNvPr id="14" name="TextBox 13"/>
-          <p:cNvSpPr txBox="1"/>
-          <p:nvPr/>
-        </p:nvSpPr>
-        <p:spPr>
-          <a:xfrm>
-            <a:off x="1828800" y="5257800"/>
-            <a:ext cx="8229600" cy="457200"/>
-          </a:xfrm>
-          <a:prstGeom prst="rect">
-            <a:avLst/>
-          </a:prstGeom>
-          <a:noFill/>
-        </p:spPr>
-        <p:txBody>
-          <a:bodyPr wrap="square">
-            <a:spAutoFit/>
-          </a:bodyPr>
-          <a:lstStyle/>
-          <a:p>
-            <a:pPr algn="l">
-              <a:defRPr sz="1700" b="0" i="0">
-                <a:solidFill>
-                  <a:srgbClr val="6B7280"/>
-                </a:solidFill>
-                <a:latin typeface="Segoe UI"/>
-              </a:defRPr>
-            </a:pPr>
-            <a:r>
-              <a:t>Our frameworks weren't built for autonomous agents.</a:t>
+                  <a:srgbClr val="E8E4D9"/>
+                </a:solidFill>
+                <a:latin typeface="Segoe UI"/>
+              </a:defRPr>
+            </a:pPr>
+            <a:r>
+              <a:t>Same loop. Same architecture. Different worlds.</a:t>
+            </a:r>
+            <a:br/>
+            <a:r>
+              <a:t>The pattern is universal.</a:t>
             </a:r>
           </a:p>
         </p:txBody>
@@ -6288,8 +6084,8 @@
         </p:nvSpPr>
         <p:spPr>
           <a:xfrm>
-            <a:off x="1371600" y="1097280"/>
-            <a:ext cx="9144000" cy="914400"/>
+            <a:off x="1097280" y="457200"/>
+            <a:ext cx="4572000" cy="457200"/>
           </a:xfrm>
           <a:prstGeom prst="rect">
             <a:avLst/>
@@ -6303,64 +6099,38 @@
           <a:lstStyle/>
           <a:p>
             <a:pPr algn="l">
-              <a:defRPr sz="3600" b="1" i="0">
-                <a:solidFill>
-                  <a:srgbClr val="F5F5F0"/>
-                </a:solidFill>
-                <a:latin typeface="Segoe UI"/>
-              </a:defRPr>
-            </a:pPr>
-            <a:r>
-              <a:t>Talk to an agentic digital twin yourself.</a:t>
-            </a:r>
-          </a:p>
-        </p:txBody>
-      </p:sp>
-      <p:pic>
-        <p:nvPicPr>
-          <p:cNvPr id="3" name="Picture 2" descr="qr-demo.png"/>
-          <p:cNvPicPr>
-            <a:picLocks noChangeAspect="1"/>
-          </p:cNvPicPr>
-          <p:nvPr/>
-        </p:nvPicPr>
-        <p:blipFill>
-          <a:blip r:embed="rId2"/>
-          <a:stretch>
-            <a:fillRect/>
-          </a:stretch>
-        </p:blipFill>
-        <p:spPr>
-          <a:xfrm>
-            <a:off x="4297680" y="2286000"/>
-            <a:ext cx="3566160" cy="3200400"/>
-          </a:xfrm>
-          <a:prstGeom prst="rect">
-            <a:avLst/>
-          </a:prstGeom>
-        </p:spPr>
-      </p:pic>
-      <p:sp>
-        <p:nvSpPr>
-          <p:cNvPr id="4" name="Rounded Rectangle 3"/>
+              <a:defRPr sz="2000" b="0" i="0">
+                <a:solidFill>
+                  <a:srgbClr val="8B919C"/>
+                </a:solidFill>
+                <a:latin typeface="Segoe UI"/>
+              </a:defRPr>
+            </a:pPr>
+            <a:r>
+              <a:t>Let's Be Honest</a:t>
+            </a:r>
+          </a:p>
+        </p:txBody>
+      </p:sp>
+      <p:sp>
+        <p:nvSpPr>
+          <p:cNvPr id="3" name="Rectangle 2"/>
           <p:cNvSpPr/>
           <p:nvPr/>
         </p:nvSpPr>
         <p:spPr>
           <a:xfrm>
-            <a:off x="2286000" y="5760720"/>
-            <a:ext cx="2286000" cy="548640"/>
-          </a:xfrm>
-          <a:prstGeom prst="roundRect">
+            <a:off x="1371600" y="1325880"/>
+            <a:ext cx="73152" cy="731520"/>
+          </a:xfrm>
+          <a:prstGeom prst="rect">
             <a:avLst/>
           </a:prstGeom>
           <a:solidFill>
-            <a:srgbClr val="151D30"/>
+            <a:srgbClr val="D4D0C8"/>
           </a:solidFill>
-          <a:ln w="19050">
-            <a:solidFill>
-              <a:srgbClr val="4B5563"/>
-            </a:solidFill>
+          <a:ln>
+            <a:noFill/>
           </a:ln>
         </p:spPr>
         <p:style>
@@ -6378,44 +6148,104 @@
           </a:fontRef>
         </p:style>
         <p:txBody>
-          <a:bodyPr rtlCol="0" anchor="ctr" wrap="square"/>
-          <a:lstStyle/>
-          <a:p>
-            <a:pPr algn="ctr">
-              <a:defRPr sz="1400" b="0">
-                <a:solidFill>
-                  <a:srgbClr val="E8E4D9"/>
-                </a:solidFill>
-                <a:latin typeface="Segoe UI"/>
-              </a:defRPr>
-            </a:pPr>
-            <a:r>
-              <a:t>Edge AI</a:t>
-            </a:r>
-          </a:p>
-        </p:txBody>
-      </p:sp>
-      <p:sp>
-        <p:nvSpPr>
-          <p:cNvPr id="5" name="Rounded Rectangle 4"/>
+          <a:bodyPr rtlCol="0" anchor="ctr"/>
+          <a:lstStyle/>
+          <a:p>
+            <a:pPr algn="ctr"/>
+          </a:p>
+        </p:txBody>
+      </p:sp>
+      <p:sp>
+        <p:nvSpPr>
+          <p:cNvPr id="4" name="TextBox 3"/>
+          <p:cNvSpPr txBox="1"/>
+          <p:nvPr/>
+        </p:nvSpPr>
+        <p:spPr>
+          <a:xfrm>
+            <a:off x="1828800" y="1280160"/>
+            <a:ext cx="3657600" cy="457200"/>
+          </a:xfrm>
+          <a:prstGeom prst="rect">
+            <a:avLst/>
+          </a:prstGeom>
+          <a:noFill/>
+        </p:spPr>
+        <p:txBody>
+          <a:bodyPr wrap="square">
+            <a:spAutoFit/>
+          </a:bodyPr>
+          <a:lstStyle/>
+          <a:p>
+            <a:pPr algn="l">
+              <a:defRPr sz="2200" b="1" i="0">
+                <a:solidFill>
+                  <a:srgbClr val="F5F5F0"/>
+                </a:solidFill>
+                <a:latin typeface="Segoe UI"/>
+              </a:defRPr>
+            </a:pPr>
+            <a:r>
+              <a:t>Accountability</a:t>
+            </a:r>
+          </a:p>
+        </p:txBody>
+      </p:sp>
+      <p:sp>
+        <p:nvSpPr>
+          <p:cNvPr id="5" name="TextBox 4"/>
+          <p:cNvSpPr txBox="1"/>
+          <p:nvPr/>
+        </p:nvSpPr>
+        <p:spPr>
+          <a:xfrm>
+            <a:off x="1828800" y="1691640"/>
+            <a:ext cx="8229600" cy="457200"/>
+          </a:xfrm>
+          <a:prstGeom prst="rect">
+            <a:avLst/>
+          </a:prstGeom>
+          <a:noFill/>
+        </p:spPr>
+        <p:txBody>
+          <a:bodyPr wrap="square">
+            <a:spAutoFit/>
+          </a:bodyPr>
+          <a:lstStyle/>
+          <a:p>
+            <a:pPr algn="l">
+              <a:defRPr sz="1700" b="0" i="0">
+                <a:solidFill>
+                  <a:srgbClr val="8B919C"/>
+                </a:solidFill>
+                <a:latin typeface="Segoe UI"/>
+              </a:defRPr>
+            </a:pPr>
+            <a:r>
+              <a:t>When the agent decides wrong, who owns it?</a:t>
+            </a:r>
+          </a:p>
+        </p:txBody>
+      </p:sp>
+      <p:sp>
+        <p:nvSpPr>
+          <p:cNvPr id="6" name="Rectangle 5"/>
           <p:cNvSpPr/>
           <p:nvPr/>
         </p:nvSpPr>
         <p:spPr>
           <a:xfrm>
-            <a:off x="5212080" y="5760720"/>
-            <a:ext cx="2286000" cy="548640"/>
-          </a:xfrm>
-          <a:prstGeom prst="roundRect">
+            <a:off x="1371600" y="2514600"/>
+            <a:ext cx="73152" cy="731520"/>
+          </a:xfrm>
+          <a:prstGeom prst="rect">
             <a:avLst/>
           </a:prstGeom>
           <a:solidFill>
-            <a:srgbClr val="151D30"/>
+            <a:srgbClr val="D4D0C8"/>
           </a:solidFill>
-          <a:ln w="19050">
-            <a:solidFill>
-              <a:srgbClr val="4B5563"/>
-            </a:solidFill>
+          <a:ln>
+            <a:noFill/>
           </a:ln>
         </p:spPr>
         <p:style>
@@ -6433,44 +6263,104 @@
           </a:fontRef>
         </p:style>
         <p:txBody>
-          <a:bodyPr rtlCol="0" anchor="ctr" wrap="square"/>
-          <a:lstStyle/>
-          <a:p>
-            <a:pPr algn="ctr">
-              <a:defRPr sz="1400" b="0">
-                <a:solidFill>
-                  <a:srgbClr val="E8E4D9"/>
-                </a:solidFill>
-                <a:latin typeface="Segoe UI"/>
-              </a:defRPr>
-            </a:pPr>
-            <a:r>
-              <a:t>Robotic Arm</a:t>
-            </a:r>
-          </a:p>
-        </p:txBody>
-      </p:sp>
-      <p:sp>
-        <p:nvSpPr>
-          <p:cNvPr id="6" name="Rounded Rectangle 5"/>
+          <a:bodyPr rtlCol="0" anchor="ctr"/>
+          <a:lstStyle/>
+          <a:p>
+            <a:pPr algn="ctr"/>
+          </a:p>
+        </p:txBody>
+      </p:sp>
+      <p:sp>
+        <p:nvSpPr>
+          <p:cNvPr id="7" name="TextBox 6"/>
+          <p:cNvSpPr txBox="1"/>
+          <p:nvPr/>
+        </p:nvSpPr>
+        <p:spPr>
+          <a:xfrm>
+            <a:off x="1828800" y="2468880"/>
+            <a:ext cx="3657600" cy="457200"/>
+          </a:xfrm>
+          <a:prstGeom prst="rect">
+            <a:avLst/>
+          </a:prstGeom>
+          <a:noFill/>
+        </p:spPr>
+        <p:txBody>
+          <a:bodyPr wrap="square">
+            <a:spAutoFit/>
+          </a:bodyPr>
+          <a:lstStyle/>
+          <a:p>
+            <a:pPr algn="l">
+              <a:defRPr sz="2200" b="1" i="0">
+                <a:solidFill>
+                  <a:srgbClr val="F5F5F0"/>
+                </a:solidFill>
+                <a:latin typeface="Segoe UI"/>
+              </a:defRPr>
+            </a:pPr>
+            <a:r>
+              <a:t>Explainability</a:t>
+            </a:r>
+          </a:p>
+        </p:txBody>
+      </p:sp>
+      <p:sp>
+        <p:nvSpPr>
+          <p:cNvPr id="8" name="TextBox 7"/>
+          <p:cNvSpPr txBox="1"/>
+          <p:nvPr/>
+        </p:nvSpPr>
+        <p:spPr>
+          <a:xfrm>
+            <a:off x="1828800" y="2880360"/>
+            <a:ext cx="8229600" cy="457200"/>
+          </a:xfrm>
+          <a:prstGeom prst="rect">
+            <a:avLst/>
+          </a:prstGeom>
+          <a:noFill/>
+        </p:spPr>
+        <p:txBody>
+          <a:bodyPr wrap="square">
+            <a:spAutoFit/>
+          </a:bodyPr>
+          <a:lstStyle/>
+          <a:p>
+            <a:pPr algn="l">
+              <a:defRPr sz="1700" b="0" i="0">
+                <a:solidFill>
+                  <a:srgbClr val="8B919C"/>
+                </a:solidFill>
+                <a:latin typeface="Segoe UI"/>
+              </a:defRPr>
+            </a:pPr>
+            <a:r>
+              <a:t>Can you trace why it made that call?</a:t>
+            </a:r>
+          </a:p>
+        </p:txBody>
+      </p:sp>
+      <p:sp>
+        <p:nvSpPr>
+          <p:cNvPr id="9" name="Rectangle 8"/>
           <p:cNvSpPr/>
           <p:nvPr/>
         </p:nvSpPr>
         <p:spPr>
           <a:xfrm>
-            <a:off x="8138160" y="5760720"/>
-            <a:ext cx="2286000" cy="548640"/>
-          </a:xfrm>
-          <a:prstGeom prst="roundRect">
+            <a:off x="1371600" y="3703320"/>
+            <a:ext cx="73152" cy="731520"/>
+          </a:xfrm>
+          <a:prstGeom prst="rect">
             <a:avLst/>
           </a:prstGeom>
           <a:solidFill>
-            <a:srgbClr val="151D30"/>
+            <a:srgbClr val="D4D0C8"/>
           </a:solidFill>
-          <a:ln w="19050">
-            <a:solidFill>
-              <a:srgbClr val="4B5563"/>
-            </a:solidFill>
+          <a:ln>
+            <a:noFill/>
           </a:ln>
         </p:spPr>
         <p:style>
@@ -6488,33 +6378,23 @@
           </a:fontRef>
         </p:style>
         <p:txBody>
-          <a:bodyPr rtlCol="0" anchor="ctr" wrap="square"/>
-          <a:lstStyle/>
-          <a:p>
-            <a:pPr algn="ctr">
-              <a:defRPr sz="1400" b="0">
-                <a:solidFill>
-                  <a:srgbClr val="E8E4D9"/>
-                </a:solidFill>
-                <a:latin typeface="Segoe UI"/>
-              </a:defRPr>
-            </a:pPr>
-            <a:r>
-              <a:t>ADAS</a:t>
-            </a:r>
-          </a:p>
-        </p:txBody>
-      </p:sp>
-      <p:sp>
-        <p:nvSpPr>
-          <p:cNvPr id="7" name="TextBox 6"/>
+          <a:bodyPr rtlCol="0" anchor="ctr"/>
+          <a:lstStyle/>
+          <a:p>
+            <a:pPr algn="ctr"/>
+          </a:p>
+        </p:txBody>
+      </p:sp>
+      <p:sp>
+        <p:nvSpPr>
+          <p:cNvPr id="10" name="TextBox 9"/>
           <p:cNvSpPr txBox="1"/>
           <p:nvPr/>
         </p:nvSpPr>
         <p:spPr>
           <a:xfrm>
-            <a:off x="0" y="6355080"/>
-            <a:ext cx="12191695" cy="365760"/>
+            <a:off x="1828800" y="3657600"/>
+            <a:ext cx="3657600" cy="457200"/>
           </a:xfrm>
           <a:prstGeom prst="rect">
             <a:avLst/>
@@ -6527,16 +6407,167 @@
           </a:bodyPr>
           <a:lstStyle/>
           <a:p>
-            <a:pPr algn="ctr">
-              <a:defRPr sz="1400" b="0" i="0">
-                <a:solidFill>
-                  <a:srgbClr val="6B7280"/>
-                </a:solidFill>
-                <a:latin typeface="Segoe UI"/>
-              </a:defRPr>
-            </a:pPr>
-            <a:r>
-              <a:t>tonypdemo.it.com</a:t>
+            <a:pPr algn="l">
+              <a:defRPr sz="2200" b="1" i="0">
+                <a:solidFill>
+                  <a:srgbClr val="F5F5F0"/>
+                </a:solidFill>
+                <a:latin typeface="Segoe UI"/>
+              </a:defRPr>
+            </a:pPr>
+            <a:r>
+              <a:t>Security</a:t>
+            </a:r>
+          </a:p>
+        </p:txBody>
+      </p:sp>
+      <p:sp>
+        <p:nvSpPr>
+          <p:cNvPr id="11" name="TextBox 10"/>
+          <p:cNvSpPr txBox="1"/>
+          <p:nvPr/>
+        </p:nvSpPr>
+        <p:spPr>
+          <a:xfrm>
+            <a:off x="1828800" y="4069080"/>
+            <a:ext cx="8229600" cy="457200"/>
+          </a:xfrm>
+          <a:prstGeom prst="rect">
+            <a:avLst/>
+          </a:prstGeom>
+          <a:noFill/>
+        </p:spPr>
+        <p:txBody>
+          <a:bodyPr wrap="square">
+            <a:spAutoFit/>
+          </a:bodyPr>
+          <a:lstStyle/>
+          <a:p>
+            <a:pPr algn="l">
+              <a:defRPr sz="1700" b="0" i="0">
+                <a:solidFill>
+                  <a:srgbClr val="8B919C"/>
+                </a:solidFill>
+                <a:latin typeface="Segoe UI"/>
+              </a:defRPr>
+            </a:pPr>
+            <a:r>
+              <a:t>New attack surfaces we haven't fully mapped.</a:t>
+            </a:r>
+          </a:p>
+        </p:txBody>
+      </p:sp>
+      <p:sp>
+        <p:nvSpPr>
+          <p:cNvPr id="12" name="Rectangle 11"/>
+          <p:cNvSpPr/>
+          <p:nvPr/>
+        </p:nvSpPr>
+        <p:spPr>
+          <a:xfrm>
+            <a:off x="1371600" y="4892040"/>
+            <a:ext cx="73152" cy="731520"/>
+          </a:xfrm>
+          <a:prstGeom prst="rect">
+            <a:avLst/>
+          </a:prstGeom>
+          <a:solidFill>
+            <a:srgbClr val="D4D0C8"/>
+          </a:solidFill>
+          <a:ln>
+            <a:noFill/>
+          </a:ln>
+        </p:spPr>
+        <p:style>
+          <a:lnRef idx="1">
+            <a:schemeClr val="accent1"/>
+          </a:lnRef>
+          <a:fillRef idx="3">
+            <a:schemeClr val="accent1"/>
+          </a:fillRef>
+          <a:effectRef idx="2">
+            <a:schemeClr val="accent1"/>
+          </a:effectRef>
+          <a:fontRef idx="minor">
+            <a:schemeClr val="lt1"/>
+          </a:fontRef>
+        </p:style>
+        <p:txBody>
+          <a:bodyPr rtlCol="0" anchor="ctr"/>
+          <a:lstStyle/>
+          <a:p>
+            <a:pPr algn="ctr"/>
+          </a:p>
+        </p:txBody>
+      </p:sp>
+      <p:sp>
+        <p:nvSpPr>
+          <p:cNvPr id="13" name="TextBox 12"/>
+          <p:cNvSpPr txBox="1"/>
+          <p:nvPr/>
+        </p:nvSpPr>
+        <p:spPr>
+          <a:xfrm>
+            <a:off x="1828800" y="4846320"/>
+            <a:ext cx="3657600" cy="457200"/>
+          </a:xfrm>
+          <a:prstGeom prst="rect">
+            <a:avLst/>
+          </a:prstGeom>
+          <a:noFill/>
+        </p:spPr>
+        <p:txBody>
+          <a:bodyPr wrap="square">
+            <a:spAutoFit/>
+          </a:bodyPr>
+          <a:lstStyle/>
+          <a:p>
+            <a:pPr algn="l">
+              <a:defRPr sz="2200" b="1" i="0">
+                <a:solidFill>
+                  <a:srgbClr val="F5F5F0"/>
+                </a:solidFill>
+                <a:latin typeface="Segoe UI"/>
+              </a:defRPr>
+            </a:pPr>
+            <a:r>
+              <a:t>Governance</a:t>
+            </a:r>
+          </a:p>
+        </p:txBody>
+      </p:sp>
+      <p:sp>
+        <p:nvSpPr>
+          <p:cNvPr id="14" name="TextBox 13"/>
+          <p:cNvSpPr txBox="1"/>
+          <p:nvPr/>
+        </p:nvSpPr>
+        <p:spPr>
+          <a:xfrm>
+            <a:off x="1828800" y="5257800"/>
+            <a:ext cx="8229600" cy="457200"/>
+          </a:xfrm>
+          <a:prstGeom prst="rect">
+            <a:avLst/>
+          </a:prstGeom>
+          <a:noFill/>
+        </p:spPr>
+        <p:txBody>
+          <a:bodyPr wrap="square">
+            <a:spAutoFit/>
+          </a:bodyPr>
+          <a:lstStyle/>
+          <a:p>
+            <a:pPr algn="l">
+              <a:defRPr sz="1700" b="0" i="0">
+                <a:solidFill>
+                  <a:srgbClr val="8B919C"/>
+                </a:solidFill>
+                <a:latin typeface="Segoe UI"/>
+              </a:defRPr>
+            </a:pPr>
+            <a:r>
+              <a:t>Our frameworks weren't built for autonomous agents.</a:t>
             </a:r>
           </a:p>
         </p:txBody>
@@ -6583,8 +6614,8 @@
         </p:nvSpPr>
         <p:spPr>
           <a:xfrm>
-            <a:off x="1371600" y="1371600"/>
-            <a:ext cx="9144000" cy="1371600"/>
+            <a:off x="1371600" y="1097280"/>
+            <a:ext cx="9144000" cy="914400"/>
           </a:xfrm>
           <a:prstGeom prst="rect">
             <a:avLst/>
@@ -6598,90 +6629,7 @@
           <a:lstStyle/>
           <a:p>
             <a:pPr algn="l">
-              <a:defRPr sz="2800" b="0" i="1">
-                <a:solidFill>
-                  <a:srgbClr val="E8E4D9"/>
-                </a:solidFill>
-                <a:latin typeface="Segoe UI"/>
-              </a:defRPr>
-            </a:pPr>
-            <a:r>
-              <a:t>Digital twins already have the data.</a:t>
-            </a:r>
-            <a:br/>
-            <a:r>
-              <a:t>Agentic AI gives them the ability to act on it.</a:t>
-            </a:r>
-          </a:p>
-        </p:txBody>
-      </p:sp>
-      <p:sp>
-        <p:nvSpPr>
-          <p:cNvPr id="3" name="Rectangle 2"/>
-          <p:cNvSpPr/>
-          <p:nvPr/>
-        </p:nvSpPr>
-        <p:spPr>
-          <a:xfrm>
-            <a:off x="1371600" y="3200400"/>
-            <a:ext cx="2286000" cy="10972"/>
-          </a:xfrm>
-          <a:prstGeom prst="rect">
-            <a:avLst/>
-          </a:prstGeom>
-          <a:solidFill>
-            <a:srgbClr val="D4D0C8"/>
-          </a:solidFill>
-          <a:ln>
-            <a:noFill/>
-          </a:ln>
-        </p:spPr>
-        <p:style>
-          <a:lnRef idx="1">
-            <a:schemeClr val="accent1"/>
-          </a:lnRef>
-          <a:fillRef idx="3">
-            <a:schemeClr val="accent1"/>
-          </a:fillRef>
-          <a:effectRef idx="2">
-            <a:schemeClr val="accent1"/>
-          </a:effectRef>
-          <a:fontRef idx="minor">
-            <a:schemeClr val="lt1"/>
-          </a:fontRef>
-        </p:style>
-        <p:txBody>
-          <a:bodyPr rtlCol="0" anchor="ctr"/>
-          <a:lstStyle/>
-          <a:p>
-            <a:pPr algn="ctr"/>
-          </a:p>
-        </p:txBody>
-      </p:sp>
-      <p:sp>
-        <p:nvSpPr>
-          <p:cNvPr id="4" name="TextBox 3"/>
-          <p:cNvSpPr txBox="1"/>
-          <p:nvPr/>
-        </p:nvSpPr>
-        <p:spPr>
-          <a:xfrm>
-            <a:off x="1371600" y="3657600"/>
-            <a:ext cx="5486400" cy="914400"/>
-          </a:xfrm>
-          <a:prstGeom prst="rect">
-            <a:avLst/>
-          </a:prstGeom>
-          <a:noFill/>
-        </p:spPr>
-        <p:txBody>
-          <a:bodyPr wrap="square">
-            <a:spAutoFit/>
-          </a:bodyPr>
-          <a:lstStyle/>
-          <a:p>
-            <a:pPr algn="l">
-              <a:defRPr sz="4400" b="1" i="0">
+              <a:defRPr sz="3600" b="1" i="0">
                 <a:solidFill>
                   <a:srgbClr val="F5F5F0"/>
                 </a:solidFill>
@@ -6689,122 +6637,14 @@
               </a:defRPr>
             </a:pPr>
             <a:r>
-              <a:t>Anthony Poole</a:t>
-            </a:r>
-          </a:p>
-        </p:txBody>
-      </p:sp>
-      <p:sp>
-        <p:nvSpPr>
-          <p:cNvPr id="5" name="TextBox 4"/>
-          <p:cNvSpPr txBox="1"/>
-          <p:nvPr/>
-        </p:nvSpPr>
-        <p:spPr>
-          <a:xfrm>
-            <a:off x="1371600" y="4480560"/>
-            <a:ext cx="5486400" cy="548640"/>
-          </a:xfrm>
-          <a:prstGeom prst="rect">
-            <a:avLst/>
-          </a:prstGeom>
-          <a:noFill/>
-        </p:spPr>
-        <p:txBody>
-          <a:bodyPr wrap="square">
-            <a:spAutoFit/>
-          </a:bodyPr>
-          <a:lstStyle/>
-          <a:p>
-            <a:pPr algn="l">
-              <a:defRPr sz="2400" b="0" i="0">
-                <a:solidFill>
-                  <a:srgbClr val="E8E4D9"/>
-                </a:solidFill>
-                <a:latin typeface="Segoe UI"/>
-              </a:defRPr>
-            </a:pPr>
-            <a:r>
-              <a:t>AI Engineer, Microsoft</a:t>
-            </a:r>
-          </a:p>
-        </p:txBody>
-      </p:sp>
-      <p:sp>
-        <p:nvSpPr>
-          <p:cNvPr id="6" name="TextBox 5"/>
-          <p:cNvSpPr txBox="1"/>
-          <p:nvPr/>
-        </p:nvSpPr>
-        <p:spPr>
-          <a:xfrm>
-            <a:off x="1371600" y="5212080"/>
-            <a:ext cx="5486400" cy="457200"/>
-          </a:xfrm>
-          <a:prstGeom prst="rect">
-            <a:avLst/>
-          </a:prstGeom>
-          <a:noFill/>
-        </p:spPr>
-        <p:txBody>
-          <a:bodyPr wrap="square">
-            <a:spAutoFit/>
-          </a:bodyPr>
-          <a:lstStyle/>
-          <a:p>
-            <a:pPr algn="l">
-              <a:defRPr sz="1800" b="0" i="0">
-                <a:solidFill>
-                  <a:srgbClr val="6B7280"/>
-                </a:solidFill>
-                <a:latin typeface="Segoe UI"/>
-              </a:defRPr>
-            </a:pPr>
-            <a:r>
-              <a:t>anthony50102.github.io  ·  linkedin.com/in/anthony-poole-079548206</a:t>
-            </a:r>
-          </a:p>
-        </p:txBody>
-      </p:sp>
-      <p:sp>
-        <p:nvSpPr>
-          <p:cNvPr id="7" name="TextBox 6"/>
-          <p:cNvSpPr txBox="1"/>
-          <p:nvPr/>
-        </p:nvSpPr>
-        <p:spPr>
-          <a:xfrm>
-            <a:off x="1371600" y="5943600"/>
-            <a:ext cx="5486400" cy="457200"/>
-          </a:xfrm>
-          <a:prstGeom prst="rect">
-            <a:avLst/>
-          </a:prstGeom>
-          <a:noFill/>
-        </p:spPr>
-        <p:txBody>
-          <a:bodyPr wrap="square">
-            <a:spAutoFit/>
-          </a:bodyPr>
-          <a:lstStyle/>
-          <a:p>
-            <a:pPr algn="l">
-              <a:defRPr sz="2000" b="0" i="0">
-                <a:solidFill>
-                  <a:srgbClr val="E8E4D9"/>
-                </a:solidFill>
-                <a:latin typeface="Segoe UI"/>
-              </a:defRPr>
-            </a:pPr>
-            <a:r>
-              <a:t>Thank you.</a:t>
+              <a:t>Talk to an agentic digital twin yourself.</a:t>
             </a:r>
           </a:p>
         </p:txBody>
       </p:sp>
       <p:pic>
         <p:nvPicPr>
-          <p:cNvPr id="8" name="Picture 7" descr="qr-personal.png"/>
+          <p:cNvPr id="3" name="Picture 2" descr="qr-demo.png"/>
           <p:cNvPicPr>
             <a:picLocks noChangeAspect="1"/>
           </p:cNvPicPr>
@@ -6818,8 +6658,8 @@
         </p:blipFill>
         <p:spPr>
           <a:xfrm>
-            <a:off x="8869680" y="3657600"/>
-            <a:ext cx="2194560" cy="2194560"/>
+            <a:off x="4297680" y="2286000"/>
+            <a:ext cx="3566160" cy="3200400"/>
           </a:xfrm>
           <a:prstGeom prst="rect">
             <a:avLst/>
@@ -6828,14 +6668,179 @@
       </p:pic>
       <p:sp>
         <p:nvSpPr>
-          <p:cNvPr id="9" name="TextBox 8"/>
+          <p:cNvPr id="4" name="Rounded Rectangle 3"/>
+          <p:cNvSpPr/>
+          <p:nvPr/>
+        </p:nvSpPr>
+        <p:spPr>
+          <a:xfrm>
+            <a:off x="2286000" y="5760720"/>
+            <a:ext cx="2286000" cy="548640"/>
+          </a:xfrm>
+          <a:prstGeom prst="roundRect">
+            <a:avLst/>
+          </a:prstGeom>
+          <a:solidFill>
+            <a:srgbClr val="151D30"/>
+          </a:solidFill>
+          <a:ln w="19050">
+            <a:solidFill>
+              <a:srgbClr val="6B7280"/>
+            </a:solidFill>
+          </a:ln>
+        </p:spPr>
+        <p:style>
+          <a:lnRef idx="1">
+            <a:schemeClr val="accent1"/>
+          </a:lnRef>
+          <a:fillRef idx="3">
+            <a:schemeClr val="accent1"/>
+          </a:fillRef>
+          <a:effectRef idx="2">
+            <a:schemeClr val="accent1"/>
+          </a:effectRef>
+          <a:fontRef idx="minor">
+            <a:schemeClr val="lt1"/>
+          </a:fontRef>
+        </p:style>
+        <p:txBody>
+          <a:bodyPr rtlCol="0" anchor="ctr" wrap="square"/>
+          <a:lstStyle/>
+          <a:p>
+            <a:pPr algn="ctr">
+              <a:defRPr sz="1400" b="0">
+                <a:solidFill>
+                  <a:srgbClr val="E8E4D9"/>
+                </a:solidFill>
+                <a:latin typeface="Segoe UI"/>
+              </a:defRPr>
+            </a:pPr>
+            <a:r>
+              <a:t>Edge AI</a:t>
+            </a:r>
+          </a:p>
+        </p:txBody>
+      </p:sp>
+      <p:sp>
+        <p:nvSpPr>
+          <p:cNvPr id="5" name="Rounded Rectangle 4"/>
+          <p:cNvSpPr/>
+          <p:nvPr/>
+        </p:nvSpPr>
+        <p:spPr>
+          <a:xfrm>
+            <a:off x="5212080" y="5760720"/>
+            <a:ext cx="2286000" cy="548640"/>
+          </a:xfrm>
+          <a:prstGeom prst="roundRect">
+            <a:avLst/>
+          </a:prstGeom>
+          <a:solidFill>
+            <a:srgbClr val="151D30"/>
+          </a:solidFill>
+          <a:ln w="19050">
+            <a:solidFill>
+              <a:srgbClr val="6B7280"/>
+            </a:solidFill>
+          </a:ln>
+        </p:spPr>
+        <p:style>
+          <a:lnRef idx="1">
+            <a:schemeClr val="accent1"/>
+          </a:lnRef>
+          <a:fillRef idx="3">
+            <a:schemeClr val="accent1"/>
+          </a:fillRef>
+          <a:effectRef idx="2">
+            <a:schemeClr val="accent1"/>
+          </a:effectRef>
+          <a:fontRef idx="minor">
+            <a:schemeClr val="lt1"/>
+          </a:fontRef>
+        </p:style>
+        <p:txBody>
+          <a:bodyPr rtlCol="0" anchor="ctr" wrap="square"/>
+          <a:lstStyle/>
+          <a:p>
+            <a:pPr algn="ctr">
+              <a:defRPr sz="1400" b="0">
+                <a:solidFill>
+                  <a:srgbClr val="E8E4D9"/>
+                </a:solidFill>
+                <a:latin typeface="Segoe UI"/>
+              </a:defRPr>
+            </a:pPr>
+            <a:r>
+              <a:t>Robotic Arm</a:t>
+            </a:r>
+          </a:p>
+        </p:txBody>
+      </p:sp>
+      <p:sp>
+        <p:nvSpPr>
+          <p:cNvPr id="6" name="Rounded Rectangle 5"/>
+          <p:cNvSpPr/>
+          <p:nvPr/>
+        </p:nvSpPr>
+        <p:spPr>
+          <a:xfrm>
+            <a:off x="8138160" y="5760720"/>
+            <a:ext cx="2286000" cy="548640"/>
+          </a:xfrm>
+          <a:prstGeom prst="roundRect">
+            <a:avLst/>
+          </a:prstGeom>
+          <a:solidFill>
+            <a:srgbClr val="151D30"/>
+          </a:solidFill>
+          <a:ln w="19050">
+            <a:solidFill>
+              <a:srgbClr val="6B7280"/>
+            </a:solidFill>
+          </a:ln>
+        </p:spPr>
+        <p:style>
+          <a:lnRef idx="1">
+            <a:schemeClr val="accent1"/>
+          </a:lnRef>
+          <a:fillRef idx="3">
+            <a:schemeClr val="accent1"/>
+          </a:fillRef>
+          <a:effectRef idx="2">
+            <a:schemeClr val="accent1"/>
+          </a:effectRef>
+          <a:fontRef idx="minor">
+            <a:schemeClr val="lt1"/>
+          </a:fontRef>
+        </p:style>
+        <p:txBody>
+          <a:bodyPr rtlCol="0" anchor="ctr" wrap="square"/>
+          <a:lstStyle/>
+          <a:p>
+            <a:pPr algn="ctr">
+              <a:defRPr sz="1400" b="0">
+                <a:solidFill>
+                  <a:srgbClr val="E8E4D9"/>
+                </a:solidFill>
+                <a:latin typeface="Segoe UI"/>
+              </a:defRPr>
+            </a:pPr>
+            <a:r>
+              <a:t>ADAS</a:t>
+            </a:r>
+          </a:p>
+        </p:txBody>
+      </p:sp>
+      <p:sp>
+        <p:nvSpPr>
+          <p:cNvPr id="7" name="TextBox 6"/>
           <p:cNvSpPr txBox="1"/>
           <p:nvPr/>
         </p:nvSpPr>
         <p:spPr>
           <a:xfrm>
-            <a:off x="8686800" y="5897880"/>
-            <a:ext cx="2560320" cy="365760"/>
+            <a:off x="0" y="6355080"/>
+            <a:ext cx="12191695" cy="365760"/>
           </a:xfrm>
           <a:prstGeom prst="rect">
             <a:avLst/>
@@ -6849,9 +6854,326 @@
           <a:lstStyle/>
           <a:p>
             <a:pPr algn="ctr">
-              <a:defRPr sz="1200" b="0" i="0">
-                <a:solidFill>
-                  <a:srgbClr val="6B7280"/>
+              <a:defRPr sz="1800" b="0" i="0">
+                <a:solidFill>
+                  <a:srgbClr val="8B919C"/>
+                </a:solidFill>
+                <a:latin typeface="Segoe UI"/>
+              </a:defRPr>
+            </a:pPr>
+            <a:r>
+              <a:t>tonypdemo.it.com</a:t>
+            </a:r>
+          </a:p>
+        </p:txBody>
+      </p:sp>
+    </p:spTree>
+  </p:cSld>
+  <p:clrMapOvr>
+    <a:masterClrMapping/>
+  </p:clrMapOvr>
+</p:sld>
+</file>
+
+<file path=ppt/slides/slide19.xml><?xml version="1.0" encoding="utf-8"?>
+<p:sld xmlns:a="http://schemas.openxmlformats.org/drawingml/2006/main" xmlns:p="http://schemas.openxmlformats.org/presentationml/2006/main" xmlns:r="http://schemas.openxmlformats.org/officeDocument/2006/relationships">
+  <p:cSld>
+    <p:bg>
+      <p:bgPr>
+        <a:gradFill rotWithShape="1">
+          <a:gsLst>
+            <a:gs pos="0">
+              <a:srgbClr val="0F172A"/>
+            </a:gs>
+            <a:gs pos="100000">
+              <a:srgbClr val="1E1E2E"/>
+            </a:gs>
+          </a:gsLst>
+          <a:lin scaled="0"/>
+        </a:gradFill>
+        <a:effectLst/>
+      </p:bgPr>
+    </p:bg>
+    <p:spTree>
+      <p:nvGrpSpPr>
+        <p:cNvPr id="1" name=""/>
+        <p:cNvGrpSpPr/>
+        <p:nvPr/>
+      </p:nvGrpSpPr>
+      <p:grpSpPr/>
+      <p:sp>
+        <p:nvSpPr>
+          <p:cNvPr id="2" name="TextBox 1"/>
+          <p:cNvSpPr txBox="1"/>
+          <p:nvPr/>
+        </p:nvSpPr>
+        <p:spPr>
+          <a:xfrm>
+            <a:off x="1371600" y="1097280"/>
+            <a:ext cx="9144000" cy="1097280"/>
+          </a:xfrm>
+          <a:prstGeom prst="rect">
+            <a:avLst/>
+          </a:prstGeom>
+          <a:noFill/>
+        </p:spPr>
+        <p:txBody>
+          <a:bodyPr wrap="square">
+            <a:spAutoFit/>
+          </a:bodyPr>
+          <a:lstStyle/>
+          <a:p>
+            <a:pPr algn="l">
+              <a:defRPr sz="5200" b="1" i="0">
+                <a:solidFill>
+                  <a:srgbClr val="F5F5F0"/>
+                </a:solidFill>
+                <a:latin typeface="Segoe UI"/>
+              </a:defRPr>
+            </a:pPr>
+            <a:r>
+              <a:t>Questions?</a:t>
+            </a:r>
+          </a:p>
+        </p:txBody>
+      </p:sp>
+      <p:sp>
+        <p:nvSpPr>
+          <p:cNvPr id="3" name="Rectangle 2"/>
+          <p:cNvSpPr/>
+          <p:nvPr/>
+        </p:nvSpPr>
+        <p:spPr>
+          <a:xfrm>
+            <a:off x="1371600" y="2560320"/>
+            <a:ext cx="2286000" cy="10972"/>
+          </a:xfrm>
+          <a:prstGeom prst="rect">
+            <a:avLst/>
+          </a:prstGeom>
+          <a:solidFill>
+            <a:srgbClr val="D4D0C8"/>
+          </a:solidFill>
+          <a:ln>
+            <a:noFill/>
+          </a:ln>
+        </p:spPr>
+        <p:style>
+          <a:lnRef idx="1">
+            <a:schemeClr val="accent1"/>
+          </a:lnRef>
+          <a:fillRef idx="3">
+            <a:schemeClr val="accent1"/>
+          </a:fillRef>
+          <a:effectRef idx="2">
+            <a:schemeClr val="accent1"/>
+          </a:effectRef>
+          <a:fontRef idx="minor">
+            <a:schemeClr val="lt1"/>
+          </a:fontRef>
+        </p:style>
+        <p:txBody>
+          <a:bodyPr rtlCol="0" anchor="ctr"/>
+          <a:lstStyle/>
+          <a:p>
+            <a:pPr algn="ctr"/>
+          </a:p>
+        </p:txBody>
+      </p:sp>
+      <p:sp>
+        <p:nvSpPr>
+          <p:cNvPr id="4" name="TextBox 3"/>
+          <p:cNvSpPr txBox="1"/>
+          <p:nvPr/>
+        </p:nvSpPr>
+        <p:spPr>
+          <a:xfrm>
+            <a:off x="1371600" y="3017520"/>
+            <a:ext cx="5486400" cy="914400"/>
+          </a:xfrm>
+          <a:prstGeom prst="rect">
+            <a:avLst/>
+          </a:prstGeom>
+          <a:noFill/>
+        </p:spPr>
+        <p:txBody>
+          <a:bodyPr wrap="square">
+            <a:spAutoFit/>
+          </a:bodyPr>
+          <a:lstStyle/>
+          <a:p>
+            <a:pPr algn="l">
+              <a:defRPr sz="3600" b="1" i="0">
+                <a:solidFill>
+                  <a:srgbClr val="F5F5F0"/>
+                </a:solidFill>
+                <a:latin typeface="Segoe UI"/>
+              </a:defRPr>
+            </a:pPr>
+            <a:r>
+              <a:t>Anthony Poole</a:t>
+            </a:r>
+          </a:p>
+        </p:txBody>
+      </p:sp>
+      <p:sp>
+        <p:nvSpPr>
+          <p:cNvPr id="5" name="TextBox 4"/>
+          <p:cNvSpPr txBox="1"/>
+          <p:nvPr/>
+        </p:nvSpPr>
+        <p:spPr>
+          <a:xfrm>
+            <a:off x="1371600" y="3749039"/>
+            <a:ext cx="5486400" cy="548640"/>
+          </a:xfrm>
+          <a:prstGeom prst="rect">
+            <a:avLst/>
+          </a:prstGeom>
+          <a:noFill/>
+        </p:spPr>
+        <p:txBody>
+          <a:bodyPr wrap="square">
+            <a:spAutoFit/>
+          </a:bodyPr>
+          <a:lstStyle/>
+          <a:p>
+            <a:pPr algn="l">
+              <a:defRPr sz="2200" b="0" i="0">
+                <a:solidFill>
+                  <a:srgbClr val="E8E4D9"/>
+                </a:solidFill>
+                <a:latin typeface="Segoe UI"/>
+              </a:defRPr>
+            </a:pPr>
+            <a:r>
+              <a:t>Software Engineer, Microsoft</a:t>
+            </a:r>
+          </a:p>
+        </p:txBody>
+      </p:sp>
+      <p:sp>
+        <p:nvSpPr>
+          <p:cNvPr id="6" name="TextBox 5"/>
+          <p:cNvSpPr txBox="1"/>
+          <p:nvPr/>
+        </p:nvSpPr>
+        <p:spPr>
+          <a:xfrm>
+            <a:off x="1371600" y="4389120"/>
+            <a:ext cx="9144000" cy="457200"/>
+          </a:xfrm>
+          <a:prstGeom prst="rect">
+            <a:avLst/>
+          </a:prstGeom>
+          <a:noFill/>
+        </p:spPr>
+        <p:txBody>
+          <a:bodyPr wrap="square">
+            <a:spAutoFit/>
+          </a:bodyPr>
+          <a:lstStyle/>
+          <a:p>
+            <a:pPr algn="l">
+              <a:defRPr sz="2000" b="0" i="0">
+                <a:solidFill>
+                  <a:srgbClr val="8B919C"/>
+                </a:solidFill>
+                <a:latin typeface="Segoe UI"/>
+              </a:defRPr>
+            </a:pPr>
+            <a:r>
+              <a:t>anthony50102.github.io</a:t>
+            </a:r>
+          </a:p>
+        </p:txBody>
+      </p:sp>
+      <p:sp>
+        <p:nvSpPr>
+          <p:cNvPr id="7" name="TextBox 6"/>
+          <p:cNvSpPr txBox="1"/>
+          <p:nvPr/>
+        </p:nvSpPr>
+        <p:spPr>
+          <a:xfrm>
+            <a:off x="1371600" y="4846320"/>
+            <a:ext cx="9144000" cy="457200"/>
+          </a:xfrm>
+          <a:prstGeom prst="rect">
+            <a:avLst/>
+          </a:prstGeom>
+          <a:noFill/>
+        </p:spPr>
+        <p:txBody>
+          <a:bodyPr wrap="square">
+            <a:spAutoFit/>
+          </a:bodyPr>
+          <a:lstStyle/>
+          <a:p>
+            <a:pPr algn="l">
+              <a:defRPr sz="2000" b="0" i="0">
+                <a:solidFill>
+                  <a:srgbClr val="8B919C"/>
+                </a:solidFill>
+                <a:latin typeface="Segoe UI"/>
+              </a:defRPr>
+            </a:pPr>
+            <a:r>
+              <a:t>linkedin.com/in/anthony-poole-079548206</a:t>
+            </a:r>
+          </a:p>
+        </p:txBody>
+      </p:sp>
+      <p:pic>
+        <p:nvPicPr>
+          <p:cNvPr id="8" name="Picture 7" descr="qr-personal.png"/>
+          <p:cNvPicPr>
+            <a:picLocks noChangeAspect="1"/>
+          </p:cNvPicPr>
+          <p:nvPr/>
+        </p:nvPicPr>
+        <p:blipFill>
+          <a:blip r:embed="rId2"/>
+          <a:stretch>
+            <a:fillRect/>
+          </a:stretch>
+        </p:blipFill>
+        <p:spPr>
+          <a:xfrm>
+            <a:off x="8412480" y="2560320"/>
+            <a:ext cx="2926080" cy="2926080"/>
+          </a:xfrm>
+          <a:prstGeom prst="rect">
+            <a:avLst/>
+          </a:prstGeom>
+        </p:spPr>
+      </p:pic>
+      <p:sp>
+        <p:nvSpPr>
+          <p:cNvPr id="9" name="TextBox 8"/>
+          <p:cNvSpPr txBox="1"/>
+          <p:nvPr/>
+        </p:nvSpPr>
+        <p:spPr>
+          <a:xfrm>
+            <a:off x="8229600" y="5532120"/>
+            <a:ext cx="3291840" cy="365760"/>
+          </a:xfrm>
+          <a:prstGeom prst="rect">
+            <a:avLst/>
+          </a:prstGeom>
+          <a:noFill/>
+        </p:spPr>
+        <p:txBody>
+          <a:bodyPr wrap="square">
+            <a:spAutoFit/>
+          </a:bodyPr>
+          <a:lstStyle/>
+          <a:p>
+            <a:pPr algn="ctr">
+              <a:defRPr sz="1600" b="0" i="0">
+                <a:solidFill>
+                  <a:srgbClr val="8B919C"/>
                 </a:solidFill>
                 <a:latin typeface="Segoe UI"/>
               </a:defRPr>
@@ -6904,8 +7226,8 @@
         </p:nvSpPr>
         <p:spPr>
           <a:xfrm>
-            <a:off x="1097280" y="457200"/>
-            <a:ext cx="4572000" cy="457200"/>
+            <a:off x="1371600" y="2286000"/>
+            <a:ext cx="9144000" cy="2286000"/>
           </a:xfrm>
           <a:prstGeom prst="rect">
             <a:avLst/>
@@ -6919,40 +7241,38 @@
           <a:lstStyle/>
           <a:p>
             <a:pPr algn="l">
-              <a:defRPr sz="1400" b="0" i="0">
-                <a:solidFill>
-                  <a:srgbClr val="4B5563"/>
-                </a:solidFill>
-                <a:latin typeface="Segoe UI"/>
-              </a:defRPr>
-            </a:pPr>
-            <a:r>
-              <a:t>The Foundation</a:t>
-            </a:r>
-          </a:p>
-        </p:txBody>
-      </p:sp>
-      <p:sp>
-        <p:nvSpPr>
-          <p:cNvPr id="3" name="Rounded Rectangle 2"/>
+              <a:defRPr sz="7200" b="1" i="0">
+                <a:solidFill>
+                  <a:srgbClr val="F5F5F0"/>
+                </a:solidFill>
+                <a:latin typeface="Segoe UI"/>
+              </a:defRPr>
+            </a:pPr>
+            <a:r>
+              <a:t>Digital Twins</a:t>
+            </a:r>
+          </a:p>
+        </p:txBody>
+      </p:sp>
+      <p:sp>
+        <p:nvSpPr>
+          <p:cNvPr id="3" name="Rectangle 2"/>
           <p:cNvSpPr/>
           <p:nvPr/>
         </p:nvSpPr>
         <p:spPr>
           <a:xfrm>
-            <a:off x="731520" y="1645920"/>
-            <a:ext cx="4389120" cy="3657600"/>
-          </a:xfrm>
-          <a:prstGeom prst="roundRect">
+            <a:off x="1371600" y="3931920"/>
+            <a:ext cx="2743200" cy="10972"/>
+          </a:xfrm>
+          <a:prstGeom prst="rect">
             <a:avLst/>
           </a:prstGeom>
           <a:solidFill>
-            <a:srgbClr val="151D30"/>
+            <a:srgbClr val="D4D0C8"/>
           </a:solidFill>
-          <a:ln w="19050">
-            <a:solidFill>
-              <a:srgbClr val="D4D0C8"/>
-            </a:solidFill>
+          <a:ln>
+            <a:noFill/>
           </a:ln>
         </p:spPr>
         <p:style>
@@ -6970,37 +7290,57 @@
           </a:fontRef>
         </p:style>
         <p:txBody>
-          <a:bodyPr rtlCol="0" anchor="ctr" wrap="square"/>
-          <a:lstStyle/>
-          <a:p>
-            <a:pPr algn="ctr">
-              <a:defRPr sz="3200" b="1">
-                <a:solidFill>
-                  <a:srgbClr val="F5F5F0"/>
-                </a:solidFill>
-                <a:latin typeface="Segoe UI"/>
-              </a:defRPr>
-            </a:pPr>
-            <a:r>
-              <a:t>Physical</a:t>
-            </a:r>
-            <a:br/>
-            <a:r>
-              <a:t>System</a:t>
-            </a:r>
-          </a:p>
-        </p:txBody>
-      </p:sp>
-      <p:sp>
-        <p:nvSpPr>
-          <p:cNvPr id="4" name="TextBox 3"/>
+          <a:bodyPr rtlCol="0" anchor="ctr"/>
+          <a:lstStyle/>
+          <a:p>
+            <a:pPr algn="ctr"/>
+          </a:p>
+        </p:txBody>
+      </p:sp>
+    </p:spTree>
+  </p:cSld>
+  <p:clrMapOvr>
+    <a:masterClrMapping/>
+  </p:clrMapOvr>
+</p:sld>
+</file>
+
+<file path=ppt/slides/slide20.xml><?xml version="1.0" encoding="utf-8"?>
+<p:sld xmlns:a="http://schemas.openxmlformats.org/drawingml/2006/main" xmlns:p="http://schemas.openxmlformats.org/presentationml/2006/main" xmlns:r="http://schemas.openxmlformats.org/officeDocument/2006/relationships">
+  <p:cSld>
+    <p:bg>
+      <p:bgPr>
+        <a:gradFill rotWithShape="1">
+          <a:gsLst>
+            <a:gs pos="0">
+              <a:srgbClr val="0F172A"/>
+            </a:gs>
+            <a:gs pos="100000">
+              <a:srgbClr val="1E1E2E"/>
+            </a:gs>
+          </a:gsLst>
+          <a:lin scaled="0"/>
+        </a:gradFill>
+        <a:effectLst/>
+      </p:bgPr>
+    </p:bg>
+    <p:spTree>
+      <p:nvGrpSpPr>
+        <p:cNvPr id="1" name=""/>
+        <p:cNvGrpSpPr/>
+        <p:nvPr/>
+      </p:nvGrpSpPr>
+      <p:grpSpPr/>
+      <p:sp>
+        <p:nvSpPr>
+          <p:cNvPr id="2" name="TextBox 1"/>
           <p:cNvSpPr txBox="1"/>
           <p:nvPr/>
         </p:nvSpPr>
         <p:spPr>
           <a:xfrm>
-            <a:off x="5212080" y="2011680"/>
-            <a:ext cx="1828800" cy="914400"/>
+            <a:off x="1371600" y="2286000"/>
+            <a:ext cx="9144000" cy="2286000"/>
           </a:xfrm>
           <a:prstGeom prst="rect">
             <a:avLst/>
@@ -7013,8 +7353,8 @@
           </a:bodyPr>
           <a:lstStyle/>
           <a:p>
-            <a:pPr algn="ctr">
-              <a:defRPr sz="4800" b="0" i="0">
+            <a:pPr algn="l">
+              <a:defRPr sz="3200" b="0" i="1">
                 <a:solidFill>
                   <a:srgbClr val="E8E4D9"/>
                 </a:solidFill>
@@ -7022,140 +7362,34 @@
               </a:defRPr>
             </a:pPr>
             <a:r>
-              <a:t>→</a:t>
-            </a:r>
-          </a:p>
-        </p:txBody>
-      </p:sp>
-      <p:sp>
-        <p:nvSpPr>
-          <p:cNvPr id="5" name="TextBox 4"/>
-          <p:cNvSpPr txBox="1"/>
-          <p:nvPr/>
-        </p:nvSpPr>
-        <p:spPr>
-          <a:xfrm>
-            <a:off x="5212080" y="2743200"/>
-            <a:ext cx="1828800" cy="457200"/>
-          </a:xfrm>
-          <a:prstGeom prst="rect">
-            <a:avLst/>
-          </a:prstGeom>
-          <a:noFill/>
-        </p:spPr>
-        <p:txBody>
-          <a:bodyPr wrap="square">
-            <a:spAutoFit/>
-          </a:bodyPr>
-          <a:lstStyle/>
-          <a:p>
-            <a:pPr algn="ctr">
-              <a:defRPr sz="1600" b="0" i="0">
-                <a:solidFill>
-                  <a:srgbClr val="6B7280"/>
-                </a:solidFill>
-                <a:latin typeface="Segoe UI"/>
-              </a:defRPr>
-            </a:pPr>
-            <a:r>
-              <a:t>Sensors &amp; Data</a:t>
-            </a:r>
-          </a:p>
-        </p:txBody>
-      </p:sp>
-      <p:sp>
-        <p:nvSpPr>
-          <p:cNvPr id="6" name="TextBox 5"/>
-          <p:cNvSpPr txBox="1"/>
-          <p:nvPr/>
-        </p:nvSpPr>
-        <p:spPr>
-          <a:xfrm>
-            <a:off x="5212080" y="3657600"/>
-            <a:ext cx="1828800" cy="914400"/>
-          </a:xfrm>
-          <a:prstGeom prst="rect">
-            <a:avLst/>
-          </a:prstGeom>
-          <a:noFill/>
-        </p:spPr>
-        <p:txBody>
-          <a:bodyPr wrap="square">
-            <a:spAutoFit/>
-          </a:bodyPr>
-          <a:lstStyle/>
-          <a:p>
-            <a:pPr algn="ctr">
-              <a:defRPr sz="4800" b="0" i="0">
-                <a:solidFill>
-                  <a:srgbClr val="E8E4D9"/>
-                </a:solidFill>
-                <a:latin typeface="Segoe UI"/>
-              </a:defRPr>
-            </a:pPr>
-            <a:r>
-              <a:t>←</a:t>
-            </a:r>
-          </a:p>
-        </p:txBody>
-      </p:sp>
-      <p:sp>
-        <p:nvSpPr>
-          <p:cNvPr id="7" name="TextBox 6"/>
-          <p:cNvSpPr txBox="1"/>
-          <p:nvPr/>
-        </p:nvSpPr>
-        <p:spPr>
-          <a:xfrm>
-            <a:off x="5212080" y="4389120"/>
-            <a:ext cx="1828800" cy="457200"/>
-          </a:xfrm>
-          <a:prstGeom prst="rect">
-            <a:avLst/>
-          </a:prstGeom>
-          <a:noFill/>
-        </p:spPr>
-        <p:txBody>
-          <a:bodyPr wrap="square">
-            <a:spAutoFit/>
-          </a:bodyPr>
-          <a:lstStyle/>
-          <a:p>
-            <a:pPr algn="ctr">
-              <a:defRPr sz="1600" b="0" i="0">
-                <a:solidFill>
-                  <a:srgbClr val="6B7280"/>
-                </a:solidFill>
-                <a:latin typeface="Segoe UI"/>
-              </a:defRPr>
-            </a:pPr>
-            <a:r>
-              <a:t>Simulation</a:t>
-            </a:r>
-          </a:p>
-        </p:txBody>
-      </p:sp>
-      <p:sp>
-        <p:nvSpPr>
-          <p:cNvPr id="8" name="Rounded Rectangle 7"/>
+              <a:t>Digital twins give us the body.</a:t>
+            </a:r>
+            <a:br/>
+            <a:r>
+              <a:t>It's time to consider the mind.</a:t>
+            </a:r>
+          </a:p>
+        </p:txBody>
+      </p:sp>
+      <p:sp>
+        <p:nvSpPr>
+          <p:cNvPr id="3" name="Rectangle 2"/>
           <p:cNvSpPr/>
           <p:nvPr/>
         </p:nvSpPr>
         <p:spPr>
           <a:xfrm>
-            <a:off x="7040880" y="1645920"/>
-            <a:ext cx="4389120" cy="3657600"/>
-          </a:xfrm>
-          <a:prstGeom prst="roundRect">
+            <a:off x="1371600" y="4846320"/>
+            <a:ext cx="2286000" cy="10972"/>
+          </a:xfrm>
+          <a:prstGeom prst="rect">
             <a:avLst/>
           </a:prstGeom>
           <a:solidFill>
-            <a:srgbClr val="151D30"/>
+            <a:srgbClr val="D4D0C8"/>
           </a:solidFill>
-          <a:ln w="19050">
-            <a:solidFill>
-              <a:srgbClr val="D4D0C8"/>
-            </a:solidFill>
+          <a:ln>
+            <a:noFill/>
           </a:ln>
         </p:spPr>
         <p:style>
@@ -7173,37 +7407,23 @@
           </a:fontRef>
         </p:style>
         <p:txBody>
-          <a:bodyPr rtlCol="0" anchor="ctr" wrap="square"/>
-          <a:lstStyle/>
-          <a:p>
-            <a:pPr algn="ctr">
-              <a:defRPr sz="3200" b="1">
-                <a:solidFill>
-                  <a:srgbClr val="F5F5F0"/>
-                </a:solidFill>
-                <a:latin typeface="Segoe UI"/>
-              </a:defRPr>
-            </a:pPr>
-            <a:r>
-              <a:t>Digital</a:t>
-            </a:r>
-            <a:br/>
-            <a:r>
-              <a:t>Twin</a:t>
-            </a:r>
-          </a:p>
-        </p:txBody>
-      </p:sp>
-      <p:sp>
-        <p:nvSpPr>
-          <p:cNvPr id="9" name="TextBox 8"/>
+          <a:bodyPr rtlCol="0" anchor="ctr"/>
+          <a:lstStyle/>
+          <a:p>
+            <a:pPr algn="ctr"/>
+          </a:p>
+        </p:txBody>
+      </p:sp>
+      <p:sp>
+        <p:nvSpPr>
+          <p:cNvPr id="4" name="TextBox 3"/>
           <p:cNvSpPr txBox="1"/>
           <p:nvPr/>
         </p:nvSpPr>
         <p:spPr>
           <a:xfrm>
-            <a:off x="1097280" y="5669280"/>
-            <a:ext cx="10058400" cy="731520"/>
+            <a:off x="1371600" y="5120640"/>
+            <a:ext cx="5486400" cy="457200"/>
           </a:xfrm>
           <a:prstGeom prst="rect">
             <a:avLst/>
@@ -7217,15 +7437,15 @@
           <a:lstStyle/>
           <a:p>
             <a:pPr algn="l">
-              <a:defRPr sz="2000" b="0" i="0">
-                <a:solidFill>
-                  <a:srgbClr val="6B7280"/>
-                </a:solidFill>
-                <a:latin typeface="Segoe UI"/>
-              </a:defRPr>
-            </a:pPr>
-            <a:r>
-              <a:t>A virtual model, continuously synced with a physical system.</a:t>
+              <a:defRPr sz="2200" b="0" i="0">
+                <a:solidFill>
+                  <a:srgbClr val="E8E4D9"/>
+                </a:solidFill>
+                <a:latin typeface="Segoe UI"/>
+              </a:defRPr>
+            </a:pPr>
+            <a:r>
+              <a:t>Thank you.</a:t>
             </a:r>
           </a:p>
         </p:txBody>
@@ -7272,8 +7492,8 @@
         </p:nvSpPr>
         <p:spPr>
           <a:xfrm>
-            <a:off x="1097280" y="1188720"/>
-            <a:ext cx="3200400" cy="914400"/>
+            <a:off x="1097280" y="457200"/>
+            <a:ext cx="4572000" cy="457200"/>
           </a:xfrm>
           <a:prstGeom prst="rect">
             <a:avLst/>
@@ -7287,230 +7507,40 @@
           <a:lstStyle/>
           <a:p>
             <a:pPr algn="l">
-              <a:defRPr sz="4800" b="1" i="0">
-                <a:solidFill>
-                  <a:srgbClr val="F5F5F0"/>
-                </a:solidFill>
-                <a:latin typeface="Segoe UI"/>
-              </a:defRPr>
-            </a:pPr>
-            <a:r>
-              <a:t>$22K / min</a:t>
-            </a:r>
-          </a:p>
-        </p:txBody>
-      </p:sp>
-      <p:sp>
-        <p:nvSpPr>
-          <p:cNvPr id="3" name="TextBox 2"/>
-          <p:cNvSpPr txBox="1"/>
-          <p:nvPr/>
-        </p:nvSpPr>
-        <p:spPr>
-          <a:xfrm>
-            <a:off x="1097280" y="2194560"/>
-            <a:ext cx="3200400" cy="914400"/>
-          </a:xfrm>
-          <a:prstGeom prst="rect">
-            <a:avLst/>
-          </a:prstGeom>
-          <a:noFill/>
-        </p:spPr>
-        <p:txBody>
-          <a:bodyPr wrap="square">
-            <a:spAutoFit/>
-          </a:bodyPr>
-          <a:lstStyle/>
-          <a:p>
-            <a:pPr algn="l">
-              <a:defRPr sz="1600" b="0" i="0">
-                <a:solidFill>
-                  <a:srgbClr val="6B7280"/>
-                </a:solidFill>
-                <a:latin typeface="Segoe UI"/>
-              </a:defRPr>
-            </a:pPr>
-            <a:r>
-              <a:t>Automotive</a:t>
-            </a:r>
-            <a:br/>
-            <a:r>
-              <a:t>downtime</a:t>
-            </a:r>
-          </a:p>
-        </p:txBody>
-      </p:sp>
-      <p:sp>
-        <p:nvSpPr>
-          <p:cNvPr id="4" name="TextBox 3"/>
-          <p:cNvSpPr txBox="1"/>
-          <p:nvPr/>
-        </p:nvSpPr>
-        <p:spPr>
-          <a:xfrm>
-            <a:off x="4754880" y="1188720"/>
-            <a:ext cx="3200400" cy="914400"/>
-          </a:xfrm>
-          <a:prstGeom prst="rect">
-            <a:avLst/>
-          </a:prstGeom>
-          <a:noFill/>
-        </p:spPr>
-        <p:txBody>
-          <a:bodyPr wrap="square">
-            <a:spAutoFit/>
-          </a:bodyPr>
-          <a:lstStyle/>
-          <a:p>
-            <a:pPr algn="l">
-              <a:defRPr sz="4800" b="1" i="0">
-                <a:solidFill>
-                  <a:srgbClr val="F5F5F0"/>
-                </a:solidFill>
-                <a:latin typeface="Segoe UI"/>
-              </a:defRPr>
-            </a:pPr>
-            <a:r>
-              <a:t>$X / hour</a:t>
-            </a:r>
-          </a:p>
-        </p:txBody>
-      </p:sp>
-      <p:sp>
-        <p:nvSpPr>
-          <p:cNvPr id="5" name="TextBox 4"/>
-          <p:cNvSpPr txBox="1"/>
-          <p:nvPr/>
-        </p:nvSpPr>
-        <p:spPr>
-          <a:xfrm>
-            <a:off x="4754880" y="2194560"/>
-            <a:ext cx="3200400" cy="914400"/>
-          </a:xfrm>
-          <a:prstGeom prst="rect">
-            <a:avLst/>
-          </a:prstGeom>
-          <a:noFill/>
-        </p:spPr>
-        <p:txBody>
-          <a:bodyPr wrap="square">
-            <a:spAutoFit/>
-          </a:bodyPr>
-          <a:lstStyle/>
-          <a:p>
-            <a:pPr algn="l">
-              <a:defRPr sz="1600" b="0" i="0">
-                <a:solidFill>
-                  <a:srgbClr val="6B7280"/>
-                </a:solidFill>
-                <a:latin typeface="Segoe UI"/>
-              </a:defRPr>
-            </a:pPr>
-            <a:r>
-              <a:t>Semiconductor</a:t>
-            </a:r>
-            <a:br/>
-            <a:r>
-              <a:t>fab downtime</a:t>
-            </a:r>
-          </a:p>
-        </p:txBody>
-      </p:sp>
-      <p:sp>
-        <p:nvSpPr>
-          <p:cNvPr id="6" name="TextBox 5"/>
-          <p:cNvSpPr txBox="1"/>
-          <p:nvPr/>
-        </p:nvSpPr>
-        <p:spPr>
-          <a:xfrm>
-            <a:off x="8412480" y="1188720"/>
-            <a:ext cx="3200400" cy="914400"/>
-          </a:xfrm>
-          <a:prstGeom prst="rect">
-            <a:avLst/>
-          </a:prstGeom>
-          <a:noFill/>
-        </p:spPr>
-        <p:txBody>
-          <a:bodyPr wrap="square">
-            <a:spAutoFit/>
-          </a:bodyPr>
-          <a:lstStyle/>
-          <a:p>
-            <a:pPr algn="l">
-              <a:defRPr sz="4800" b="1" i="0">
-                <a:solidFill>
-                  <a:srgbClr val="F5F5F0"/>
-                </a:solidFill>
-                <a:latin typeface="Segoe UI"/>
-              </a:defRPr>
-            </a:pPr>
-            <a:r>
-              <a:t>$X / event</a:t>
-            </a:r>
-          </a:p>
-        </p:txBody>
-      </p:sp>
-      <p:sp>
-        <p:nvSpPr>
-          <p:cNvPr id="7" name="TextBox 6"/>
-          <p:cNvSpPr txBox="1"/>
-          <p:nvPr/>
-        </p:nvSpPr>
-        <p:spPr>
-          <a:xfrm>
-            <a:off x="8412480" y="2194560"/>
-            <a:ext cx="3200400" cy="914400"/>
-          </a:xfrm>
-          <a:prstGeom prst="rect">
-            <a:avLst/>
-          </a:prstGeom>
-          <a:noFill/>
-        </p:spPr>
-        <p:txBody>
-          <a:bodyPr wrap="square">
-            <a:spAutoFit/>
-          </a:bodyPr>
-          <a:lstStyle/>
-          <a:p>
-            <a:pPr algn="l">
-              <a:defRPr sz="1600" b="0" i="0">
-                <a:solidFill>
-                  <a:srgbClr val="6B7280"/>
-                </a:solidFill>
-                <a:latin typeface="Segoe UI"/>
-              </a:defRPr>
-            </a:pPr>
-            <a:r>
-              <a:t>Energy grid</a:t>
-            </a:r>
-            <a:br/>
-            <a:r>
-              <a:t>outage cost</a:t>
-            </a:r>
-          </a:p>
-        </p:txBody>
-      </p:sp>
-      <p:sp>
-        <p:nvSpPr>
-          <p:cNvPr id="8" name="Rectangle 7"/>
+              <a:defRPr sz="2000" b="0" i="0">
+                <a:solidFill>
+                  <a:srgbClr val="8B919C"/>
+                </a:solidFill>
+                <a:latin typeface="Segoe UI"/>
+              </a:defRPr>
+            </a:pPr>
+            <a:r>
+              <a:t>The Foundation</a:t>
+            </a:r>
+          </a:p>
+        </p:txBody>
+      </p:sp>
+      <p:sp>
+        <p:nvSpPr>
+          <p:cNvPr id="3" name="Rounded Rectangle 2"/>
           <p:cNvSpPr/>
           <p:nvPr/>
         </p:nvSpPr>
         <p:spPr>
           <a:xfrm>
-            <a:off x="1097280" y="3657600"/>
-            <a:ext cx="1828800" cy="13716"/>
-          </a:xfrm>
-          <a:prstGeom prst="rect">
+            <a:off x="731520" y="1645920"/>
+            <a:ext cx="4389120" cy="3657600"/>
+          </a:xfrm>
+          <a:prstGeom prst="roundRect">
             <a:avLst/>
           </a:prstGeom>
           <a:solidFill>
-            <a:srgbClr val="D4D0C8"/>
+            <a:srgbClr val="151D30"/>
           </a:solidFill>
-          <a:ln>
-            <a:noFill/>
+          <a:ln w="19050">
+            <a:solidFill>
+              <a:srgbClr val="D4D0C8"/>
+            </a:solidFill>
           </a:ln>
         </p:spPr>
         <p:style>
@@ -7528,23 +7558,37 @@
           </a:fontRef>
         </p:style>
         <p:txBody>
-          <a:bodyPr rtlCol="0" anchor="ctr"/>
-          <a:lstStyle/>
-          <a:p>
-            <a:pPr algn="ctr"/>
-          </a:p>
-        </p:txBody>
-      </p:sp>
-      <p:sp>
-        <p:nvSpPr>
-          <p:cNvPr id="9" name="TextBox 8"/>
+          <a:bodyPr rtlCol="0" anchor="ctr" wrap="square"/>
+          <a:lstStyle/>
+          <a:p>
+            <a:pPr algn="ctr">
+              <a:defRPr sz="3200" b="1">
+                <a:solidFill>
+                  <a:srgbClr val="F5F5F0"/>
+                </a:solidFill>
+                <a:latin typeface="Segoe UI"/>
+              </a:defRPr>
+            </a:pPr>
+            <a:r>
+              <a:t>Physical</a:t>
+            </a:r>
+            <a:br/>
+            <a:r>
+              <a:t>System</a:t>
+            </a:r>
+          </a:p>
+        </p:txBody>
+      </p:sp>
+      <p:sp>
+        <p:nvSpPr>
+          <p:cNvPr id="4" name="TextBox 3"/>
           <p:cNvSpPr txBox="1"/>
           <p:nvPr/>
         </p:nvSpPr>
         <p:spPr>
           <a:xfrm>
-            <a:off x="1097280" y="4023360"/>
-            <a:ext cx="9601200" cy="1828800"/>
+            <a:off x="5212080" y="1828800"/>
+            <a:ext cx="1828800" cy="1097280"/>
           </a:xfrm>
           <a:prstGeom prst="rect">
             <a:avLst/>
@@ -7557,20 +7601,219 @@
           </a:bodyPr>
           <a:lstStyle/>
           <a:p>
+            <a:pPr algn="ctr">
+              <a:defRPr sz="7200" b="0" i="0">
+                <a:solidFill>
+                  <a:srgbClr val="E8E4D9"/>
+                </a:solidFill>
+                <a:latin typeface="Segoe UI"/>
+              </a:defRPr>
+            </a:pPr>
+            <a:r>
+              <a:t>→</a:t>
+            </a:r>
+          </a:p>
+        </p:txBody>
+      </p:sp>
+      <p:sp>
+        <p:nvSpPr>
+          <p:cNvPr id="5" name="TextBox 4"/>
+          <p:cNvSpPr txBox="1"/>
+          <p:nvPr/>
+        </p:nvSpPr>
+        <p:spPr>
+          <a:xfrm>
+            <a:off x="5212080" y="2651760"/>
+            <a:ext cx="1828800" cy="457200"/>
+          </a:xfrm>
+          <a:prstGeom prst="rect">
+            <a:avLst/>
+          </a:prstGeom>
+          <a:noFill/>
+        </p:spPr>
+        <p:txBody>
+          <a:bodyPr wrap="square">
+            <a:spAutoFit/>
+          </a:bodyPr>
+          <a:lstStyle/>
+          <a:p>
+            <a:pPr algn="ctr">
+              <a:defRPr sz="1600" b="0" i="0">
+                <a:solidFill>
+                  <a:srgbClr val="8B919C"/>
+                </a:solidFill>
+                <a:latin typeface="Segoe UI"/>
+              </a:defRPr>
+            </a:pPr>
+            <a:r>
+              <a:t>Sensors &amp; Data</a:t>
+            </a:r>
+          </a:p>
+        </p:txBody>
+      </p:sp>
+      <p:sp>
+        <p:nvSpPr>
+          <p:cNvPr id="6" name="TextBox 5"/>
+          <p:cNvSpPr txBox="1"/>
+          <p:nvPr/>
+        </p:nvSpPr>
+        <p:spPr>
+          <a:xfrm>
+            <a:off x="5212080" y="3474720"/>
+            <a:ext cx="1828800" cy="1097280"/>
+          </a:xfrm>
+          <a:prstGeom prst="rect">
+            <a:avLst/>
+          </a:prstGeom>
+          <a:noFill/>
+        </p:spPr>
+        <p:txBody>
+          <a:bodyPr wrap="square">
+            <a:spAutoFit/>
+          </a:bodyPr>
+          <a:lstStyle/>
+          <a:p>
+            <a:pPr algn="ctr">
+              <a:defRPr sz="7200" b="0" i="0">
+                <a:solidFill>
+                  <a:srgbClr val="E8E4D9"/>
+                </a:solidFill>
+                <a:latin typeface="Segoe UI"/>
+              </a:defRPr>
+            </a:pPr>
+            <a:r>
+              <a:t>←</a:t>
+            </a:r>
+          </a:p>
+        </p:txBody>
+      </p:sp>
+      <p:sp>
+        <p:nvSpPr>
+          <p:cNvPr id="7" name="TextBox 6"/>
+          <p:cNvSpPr txBox="1"/>
+          <p:nvPr/>
+        </p:nvSpPr>
+        <p:spPr>
+          <a:xfrm>
+            <a:off x="5212080" y="4297680"/>
+            <a:ext cx="1828800" cy="457200"/>
+          </a:xfrm>
+          <a:prstGeom prst="rect">
+            <a:avLst/>
+          </a:prstGeom>
+          <a:noFill/>
+        </p:spPr>
+        <p:txBody>
+          <a:bodyPr wrap="square">
+            <a:spAutoFit/>
+          </a:bodyPr>
+          <a:lstStyle/>
+          <a:p>
+            <a:pPr algn="ctr">
+              <a:defRPr sz="1600" b="0" i="0">
+                <a:solidFill>
+                  <a:srgbClr val="8B919C"/>
+                </a:solidFill>
+                <a:latin typeface="Segoe UI"/>
+              </a:defRPr>
+            </a:pPr>
+            <a:r>
+              <a:t>Simulation</a:t>
+            </a:r>
+          </a:p>
+        </p:txBody>
+      </p:sp>
+      <p:sp>
+        <p:nvSpPr>
+          <p:cNvPr id="8" name="Rounded Rectangle 7"/>
+          <p:cNvSpPr/>
+          <p:nvPr/>
+        </p:nvSpPr>
+        <p:spPr>
+          <a:xfrm>
+            <a:off x="7040880" y="1645920"/>
+            <a:ext cx="4389120" cy="3657600"/>
+          </a:xfrm>
+          <a:prstGeom prst="roundRect">
+            <a:avLst/>
+          </a:prstGeom>
+          <a:solidFill>
+            <a:srgbClr val="151D30"/>
+          </a:solidFill>
+          <a:ln w="19050">
+            <a:solidFill>
+              <a:srgbClr val="D4D0C8"/>
+            </a:solidFill>
+          </a:ln>
+        </p:spPr>
+        <p:style>
+          <a:lnRef idx="1">
+            <a:schemeClr val="accent1"/>
+          </a:lnRef>
+          <a:fillRef idx="3">
+            <a:schemeClr val="accent1"/>
+          </a:fillRef>
+          <a:effectRef idx="2">
+            <a:schemeClr val="accent1"/>
+          </a:effectRef>
+          <a:fontRef idx="minor">
+            <a:schemeClr val="lt1"/>
+          </a:fontRef>
+        </p:style>
+        <p:txBody>
+          <a:bodyPr rtlCol="0" anchor="ctr" wrap="square"/>
+          <a:lstStyle/>
+          <a:p>
+            <a:pPr algn="ctr">
+              <a:defRPr sz="3200" b="1">
+                <a:solidFill>
+                  <a:srgbClr val="F5F5F0"/>
+                </a:solidFill>
+                <a:latin typeface="Segoe UI"/>
+              </a:defRPr>
+            </a:pPr>
+            <a:r>
+              <a:t>Digital</a:t>
+            </a:r>
+            <a:br/>
+            <a:r>
+              <a:t>Twin</a:t>
+            </a:r>
+          </a:p>
+        </p:txBody>
+      </p:sp>
+      <p:sp>
+        <p:nvSpPr>
+          <p:cNvPr id="9" name="TextBox 8"/>
+          <p:cNvSpPr txBox="1"/>
+          <p:nvPr/>
+        </p:nvSpPr>
+        <p:spPr>
+          <a:xfrm>
+            <a:off x="1097280" y="5669280"/>
+            <a:ext cx="10058400" cy="731520"/>
+          </a:xfrm>
+          <a:prstGeom prst="rect">
+            <a:avLst/>
+          </a:prstGeom>
+          <a:noFill/>
+        </p:spPr>
+        <p:txBody>
+          <a:bodyPr wrap="square">
+            <a:spAutoFit/>
+          </a:bodyPr>
+          <a:lstStyle/>
+          <a:p>
             <a:pPr algn="l">
-              <a:defRPr sz="3000" b="1" i="0">
-                <a:solidFill>
-                  <a:srgbClr val="E8E4D9"/>
-                </a:solidFill>
-                <a:latin typeface="Segoe UI"/>
-              </a:defRPr>
-            </a:pPr>
-            <a:r>
-              <a:t>Your systems generate more data every hour</a:t>
-            </a:r>
-            <a:br/>
-            <a:r>
-              <a:t>than your teams can act on in a week.</a:t>
+              <a:defRPr sz="2000" b="0" i="0">
+                <a:solidFill>
+                  <a:srgbClr val="8B919C"/>
+                </a:solidFill>
+                <a:latin typeface="Segoe UI"/>
+              </a:defRPr>
+            </a:pPr>
+            <a:r>
+              <a:t>A virtual model, continuously synced with a physical system.</a:t>
             </a:r>
           </a:p>
         </p:txBody>
@@ -7617,8 +7860,8 @@
         </p:nvSpPr>
         <p:spPr>
           <a:xfrm>
-            <a:off x="1097280" y="457200"/>
-            <a:ext cx="4572000" cy="457200"/>
+            <a:off x="1371600" y="1097280"/>
+            <a:ext cx="6858000" cy="1097280"/>
           </a:xfrm>
           <a:prstGeom prst="rect">
             <a:avLst/>
@@ -7632,40 +7875,74 @@
           <a:lstStyle/>
           <a:p>
             <a:pPr algn="l">
-              <a:defRPr sz="1400" b="0" i="0">
-                <a:solidFill>
-                  <a:srgbClr val="4B5563"/>
-                </a:solidFill>
-                <a:latin typeface="Segoe UI"/>
-              </a:defRPr>
-            </a:pPr>
-            <a:r>
-              <a:t>The Evolution</a:t>
-            </a:r>
-          </a:p>
-        </p:txBody>
-      </p:sp>
-      <p:sp>
-        <p:nvSpPr>
-          <p:cNvPr id="3" name="Rounded Rectangle 2"/>
+              <a:defRPr sz="6000" b="1" i="0">
+                <a:solidFill>
+                  <a:srgbClr val="F5F5F0"/>
+                </a:solidFill>
+                <a:latin typeface="Segoe UI"/>
+              </a:defRPr>
+            </a:pPr>
+            <a:r>
+              <a:t>$22K / min</a:t>
+            </a:r>
+          </a:p>
+        </p:txBody>
+      </p:sp>
+      <p:sp>
+        <p:nvSpPr>
+          <p:cNvPr id="3" name="TextBox 2"/>
+          <p:cNvSpPr txBox="1"/>
+          <p:nvPr/>
+        </p:nvSpPr>
+        <p:spPr>
+          <a:xfrm>
+            <a:off x="7772400" y="1280160"/>
+            <a:ext cx="3017520" cy="822960"/>
+          </a:xfrm>
+          <a:prstGeom prst="rect">
+            <a:avLst/>
+          </a:prstGeom>
+          <a:noFill/>
+        </p:spPr>
+        <p:txBody>
+          <a:bodyPr wrap="square">
+            <a:spAutoFit/>
+          </a:bodyPr>
+          <a:lstStyle/>
+          <a:p>
+            <a:pPr algn="r">
+              <a:defRPr sz="2200" b="0" i="0">
+                <a:solidFill>
+                  <a:srgbClr val="8B919C"/>
+                </a:solidFill>
+                <a:latin typeface="Segoe UI"/>
+              </a:defRPr>
+            </a:pPr>
+            <a:r>
+              <a:t>Automotive downtime</a:t>
+            </a:r>
+          </a:p>
+        </p:txBody>
+      </p:sp>
+      <p:sp>
+        <p:nvSpPr>
+          <p:cNvPr id="4" name="Rectangle 3"/>
           <p:cNvSpPr/>
           <p:nvPr/>
         </p:nvSpPr>
         <p:spPr>
           <a:xfrm>
-            <a:off x="746607" y="1645920"/>
-            <a:ext cx="2468880" cy="1188720"/>
-          </a:xfrm>
-          <a:prstGeom prst="roundRect">
+            <a:off x="1371600" y="2468879"/>
+            <a:ext cx="9418320" cy="18288"/>
+          </a:xfrm>
+          <a:prstGeom prst="rect">
             <a:avLst/>
           </a:prstGeom>
           <a:solidFill>
-            <a:srgbClr val="151D30"/>
+            <a:srgbClr val="6B7280"/>
           </a:solidFill>
-          <a:ln w="19050">
-            <a:solidFill>
-              <a:srgbClr val="4B5563"/>
-            </a:solidFill>
+          <a:ln>
+            <a:noFill/>
           </a:ln>
         </p:spPr>
         <p:style>
@@ -7683,33 +7960,23 @@
           </a:fontRef>
         </p:style>
         <p:txBody>
-          <a:bodyPr rtlCol="0" anchor="ctr" wrap="square"/>
-          <a:lstStyle/>
-          <a:p>
-            <a:pPr algn="ctr">
-              <a:defRPr sz="2000" b="1">
-                <a:solidFill>
-                  <a:srgbClr val="F5F5F0"/>
-                </a:solidFill>
-                <a:latin typeface="Segoe UI"/>
-              </a:defRPr>
-            </a:pPr>
-            <a:r>
-              <a:t>Gen 1: Static</a:t>
-            </a:r>
-          </a:p>
-        </p:txBody>
-      </p:sp>
-      <p:sp>
-        <p:nvSpPr>
-          <p:cNvPr id="4" name="TextBox 3"/>
+          <a:bodyPr rtlCol="0" anchor="ctr"/>
+          <a:lstStyle/>
+          <a:p>
+            <a:pPr algn="ctr"/>
+          </a:p>
+        </p:txBody>
+      </p:sp>
+      <p:sp>
+        <p:nvSpPr>
+          <p:cNvPr id="5" name="TextBox 4"/>
           <p:cNvSpPr txBox="1"/>
           <p:nvPr/>
         </p:nvSpPr>
         <p:spPr>
           <a:xfrm>
-            <a:off x="746607" y="3017520"/>
-            <a:ext cx="2468880" cy="1097280"/>
+            <a:off x="1371600" y="2651760"/>
+            <a:ext cx="6858000" cy="1097280"/>
           </a:xfrm>
           <a:prstGeom prst="rect">
             <a:avLst/>
@@ -7722,34 +7989,30 @@
           </a:bodyPr>
           <a:lstStyle/>
           <a:p>
-            <a:pPr algn="ctr">
-              <a:defRPr sz="1500" b="0" i="0">
-                <a:solidFill>
-                  <a:srgbClr val="6B7280"/>
-                </a:solidFill>
-                <a:latin typeface="Segoe UI"/>
-              </a:defRPr>
-            </a:pPr>
-            <a:r>
-              <a:t>"Here's what</a:t>
-            </a:r>
-            <a:br/>
-            <a:r>
-              <a:t>it looks like"</a:t>
-            </a:r>
-          </a:p>
-        </p:txBody>
-      </p:sp>
-      <p:sp>
-        <p:nvSpPr>
-          <p:cNvPr id="5" name="TextBox 4"/>
+            <a:pPr algn="l">
+              <a:defRPr sz="6000" b="1" i="0">
+                <a:solidFill>
+                  <a:srgbClr val="F5F5F0"/>
+                </a:solidFill>
+                <a:latin typeface="Segoe UI"/>
+              </a:defRPr>
+            </a:pPr>
+            <a:r>
+              <a:t>$5M / hour</a:t>
+            </a:r>
+          </a:p>
+        </p:txBody>
+      </p:sp>
+      <p:sp>
+        <p:nvSpPr>
+          <p:cNvPr id="6" name="TextBox 5"/>
           <p:cNvSpPr txBox="1"/>
           <p:nvPr/>
         </p:nvSpPr>
         <p:spPr>
           <a:xfrm>
-            <a:off x="3215487" y="1920240"/>
-            <a:ext cx="274320" cy="914400"/>
+            <a:off x="7772400" y="2834640"/>
+            <a:ext cx="3017520" cy="822960"/>
           </a:xfrm>
           <a:prstGeom prst="rect">
             <a:avLst/>
@@ -7762,41 +8025,39 @@
           </a:bodyPr>
           <a:lstStyle/>
           <a:p>
-            <a:pPr algn="ctr">
-              <a:defRPr sz="2400" b="0" i="0">
-                <a:solidFill>
-                  <a:srgbClr val="4B5563"/>
-                </a:solidFill>
-                <a:latin typeface="Segoe UI"/>
-              </a:defRPr>
-            </a:pPr>
-            <a:r>
-              <a:t>→</a:t>
-            </a:r>
-          </a:p>
-        </p:txBody>
-      </p:sp>
-      <p:sp>
-        <p:nvSpPr>
-          <p:cNvPr id="6" name="Rounded Rectangle 5"/>
+            <a:pPr algn="r">
+              <a:defRPr sz="2200" b="0" i="0">
+                <a:solidFill>
+                  <a:srgbClr val="8B919C"/>
+                </a:solidFill>
+                <a:latin typeface="Segoe UI"/>
+              </a:defRPr>
+            </a:pPr>
+            <a:r>
+              <a:t>Semiconductor fab downtime</a:t>
+            </a:r>
+          </a:p>
+        </p:txBody>
+      </p:sp>
+      <p:sp>
+        <p:nvSpPr>
+          <p:cNvPr id="7" name="Rectangle 6"/>
           <p:cNvSpPr/>
           <p:nvPr/>
         </p:nvSpPr>
         <p:spPr>
           <a:xfrm>
-            <a:off x="3489807" y="1645920"/>
-            <a:ext cx="2468880" cy="1188720"/>
-          </a:xfrm>
-          <a:prstGeom prst="roundRect">
+            <a:off x="1371600" y="4023359"/>
+            <a:ext cx="9418320" cy="18288"/>
+          </a:xfrm>
+          <a:prstGeom prst="rect">
             <a:avLst/>
           </a:prstGeom>
           <a:solidFill>
-            <a:srgbClr val="151D30"/>
+            <a:srgbClr val="6B7280"/>
           </a:solidFill>
-          <a:ln w="19050">
-            <a:solidFill>
-              <a:srgbClr val="4B5563"/>
-            </a:solidFill>
+          <a:ln>
+            <a:noFill/>
           </a:ln>
         </p:spPr>
         <p:style>
@@ -7814,33 +8075,23 @@
           </a:fontRef>
         </p:style>
         <p:txBody>
-          <a:bodyPr rtlCol="0" anchor="ctr" wrap="square"/>
-          <a:lstStyle/>
-          <a:p>
-            <a:pPr algn="ctr">
-              <a:defRPr sz="2000" b="1">
-                <a:solidFill>
-                  <a:srgbClr val="F5F5F0"/>
-                </a:solidFill>
-                <a:latin typeface="Segoe UI"/>
-              </a:defRPr>
-            </a:pPr>
-            <a:r>
-              <a:t>Gen 2: Reactive</a:t>
-            </a:r>
-          </a:p>
-        </p:txBody>
-      </p:sp>
-      <p:sp>
-        <p:nvSpPr>
-          <p:cNvPr id="7" name="TextBox 6"/>
+          <a:bodyPr rtlCol="0" anchor="ctr"/>
+          <a:lstStyle/>
+          <a:p>
+            <a:pPr algn="ctr"/>
+          </a:p>
+        </p:txBody>
+      </p:sp>
+      <p:sp>
+        <p:nvSpPr>
+          <p:cNvPr id="8" name="TextBox 7"/>
           <p:cNvSpPr txBox="1"/>
           <p:nvPr/>
         </p:nvSpPr>
         <p:spPr>
           <a:xfrm>
-            <a:off x="3489807" y="3017520"/>
-            <a:ext cx="2468880" cy="1097280"/>
+            <a:off x="1371600" y="4206240"/>
+            <a:ext cx="6858000" cy="1097280"/>
           </a:xfrm>
           <a:prstGeom prst="rect">
             <a:avLst/>
@@ -7853,34 +8104,30 @@
           </a:bodyPr>
           <a:lstStyle/>
           <a:p>
-            <a:pPr algn="ctr">
-              <a:defRPr sz="1500" b="0" i="0">
-                <a:solidFill>
-                  <a:srgbClr val="6B7280"/>
-                </a:solidFill>
-                <a:latin typeface="Segoe UI"/>
-              </a:defRPr>
-            </a:pPr>
-            <a:r>
-              <a:t>"Something</a:t>
-            </a:r>
-            <a:br/>
-            <a:r>
-              <a:t>went wrong"</a:t>
-            </a:r>
-          </a:p>
-        </p:txBody>
-      </p:sp>
-      <p:sp>
-        <p:nvSpPr>
-          <p:cNvPr id="8" name="TextBox 7"/>
+            <a:pPr algn="l">
+              <a:defRPr sz="6000" b="1" i="0">
+                <a:solidFill>
+                  <a:srgbClr val="F5F5F0"/>
+                </a:solidFill>
+                <a:latin typeface="Segoe UI"/>
+              </a:defRPr>
+            </a:pPr>
+            <a:r>
+              <a:t>$121B / year</a:t>
+            </a:r>
+          </a:p>
+        </p:txBody>
+      </p:sp>
+      <p:sp>
+        <p:nvSpPr>
+          <p:cNvPr id="9" name="TextBox 8"/>
           <p:cNvSpPr txBox="1"/>
           <p:nvPr/>
         </p:nvSpPr>
         <p:spPr>
           <a:xfrm>
-            <a:off x="5958687" y="1920240"/>
-            <a:ext cx="274320" cy="914400"/>
+            <a:off x="7772400" y="4389120"/>
+            <a:ext cx="3017520" cy="822960"/>
           </a:xfrm>
           <a:prstGeom prst="rect">
             <a:avLst/>
@@ -7893,240 +8140,16 @@
           </a:bodyPr>
           <a:lstStyle/>
           <a:p>
-            <a:pPr algn="ctr">
-              <a:defRPr sz="2400" b="0" i="0">
-                <a:solidFill>
-                  <a:srgbClr val="4B5563"/>
-                </a:solidFill>
-                <a:latin typeface="Segoe UI"/>
-              </a:defRPr>
-            </a:pPr>
-            <a:r>
-              <a:t>→</a:t>
-            </a:r>
-          </a:p>
-        </p:txBody>
-      </p:sp>
-      <p:sp>
-        <p:nvSpPr>
-          <p:cNvPr id="9" name="Rounded Rectangle 8"/>
-          <p:cNvSpPr/>
-          <p:nvPr/>
-        </p:nvSpPr>
-        <p:spPr>
-          <a:xfrm>
-            <a:off x="6233007" y="1645920"/>
-            <a:ext cx="2468880" cy="1188720"/>
-          </a:xfrm>
-          <a:prstGeom prst="roundRect">
-            <a:avLst/>
-          </a:prstGeom>
-          <a:solidFill>
-            <a:srgbClr val="151D30"/>
-          </a:solidFill>
-          <a:ln w="19050">
-            <a:solidFill>
-              <a:srgbClr val="4B5563"/>
-            </a:solidFill>
-          </a:ln>
-        </p:spPr>
-        <p:style>
-          <a:lnRef idx="1">
-            <a:schemeClr val="accent1"/>
-          </a:lnRef>
-          <a:fillRef idx="3">
-            <a:schemeClr val="accent1"/>
-          </a:fillRef>
-          <a:effectRef idx="2">
-            <a:schemeClr val="accent1"/>
-          </a:effectRef>
-          <a:fontRef idx="minor">
-            <a:schemeClr val="lt1"/>
-          </a:fontRef>
-        </p:style>
-        <p:txBody>
-          <a:bodyPr rtlCol="0" anchor="ctr" wrap="square"/>
-          <a:lstStyle/>
-          <a:p>
-            <a:pPr algn="ctr">
-              <a:defRPr sz="2000" b="1">
-                <a:solidFill>
-                  <a:srgbClr val="F5F5F0"/>
-                </a:solidFill>
-                <a:latin typeface="Segoe UI"/>
-              </a:defRPr>
-            </a:pPr>
-            <a:r>
-              <a:t>Gen 3: Predictive</a:t>
-            </a:r>
-          </a:p>
-        </p:txBody>
-      </p:sp>
-      <p:sp>
-        <p:nvSpPr>
-          <p:cNvPr id="10" name="TextBox 9"/>
-          <p:cNvSpPr txBox="1"/>
-          <p:nvPr/>
-        </p:nvSpPr>
-        <p:spPr>
-          <a:xfrm>
-            <a:off x="6233007" y="3017520"/>
-            <a:ext cx="2468880" cy="1097280"/>
-          </a:xfrm>
-          <a:prstGeom prst="rect">
-            <a:avLst/>
-          </a:prstGeom>
-          <a:noFill/>
-        </p:spPr>
-        <p:txBody>
-          <a:bodyPr wrap="square">
-            <a:spAutoFit/>
-          </a:bodyPr>
-          <a:lstStyle/>
-          <a:p>
-            <a:pPr algn="ctr">
-              <a:defRPr sz="1500" b="0" i="0">
-                <a:solidFill>
-                  <a:srgbClr val="6B7280"/>
-                </a:solidFill>
-                <a:latin typeface="Segoe UI"/>
-              </a:defRPr>
-            </a:pPr>
-            <a:r>
-              <a:t>"Something</a:t>
-            </a:r>
-            <a:br/>
-            <a:r>
-              <a:t>will go wrong"</a:t>
-            </a:r>
-          </a:p>
-        </p:txBody>
-      </p:sp>
-      <p:sp>
-        <p:nvSpPr>
-          <p:cNvPr id="11" name="TextBox 10"/>
-          <p:cNvSpPr txBox="1"/>
-          <p:nvPr/>
-        </p:nvSpPr>
-        <p:spPr>
-          <a:xfrm>
-            <a:off x="8701887" y="1920240"/>
-            <a:ext cx="274320" cy="914400"/>
-          </a:xfrm>
-          <a:prstGeom prst="rect">
-            <a:avLst/>
-          </a:prstGeom>
-          <a:noFill/>
-        </p:spPr>
-        <p:txBody>
-          <a:bodyPr wrap="square">
-            <a:spAutoFit/>
-          </a:bodyPr>
-          <a:lstStyle/>
-          <a:p>
-            <a:pPr algn="ctr">
-              <a:defRPr sz="2400" b="0" i="0">
-                <a:solidFill>
-                  <a:srgbClr val="4B5563"/>
-                </a:solidFill>
-                <a:latin typeface="Segoe UI"/>
-              </a:defRPr>
-            </a:pPr>
-            <a:r>
-              <a:t>→</a:t>
-            </a:r>
-          </a:p>
-        </p:txBody>
-      </p:sp>
-      <p:sp>
-        <p:nvSpPr>
-          <p:cNvPr id="12" name="Rounded Rectangle 11"/>
-          <p:cNvSpPr/>
-          <p:nvPr/>
-        </p:nvSpPr>
-        <p:spPr>
-          <a:xfrm>
-            <a:off x="8976207" y="1645920"/>
-            <a:ext cx="2468880" cy="1188720"/>
-          </a:xfrm>
-          <a:prstGeom prst="roundRect">
-            <a:avLst/>
-          </a:prstGeom>
-          <a:noFill/>
-          <a:ln w="19050">
-            <a:solidFill>
-              <a:srgbClr val="D4D0C8"/>
-            </a:solidFill>
-          </a:ln>
-        </p:spPr>
-        <p:style>
-          <a:lnRef idx="1">
-            <a:schemeClr val="accent1"/>
-          </a:lnRef>
-          <a:fillRef idx="3">
-            <a:schemeClr val="accent1"/>
-          </a:fillRef>
-          <a:effectRef idx="2">
-            <a:schemeClr val="accent1"/>
-          </a:effectRef>
-          <a:fontRef idx="minor">
-            <a:schemeClr val="lt1"/>
-          </a:fontRef>
-        </p:style>
-        <p:txBody>
-          <a:bodyPr rtlCol="0" anchor="ctr" wrap="square"/>
-          <a:lstStyle/>
-          <a:p>
-            <a:pPr algn="ctr">
-              <a:defRPr sz="2000" b="1">
-                <a:solidFill>
-                  <a:srgbClr val="E8E4D9"/>
-                </a:solidFill>
-                <a:latin typeface="Segoe UI"/>
-              </a:defRPr>
-            </a:pPr>
-            <a:r>
-              <a:t>Gen 4: ?</a:t>
-            </a:r>
-          </a:p>
-        </p:txBody>
-      </p:sp>
-      <p:sp>
-        <p:nvSpPr>
-          <p:cNvPr id="13" name="TextBox 12"/>
-          <p:cNvSpPr txBox="1"/>
-          <p:nvPr/>
-        </p:nvSpPr>
-        <p:spPr>
-          <a:xfrm>
-            <a:off x="914400" y="4754880"/>
-            <a:ext cx="10058400" cy="1371600"/>
-          </a:xfrm>
-          <a:prstGeom prst="rect">
-            <a:avLst/>
-          </a:prstGeom>
-          <a:noFill/>
-        </p:spPr>
-        <p:txBody>
-          <a:bodyPr wrap="square">
-            <a:spAutoFit/>
-          </a:bodyPr>
-          <a:lstStyle/>
-          <a:p>
-            <a:pPr algn="l">
+            <a:pPr algn="r">
               <a:defRPr sz="2200" b="0" i="0">
                 <a:solidFill>
-                  <a:srgbClr val="E8E4D9"/>
-                </a:solidFill>
-                <a:latin typeface="Segoe UI"/>
-              </a:defRPr>
-            </a:pPr>
-            <a:r>
-              <a:t>Each generation gets smarter about what's happening.</a:t>
-            </a:r>
-            <a:br/>
-            <a:r>
-              <a:t>But the human is still the one who decides what to do about it.</a:t>
+                  <a:srgbClr val="8B919C"/>
+                </a:solidFill>
+                <a:latin typeface="Segoe UI"/>
+              </a:defRPr>
+            </a:pPr>
+            <a:r>
+              <a:t>U.S. grid outage costs</a:t>
             </a:r>
           </a:p>
         </p:txBody>
@@ -8173,8 +8196,8 @@
         </p:nvSpPr>
         <p:spPr>
           <a:xfrm>
-            <a:off x="1371600" y="2286000"/>
-            <a:ext cx="9144000" cy="2743200"/>
+            <a:off x="1097280" y="457200"/>
+            <a:ext cx="4572000" cy="457200"/>
           </a:xfrm>
           <a:prstGeom prst="rect">
             <a:avLst/>
@@ -8188,7 +8211,453 @@
           <a:lstStyle/>
           <a:p>
             <a:pPr algn="l">
-              <a:defRPr sz="4200" b="1" i="0">
+              <a:defRPr sz="2000" b="0" i="0">
+                <a:solidFill>
+                  <a:srgbClr val="8B919C"/>
+                </a:solidFill>
+                <a:latin typeface="Segoe UI"/>
+              </a:defRPr>
+            </a:pPr>
+            <a:r>
+              <a:t>The Evolution</a:t>
+            </a:r>
+          </a:p>
+        </p:txBody>
+      </p:sp>
+      <p:sp>
+        <p:nvSpPr>
+          <p:cNvPr id="3" name="Rounded Rectangle 2"/>
+          <p:cNvSpPr/>
+          <p:nvPr/>
+        </p:nvSpPr>
+        <p:spPr>
+          <a:xfrm>
+            <a:off x="746607" y="1645920"/>
+            <a:ext cx="2468880" cy="1188720"/>
+          </a:xfrm>
+          <a:prstGeom prst="roundRect">
+            <a:avLst/>
+          </a:prstGeom>
+          <a:solidFill>
+            <a:srgbClr val="151D30"/>
+          </a:solidFill>
+          <a:ln w="19050">
+            <a:solidFill>
+              <a:srgbClr val="6B7280"/>
+            </a:solidFill>
+          </a:ln>
+        </p:spPr>
+        <p:style>
+          <a:lnRef idx="1">
+            <a:schemeClr val="accent1"/>
+          </a:lnRef>
+          <a:fillRef idx="3">
+            <a:schemeClr val="accent1"/>
+          </a:fillRef>
+          <a:effectRef idx="2">
+            <a:schemeClr val="accent1"/>
+          </a:effectRef>
+          <a:fontRef idx="minor">
+            <a:schemeClr val="lt1"/>
+          </a:fontRef>
+        </p:style>
+        <p:txBody>
+          <a:bodyPr rtlCol="0" anchor="ctr" wrap="square"/>
+          <a:lstStyle/>
+          <a:p>
+            <a:pPr algn="ctr">
+              <a:defRPr sz="2000" b="1">
+                <a:solidFill>
+                  <a:srgbClr val="F5F5F0"/>
+                </a:solidFill>
+                <a:latin typeface="Segoe UI"/>
+              </a:defRPr>
+            </a:pPr>
+            <a:r>
+              <a:t>Gen 1: Static</a:t>
+            </a:r>
+          </a:p>
+        </p:txBody>
+      </p:sp>
+      <p:sp>
+        <p:nvSpPr>
+          <p:cNvPr id="4" name="TextBox 3"/>
+          <p:cNvSpPr txBox="1"/>
+          <p:nvPr/>
+        </p:nvSpPr>
+        <p:spPr>
+          <a:xfrm>
+            <a:off x="746607" y="3017520"/>
+            <a:ext cx="2468880" cy="1097280"/>
+          </a:xfrm>
+          <a:prstGeom prst="rect">
+            <a:avLst/>
+          </a:prstGeom>
+          <a:noFill/>
+        </p:spPr>
+        <p:txBody>
+          <a:bodyPr wrap="square">
+            <a:spAutoFit/>
+          </a:bodyPr>
+          <a:lstStyle/>
+          <a:p>
+            <a:pPr algn="ctr">
+              <a:defRPr sz="1500" b="0" i="0">
+                <a:solidFill>
+                  <a:srgbClr val="8B919C"/>
+                </a:solidFill>
+                <a:latin typeface="Segoe UI"/>
+              </a:defRPr>
+            </a:pPr>
+            <a:r>
+              <a:t>"Here's what</a:t>
+            </a:r>
+            <a:br/>
+            <a:r>
+              <a:t>it looks like"</a:t>
+            </a:r>
+          </a:p>
+        </p:txBody>
+      </p:sp>
+      <p:sp>
+        <p:nvSpPr>
+          <p:cNvPr id="5" name="TextBox 4"/>
+          <p:cNvSpPr txBox="1"/>
+          <p:nvPr/>
+        </p:nvSpPr>
+        <p:spPr>
+          <a:xfrm>
+            <a:off x="3215487" y="1920240"/>
+            <a:ext cx="274320" cy="914400"/>
+          </a:xfrm>
+          <a:prstGeom prst="rect">
+            <a:avLst/>
+          </a:prstGeom>
+          <a:noFill/>
+        </p:spPr>
+        <p:txBody>
+          <a:bodyPr wrap="square">
+            <a:spAutoFit/>
+          </a:bodyPr>
+          <a:lstStyle/>
+          <a:p>
+            <a:pPr algn="ctr">
+              <a:defRPr sz="2400" b="0" i="0">
+                <a:solidFill>
+                  <a:srgbClr val="6B7280"/>
+                </a:solidFill>
+                <a:latin typeface="Segoe UI"/>
+              </a:defRPr>
+            </a:pPr>
+            <a:r>
+              <a:t>→</a:t>
+            </a:r>
+          </a:p>
+        </p:txBody>
+      </p:sp>
+      <p:sp>
+        <p:nvSpPr>
+          <p:cNvPr id="6" name="Rounded Rectangle 5"/>
+          <p:cNvSpPr/>
+          <p:nvPr/>
+        </p:nvSpPr>
+        <p:spPr>
+          <a:xfrm>
+            <a:off x="3489807" y="1645920"/>
+            <a:ext cx="2468880" cy="1188720"/>
+          </a:xfrm>
+          <a:prstGeom prst="roundRect">
+            <a:avLst/>
+          </a:prstGeom>
+          <a:solidFill>
+            <a:srgbClr val="151D30"/>
+          </a:solidFill>
+          <a:ln w="19050">
+            <a:solidFill>
+              <a:srgbClr val="6B7280"/>
+            </a:solidFill>
+          </a:ln>
+        </p:spPr>
+        <p:style>
+          <a:lnRef idx="1">
+            <a:schemeClr val="accent1"/>
+          </a:lnRef>
+          <a:fillRef idx="3">
+            <a:schemeClr val="accent1"/>
+          </a:fillRef>
+          <a:effectRef idx="2">
+            <a:schemeClr val="accent1"/>
+          </a:effectRef>
+          <a:fontRef idx="minor">
+            <a:schemeClr val="lt1"/>
+          </a:fontRef>
+        </p:style>
+        <p:txBody>
+          <a:bodyPr rtlCol="0" anchor="ctr" wrap="square"/>
+          <a:lstStyle/>
+          <a:p>
+            <a:pPr algn="ctr">
+              <a:defRPr sz="2000" b="1">
+                <a:solidFill>
+                  <a:srgbClr val="F5F5F0"/>
+                </a:solidFill>
+                <a:latin typeface="Segoe UI"/>
+              </a:defRPr>
+            </a:pPr>
+            <a:r>
+              <a:t>Gen 2: Reactive</a:t>
+            </a:r>
+          </a:p>
+        </p:txBody>
+      </p:sp>
+      <p:sp>
+        <p:nvSpPr>
+          <p:cNvPr id="7" name="TextBox 6"/>
+          <p:cNvSpPr txBox="1"/>
+          <p:nvPr/>
+        </p:nvSpPr>
+        <p:spPr>
+          <a:xfrm>
+            <a:off x="3489807" y="3017520"/>
+            <a:ext cx="2468880" cy="1097280"/>
+          </a:xfrm>
+          <a:prstGeom prst="rect">
+            <a:avLst/>
+          </a:prstGeom>
+          <a:noFill/>
+        </p:spPr>
+        <p:txBody>
+          <a:bodyPr wrap="square">
+            <a:spAutoFit/>
+          </a:bodyPr>
+          <a:lstStyle/>
+          <a:p>
+            <a:pPr algn="ctr">
+              <a:defRPr sz="1500" b="0" i="0">
+                <a:solidFill>
+                  <a:srgbClr val="8B919C"/>
+                </a:solidFill>
+                <a:latin typeface="Segoe UI"/>
+              </a:defRPr>
+            </a:pPr>
+            <a:r>
+              <a:t>"Something</a:t>
+            </a:r>
+            <a:br/>
+            <a:r>
+              <a:t>went wrong"</a:t>
+            </a:r>
+          </a:p>
+        </p:txBody>
+      </p:sp>
+      <p:sp>
+        <p:nvSpPr>
+          <p:cNvPr id="8" name="TextBox 7"/>
+          <p:cNvSpPr txBox="1"/>
+          <p:nvPr/>
+        </p:nvSpPr>
+        <p:spPr>
+          <a:xfrm>
+            <a:off x="5958687" y="1920240"/>
+            <a:ext cx="274320" cy="914400"/>
+          </a:xfrm>
+          <a:prstGeom prst="rect">
+            <a:avLst/>
+          </a:prstGeom>
+          <a:noFill/>
+        </p:spPr>
+        <p:txBody>
+          <a:bodyPr wrap="square">
+            <a:spAutoFit/>
+          </a:bodyPr>
+          <a:lstStyle/>
+          <a:p>
+            <a:pPr algn="ctr">
+              <a:defRPr sz="2400" b="0" i="0">
+                <a:solidFill>
+                  <a:srgbClr val="6B7280"/>
+                </a:solidFill>
+                <a:latin typeface="Segoe UI"/>
+              </a:defRPr>
+            </a:pPr>
+            <a:r>
+              <a:t>→</a:t>
+            </a:r>
+          </a:p>
+        </p:txBody>
+      </p:sp>
+      <p:sp>
+        <p:nvSpPr>
+          <p:cNvPr id="9" name="Rounded Rectangle 8"/>
+          <p:cNvSpPr/>
+          <p:nvPr/>
+        </p:nvSpPr>
+        <p:spPr>
+          <a:xfrm>
+            <a:off x="6233007" y="1645920"/>
+            <a:ext cx="2468880" cy="1188720"/>
+          </a:xfrm>
+          <a:prstGeom prst="roundRect">
+            <a:avLst/>
+          </a:prstGeom>
+          <a:solidFill>
+            <a:srgbClr val="151D30"/>
+          </a:solidFill>
+          <a:ln w="19050">
+            <a:solidFill>
+              <a:srgbClr val="6B7280"/>
+            </a:solidFill>
+          </a:ln>
+        </p:spPr>
+        <p:style>
+          <a:lnRef idx="1">
+            <a:schemeClr val="accent1"/>
+          </a:lnRef>
+          <a:fillRef idx="3">
+            <a:schemeClr val="accent1"/>
+          </a:fillRef>
+          <a:effectRef idx="2">
+            <a:schemeClr val="accent1"/>
+          </a:effectRef>
+          <a:fontRef idx="minor">
+            <a:schemeClr val="lt1"/>
+          </a:fontRef>
+        </p:style>
+        <p:txBody>
+          <a:bodyPr rtlCol="0" anchor="ctr" wrap="square"/>
+          <a:lstStyle/>
+          <a:p>
+            <a:pPr algn="ctr">
+              <a:defRPr sz="2000" b="1">
+                <a:solidFill>
+                  <a:srgbClr val="F5F5F0"/>
+                </a:solidFill>
+                <a:latin typeface="Segoe UI"/>
+              </a:defRPr>
+            </a:pPr>
+            <a:r>
+              <a:t>Gen 3: Predictive</a:t>
+            </a:r>
+          </a:p>
+        </p:txBody>
+      </p:sp>
+      <p:sp>
+        <p:nvSpPr>
+          <p:cNvPr id="10" name="TextBox 9"/>
+          <p:cNvSpPr txBox="1"/>
+          <p:nvPr/>
+        </p:nvSpPr>
+        <p:spPr>
+          <a:xfrm>
+            <a:off x="6233007" y="3017520"/>
+            <a:ext cx="2468880" cy="1097280"/>
+          </a:xfrm>
+          <a:prstGeom prst="rect">
+            <a:avLst/>
+          </a:prstGeom>
+          <a:noFill/>
+        </p:spPr>
+        <p:txBody>
+          <a:bodyPr wrap="square">
+            <a:spAutoFit/>
+          </a:bodyPr>
+          <a:lstStyle/>
+          <a:p>
+            <a:pPr algn="ctr">
+              <a:defRPr sz="1500" b="0" i="0">
+                <a:solidFill>
+                  <a:srgbClr val="8B919C"/>
+                </a:solidFill>
+                <a:latin typeface="Segoe UI"/>
+              </a:defRPr>
+            </a:pPr>
+            <a:r>
+              <a:t>"Something</a:t>
+            </a:r>
+            <a:br/>
+            <a:r>
+              <a:t>will go wrong"</a:t>
+            </a:r>
+          </a:p>
+        </p:txBody>
+      </p:sp>
+      <p:sp>
+        <p:nvSpPr>
+          <p:cNvPr id="11" name="TextBox 10"/>
+          <p:cNvSpPr txBox="1"/>
+          <p:nvPr/>
+        </p:nvSpPr>
+        <p:spPr>
+          <a:xfrm>
+            <a:off x="8701887" y="1920240"/>
+            <a:ext cx="274320" cy="914400"/>
+          </a:xfrm>
+          <a:prstGeom prst="rect">
+            <a:avLst/>
+          </a:prstGeom>
+          <a:noFill/>
+        </p:spPr>
+        <p:txBody>
+          <a:bodyPr wrap="square">
+            <a:spAutoFit/>
+          </a:bodyPr>
+          <a:lstStyle/>
+          <a:p>
+            <a:pPr algn="ctr">
+              <a:defRPr sz="2400" b="0" i="0">
+                <a:solidFill>
+                  <a:srgbClr val="6B7280"/>
+                </a:solidFill>
+                <a:latin typeface="Segoe UI"/>
+              </a:defRPr>
+            </a:pPr>
+            <a:r>
+              <a:t>→</a:t>
+            </a:r>
+          </a:p>
+        </p:txBody>
+      </p:sp>
+      <p:sp>
+        <p:nvSpPr>
+          <p:cNvPr id="12" name="Rounded Rectangle 11"/>
+          <p:cNvSpPr/>
+          <p:nvPr/>
+        </p:nvSpPr>
+        <p:spPr>
+          <a:xfrm>
+            <a:off x="8976207" y="1645920"/>
+            <a:ext cx="2468880" cy="1188720"/>
+          </a:xfrm>
+          <a:prstGeom prst="roundRect">
+            <a:avLst/>
+          </a:prstGeom>
+          <a:noFill/>
+          <a:ln w="19050">
+            <a:solidFill>
+              <a:srgbClr val="D4D0C8"/>
+            </a:solidFill>
+          </a:ln>
+        </p:spPr>
+        <p:style>
+          <a:lnRef idx="1">
+            <a:schemeClr val="accent1"/>
+          </a:lnRef>
+          <a:fillRef idx="3">
+            <a:schemeClr val="accent1"/>
+          </a:fillRef>
+          <a:effectRef idx="2">
+            <a:schemeClr val="accent1"/>
+          </a:effectRef>
+          <a:fontRef idx="minor">
+            <a:schemeClr val="lt1"/>
+          </a:fontRef>
+        </p:style>
+        <p:txBody>
+          <a:bodyPr rtlCol="0" anchor="ctr" wrap="square"/>
+          <a:lstStyle/>
+          <a:p>
+            <a:pPr algn="ctr">
+              <a:defRPr sz="2000" b="1">
                 <a:solidFill>
                   <a:srgbClr val="E8E4D9"/>
                 </a:solidFill>
@@ -8196,15 +8665,47 @@
               </a:defRPr>
             </a:pPr>
             <a:r>
-              <a:t>Digital twins can see everything.</a:t>
+              <a:t>Gen 4: ?</a:t>
+            </a:r>
+          </a:p>
+        </p:txBody>
+      </p:sp>
+      <p:sp>
+        <p:nvSpPr>
+          <p:cNvPr id="13" name="TextBox 12"/>
+          <p:cNvSpPr txBox="1"/>
+          <p:nvPr/>
+        </p:nvSpPr>
+        <p:spPr>
+          <a:xfrm>
+            <a:off x="914400" y="4754880"/>
+            <a:ext cx="10058400" cy="1371600"/>
+          </a:xfrm>
+          <a:prstGeom prst="rect">
+            <a:avLst/>
+          </a:prstGeom>
+          <a:noFill/>
+        </p:spPr>
+        <p:txBody>
+          <a:bodyPr wrap="square">
+            <a:spAutoFit/>
+          </a:bodyPr>
+          <a:lstStyle/>
+          <a:p>
+            <a:pPr algn="l">
+              <a:defRPr sz="2200" b="0" i="0">
+                <a:solidFill>
+                  <a:srgbClr val="E8E4D9"/>
+                </a:solidFill>
+                <a:latin typeface="Segoe UI"/>
+              </a:defRPr>
+            </a:pPr>
+            <a:r>
+              <a:t>Each generation gets smarter about what's happening.</a:t>
             </a:r>
             <a:br/>
             <a:r>
-              <a:t>They can't do anything</a:t>
-            </a:r>
-            <a:br/>
-            <a:r>
-              <a:t>about what they see.</a:t>
+              <a:t>But the human is still the one who decides what to do about it.</a:t>
             </a:r>
           </a:p>
         </p:txBody>
@@ -8251,8 +8752,8 @@
         </p:nvSpPr>
         <p:spPr>
           <a:xfrm>
-            <a:off x="0" y="2286000"/>
-            <a:ext cx="12191695" cy="2286000"/>
+            <a:off x="1371600" y="2286000"/>
+            <a:ext cx="9144000" cy="2743200"/>
           </a:xfrm>
           <a:prstGeom prst="rect">
             <a:avLst/>
@@ -8265,16 +8766,24 @@
           </a:bodyPr>
           <a:lstStyle/>
           <a:p>
-            <a:pPr algn="ctr">
-              <a:defRPr sz="7200" b="1" i="0">
-                <a:solidFill>
-                  <a:srgbClr val="F5F5F0"/>
-                </a:solidFill>
-                <a:latin typeface="Segoe UI"/>
-              </a:defRPr>
-            </a:pPr>
-            <a:r>
-              <a:t>2:14 AM</a:t>
+            <a:pPr algn="l">
+              <a:defRPr sz="4200" b="1" i="0">
+                <a:solidFill>
+                  <a:srgbClr val="E8E4D9"/>
+                </a:solidFill>
+                <a:latin typeface="Segoe UI"/>
+              </a:defRPr>
+            </a:pPr>
+            <a:r>
+              <a:t>Digital twins can see everything.</a:t>
+            </a:r>
+            <a:br/>
+            <a:r>
+              <a:t>They can't do anything</a:t>
+            </a:r>
+            <a:br/>
+            <a:r>
+              <a:t>about what they see.</a:t>
             </a:r>
           </a:p>
         </p:txBody>
@@ -8321,8 +8830,8 @@
         </p:nvSpPr>
         <p:spPr>
           <a:xfrm>
-            <a:off x="1371600" y="2286000"/>
-            <a:ext cx="9144000" cy="1371600"/>
+            <a:off x="0" y="2286000"/>
+            <a:ext cx="12191695" cy="2286000"/>
           </a:xfrm>
           <a:prstGeom prst="rect">
             <a:avLst/>
@@ -8335,7 +8844,7 @@
           </a:bodyPr>
           <a:lstStyle/>
           <a:p>
-            <a:pPr algn="l">
+            <a:pPr algn="ctr">
               <a:defRPr sz="7200" b="1" i="0">
                 <a:solidFill>
                   <a:srgbClr val="F5F5F0"/>
@@ -8344,43 +8853,7 @@
               </a:defRPr>
             </a:pPr>
             <a:r>
-              <a:t>Agents</a:t>
-            </a:r>
-          </a:p>
-        </p:txBody>
-      </p:sp>
-      <p:sp>
-        <p:nvSpPr>
-          <p:cNvPr id="3" name="TextBox 2"/>
-          <p:cNvSpPr txBox="1"/>
-          <p:nvPr/>
-        </p:nvSpPr>
-        <p:spPr>
-          <a:xfrm>
-            <a:off x="1371600" y="3657600"/>
-            <a:ext cx="7315200" cy="731520"/>
-          </a:xfrm>
-          <a:prstGeom prst="rect">
-            <a:avLst/>
-          </a:prstGeom>
-          <a:noFill/>
-        </p:spPr>
-        <p:txBody>
-          <a:bodyPr wrap="square">
-            <a:spAutoFit/>
-          </a:bodyPr>
-          <a:lstStyle/>
-          <a:p>
-            <a:pPr algn="l">
-              <a:defRPr sz="2400" b="0" i="0">
-                <a:solidFill>
-                  <a:srgbClr val="E8E4D9"/>
-                </a:solidFill>
-                <a:latin typeface="Segoe UI"/>
-              </a:defRPr>
-            </a:pPr>
-            <a:r>
-              <a:t>Autonomous AI systems that can reason, plan, and act.</a:t>
+              <a:t>2:14 AM</a:t>
             </a:r>
           </a:p>
         </p:txBody>
@@ -8427,8 +8900,8 @@
         </p:nvSpPr>
         <p:spPr>
           <a:xfrm>
-            <a:off x="1097280" y="457200"/>
-            <a:ext cx="4572000" cy="457200"/>
+            <a:off x="1371600" y="2286000"/>
+            <a:ext cx="9144000" cy="1371600"/>
           </a:xfrm>
           <a:prstGeom prst="rect">
             <a:avLst/>
@@ -8442,40 +8915,38 @@
           <a:lstStyle/>
           <a:p>
             <a:pPr algn="l">
-              <a:defRPr sz="1400" b="0" i="0">
-                <a:solidFill>
-                  <a:srgbClr val="4B5563"/>
-                </a:solidFill>
-                <a:latin typeface="Segoe UI"/>
-              </a:defRPr>
-            </a:pPr>
-            <a:r>
-              <a:t>What Makes an Agent</a:t>
-            </a:r>
-          </a:p>
-        </p:txBody>
-      </p:sp>
-      <p:sp>
-        <p:nvSpPr>
-          <p:cNvPr id="3" name="Rounded Rectangle 2"/>
+              <a:defRPr sz="7200" b="1" i="0">
+                <a:solidFill>
+                  <a:srgbClr val="F5F5F0"/>
+                </a:solidFill>
+                <a:latin typeface="Segoe UI"/>
+              </a:defRPr>
+            </a:pPr>
+            <a:r>
+              <a:t>Agents</a:t>
+            </a:r>
+          </a:p>
+        </p:txBody>
+      </p:sp>
+      <p:sp>
+        <p:nvSpPr>
+          <p:cNvPr id="3" name="Rectangle 2"/>
           <p:cNvSpPr/>
           <p:nvPr/>
         </p:nvSpPr>
         <p:spPr>
           <a:xfrm>
-            <a:off x="746607" y="1828800"/>
-            <a:ext cx="2468880" cy="1097280"/>
-          </a:xfrm>
-          <a:prstGeom prst="roundRect">
+            <a:off x="1371600" y="3931920"/>
+            <a:ext cx="2743200" cy="10972"/>
+          </a:xfrm>
+          <a:prstGeom prst="rect">
             <a:avLst/>
           </a:prstGeom>
           <a:solidFill>
-            <a:srgbClr val="151D30"/>
+            <a:srgbClr val="D4D0C8"/>
           </a:solidFill>
-          <a:ln w="19050">
-            <a:solidFill>
-              <a:srgbClr val="D4D0C8"/>
-            </a:solidFill>
+          <a:ln>
+            <a:noFill/>
           </a:ln>
         </p:spPr>
         <p:style>
@@ -8493,361 +8964,10 @@
           </a:fontRef>
         </p:style>
         <p:txBody>
-          <a:bodyPr rtlCol="0" anchor="ctr" wrap="square"/>
-          <a:lstStyle/>
-          <a:p>
-            <a:pPr algn="ctr">
-              <a:defRPr sz="2200" b="1">
-                <a:solidFill>
-                  <a:srgbClr val="F5F5F0"/>
-                </a:solidFill>
-                <a:latin typeface="Segoe UI"/>
-              </a:defRPr>
-            </a:pPr>
-            <a:r>
-              <a:t>Autonomy</a:t>
-            </a:r>
-          </a:p>
-        </p:txBody>
-      </p:sp>
-      <p:sp>
-        <p:nvSpPr>
-          <p:cNvPr id="4" name="TextBox 3"/>
-          <p:cNvSpPr txBox="1"/>
-          <p:nvPr/>
-        </p:nvSpPr>
-        <p:spPr>
-          <a:xfrm>
-            <a:off x="883767" y="3200400"/>
-            <a:ext cx="2286000" cy="1645920"/>
-          </a:xfrm>
-          <a:prstGeom prst="rect">
-            <a:avLst/>
-          </a:prstGeom>
-          <a:noFill/>
-        </p:spPr>
-        <p:txBody>
-          <a:bodyPr wrap="square">
-            <a:spAutoFit/>
-          </a:bodyPr>
-          <a:lstStyle/>
-          <a:p>
-            <a:pPr algn="ctr">
-              <a:defRPr sz="1500" b="0" i="0">
-                <a:solidFill>
-                  <a:srgbClr val="6B7280"/>
-                </a:solidFill>
-                <a:latin typeface="Segoe UI"/>
-              </a:defRPr>
-            </a:pPr>
-            <a:r>
-              <a:t>Acts within defined</a:t>
-            </a:r>
-            <a:br/>
-            <a:r>
-              <a:t>boundaries without</a:t>
-            </a:r>
-            <a:br/>
-            <a:r>
-              <a:t>prompting</a:t>
-            </a:r>
-          </a:p>
-        </p:txBody>
-      </p:sp>
-      <p:sp>
-        <p:nvSpPr>
-          <p:cNvPr id="5" name="Rounded Rectangle 4"/>
-          <p:cNvSpPr/>
-          <p:nvPr/>
-        </p:nvSpPr>
-        <p:spPr>
-          <a:xfrm>
-            <a:off x="3489807" y="1828800"/>
-            <a:ext cx="2468880" cy="1097280"/>
-          </a:xfrm>
-          <a:prstGeom prst="roundRect">
-            <a:avLst/>
-          </a:prstGeom>
-          <a:solidFill>
-            <a:srgbClr val="151D30"/>
-          </a:solidFill>
-          <a:ln w="19050">
-            <a:solidFill>
-              <a:srgbClr val="D4D0C8"/>
-            </a:solidFill>
-          </a:ln>
-        </p:spPr>
-        <p:style>
-          <a:lnRef idx="1">
-            <a:schemeClr val="accent1"/>
-          </a:lnRef>
-          <a:fillRef idx="3">
-            <a:schemeClr val="accent1"/>
-          </a:fillRef>
-          <a:effectRef idx="2">
-            <a:schemeClr val="accent1"/>
-          </a:effectRef>
-          <a:fontRef idx="minor">
-            <a:schemeClr val="lt1"/>
-          </a:fontRef>
-        </p:style>
-        <p:txBody>
-          <a:bodyPr rtlCol="0" anchor="ctr" wrap="square"/>
-          <a:lstStyle/>
-          <a:p>
-            <a:pPr algn="ctr">
-              <a:defRPr sz="2200" b="1">
-                <a:solidFill>
-                  <a:srgbClr val="F5F5F0"/>
-                </a:solidFill>
-                <a:latin typeface="Segoe UI"/>
-              </a:defRPr>
-            </a:pPr>
-            <a:r>
-              <a:t>Planning</a:t>
-            </a:r>
-          </a:p>
-        </p:txBody>
-      </p:sp>
-      <p:sp>
-        <p:nvSpPr>
-          <p:cNvPr id="6" name="TextBox 5"/>
-          <p:cNvSpPr txBox="1"/>
-          <p:nvPr/>
-        </p:nvSpPr>
-        <p:spPr>
-          <a:xfrm>
-            <a:off x="3626967" y="3200400"/>
-            <a:ext cx="2286000" cy="1645920"/>
-          </a:xfrm>
-          <a:prstGeom prst="rect">
-            <a:avLst/>
-          </a:prstGeom>
-          <a:noFill/>
-        </p:spPr>
-        <p:txBody>
-          <a:bodyPr wrap="square">
-            <a:spAutoFit/>
-          </a:bodyPr>
-          <a:lstStyle/>
-          <a:p>
-            <a:pPr algn="ctr">
-              <a:defRPr sz="1500" b="0" i="0">
-                <a:solidFill>
-                  <a:srgbClr val="6B7280"/>
-                </a:solidFill>
-                <a:latin typeface="Segoe UI"/>
-              </a:defRPr>
-            </a:pPr>
-            <a:r>
-              <a:t>Breaks complex problems</a:t>
-            </a:r>
-            <a:br/>
-            <a:r>
-              <a:t>into multi-step</a:t>
-            </a:r>
-            <a:br/>
-            <a:r>
-              <a:t>workflows</a:t>
-            </a:r>
-          </a:p>
-        </p:txBody>
-      </p:sp>
-      <p:sp>
-        <p:nvSpPr>
-          <p:cNvPr id="7" name="Rounded Rectangle 6"/>
-          <p:cNvSpPr/>
-          <p:nvPr/>
-        </p:nvSpPr>
-        <p:spPr>
-          <a:xfrm>
-            <a:off x="6233007" y="1828800"/>
-            <a:ext cx="2468880" cy="1097280"/>
-          </a:xfrm>
-          <a:prstGeom prst="roundRect">
-            <a:avLst/>
-          </a:prstGeom>
-          <a:solidFill>
-            <a:srgbClr val="151D30"/>
-          </a:solidFill>
-          <a:ln w="19050">
-            <a:solidFill>
-              <a:srgbClr val="D4D0C8"/>
-            </a:solidFill>
-          </a:ln>
-        </p:spPr>
-        <p:style>
-          <a:lnRef idx="1">
-            <a:schemeClr val="accent1"/>
-          </a:lnRef>
-          <a:fillRef idx="3">
-            <a:schemeClr val="accent1"/>
-          </a:fillRef>
-          <a:effectRef idx="2">
-            <a:schemeClr val="accent1"/>
-          </a:effectRef>
-          <a:fontRef idx="minor">
-            <a:schemeClr val="lt1"/>
-          </a:fontRef>
-        </p:style>
-        <p:txBody>
-          <a:bodyPr rtlCol="0" anchor="ctr" wrap="square"/>
-          <a:lstStyle/>
-          <a:p>
-            <a:pPr algn="ctr">
-              <a:defRPr sz="2200" b="1">
-                <a:solidFill>
-                  <a:srgbClr val="F5F5F0"/>
-                </a:solidFill>
-                <a:latin typeface="Segoe UI"/>
-              </a:defRPr>
-            </a:pPr>
-            <a:r>
-              <a:t>Tool Use</a:t>
-            </a:r>
-          </a:p>
-        </p:txBody>
-      </p:sp>
-      <p:sp>
-        <p:nvSpPr>
-          <p:cNvPr id="8" name="TextBox 7"/>
-          <p:cNvSpPr txBox="1"/>
-          <p:nvPr/>
-        </p:nvSpPr>
-        <p:spPr>
-          <a:xfrm>
-            <a:off x="6370167" y="3200400"/>
-            <a:ext cx="2286000" cy="1645920"/>
-          </a:xfrm>
-          <a:prstGeom prst="rect">
-            <a:avLst/>
-          </a:prstGeom>
-          <a:noFill/>
-        </p:spPr>
-        <p:txBody>
-          <a:bodyPr wrap="square">
-            <a:spAutoFit/>
-          </a:bodyPr>
-          <a:lstStyle/>
-          <a:p>
-            <a:pPr algn="ctr">
-              <a:defRPr sz="1500" b="0" i="0">
-                <a:solidFill>
-                  <a:srgbClr val="6B7280"/>
-                </a:solidFill>
-                <a:latin typeface="Segoe UI"/>
-              </a:defRPr>
-            </a:pPr>
-            <a:r>
-              <a:t>Connects to real</a:t>
-            </a:r>
-            <a:br/>
-            <a:r>
-              <a:t>systems, APIs,</a:t>
-            </a:r>
-            <a:br/>
-            <a:r>
-              <a:t>and databases</a:t>
-            </a:r>
-          </a:p>
-        </p:txBody>
-      </p:sp>
-      <p:sp>
-        <p:nvSpPr>
-          <p:cNvPr id="9" name="Rounded Rectangle 8"/>
-          <p:cNvSpPr/>
-          <p:nvPr/>
-        </p:nvSpPr>
-        <p:spPr>
-          <a:xfrm>
-            <a:off x="8976207" y="1828800"/>
-            <a:ext cx="2468880" cy="1097280"/>
-          </a:xfrm>
-          <a:prstGeom prst="roundRect">
-            <a:avLst/>
-          </a:prstGeom>
-          <a:solidFill>
-            <a:srgbClr val="151D30"/>
-          </a:solidFill>
-          <a:ln w="19050">
-            <a:solidFill>
-              <a:srgbClr val="D4D0C8"/>
-            </a:solidFill>
-          </a:ln>
-        </p:spPr>
-        <p:style>
-          <a:lnRef idx="1">
-            <a:schemeClr val="accent1"/>
-          </a:lnRef>
-          <a:fillRef idx="3">
-            <a:schemeClr val="accent1"/>
-          </a:fillRef>
-          <a:effectRef idx="2">
-            <a:schemeClr val="accent1"/>
-          </a:effectRef>
-          <a:fontRef idx="minor">
-            <a:schemeClr val="lt1"/>
-          </a:fontRef>
-        </p:style>
-        <p:txBody>
-          <a:bodyPr rtlCol="0" anchor="ctr" wrap="square"/>
-          <a:lstStyle/>
-          <a:p>
-            <a:pPr algn="ctr">
-              <a:defRPr sz="2200" b="1">
-                <a:solidFill>
-                  <a:srgbClr val="F5F5F0"/>
-                </a:solidFill>
-                <a:latin typeface="Segoe UI"/>
-              </a:defRPr>
-            </a:pPr>
-            <a:r>
-              <a:t>Reflection</a:t>
-            </a:r>
-          </a:p>
-        </p:txBody>
-      </p:sp>
-      <p:sp>
-        <p:nvSpPr>
-          <p:cNvPr id="10" name="TextBox 9"/>
-          <p:cNvSpPr txBox="1"/>
-          <p:nvPr/>
-        </p:nvSpPr>
-        <p:spPr>
-          <a:xfrm>
-            <a:off x="9113367" y="3200400"/>
-            <a:ext cx="2286000" cy="1645920"/>
-          </a:xfrm>
-          <a:prstGeom prst="rect">
-            <a:avLst/>
-          </a:prstGeom>
-          <a:noFill/>
-        </p:spPr>
-        <p:txBody>
-          <a:bodyPr wrap="square">
-            <a:spAutoFit/>
-          </a:bodyPr>
-          <a:lstStyle/>
-          <a:p>
-            <a:pPr algn="ctr">
-              <a:defRPr sz="1500" b="0" i="0">
-                <a:solidFill>
-                  <a:srgbClr val="6B7280"/>
-                </a:solidFill>
-                <a:latin typeface="Segoe UI"/>
-              </a:defRPr>
-            </a:pPr>
-            <a:r>
-              <a:t>Evaluates its own</a:t>
-            </a:r>
-            <a:br/>
-            <a:r>
-              <a:t>actions and adjusts</a:t>
-            </a:r>
-            <a:br/>
-            <a:r>
-              <a:t>strategy</a:t>
-            </a:r>
+          <a:bodyPr rtlCol="0" anchor="ctr"/>
+          <a:lstStyle/>
+          <a:p>
+            <a:pPr algn="ctr"/>
           </a:p>
         </p:txBody>
       </p:sp>
@@ -8887,19 +9007,57 @@
       <p:grpSpPr/>
       <p:sp>
         <p:nvSpPr>
-          <p:cNvPr id="2" name="Oval 1"/>
+          <p:cNvPr id="2" name="TextBox 1"/>
+          <p:cNvSpPr txBox="1"/>
+          <p:nvPr/>
+        </p:nvSpPr>
+        <p:spPr>
+          <a:xfrm>
+            <a:off x="1097280" y="457200"/>
+            <a:ext cx="4572000" cy="457200"/>
+          </a:xfrm>
+          <a:prstGeom prst="rect">
+            <a:avLst/>
+          </a:prstGeom>
+          <a:noFill/>
+        </p:spPr>
+        <p:txBody>
+          <a:bodyPr wrap="square">
+            <a:spAutoFit/>
+          </a:bodyPr>
+          <a:lstStyle/>
+          <a:p>
+            <a:pPr algn="l">
+              <a:defRPr sz="2000" b="0" i="0">
+                <a:solidFill>
+                  <a:srgbClr val="8B919C"/>
+                </a:solidFill>
+                <a:latin typeface="Segoe UI"/>
+              </a:defRPr>
+            </a:pPr>
+            <a:r>
+              <a:t>What Makes an Agent</a:t>
+            </a:r>
+          </a:p>
+        </p:txBody>
+      </p:sp>
+      <p:sp>
+        <p:nvSpPr>
+          <p:cNvPr id="3" name="Rounded Rectangle 2"/>
           <p:cNvSpPr/>
           <p:nvPr/>
         </p:nvSpPr>
         <p:spPr>
           <a:xfrm>
-            <a:off x="1645920" y="1097280"/>
-            <a:ext cx="5029200" cy="5029200"/>
-          </a:xfrm>
-          <a:prstGeom prst="ellipse">
-            <a:avLst/>
-          </a:prstGeom>
-          <a:noFill/>
+            <a:off x="746607" y="1828800"/>
+            <a:ext cx="2468880" cy="1097280"/>
+          </a:xfrm>
+          <a:prstGeom prst="roundRect">
+            <a:avLst/>
+          </a:prstGeom>
+          <a:solidFill>
+            <a:srgbClr val="151D30"/>
+          </a:solidFill>
           <a:ln w="19050">
             <a:solidFill>
               <a:srgbClr val="D4D0C8"/>
@@ -8921,23 +9079,33 @@
           </a:fontRef>
         </p:style>
         <p:txBody>
-          <a:bodyPr rtlCol="0" anchor="ctr"/>
-          <a:lstStyle/>
-          <a:p>
-            <a:pPr algn="ctr"/>
-          </a:p>
-        </p:txBody>
-      </p:sp>
-      <p:sp>
-        <p:nvSpPr>
-          <p:cNvPr id="3" name="TextBox 2"/>
+          <a:bodyPr rtlCol="0" anchor="ctr" wrap="square"/>
+          <a:lstStyle/>
+          <a:p>
+            <a:pPr algn="ctr">
+              <a:defRPr sz="2200" b="1">
+                <a:solidFill>
+                  <a:srgbClr val="F5F5F0"/>
+                </a:solidFill>
+                <a:latin typeface="Segoe UI"/>
+              </a:defRPr>
+            </a:pPr>
+            <a:r>
+              <a:t>Autonomy</a:t>
+            </a:r>
+          </a:p>
+        </p:txBody>
+      </p:sp>
+      <p:sp>
+        <p:nvSpPr>
+          <p:cNvPr id="4" name="TextBox 3"/>
           <p:cNvSpPr txBox="1"/>
           <p:nvPr/>
         </p:nvSpPr>
         <p:spPr>
           <a:xfrm>
-            <a:off x="2103120" y="2926080"/>
-            <a:ext cx="3200400" cy="914400"/>
+            <a:off x="883767" y="3200400"/>
+            <a:ext cx="2286000" cy="1645920"/>
           </a:xfrm>
           <a:prstGeom prst="rect">
             <a:avLst/>
@@ -8950,83 +9118,45 @@
           </a:bodyPr>
           <a:lstStyle/>
           <a:p>
-            <a:pPr algn="l">
-              <a:defRPr sz="3000" b="1" i="0">
-                <a:solidFill>
-                  <a:srgbClr val="F5F5F0"/>
-                </a:solidFill>
-                <a:latin typeface="Segoe UI"/>
-              </a:defRPr>
-            </a:pPr>
-            <a:r>
-              <a:t>Digital</a:t>
+            <a:pPr algn="ctr">
+              <a:defRPr sz="1500" b="0" i="0">
+                <a:solidFill>
+                  <a:srgbClr val="8B919C"/>
+                </a:solidFill>
+                <a:latin typeface="Segoe UI"/>
+              </a:defRPr>
+            </a:pPr>
+            <a:r>
+              <a:t>Acts within defined</a:t>
             </a:r>
             <a:br/>
             <a:r>
-              <a:t>Twins</a:t>
-            </a:r>
-          </a:p>
-        </p:txBody>
-      </p:sp>
-      <p:sp>
-        <p:nvSpPr>
-          <p:cNvPr id="4" name="TextBox 3"/>
-          <p:cNvSpPr txBox="1"/>
-          <p:nvPr/>
-        </p:nvSpPr>
-        <p:spPr>
-          <a:xfrm>
-            <a:off x="2103120" y="4114800"/>
-            <a:ext cx="2926080" cy="914400"/>
-          </a:xfrm>
-          <a:prstGeom prst="rect">
-            <a:avLst/>
-          </a:prstGeom>
-          <a:noFill/>
-        </p:spPr>
-        <p:txBody>
-          <a:bodyPr wrap="square">
-            <a:spAutoFit/>
-          </a:bodyPr>
-          <a:lstStyle/>
-          <a:p>
-            <a:pPr algn="l">
-              <a:defRPr sz="1600" b="0" i="0">
-                <a:solidFill>
-                  <a:srgbClr val="6B7280"/>
-                </a:solidFill>
-                <a:latin typeface="Segoe UI"/>
-              </a:defRPr>
-            </a:pPr>
-            <a:r>
-              <a:t>The data.</a:t>
+              <a:t>boundaries without</a:t>
             </a:r>
             <a:br/>
             <a:r>
-              <a:t>The models.</a:t>
-            </a:r>
-            <a:br/>
-            <a:r>
-              <a:t>The simulation.</a:t>
-            </a:r>
-          </a:p>
-        </p:txBody>
-      </p:sp>
-      <p:sp>
-        <p:nvSpPr>
-          <p:cNvPr id="5" name="Oval 4"/>
+              <a:t>prompting</a:t>
+            </a:r>
+          </a:p>
+        </p:txBody>
+      </p:sp>
+      <p:sp>
+        <p:nvSpPr>
+          <p:cNvPr id="5" name="Rounded Rectangle 4"/>
           <p:cNvSpPr/>
           <p:nvPr/>
         </p:nvSpPr>
         <p:spPr>
           <a:xfrm>
-            <a:off x="5486400" y="1097280"/>
-            <a:ext cx="5029200" cy="5029200"/>
-          </a:xfrm>
-          <a:prstGeom prst="ellipse">
-            <a:avLst/>
-          </a:prstGeom>
-          <a:noFill/>
+            <a:off x="3489807" y="1828800"/>
+            <a:ext cx="2468880" cy="1097280"/>
+          </a:xfrm>
+          <a:prstGeom prst="roundRect">
+            <a:avLst/>
+          </a:prstGeom>
+          <a:solidFill>
+            <a:srgbClr val="151D30"/>
+          </a:solidFill>
           <a:ln w="19050">
             <a:solidFill>
               <a:srgbClr val="D4D0C8"/>
@@ -9048,10 +9178,20 @@
           </a:fontRef>
         </p:style>
         <p:txBody>
-          <a:bodyPr rtlCol="0" anchor="ctr"/>
-          <a:lstStyle/>
-          <a:p>
-            <a:pPr algn="ctr"/>
+          <a:bodyPr rtlCol="0" anchor="ctr" wrap="square"/>
+          <a:lstStyle/>
+          <a:p>
+            <a:pPr algn="ctr">
+              <a:defRPr sz="2200" b="1">
+                <a:solidFill>
+                  <a:srgbClr val="F5F5F0"/>
+                </a:solidFill>
+                <a:latin typeface="Segoe UI"/>
+              </a:defRPr>
+            </a:pPr>
+            <a:r>
+              <a:t>Planning</a:t>
+            </a:r>
           </a:p>
         </p:txBody>
       </p:sp>
@@ -9063,8 +9203,8 @@
         </p:nvSpPr>
         <p:spPr>
           <a:xfrm>
-            <a:off x="7132320" y="2926080"/>
-            <a:ext cx="3200400" cy="914400"/>
+            <a:off x="3626967" y="3200400"/>
+            <a:ext cx="2286000" cy="1645920"/>
           </a:xfrm>
           <a:prstGeom prst="rect">
             <a:avLst/>
@@ -9077,8 +9217,71 @@
           </a:bodyPr>
           <a:lstStyle/>
           <a:p>
-            <a:pPr algn="l">
-              <a:defRPr sz="3000" b="1" i="0">
+            <a:pPr algn="ctr">
+              <a:defRPr sz="1500" b="0" i="0">
+                <a:solidFill>
+                  <a:srgbClr val="8B919C"/>
+                </a:solidFill>
+                <a:latin typeface="Segoe UI"/>
+              </a:defRPr>
+            </a:pPr>
+            <a:r>
+              <a:t>Breaks complex problems</a:t>
+            </a:r>
+            <a:br/>
+            <a:r>
+              <a:t>into multi-step</a:t>
+            </a:r>
+            <a:br/>
+            <a:r>
+              <a:t>workflows</a:t>
+            </a:r>
+          </a:p>
+        </p:txBody>
+      </p:sp>
+      <p:sp>
+        <p:nvSpPr>
+          <p:cNvPr id="7" name="Rounded Rectangle 6"/>
+          <p:cNvSpPr/>
+          <p:nvPr/>
+        </p:nvSpPr>
+        <p:spPr>
+          <a:xfrm>
+            <a:off x="6233007" y="1828800"/>
+            <a:ext cx="2468880" cy="1097280"/>
+          </a:xfrm>
+          <a:prstGeom prst="roundRect">
+            <a:avLst/>
+          </a:prstGeom>
+          <a:solidFill>
+            <a:srgbClr val="151D30"/>
+          </a:solidFill>
+          <a:ln w="19050">
+            <a:solidFill>
+              <a:srgbClr val="D4D0C8"/>
+            </a:solidFill>
+          </a:ln>
+        </p:spPr>
+        <p:style>
+          <a:lnRef idx="1">
+            <a:schemeClr val="accent1"/>
+          </a:lnRef>
+          <a:fillRef idx="3">
+            <a:schemeClr val="accent1"/>
+          </a:fillRef>
+          <a:effectRef idx="2">
+            <a:schemeClr val="accent1"/>
+          </a:effectRef>
+          <a:fontRef idx="minor">
+            <a:schemeClr val="lt1"/>
+          </a:fontRef>
+        </p:style>
+        <p:txBody>
+          <a:bodyPr rtlCol="0" anchor="ctr" wrap="square"/>
+          <a:lstStyle/>
+          <a:p>
+            <a:pPr algn="ctr">
+              <a:defRPr sz="2200" b="1">
                 <a:solidFill>
                   <a:srgbClr val="F5F5F0"/>
                 </a:solidFill>
@@ -9086,25 +9289,21 @@
               </a:defRPr>
             </a:pPr>
             <a:r>
-              <a:t>Agentic</a:t>
-            </a:r>
-            <a:br/>
-            <a:r>
-              <a:t>AI</a:t>
-            </a:r>
-          </a:p>
-        </p:txBody>
-      </p:sp>
-      <p:sp>
-        <p:nvSpPr>
-          <p:cNvPr id="7" name="TextBox 6"/>
+              <a:t>Tool Use</a:t>
+            </a:r>
+          </a:p>
+        </p:txBody>
+      </p:sp>
+      <p:sp>
+        <p:nvSpPr>
+          <p:cNvPr id="8" name="TextBox 7"/>
           <p:cNvSpPr txBox="1"/>
           <p:nvPr/>
         </p:nvSpPr>
         <p:spPr>
           <a:xfrm>
-            <a:off x="7132320" y="4114800"/>
-            <a:ext cx="2926080" cy="914400"/>
+            <a:off x="6370167" y="3200400"/>
+            <a:ext cx="2286000" cy="1645920"/>
           </a:xfrm>
           <a:prstGeom prst="rect">
             <a:avLst/>
@@ -9117,38 +9316,93 @@
           </a:bodyPr>
           <a:lstStyle/>
           <a:p>
-            <a:pPr algn="l">
-              <a:defRPr sz="1600" b="0" i="0">
-                <a:solidFill>
-                  <a:srgbClr val="6B7280"/>
-                </a:solidFill>
-                <a:latin typeface="Segoe UI"/>
-              </a:defRPr>
-            </a:pPr>
-            <a:r>
-              <a:t>The reasoning.</a:t>
+            <a:pPr algn="ctr">
+              <a:defRPr sz="1500" b="0" i="0">
+                <a:solidFill>
+                  <a:srgbClr val="8B919C"/>
+                </a:solidFill>
+                <a:latin typeface="Segoe UI"/>
+              </a:defRPr>
+            </a:pPr>
+            <a:r>
+              <a:t>Connects to real</a:t>
             </a:r>
             <a:br/>
             <a:r>
-              <a:t>The planning.</a:t>
+              <a:t>systems, APIs,</a:t>
             </a:r>
             <a:br/>
             <a:r>
-              <a:t>The action.</a:t>
-            </a:r>
-          </a:p>
-        </p:txBody>
-      </p:sp>
-      <p:sp>
-        <p:nvSpPr>
-          <p:cNvPr id="8" name="TextBox 7"/>
+              <a:t>and databases</a:t>
+            </a:r>
+          </a:p>
+        </p:txBody>
+      </p:sp>
+      <p:sp>
+        <p:nvSpPr>
+          <p:cNvPr id="9" name="Rounded Rectangle 8"/>
+          <p:cNvSpPr/>
+          <p:nvPr/>
+        </p:nvSpPr>
+        <p:spPr>
+          <a:xfrm>
+            <a:off x="8976207" y="1828800"/>
+            <a:ext cx="2468880" cy="1097280"/>
+          </a:xfrm>
+          <a:prstGeom prst="roundRect">
+            <a:avLst/>
+          </a:prstGeom>
+          <a:solidFill>
+            <a:srgbClr val="151D30"/>
+          </a:solidFill>
+          <a:ln w="19050">
+            <a:solidFill>
+              <a:srgbClr val="D4D0C8"/>
+            </a:solidFill>
+          </a:ln>
+        </p:spPr>
+        <p:style>
+          <a:lnRef idx="1">
+            <a:schemeClr val="accent1"/>
+          </a:lnRef>
+          <a:fillRef idx="3">
+            <a:schemeClr val="accent1"/>
+          </a:fillRef>
+          <a:effectRef idx="2">
+            <a:schemeClr val="accent1"/>
+          </a:effectRef>
+          <a:fontRef idx="minor">
+            <a:schemeClr val="lt1"/>
+          </a:fontRef>
+        </p:style>
+        <p:txBody>
+          <a:bodyPr rtlCol="0" anchor="ctr" wrap="square"/>
+          <a:lstStyle/>
+          <a:p>
+            <a:pPr algn="ctr">
+              <a:defRPr sz="2200" b="1">
+                <a:solidFill>
+                  <a:srgbClr val="F5F5F0"/>
+                </a:solidFill>
+                <a:latin typeface="Segoe UI"/>
+              </a:defRPr>
+            </a:pPr>
+            <a:r>
+              <a:t>Reflection</a:t>
+            </a:r>
+          </a:p>
+        </p:txBody>
+      </p:sp>
+      <p:sp>
+        <p:nvSpPr>
+          <p:cNvPr id="10" name="TextBox 9"/>
           <p:cNvSpPr txBox="1"/>
           <p:nvPr/>
         </p:nvSpPr>
         <p:spPr>
           <a:xfrm>
-            <a:off x="5029200" y="3017520"/>
-            <a:ext cx="2103120" cy="1371600"/>
+            <a:off x="9113367" y="3200400"/>
+            <a:ext cx="2286000" cy="1645920"/>
           </a:xfrm>
           <a:prstGeom prst="rect">
             <a:avLst/>
@@ -9162,15 +9416,23 @@
           <a:lstStyle/>
           <a:p>
             <a:pPr algn="ctr">
-              <a:defRPr sz="5600" b="1" i="0">
-                <a:solidFill>
-                  <a:srgbClr val="E8E4D9"/>
-                </a:solidFill>
-                <a:latin typeface="Segoe UI"/>
-              </a:defRPr>
-            </a:pPr>
-            <a:r>
-              <a:t>?</a:t>
+              <a:defRPr sz="1500" b="0" i="0">
+                <a:solidFill>
+                  <a:srgbClr val="8B919C"/>
+                </a:solidFill>
+                <a:latin typeface="Segoe UI"/>
+              </a:defRPr>
+            </a:pPr>
+            <a:r>
+              <a:t>Evaluates its own</a:t>
+            </a:r>
+            <a:br/>
+            <a:r>
+              <a:t>actions and adjusts</a:t>
+            </a:r>
+            <a:br/>
+            <a:r>
+              <a:t>strategy</a:t>
             </a:r>
           </a:p>
         </p:txBody>

--- a/presentation/presentation-v4-gradient-noir.pptx
+++ b/presentation/presentation-v4-gradient-noir.pptx
@@ -124,6 +124,1876 @@
     </a:lvl9pPr>
   </p:defaultTextStyle>
 </p:presentation>
+</file>
+
+<file path=ppt/notesMasters/notesMaster1.xml><?xml version="1.0" encoding="utf-8"?>
+<p:notesMaster xmlns:a="http://schemas.openxmlformats.org/drawingml/2006/main" xmlns:p="http://schemas.openxmlformats.org/presentationml/2006/main" xmlns:r="http://schemas.openxmlformats.org/officeDocument/2006/relationships">
+  <p:cSld>
+    <p:bg>
+      <p:bgRef idx="1001">
+        <a:schemeClr val="bg1"/>
+      </p:bgRef>
+    </p:bg>
+    <p:spTree>
+      <p:nvGrpSpPr>
+        <p:cNvPr id="1" name=""/>
+        <p:cNvGrpSpPr/>
+        <p:nvPr/>
+      </p:nvGrpSpPr>
+      <p:grpSpPr>
+        <a:xfrm>
+          <a:off x="0" y="0"/>
+          <a:ext cx="0" cy="0"/>
+          <a:chOff x="0" y="0"/>
+          <a:chExt cx="0" cy="0"/>
+        </a:xfrm>
+      </p:grpSpPr>
+      <p:sp>
+        <p:nvSpPr>
+          <p:cNvPr id="2" name="Header Placeholder 1"/>
+          <p:cNvSpPr>
+            <a:spLocks noGrp="1"/>
+          </p:cNvSpPr>
+          <p:nvPr>
+            <p:ph type="hdr" sz="quarter"/>
+          </p:nvPr>
+        </p:nvSpPr>
+        <p:spPr>
+          <a:xfrm>
+            <a:off x="0" y="0"/>
+            <a:ext cx="2971800" cy="457200"/>
+          </a:xfrm>
+          <a:prstGeom prst="rect">
+            <a:avLst/>
+          </a:prstGeom>
+        </p:spPr>
+        <p:txBody>
+          <a:bodyPr vert="horz" lIns="91440" tIns="45720" rIns="91440" bIns="45720" rtlCol="0"/>
+          <a:lstStyle>
+            <a:lvl1pPr algn="l">
+              <a:defRPr sz="1200"/>
+            </a:lvl1pPr>
+          </a:lstStyle>
+          <a:p>
+            <a:endParaRPr lang="en-US"/>
+          </a:p>
+        </p:txBody>
+      </p:sp>
+      <p:sp>
+        <p:nvSpPr>
+          <p:cNvPr id="3" name="Date Placeholder 2"/>
+          <p:cNvSpPr>
+            <a:spLocks noGrp="1"/>
+          </p:cNvSpPr>
+          <p:nvPr>
+            <p:ph type="dt" idx="1"/>
+          </p:nvPr>
+        </p:nvSpPr>
+        <p:spPr>
+          <a:xfrm>
+            <a:off x="3884613" y="0"/>
+            <a:ext cx="2971800" cy="457200"/>
+          </a:xfrm>
+          <a:prstGeom prst="rect">
+            <a:avLst/>
+          </a:prstGeom>
+        </p:spPr>
+        <p:txBody>
+          <a:bodyPr vert="horz" lIns="91440" tIns="45720" rIns="91440" bIns="45720" rtlCol="0"/>
+          <a:lstStyle>
+            <a:lvl1pPr algn="r">
+              <a:defRPr sz="1200"/>
+            </a:lvl1pPr>
+          </a:lstStyle>
+          <a:p>
+            <a:fld id="{0F89C1C7-3DCD-1040-A9CF-14679D8B5DDD}" type="datetimeFigureOut">
+              <a:rPr lang="en-US" smtClean="0"/>
+              <a:t>10/17/16</a:t>
+            </a:fld>
+            <a:endParaRPr lang="en-US"/>
+          </a:p>
+        </p:txBody>
+      </p:sp>
+      <p:sp>
+        <p:nvSpPr>
+          <p:cNvPr id="4" name="Slide Image Placeholder 3"/>
+          <p:cNvSpPr>
+            <a:spLocks noGrp="1" noRot="1" noChangeAspect="1"/>
+          </p:cNvSpPr>
+          <p:nvPr>
+            <p:ph type="sldImg" idx="2"/>
+          </p:nvPr>
+        </p:nvSpPr>
+        <p:spPr>
+          <a:xfrm>
+            <a:off x="1143000" y="685800"/>
+            <a:ext cx="4572000" cy="3429000"/>
+          </a:xfrm>
+          <a:prstGeom prst="rect">
+            <a:avLst/>
+          </a:prstGeom>
+          <a:noFill/>
+          <a:ln w="12700">
+            <a:solidFill>
+              <a:prstClr val="black"/>
+            </a:solidFill>
+          </a:ln>
+        </p:spPr>
+        <p:txBody>
+          <a:bodyPr vert="horz" lIns="91440" tIns="45720" rIns="91440" bIns="45720" rtlCol="0" anchor="ctr"/>
+          <a:lstStyle/>
+          <a:p>
+            <a:endParaRPr lang="en-US"/>
+          </a:p>
+        </p:txBody>
+      </p:sp>
+      <p:sp>
+        <p:nvSpPr>
+          <p:cNvPr id="5" name="Notes Placeholder 4"/>
+          <p:cNvSpPr>
+            <a:spLocks noGrp="1"/>
+          </p:cNvSpPr>
+          <p:nvPr>
+            <p:ph type="body" sz="quarter" idx="3"/>
+          </p:nvPr>
+        </p:nvSpPr>
+        <p:spPr>
+          <a:xfrm>
+            <a:off x="685800" y="4343400"/>
+            <a:ext cx="5486400" cy="4114800"/>
+          </a:xfrm>
+          <a:prstGeom prst="rect">
+            <a:avLst/>
+          </a:prstGeom>
+        </p:spPr>
+        <p:txBody>
+          <a:bodyPr vert="horz" lIns="91440" tIns="45720" rIns="91440" bIns="45720" rtlCol="0"/>
+          <a:lstStyle/>
+          <a:p>
+            <a:pPr lvl="0"/>
+            <a:r>
+              <a:rPr lang="en-US" smtClean="0"/>
+              <a:t>Click to edit Master text styles</a:t>
+            </a:r>
+          </a:p>
+          <a:p>
+            <a:pPr lvl="1"/>
+            <a:r>
+              <a:rPr lang="en-US" smtClean="0"/>
+              <a:t>Second level</a:t>
+            </a:r>
+          </a:p>
+          <a:p>
+            <a:pPr lvl="2"/>
+            <a:r>
+              <a:rPr lang="en-US" smtClean="0"/>
+              <a:t>Third level</a:t>
+            </a:r>
+          </a:p>
+          <a:p>
+            <a:pPr lvl="3"/>
+            <a:r>
+              <a:rPr lang="en-US" smtClean="0"/>
+              <a:t>Fourth level</a:t>
+            </a:r>
+          </a:p>
+          <a:p>
+            <a:pPr lvl="4"/>
+            <a:r>
+              <a:rPr lang="en-US" smtClean="0"/>
+              <a:t>Fifth level</a:t>
+            </a:r>
+            <a:endParaRPr lang="en-US"/>
+          </a:p>
+        </p:txBody>
+      </p:sp>
+      <p:sp>
+        <p:nvSpPr>
+          <p:cNvPr id="6" name="Footer Placeholder 5"/>
+          <p:cNvSpPr>
+            <a:spLocks noGrp="1"/>
+          </p:cNvSpPr>
+          <p:nvPr>
+            <p:ph type="ftr" sz="quarter" idx="4"/>
+          </p:nvPr>
+        </p:nvSpPr>
+        <p:spPr>
+          <a:xfrm>
+            <a:off x="0" y="8685213"/>
+            <a:ext cx="2971800" cy="457200"/>
+          </a:xfrm>
+          <a:prstGeom prst="rect">
+            <a:avLst/>
+          </a:prstGeom>
+        </p:spPr>
+        <p:txBody>
+          <a:bodyPr vert="horz" lIns="91440" tIns="45720" rIns="91440" bIns="45720" rtlCol="0" anchor="b"/>
+          <a:lstStyle>
+            <a:lvl1pPr algn="l">
+              <a:defRPr sz="1200"/>
+            </a:lvl1pPr>
+          </a:lstStyle>
+          <a:p>
+            <a:endParaRPr lang="en-US"/>
+          </a:p>
+        </p:txBody>
+      </p:sp>
+      <p:sp>
+        <p:nvSpPr>
+          <p:cNvPr id="7" name="Slide Number Placeholder 6"/>
+          <p:cNvSpPr>
+            <a:spLocks noGrp="1"/>
+          </p:cNvSpPr>
+          <p:nvPr>
+            <p:ph type="sldNum" sz="quarter" idx="5"/>
+          </p:nvPr>
+        </p:nvSpPr>
+        <p:spPr>
+          <a:xfrm>
+            <a:off x="3884613" y="8685213"/>
+            <a:ext cx="2971800" cy="457200"/>
+          </a:xfrm>
+          <a:prstGeom prst="rect">
+            <a:avLst/>
+          </a:prstGeom>
+        </p:spPr>
+        <p:txBody>
+          <a:bodyPr vert="horz" lIns="91440" tIns="45720" rIns="91440" bIns="45720" rtlCol="0" anchor="b"/>
+          <a:lstStyle>
+            <a:lvl1pPr algn="r">
+              <a:defRPr sz="1200"/>
+            </a:lvl1pPr>
+          </a:lstStyle>
+          <a:p>
+            <a:fld id="{BB5E49A5-4136-284D-997B-48E1D791AD67}" type="slidenum">
+              <a:rPr lang="en-US" smtClean="0"/>
+              <a:t>‹#›</a:t>
+            </a:fld>
+            <a:endParaRPr lang="en-US"/>
+          </a:p>
+        </p:txBody>
+      </p:sp>
+    </p:spTree>
+    <p:extLst>
+      <p:ext uri="{BB962C8B-B14F-4D97-AF65-F5344CB8AC3E}">
+        <p14:creationId xmlns:p14="http://schemas.microsoft.com/office/powerpoint/2010/main" val="2623252185"/>
+      </p:ext>
+    </p:extLst>
+  </p:cSld>
+  <p:clrMap bg1="lt1" tx1="dk1" bg2="lt2" tx2="dk2" accent1="accent1" accent2="accent2" accent3="accent3" accent4="accent4" accent5="accent5" accent6="accent6" hlink="hlink" folHlink="folHlink"/>
+  <p:notesStyle>
+    <a:lvl1pPr marL="0" algn="l" defTabSz="457200" rtl="0" eaLnBrk="1" latinLnBrk="0" hangingPunct="1">
+      <a:defRPr sz="1200" kern="1200">
+        <a:solidFill>
+          <a:schemeClr val="tx1"/>
+        </a:solidFill>
+        <a:latin typeface="+mn-lt"/>
+        <a:ea typeface="+mn-ea"/>
+        <a:cs typeface="+mn-cs"/>
+      </a:defRPr>
+    </a:lvl1pPr>
+    <a:lvl2pPr marL="457200" algn="l" defTabSz="457200" rtl="0" eaLnBrk="1" latinLnBrk="0" hangingPunct="1">
+      <a:defRPr sz="1200" kern="1200">
+        <a:solidFill>
+          <a:schemeClr val="tx1"/>
+        </a:solidFill>
+        <a:latin typeface="+mn-lt"/>
+        <a:ea typeface="+mn-ea"/>
+        <a:cs typeface="+mn-cs"/>
+      </a:defRPr>
+    </a:lvl2pPr>
+    <a:lvl3pPr marL="914400" algn="l" defTabSz="457200" rtl="0" eaLnBrk="1" latinLnBrk="0" hangingPunct="1">
+      <a:defRPr sz="1200" kern="1200">
+        <a:solidFill>
+          <a:schemeClr val="tx1"/>
+        </a:solidFill>
+        <a:latin typeface="+mn-lt"/>
+        <a:ea typeface="+mn-ea"/>
+        <a:cs typeface="+mn-cs"/>
+      </a:defRPr>
+    </a:lvl3pPr>
+    <a:lvl4pPr marL="1371600" algn="l" defTabSz="457200" rtl="0" eaLnBrk="1" latinLnBrk="0" hangingPunct="1">
+      <a:defRPr sz="1200" kern="1200">
+        <a:solidFill>
+          <a:schemeClr val="tx1"/>
+        </a:solidFill>
+        <a:latin typeface="+mn-lt"/>
+        <a:ea typeface="+mn-ea"/>
+        <a:cs typeface="+mn-cs"/>
+      </a:defRPr>
+    </a:lvl4pPr>
+    <a:lvl5pPr marL="1828800" algn="l" defTabSz="457200" rtl="0" eaLnBrk="1" latinLnBrk="0" hangingPunct="1">
+      <a:defRPr sz="1200" kern="1200">
+        <a:solidFill>
+          <a:schemeClr val="tx1"/>
+        </a:solidFill>
+        <a:latin typeface="+mn-lt"/>
+        <a:ea typeface="+mn-ea"/>
+        <a:cs typeface="+mn-cs"/>
+      </a:defRPr>
+    </a:lvl5pPr>
+    <a:lvl6pPr marL="2286000" algn="l" defTabSz="457200" rtl="0" eaLnBrk="1" latinLnBrk="0" hangingPunct="1">
+      <a:defRPr sz="1200" kern="1200">
+        <a:solidFill>
+          <a:schemeClr val="tx1"/>
+        </a:solidFill>
+        <a:latin typeface="+mn-lt"/>
+        <a:ea typeface="+mn-ea"/>
+        <a:cs typeface="+mn-cs"/>
+      </a:defRPr>
+    </a:lvl6pPr>
+    <a:lvl7pPr marL="2743200" algn="l" defTabSz="457200" rtl="0" eaLnBrk="1" latinLnBrk="0" hangingPunct="1">
+      <a:defRPr sz="1200" kern="1200">
+        <a:solidFill>
+          <a:schemeClr val="tx1"/>
+        </a:solidFill>
+        <a:latin typeface="+mn-lt"/>
+        <a:ea typeface="+mn-ea"/>
+        <a:cs typeface="+mn-cs"/>
+      </a:defRPr>
+    </a:lvl7pPr>
+    <a:lvl8pPr marL="3200400" algn="l" defTabSz="457200" rtl="0" eaLnBrk="1" latinLnBrk="0" hangingPunct="1">
+      <a:defRPr sz="1200" kern="1200">
+        <a:solidFill>
+          <a:schemeClr val="tx1"/>
+        </a:solidFill>
+        <a:latin typeface="+mn-lt"/>
+        <a:ea typeface="+mn-ea"/>
+        <a:cs typeface="+mn-cs"/>
+      </a:defRPr>
+    </a:lvl8pPr>
+    <a:lvl9pPr marL="3657600" algn="l" defTabSz="457200" rtl="0" eaLnBrk="1" latinLnBrk="0" hangingPunct="1">
+      <a:defRPr sz="1200" kern="1200">
+        <a:solidFill>
+          <a:schemeClr val="tx1"/>
+        </a:solidFill>
+        <a:latin typeface="+mn-lt"/>
+        <a:ea typeface="+mn-ea"/>
+        <a:cs typeface="+mn-cs"/>
+      </a:defRPr>
+    </a:lvl9pPr>
+  </p:notesStyle>
+</p:notesMaster>
+</file>
+
+<file path=ppt/notesSlides/notesSlide1.xml><?xml version="1.0" encoding="utf-8"?>
+<p:notes xmlns:a="http://schemas.openxmlformats.org/drawingml/2006/main" xmlns:p="http://schemas.openxmlformats.org/presentationml/2006/main" xmlns:r="http://schemas.openxmlformats.org/officeDocument/2006/relationships">
+  <p:cSld>
+    <p:spTree>
+      <p:nvGrpSpPr>
+        <p:cNvPr id="1" name=""/>
+        <p:cNvGrpSpPr/>
+        <p:nvPr/>
+      </p:nvGrpSpPr>
+      <p:grpSpPr>
+        <a:xfrm>
+          <a:off x="0" y="0"/>
+          <a:ext cx="0" cy="0"/>
+          <a:chOff x="0" y="0"/>
+          <a:chExt cx="0" cy="0"/>
+        </a:xfrm>
+      </p:grpSpPr>
+      <p:sp>
+        <p:nvSpPr>
+          <p:cNvPr id="2" name="Slide Image Placeholder 1"/>
+          <p:cNvSpPr>
+            <a:spLocks noGrp="1"/>
+          </p:cNvSpPr>
+          <p:nvPr>
+            <p:ph type="sldImg" idx="2"/>
+          </p:nvPr>
+        </p:nvSpPr>
+        <p:spPr/>
+      </p:sp>
+      <p:sp>
+        <p:nvSpPr>
+          <p:cNvPr id="3" name="Notes Placeholder 2"/>
+          <p:cNvSpPr>
+            <a:spLocks noGrp="1"/>
+          </p:cNvSpPr>
+          <p:nvPr>
+            <p:ph type="body" idx="3" sz="quarter"/>
+          </p:nvPr>
+        </p:nvSpPr>
+        <p:spPr/>
+        <p:txBody>
+          <a:bodyPr/>
+          <a:lstStyle/>
+          <a:p>
+            <a:r>
+              <a:t>Hey everyone. I'm Anthony Poole, software engineer at Microsoft — I build AI systems. But I actually started a bit closer to y'all's world than you'd think — I interned at AMD, did research in photonics, wrote my thesis on digital twins, and I worked on embedded systems for autonomous vehicles. But then I crossed over to the big tech AI side. And over the last year I've watched something reshape how my team thinks about every system we touch. Now when I look back at what's happening with digital twins, I realize the same shift is heading this way.</a:t>
+            </a:r>
+          </a:p>
+        </p:txBody>
+      </p:sp>
+      <p:sp>
+        <p:nvSpPr>
+          <p:cNvPr id="4" name="Slide Number Placeholder 3"/>
+          <p:cNvSpPr>
+            <a:spLocks noGrp="1"/>
+          </p:cNvSpPr>
+          <p:nvPr>
+            <p:ph type="sldNum" idx="5" sz="quarter"/>
+          </p:nvPr>
+        </p:nvSpPr>
+        <p:spPr/>
+      </p:sp>
+    </p:spTree>
+  </p:cSld>
+  <p:clrMapOvr>
+    <a:masterClrMapping/>
+  </p:clrMapOvr>
+</p:notes>
+</file>
+
+<file path=ppt/notesSlides/notesSlide10.xml><?xml version="1.0" encoding="utf-8"?>
+<p:notes xmlns:a="http://schemas.openxmlformats.org/drawingml/2006/main" xmlns:p="http://schemas.openxmlformats.org/presentationml/2006/main" xmlns:r="http://schemas.openxmlformats.org/officeDocument/2006/relationships">
+  <p:cSld>
+    <p:spTree>
+      <p:nvGrpSpPr>
+        <p:cNvPr id="1" name=""/>
+        <p:cNvGrpSpPr/>
+        <p:nvPr/>
+      </p:nvGrpSpPr>
+      <p:grpSpPr>
+        <a:xfrm>
+          <a:off x="0" y="0"/>
+          <a:ext cx="0" cy="0"/>
+          <a:chOff x="0" y="0"/>
+          <a:chExt cx="0" cy="0"/>
+        </a:xfrm>
+      </p:grpSpPr>
+      <p:sp>
+        <p:nvSpPr>
+          <p:cNvPr id="2" name="Slide Image Placeholder 1"/>
+          <p:cNvSpPr>
+            <a:spLocks noGrp="1"/>
+          </p:cNvSpPr>
+          <p:nvPr>
+            <p:ph type="sldImg" idx="2"/>
+          </p:nvPr>
+        </p:nvSpPr>
+        <p:spPr/>
+      </p:sp>
+      <p:sp>
+        <p:nvSpPr>
+          <p:cNvPr id="3" name="Notes Placeholder 2"/>
+          <p:cNvSpPr>
+            <a:spLocks noGrp="1"/>
+          </p:cNvSpPr>
+          <p:nvPr>
+            <p:ph type="body" idx="3" sz="quarter"/>
+          </p:nvPr>
+        </p:nvSpPr>
+        <p:spPr/>
+        <p:txBody>
+          <a:bodyPr/>
+          <a:lstStyle/>
+          <a:p>
+            <a:r>
+              <a:t>On one side, digital twins — the data, the models, the simulation. On the other, agentic AI — the reasoning, the planning, the action. If you're looking at this thinking 'why aren't these connected yet?' — that's exactly the right question.</a:t>
+            </a:r>
+          </a:p>
+        </p:txBody>
+      </p:sp>
+      <p:sp>
+        <p:nvSpPr>
+          <p:cNvPr id="4" name="Slide Number Placeholder 3"/>
+          <p:cNvSpPr>
+            <a:spLocks noGrp="1"/>
+          </p:cNvSpPr>
+          <p:nvPr>
+            <p:ph type="sldNum" idx="5" sz="quarter"/>
+          </p:nvPr>
+        </p:nvSpPr>
+        <p:spPr/>
+      </p:sp>
+    </p:spTree>
+  </p:cSld>
+  <p:clrMapOvr>
+    <a:masterClrMapping/>
+  </p:clrMapOvr>
+</p:notes>
+</file>
+
+<file path=ppt/notesSlides/notesSlide11.xml><?xml version="1.0" encoding="utf-8"?>
+<p:notes xmlns:a="http://schemas.openxmlformats.org/drawingml/2006/main" xmlns:p="http://schemas.openxmlformats.org/presentationml/2006/main" xmlns:r="http://schemas.openxmlformats.org/officeDocument/2006/relationships">
+  <p:cSld>
+    <p:spTree>
+      <p:nvGrpSpPr>
+        <p:cNvPr id="1" name=""/>
+        <p:cNvGrpSpPr/>
+        <p:nvPr/>
+      </p:nvGrpSpPr>
+      <p:grpSpPr>
+        <a:xfrm>
+          <a:off x="0" y="0"/>
+          <a:ext cx="0" cy="0"/>
+          <a:chOff x="0" y="0"/>
+          <a:chExt cx="0" cy="0"/>
+        </a:xfrm>
+      </p:grpSpPr>
+      <p:sp>
+        <p:nvSpPr>
+          <p:cNvPr id="2" name="Slide Image Placeholder 1"/>
+          <p:cNvSpPr>
+            <a:spLocks noGrp="1"/>
+          </p:cNvSpPr>
+          <p:nvPr>
+            <p:ph type="sldImg" idx="2"/>
+          </p:nvPr>
+        </p:nvSpPr>
+        <p:spPr/>
+      </p:sp>
+      <p:sp>
+        <p:nvSpPr>
+          <p:cNvPr id="3" name="Notes Placeholder 2"/>
+          <p:cNvSpPr>
+            <a:spLocks noGrp="1"/>
+          </p:cNvSpPr>
+          <p:nvPr>
+            <p:ph type="body" idx="3" sz="quarter"/>
+          </p:nvPr>
+        </p:nvSpPr>
+        <p:spPr/>
+        <p:txBody>
+          <a:bodyPr/>
+          <a:lstStyle/>
+          <a:p>
+            <a:r>
+              <a:t>[Let the slide breathe. A beat of silence before you speak.]</a:t>
+            </a:r>
+          </a:p>
+          <a:p/>
+          <a:p>
+            <a:r>
+              <a:t>What if the twin could think? A digital twin that doesn't just mirror a system — it reasons about it. It plans. It acts. Not replacing the engineer. Giving the engineer a partner that never sleeps and never loses context.</a:t>
+            </a:r>
+          </a:p>
+        </p:txBody>
+      </p:sp>
+      <p:sp>
+        <p:nvSpPr>
+          <p:cNvPr id="4" name="Slide Number Placeholder 3"/>
+          <p:cNvSpPr>
+            <a:spLocks noGrp="1"/>
+          </p:cNvSpPr>
+          <p:nvPr>
+            <p:ph type="sldNum" idx="5" sz="quarter"/>
+          </p:nvPr>
+        </p:nvSpPr>
+        <p:spPr/>
+      </p:sp>
+    </p:spTree>
+  </p:cSld>
+  <p:clrMapOvr>
+    <a:masterClrMapping/>
+  </p:clrMapOvr>
+</p:notes>
+</file>
+
+<file path=ppt/notesSlides/notesSlide12.xml><?xml version="1.0" encoding="utf-8"?>
+<p:notes xmlns:a="http://schemas.openxmlformats.org/drawingml/2006/main" xmlns:p="http://schemas.openxmlformats.org/presentationml/2006/main" xmlns:r="http://schemas.openxmlformats.org/officeDocument/2006/relationships">
+  <p:cSld>
+    <p:spTree>
+      <p:nvGrpSpPr>
+        <p:cNvPr id="1" name=""/>
+        <p:cNvGrpSpPr/>
+        <p:nvPr/>
+      </p:nvGrpSpPr>
+      <p:grpSpPr>
+        <a:xfrm>
+          <a:off x="0" y="0"/>
+          <a:ext cx="0" cy="0"/>
+          <a:chOff x="0" y="0"/>
+          <a:chExt cx="0" cy="0"/>
+        </a:xfrm>
+      </p:grpSpPr>
+      <p:sp>
+        <p:nvSpPr>
+          <p:cNvPr id="2" name="Slide Image Placeholder 1"/>
+          <p:cNvSpPr>
+            <a:spLocks noGrp="1"/>
+          </p:cNvSpPr>
+          <p:nvPr>
+            <p:ph type="sldImg" idx="2"/>
+          </p:nvPr>
+        </p:nvSpPr>
+        <p:spPr/>
+      </p:sp>
+      <p:sp>
+        <p:nvSpPr>
+          <p:cNvPr id="3" name="Notes Placeholder 2"/>
+          <p:cNvSpPr>
+            <a:spLocks noGrp="1"/>
+          </p:cNvSpPr>
+          <p:nvPr>
+            <p:ph type="body" idx="3" sz="quarter"/>
+          </p:nvPr>
+        </p:nvSpPr>
+        <p:spPr/>
+        <p:txBody>
+          <a:bodyPr/>
+          <a:lstStyle/>
+          <a:p>
+            <a:r>
+              <a:t>It's a control loop — something every engineer in this room already thinks in. Perceive — ingest data. Reason — identify what's happening and why. Plan — build a response. Act — execute through connected systems. Reflect — evaluate the outcome.</a:t>
+            </a:r>
+          </a:p>
+          <a:p/>
+          <a:p>
+            <a:r>
+              <a:t>Remember that engineer at 2 AM? An agentic twin wouldn't have just detected the drift. It would have pulled historical patterns, identified the failing element, and scheduled the repair. Minutes, not hours.</a:t>
+            </a:r>
+          </a:p>
+        </p:txBody>
+      </p:sp>
+      <p:sp>
+        <p:nvSpPr>
+          <p:cNvPr id="4" name="Slide Number Placeholder 3"/>
+          <p:cNvSpPr>
+            <a:spLocks noGrp="1"/>
+          </p:cNvSpPr>
+          <p:nvPr>
+            <p:ph type="sldNum" idx="5" sz="quarter"/>
+          </p:nvPr>
+        </p:nvSpPr>
+        <p:spPr/>
+      </p:sp>
+    </p:spTree>
+  </p:cSld>
+  <p:clrMapOvr>
+    <a:masterClrMapping/>
+  </p:clrMapOvr>
+</p:notes>
+</file>
+
+<file path=ppt/notesSlides/notesSlide13.xml><?xml version="1.0" encoding="utf-8"?>
+<p:notes xmlns:a="http://schemas.openxmlformats.org/drawingml/2006/main" xmlns:p="http://schemas.openxmlformats.org/presentationml/2006/main" xmlns:r="http://schemas.openxmlformats.org/officeDocument/2006/relationships">
+  <p:cSld>
+    <p:spTree>
+      <p:nvGrpSpPr>
+        <p:cNvPr id="1" name=""/>
+        <p:cNvGrpSpPr/>
+        <p:nvPr/>
+      </p:nvGrpSpPr>
+      <p:grpSpPr>
+        <a:xfrm>
+          <a:off x="0" y="0"/>
+          <a:ext cx="0" cy="0"/>
+          <a:chOff x="0" y="0"/>
+          <a:chExt cx="0" cy="0"/>
+        </a:xfrm>
+      </p:grpSpPr>
+      <p:sp>
+        <p:nvSpPr>
+          <p:cNvPr id="2" name="Slide Image Placeholder 1"/>
+          <p:cNvSpPr>
+            <a:spLocks noGrp="1"/>
+          </p:cNvSpPr>
+          <p:nvPr>
+            <p:ph type="sldImg" idx="2"/>
+          </p:nvPr>
+        </p:nvSpPr>
+        <p:spPr/>
+      </p:sp>
+      <p:sp>
+        <p:nvSpPr>
+          <p:cNvPr id="3" name="Notes Placeholder 2"/>
+          <p:cNvSpPr>
+            <a:spLocks noGrp="1"/>
+          </p:cNvSpPr>
+          <p:nvPr>
+            <p:ph type="body" idx="3" sz="quarter"/>
+          </p:nvPr>
+        </p:nvSpPr>
+        <p:spPr/>
+        <p:txBody>
+          <a:bodyPr/>
+          <a:lstStyle/>
+          <a:p>
+            <a:r>
+              <a:t>Architecturally, it's simpler than you'd think. Physical system at the bottom. Digital twin in the middle. And on top, a new cognitive layer — the reasoning and decision-making.</a:t>
+            </a:r>
+          </a:p>
+          <a:p/>
+          <a:p>
+            <a:r>
+              <a:t>Two of those three layers? You already have them. The whole idea is one new layer on top of what you've already invested in.</a:t>
+            </a:r>
+          </a:p>
+        </p:txBody>
+      </p:sp>
+      <p:sp>
+        <p:nvSpPr>
+          <p:cNvPr id="4" name="Slide Number Placeholder 3"/>
+          <p:cNvSpPr>
+            <a:spLocks noGrp="1"/>
+          </p:cNvSpPr>
+          <p:nvPr>
+            <p:ph type="sldNum" idx="5" sz="quarter"/>
+          </p:nvPr>
+        </p:nvSpPr>
+        <p:spPr/>
+      </p:sp>
+    </p:spTree>
+  </p:cSld>
+  <p:clrMapOvr>
+    <a:masterClrMapping/>
+  </p:clrMapOvr>
+</p:notes>
+</file>
+
+<file path=ppt/notesSlides/notesSlide14.xml><?xml version="1.0" encoding="utf-8"?>
+<p:notes xmlns:a="http://schemas.openxmlformats.org/drawingml/2006/main" xmlns:p="http://schemas.openxmlformats.org/presentationml/2006/main" xmlns:r="http://schemas.openxmlformats.org/officeDocument/2006/relationships">
+  <p:cSld>
+    <p:spTree>
+      <p:nvGrpSpPr>
+        <p:cNvPr id="1" name=""/>
+        <p:cNvGrpSpPr/>
+        <p:nvPr/>
+      </p:nvGrpSpPr>
+      <p:grpSpPr>
+        <a:xfrm>
+          <a:off x="0" y="0"/>
+          <a:ext cx="0" cy="0"/>
+          <a:chOff x="0" y="0"/>
+          <a:chExt cx="0" cy="0"/>
+        </a:xfrm>
+      </p:grpSpPr>
+      <p:sp>
+        <p:nvSpPr>
+          <p:cNvPr id="2" name="Slide Image Placeholder 1"/>
+          <p:cNvSpPr>
+            <a:spLocks noGrp="1"/>
+          </p:cNvSpPr>
+          <p:nvPr>
+            <p:ph type="sldImg" idx="2"/>
+          </p:nvPr>
+        </p:nvSpPr>
+        <p:spPr/>
+      </p:sp>
+      <p:sp>
+        <p:nvSpPr>
+          <p:cNvPr id="3" name="Notes Placeholder 2"/>
+          <p:cNvSpPr>
+            <a:spLocks noGrp="1"/>
+          </p:cNvSpPr>
+          <p:nvPr>
+            <p:ph type="body" idx="3" sz="quarter"/>
+          </p:nvPr>
+        </p:nvSpPr>
+        <p:spPr/>
+        <p:txBody>
+          <a:bodyPr/>
+          <a:lstStyle/>
+          <a:p>
+            <a:r>
+              <a:t>IBM published a paper at AAAI 2025 on agentic digital twins for shipping fleet management. XMPro has a multi-agent system in production — reporting 30–40% reductions in unplanned downtime. And Nature Computational Science published a formal evolutionary framework this year.</a:t>
+            </a:r>
+          </a:p>
+          <a:p/>
+          <a:p>
+            <a:r>
+              <a:t>This went from idea to research to production faster than most people realize.</a:t>
+            </a:r>
+          </a:p>
+        </p:txBody>
+      </p:sp>
+      <p:sp>
+        <p:nvSpPr>
+          <p:cNvPr id="4" name="Slide Number Placeholder 3"/>
+          <p:cNvSpPr>
+            <a:spLocks noGrp="1"/>
+          </p:cNvSpPr>
+          <p:nvPr>
+            <p:ph type="sldNum" idx="5" sz="quarter"/>
+          </p:nvPr>
+        </p:nvSpPr>
+        <p:spPr/>
+      </p:sp>
+    </p:spTree>
+  </p:cSld>
+  <p:clrMapOvr>
+    <a:masterClrMapping/>
+  </p:clrMapOvr>
+</p:notes>
+</file>
+
+<file path=ppt/notesSlides/notesSlide15.xml><?xml version="1.0" encoding="utf-8"?>
+<p:notes xmlns:a="http://schemas.openxmlformats.org/drawingml/2006/main" xmlns:p="http://schemas.openxmlformats.org/presentationml/2006/main" xmlns:r="http://schemas.openxmlformats.org/officeDocument/2006/relationships">
+  <p:cSld>
+    <p:spTree>
+      <p:nvGrpSpPr>
+        <p:cNvPr id="1" name=""/>
+        <p:cNvGrpSpPr/>
+        <p:nvPr/>
+      </p:nvGrpSpPr>
+      <p:grpSpPr>
+        <a:xfrm>
+          <a:off x="0" y="0"/>
+          <a:ext cx="0" cy="0"/>
+          <a:chOff x="0" y="0"/>
+          <a:chExt cx="0" cy="0"/>
+        </a:xfrm>
+      </p:grpSpPr>
+      <p:sp>
+        <p:nvSpPr>
+          <p:cNvPr id="2" name="Slide Image Placeholder 1"/>
+          <p:cNvSpPr>
+            <a:spLocks noGrp="1"/>
+          </p:cNvSpPr>
+          <p:nvPr>
+            <p:ph type="sldImg" idx="2"/>
+          </p:nvPr>
+        </p:nvSpPr>
+        <p:spPr/>
+      </p:sp>
+      <p:sp>
+        <p:nvSpPr>
+          <p:cNvPr id="3" name="Notes Placeholder 2"/>
+          <p:cNvSpPr>
+            <a:spLocks noGrp="1"/>
+          </p:cNvSpPr>
+          <p:nvPr>
+            <p:ph type="body" idx="3" sz="quarter"/>
+          </p:nvPr>
+        </p:nvSpPr>
+        <p:spPr/>
+        <p:txBody>
+          <a:bodyPr/>
+          <a:lstStyle/>
+          <a:p>
+            <a:r>
+              <a:t>The architecture that's emerging isn't one giant AI doing everything. It's specialized agents working together. A monitor that detects. An analyst that finds root causes. A planner that schedules the response. They collaborate — and critically — they check each other's work. The agent that proposes is never the one that approves.</a:t>
+            </a:r>
+          </a:p>
+          <a:p/>
+          <a:p>
+            <a:r>
+              <a:t>If that sounds like how a good engineering team works — it is.</a:t>
+            </a:r>
+          </a:p>
+        </p:txBody>
+      </p:sp>
+      <p:sp>
+        <p:nvSpPr>
+          <p:cNvPr id="4" name="Slide Number Placeholder 3"/>
+          <p:cNvSpPr>
+            <a:spLocks noGrp="1"/>
+          </p:cNvSpPr>
+          <p:nvPr>
+            <p:ph type="sldNum" idx="5" sz="quarter"/>
+          </p:nvPr>
+        </p:nvSpPr>
+        <p:spPr/>
+      </p:sp>
+    </p:spTree>
+  </p:cSld>
+  <p:clrMapOvr>
+    <a:masterClrMapping/>
+  </p:clrMapOvr>
+</p:notes>
+</file>
+
+<file path=ppt/notesSlides/notesSlide16.xml><?xml version="1.0" encoding="utf-8"?>
+<p:notes xmlns:a="http://schemas.openxmlformats.org/drawingml/2006/main" xmlns:p="http://schemas.openxmlformats.org/presentationml/2006/main" xmlns:r="http://schemas.openxmlformats.org/officeDocument/2006/relationships">
+  <p:cSld>
+    <p:spTree>
+      <p:nvGrpSpPr>
+        <p:cNvPr id="1" name=""/>
+        <p:cNvGrpSpPr/>
+        <p:nvPr/>
+      </p:nvGrpSpPr>
+      <p:grpSpPr>
+        <a:xfrm>
+          <a:off x="0" y="0"/>
+          <a:ext cx="0" cy="0"/>
+          <a:chOff x="0" y="0"/>
+          <a:chExt cx="0" cy="0"/>
+        </a:xfrm>
+      </p:grpSpPr>
+      <p:sp>
+        <p:nvSpPr>
+          <p:cNvPr id="2" name="Slide Image Placeholder 1"/>
+          <p:cNvSpPr>
+            <a:spLocks noGrp="1"/>
+          </p:cNvSpPr>
+          <p:nvPr>
+            <p:ph type="sldImg" idx="2"/>
+          </p:nvPr>
+        </p:nvSpPr>
+        <p:spPr/>
+      </p:sp>
+      <p:sp>
+        <p:nvSpPr>
+          <p:cNvPr id="3" name="Notes Placeholder 2"/>
+          <p:cNvSpPr>
+            <a:spLocks noGrp="1"/>
+          </p:cNvSpPr>
+          <p:nvPr>
+            <p:ph type="body" idx="3" sz="quarter"/>
+          </p:nvPr>
+        </p:nvSpPr>
+        <p:spPr/>
+        <p:txBody>
+          <a:bodyPr/>
+          <a:lstStyle/>
+          <a:p>
+            <a:r>
+              <a:t>This isn't a solution for one industry. The same pattern applies everywhere. Edge AI device drifts? The twin diagnoses and retrains. Robotic arm shows bearing wear? The twin predicts and schedules maintenance. ADAS sensor gets conflicting data? The twin runs safety checks and adapts.</a:t>
+            </a:r>
+          </a:p>
+          <a:p/>
+          <a:p>
+            <a:r>
+              <a:t>Different worlds. Same idea. That's how you know it's real.</a:t>
+            </a:r>
+          </a:p>
+        </p:txBody>
+      </p:sp>
+      <p:sp>
+        <p:nvSpPr>
+          <p:cNvPr id="4" name="Slide Number Placeholder 3"/>
+          <p:cNvSpPr>
+            <a:spLocks noGrp="1"/>
+          </p:cNvSpPr>
+          <p:nvPr>
+            <p:ph type="sldNum" idx="5" sz="quarter"/>
+          </p:nvPr>
+        </p:nvSpPr>
+        <p:spPr/>
+      </p:sp>
+    </p:spTree>
+  </p:cSld>
+  <p:clrMapOvr>
+    <a:masterClrMapping/>
+  </p:clrMapOvr>
+</p:notes>
+</file>
+
+<file path=ppt/notesSlides/notesSlide17.xml><?xml version="1.0" encoding="utf-8"?>
+<p:notes xmlns:a="http://schemas.openxmlformats.org/drawingml/2006/main" xmlns:p="http://schemas.openxmlformats.org/presentationml/2006/main" xmlns:r="http://schemas.openxmlformats.org/officeDocument/2006/relationships">
+  <p:cSld>
+    <p:spTree>
+      <p:nvGrpSpPr>
+        <p:cNvPr id="1" name=""/>
+        <p:cNvGrpSpPr/>
+        <p:nvPr/>
+      </p:nvGrpSpPr>
+      <p:grpSpPr>
+        <a:xfrm>
+          <a:off x="0" y="0"/>
+          <a:ext cx="0" cy="0"/>
+          <a:chOff x="0" y="0"/>
+          <a:chExt cx="0" cy="0"/>
+        </a:xfrm>
+      </p:grpSpPr>
+      <p:sp>
+        <p:nvSpPr>
+          <p:cNvPr id="2" name="Slide Image Placeholder 1"/>
+          <p:cNvSpPr>
+            <a:spLocks noGrp="1"/>
+          </p:cNvSpPr>
+          <p:nvPr>
+            <p:ph type="sldImg" idx="2"/>
+          </p:nvPr>
+        </p:nvSpPr>
+        <p:spPr/>
+      </p:sp>
+      <p:sp>
+        <p:nvSpPr>
+          <p:cNvPr id="3" name="Notes Placeholder 2"/>
+          <p:cNvSpPr>
+            <a:spLocks noGrp="1"/>
+          </p:cNvSpPr>
+          <p:nvPr>
+            <p:ph type="body" idx="3" sz="quarter"/>
+          </p:nvPr>
+        </p:nvSpPr>
+        <p:spPr/>
+        <p:txBody>
+          <a:bodyPr/>
+          <a:lstStyle/>
+          <a:p>
+            <a:r>
+              <a:t>When an agent makes a bad decision, who owns it? Can you trace why it made that call? These systems create attack surfaces we haven't fully mapped. And governance frameworks weren't built for tools that act on their own.</a:t>
+            </a:r>
+          </a:p>
+          <a:p/>
+          <a:p>
+            <a:r>
+              <a:t>These are solvable problems. But they're real.</a:t>
+            </a:r>
+          </a:p>
+        </p:txBody>
+      </p:sp>
+      <p:sp>
+        <p:nvSpPr>
+          <p:cNvPr id="4" name="Slide Number Placeholder 3"/>
+          <p:cNvSpPr>
+            <a:spLocks noGrp="1"/>
+          </p:cNvSpPr>
+          <p:nvPr>
+            <p:ph type="sldNum" idx="5" sz="quarter"/>
+          </p:nvPr>
+        </p:nvSpPr>
+        <p:spPr/>
+      </p:sp>
+    </p:spTree>
+  </p:cSld>
+  <p:clrMapOvr>
+    <a:masterClrMapping/>
+  </p:clrMapOvr>
+</p:notes>
+</file>
+
+<file path=ppt/notesSlides/notesSlide18.xml><?xml version="1.0" encoding="utf-8"?>
+<p:notes xmlns:a="http://schemas.openxmlformats.org/drawingml/2006/main" xmlns:p="http://schemas.openxmlformats.org/presentationml/2006/main" xmlns:r="http://schemas.openxmlformats.org/officeDocument/2006/relationships">
+  <p:cSld>
+    <p:spTree>
+      <p:nvGrpSpPr>
+        <p:cNvPr id="1" name=""/>
+        <p:cNvGrpSpPr/>
+        <p:nvPr/>
+      </p:nvGrpSpPr>
+      <p:grpSpPr>
+        <a:xfrm>
+          <a:off x="0" y="0"/>
+          <a:ext cx="0" cy="0"/>
+          <a:chOff x="0" y="0"/>
+          <a:chExt cx="0" cy="0"/>
+        </a:xfrm>
+      </p:grpSpPr>
+      <p:sp>
+        <p:nvSpPr>
+          <p:cNvPr id="2" name="Slide Image Placeholder 1"/>
+          <p:cNvSpPr>
+            <a:spLocks noGrp="1"/>
+          </p:cNvSpPr>
+          <p:nvPr>
+            <p:ph type="sldImg" idx="2"/>
+          </p:nvPr>
+        </p:nvSpPr>
+        <p:spPr/>
+      </p:sp>
+      <p:sp>
+        <p:nvSpPr>
+          <p:cNvPr id="3" name="Notes Placeholder 2"/>
+          <p:cNvSpPr>
+            <a:spLocks noGrp="1"/>
+          </p:cNvSpPr>
+          <p:nvPr>
+            <p:ph type="body" idx="3" sz="quarter"/>
+          </p:nvPr>
+        </p:nvSpPr>
+        <p:spPr/>
+        <p:txBody>
+          <a:bodyPr/>
+          <a:lstStyle/>
+          <a:p>
+            <a:r>
+              <a:t>I built something. Scan the QR code — you can talk to an agentic digital twin right now. Three of them: edge AI, robotic arm, ADAS. Ask what's wrong. Inject issues. Watch it reason.</a:t>
+            </a:r>
+          </a:p>
+          <a:p/>
+          <a:p>
+            <a:r>
+              <a:t>[Give them 10–15 seconds to scan.]</a:t>
+            </a:r>
+          </a:p>
+          <a:p/>
+          <a:p>
+            <a:r>
+              <a:t>The URL is at the bottom if you'd rather type. It'll be live after the talk too — no rush.</a:t>
+            </a:r>
+          </a:p>
+        </p:txBody>
+      </p:sp>
+      <p:sp>
+        <p:nvSpPr>
+          <p:cNvPr id="4" name="Slide Number Placeholder 3"/>
+          <p:cNvSpPr>
+            <a:spLocks noGrp="1"/>
+          </p:cNvSpPr>
+          <p:nvPr>
+            <p:ph type="sldNum" idx="5" sz="quarter"/>
+          </p:nvPr>
+        </p:nvSpPr>
+        <p:spPr/>
+      </p:sp>
+    </p:spTree>
+  </p:cSld>
+  <p:clrMapOvr>
+    <a:masterClrMapping/>
+  </p:clrMapOvr>
+</p:notes>
+</file>
+
+<file path=ppt/notesSlides/notesSlide19.xml><?xml version="1.0" encoding="utf-8"?>
+<p:notes xmlns:a="http://schemas.openxmlformats.org/drawingml/2006/main" xmlns:p="http://schemas.openxmlformats.org/presentationml/2006/main" xmlns:r="http://schemas.openxmlformats.org/officeDocument/2006/relationships">
+  <p:cSld>
+    <p:spTree>
+      <p:nvGrpSpPr>
+        <p:cNvPr id="1" name=""/>
+        <p:cNvGrpSpPr/>
+        <p:nvPr/>
+      </p:nvGrpSpPr>
+      <p:grpSpPr>
+        <a:xfrm>
+          <a:off x="0" y="0"/>
+          <a:ext cx="0" cy="0"/>
+          <a:chOff x="0" y="0"/>
+          <a:chExt cx="0" cy="0"/>
+        </a:xfrm>
+      </p:grpSpPr>
+      <p:sp>
+        <p:nvSpPr>
+          <p:cNvPr id="2" name="Slide Image Placeholder 1"/>
+          <p:cNvSpPr>
+            <a:spLocks noGrp="1"/>
+          </p:cNvSpPr>
+          <p:nvPr>
+            <p:ph type="sldImg" idx="2"/>
+          </p:nvPr>
+        </p:nvSpPr>
+        <p:spPr/>
+      </p:sp>
+      <p:sp>
+        <p:nvSpPr>
+          <p:cNvPr id="3" name="Notes Placeholder 2"/>
+          <p:cNvSpPr>
+            <a:spLocks noGrp="1"/>
+          </p:cNvSpPr>
+          <p:nvPr>
+            <p:ph type="body" idx="3" sz="quarter"/>
+          </p:nvPr>
+        </p:nvSpPr>
+        <p:spPr/>
+        <p:txBody>
+          <a:bodyPr/>
+          <a:lstStyle/>
+          <a:p>
+            <a:r>
+              <a:t>Digital twins already have the data and models. Agentic AI gives them the ability to act on it. That's it. That's the whole idea. One new layer.</a:t>
+            </a:r>
+          </a:p>
+          <a:p/>
+          <a:p>
+            <a:r>
+              <a:t>Thank you. Come find me or scan the QR for my site.</a:t>
+            </a:r>
+          </a:p>
+          <a:p/>
+          <a:p>
+            <a:r>
+              <a:t>[This slide stays up during Q&amp;A — contact info and QR visible.]</a:t>
+            </a:r>
+          </a:p>
+        </p:txBody>
+      </p:sp>
+      <p:sp>
+        <p:nvSpPr>
+          <p:cNvPr id="4" name="Slide Number Placeholder 3"/>
+          <p:cNvSpPr>
+            <a:spLocks noGrp="1"/>
+          </p:cNvSpPr>
+          <p:nvPr>
+            <p:ph type="sldNum" idx="5" sz="quarter"/>
+          </p:nvPr>
+        </p:nvSpPr>
+        <p:spPr/>
+      </p:sp>
+    </p:spTree>
+  </p:cSld>
+  <p:clrMapOvr>
+    <a:masterClrMapping/>
+  </p:clrMapOvr>
+</p:notes>
+</file>
+
+<file path=ppt/notesSlides/notesSlide2.xml><?xml version="1.0" encoding="utf-8"?>
+<p:notes xmlns:a="http://schemas.openxmlformats.org/drawingml/2006/main" xmlns:p="http://schemas.openxmlformats.org/presentationml/2006/main" xmlns:r="http://schemas.openxmlformats.org/officeDocument/2006/relationships">
+  <p:cSld>
+    <p:spTree>
+      <p:nvGrpSpPr>
+        <p:cNvPr id="1" name=""/>
+        <p:cNvGrpSpPr/>
+        <p:nvPr/>
+      </p:nvGrpSpPr>
+      <p:grpSpPr>
+        <a:xfrm>
+          <a:off x="0" y="0"/>
+          <a:ext cx="0" cy="0"/>
+          <a:chOff x="0" y="0"/>
+          <a:chExt cx="0" cy="0"/>
+        </a:xfrm>
+      </p:grpSpPr>
+      <p:sp>
+        <p:nvSpPr>
+          <p:cNvPr id="2" name="Slide Image Placeholder 1"/>
+          <p:cNvSpPr>
+            <a:spLocks noGrp="1"/>
+          </p:cNvSpPr>
+          <p:nvPr>
+            <p:ph type="sldImg" idx="2"/>
+          </p:nvPr>
+        </p:nvSpPr>
+        <p:spPr/>
+      </p:sp>
+      <p:sp>
+        <p:nvSpPr>
+          <p:cNvPr id="3" name="Notes Placeholder 2"/>
+          <p:cNvSpPr>
+            <a:spLocks noGrp="1"/>
+          </p:cNvSpPr>
+          <p:nvPr>
+            <p:ph type="body" idx="3" sz="quarter"/>
+          </p:nvPr>
+        </p:nvSpPr>
+        <p:spPr/>
+        <p:txBody>
+          <a:bodyPr/>
+          <a:lstStyle/>
+          <a:p>
+            <a:r>
+              <a:t>[Section divider — click through quickly. This is a signpost, not a beat.]</a:t>
+            </a:r>
+          </a:p>
+        </p:txBody>
+      </p:sp>
+      <p:sp>
+        <p:nvSpPr>
+          <p:cNvPr id="4" name="Slide Number Placeholder 3"/>
+          <p:cNvSpPr>
+            <a:spLocks noGrp="1"/>
+          </p:cNvSpPr>
+          <p:nvPr>
+            <p:ph type="sldNum" idx="5" sz="quarter"/>
+          </p:nvPr>
+        </p:nvSpPr>
+        <p:spPr/>
+      </p:sp>
+    </p:spTree>
+  </p:cSld>
+  <p:clrMapOvr>
+    <a:masterClrMapping/>
+  </p:clrMapOvr>
+</p:notes>
+</file>
+
+<file path=ppt/notesSlides/notesSlide20.xml><?xml version="1.0" encoding="utf-8"?>
+<p:notes xmlns:a="http://schemas.openxmlformats.org/drawingml/2006/main" xmlns:p="http://schemas.openxmlformats.org/presentationml/2006/main" xmlns:r="http://schemas.openxmlformats.org/officeDocument/2006/relationships">
+  <p:cSld>
+    <p:spTree>
+      <p:nvGrpSpPr>
+        <p:cNvPr id="1" name=""/>
+        <p:cNvGrpSpPr/>
+        <p:nvPr/>
+      </p:nvGrpSpPr>
+      <p:grpSpPr>
+        <a:xfrm>
+          <a:off x="0" y="0"/>
+          <a:ext cx="0" cy="0"/>
+          <a:chOff x="0" y="0"/>
+          <a:chExt cx="0" cy="0"/>
+        </a:xfrm>
+      </p:grpSpPr>
+      <p:sp>
+        <p:nvSpPr>
+          <p:cNvPr id="2" name="Slide Image Placeholder 1"/>
+          <p:cNvSpPr>
+            <a:spLocks noGrp="1"/>
+          </p:cNvSpPr>
+          <p:nvPr>
+            <p:ph type="sldImg" idx="2"/>
+          </p:nvPr>
+        </p:nvSpPr>
+        <p:spPr/>
+      </p:sp>
+      <p:sp>
+        <p:nvSpPr>
+          <p:cNvPr id="3" name="Notes Placeholder 2"/>
+          <p:cNvSpPr>
+            <a:spLocks noGrp="1"/>
+          </p:cNvSpPr>
+          <p:nvPr>
+            <p:ph type="body" idx="3" sz="quarter"/>
+          </p:nvPr>
+        </p:nvSpPr>
+        <p:spPr/>
+        <p:txBody>
+          <a:bodyPr/>
+          <a:lstStyle/>
+          <a:p>
+            <a:r>
+              <a:t>[Click to this after Q&amp;A wraps, as your final word.]</a:t>
+            </a:r>
+          </a:p>
+          <a:p/>
+          <a:p>
+            <a:r>
+              <a:t>Thanks everyone.</a:t>
+            </a:r>
+          </a:p>
+        </p:txBody>
+      </p:sp>
+      <p:sp>
+        <p:nvSpPr>
+          <p:cNvPr id="4" name="Slide Number Placeholder 3"/>
+          <p:cNvSpPr>
+            <a:spLocks noGrp="1"/>
+          </p:cNvSpPr>
+          <p:nvPr>
+            <p:ph type="sldNum" idx="5" sz="quarter"/>
+          </p:nvPr>
+        </p:nvSpPr>
+        <p:spPr/>
+      </p:sp>
+    </p:spTree>
+  </p:cSld>
+  <p:clrMapOvr>
+    <a:masterClrMapping/>
+  </p:clrMapOvr>
+</p:notes>
+</file>
+
+<file path=ppt/notesSlides/notesSlide3.xml><?xml version="1.0" encoding="utf-8"?>
+<p:notes xmlns:a="http://schemas.openxmlformats.org/drawingml/2006/main" xmlns:p="http://schemas.openxmlformats.org/presentationml/2006/main" xmlns:r="http://schemas.openxmlformats.org/officeDocument/2006/relationships">
+  <p:cSld>
+    <p:spTree>
+      <p:nvGrpSpPr>
+        <p:cNvPr id="1" name=""/>
+        <p:cNvGrpSpPr/>
+        <p:nvPr/>
+      </p:nvGrpSpPr>
+      <p:grpSpPr>
+        <a:xfrm>
+          <a:off x="0" y="0"/>
+          <a:ext cx="0" cy="0"/>
+          <a:chOff x="0" y="0"/>
+          <a:chExt cx="0" cy="0"/>
+        </a:xfrm>
+      </p:grpSpPr>
+      <p:sp>
+        <p:nvSpPr>
+          <p:cNvPr id="2" name="Slide Image Placeholder 1"/>
+          <p:cNvSpPr>
+            <a:spLocks noGrp="1"/>
+          </p:cNvSpPr>
+          <p:nvPr>
+            <p:ph type="sldImg" idx="2"/>
+          </p:nvPr>
+        </p:nvSpPr>
+        <p:spPr/>
+      </p:sp>
+      <p:sp>
+        <p:nvSpPr>
+          <p:cNvPr id="3" name="Notes Placeholder 2"/>
+          <p:cNvSpPr>
+            <a:spLocks noGrp="1"/>
+          </p:cNvSpPr>
+          <p:nvPr>
+            <p:ph type="body" idx="3" sz="quarter"/>
+          </p:nvPr>
+        </p:nvSpPr>
+        <p:spPr/>
+        <p:txBody>
+          <a:bodyPr/>
+          <a:lstStyle/>
+          <a:p>
+            <a:r>
+              <a:t>So let's make sure we're starting from the same place. A digital twin — at its core — is a virtual model that stays continuously synced with a physical system. Data flows in from sensors. Simulations flow back. "Most of you know this better than I do. I'm not here to explain digital twins to you. I'm here to talk about what comes next."</a:t>
+            </a:r>
+          </a:p>
+        </p:txBody>
+      </p:sp>
+      <p:sp>
+        <p:nvSpPr>
+          <p:cNvPr id="4" name="Slide Number Placeholder 3"/>
+          <p:cNvSpPr>
+            <a:spLocks noGrp="1"/>
+          </p:cNvSpPr>
+          <p:nvPr>
+            <p:ph type="sldNum" idx="5" sz="quarter"/>
+          </p:nvPr>
+        </p:nvSpPr>
+        <p:spPr/>
+      </p:sp>
+    </p:spTree>
+  </p:cSld>
+  <p:clrMapOvr>
+    <a:masterClrMapping/>
+  </p:clrMapOvr>
+</p:notes>
+</file>
+
+<file path=ppt/notesSlides/notesSlide4.xml><?xml version="1.0" encoding="utf-8"?>
+<p:notes xmlns:a="http://schemas.openxmlformats.org/drawingml/2006/main" xmlns:p="http://schemas.openxmlformats.org/presentationml/2006/main" xmlns:r="http://schemas.openxmlformats.org/officeDocument/2006/relationships">
+  <p:cSld>
+    <p:spTree>
+      <p:nvGrpSpPr>
+        <p:cNvPr id="1" name=""/>
+        <p:cNvGrpSpPr/>
+        <p:nvPr/>
+      </p:nvGrpSpPr>
+      <p:grpSpPr>
+        <a:xfrm>
+          <a:off x="0" y="0"/>
+          <a:ext cx="0" cy="0"/>
+          <a:chOff x="0" y="0"/>
+          <a:chExt cx="0" cy="0"/>
+        </a:xfrm>
+      </p:grpSpPr>
+      <p:sp>
+        <p:nvSpPr>
+          <p:cNvPr id="2" name="Slide Image Placeholder 1"/>
+          <p:cNvSpPr>
+            <a:spLocks noGrp="1"/>
+          </p:cNvSpPr>
+          <p:nvPr>
+            <p:ph type="sldImg" idx="2"/>
+          </p:nvPr>
+        </p:nvSpPr>
+        <p:spPr/>
+      </p:sp>
+      <p:sp>
+        <p:nvSpPr>
+          <p:cNvPr id="3" name="Notes Placeholder 2"/>
+          <p:cNvSpPr>
+            <a:spLocks noGrp="1"/>
+          </p:cNvSpPr>
+          <p:nvPr>
+            <p:ph type="body" idx="3" sz="quarter"/>
+          </p:nvPr>
+        </p:nvSpPr>
+        <p:spPr/>
+        <p:txBody>
+          <a:bodyPr/>
+          <a:lstStyle/>
+          <a:p>
+            <a:r>
+              <a:t>In automotive manufacturing, unplanned downtime costs $22,000 a minute. In semiconductor fabs it can hit $5 million an hour. And at the electric grid level, U.S. power outages cost $121 billion last year alone. Here's the real problem: these systems are generating more data every minute than teams can act on in a week.</a:t>
+            </a:r>
+          </a:p>
+        </p:txBody>
+      </p:sp>
+      <p:sp>
+        <p:nvSpPr>
+          <p:cNvPr id="4" name="Slide Number Placeholder 3"/>
+          <p:cNvSpPr>
+            <a:spLocks noGrp="1"/>
+          </p:cNvSpPr>
+          <p:nvPr>
+            <p:ph type="sldNum" idx="5" sz="quarter"/>
+          </p:nvPr>
+        </p:nvSpPr>
+        <p:spPr/>
+      </p:sp>
+    </p:spTree>
+  </p:cSld>
+  <p:clrMapOvr>
+    <a:masterClrMapping/>
+  </p:clrMapOvr>
+</p:notes>
+</file>
+
+<file path=ppt/notesSlides/notesSlide5.xml><?xml version="1.0" encoding="utf-8"?>
+<p:notes xmlns:a="http://schemas.openxmlformats.org/drawingml/2006/main" xmlns:p="http://schemas.openxmlformats.org/presentationml/2006/main" xmlns:r="http://schemas.openxmlformats.org/officeDocument/2006/relationships">
+  <p:cSld>
+    <p:spTree>
+      <p:nvGrpSpPr>
+        <p:cNvPr id="1" name=""/>
+        <p:cNvGrpSpPr/>
+        <p:nvPr/>
+      </p:nvGrpSpPr>
+      <p:grpSpPr>
+        <a:xfrm>
+          <a:off x="0" y="0"/>
+          <a:ext cx="0" cy="0"/>
+          <a:chOff x="0" y="0"/>
+          <a:chExt cx="0" cy="0"/>
+        </a:xfrm>
+      </p:grpSpPr>
+      <p:sp>
+        <p:nvSpPr>
+          <p:cNvPr id="2" name="Slide Image Placeholder 1"/>
+          <p:cNvSpPr>
+            <a:spLocks noGrp="1"/>
+          </p:cNvSpPr>
+          <p:nvPr>
+            <p:ph type="sldImg" idx="2"/>
+          </p:nvPr>
+        </p:nvSpPr>
+        <p:spPr/>
+      </p:sp>
+      <p:sp>
+        <p:nvSpPr>
+          <p:cNvPr id="3" name="Notes Placeholder 2"/>
+          <p:cNvSpPr>
+            <a:spLocks noGrp="1"/>
+          </p:cNvSpPr>
+          <p:nvPr>
+            <p:ph type="body" idx="3" sz="quarter"/>
+          </p:nvPr>
+        </p:nvSpPr>
+        <p:spPr/>
+        <p:txBody>
+          <a:bodyPr/>
+          <a:lstStyle/>
+          <a:p>
+            <a:r>
+              <a:t>[BUILD ANIMATION — click through generations one at a time.]</a:t>
+            </a:r>
+          </a:p>
+          <a:p/>
+          <a:p>
+            <a:r>
+              <a:t>Digital twins have been evolving. Gen 1 was static — a 3D model, a schematic. Gen 2 was reactive — something went wrong, here's an alert. Gen 3 — where a lot of you are or are heading — is predictive.</a:t>
+            </a:r>
+          </a:p>
+          <a:p/>
+          <a:p>
+            <a:r>
+              <a:t>But notice — every generation gets smarter about what's happening. None of them do anything about it.</a:t>
+            </a:r>
+          </a:p>
+        </p:txBody>
+      </p:sp>
+      <p:sp>
+        <p:nvSpPr>
+          <p:cNvPr id="4" name="Slide Number Placeholder 3"/>
+          <p:cNvSpPr>
+            <a:spLocks noGrp="1"/>
+          </p:cNvSpPr>
+          <p:nvPr>
+            <p:ph type="sldNum" idx="5" sz="quarter"/>
+          </p:nvPr>
+        </p:nvSpPr>
+        <p:spPr/>
+      </p:sp>
+    </p:spTree>
+  </p:cSld>
+  <p:clrMapOvr>
+    <a:masterClrMapping/>
+  </p:clrMapOvr>
+</p:notes>
+</file>
+
+<file path=ppt/notesSlides/notesSlide6.xml><?xml version="1.0" encoding="utf-8"?>
+<p:notes xmlns:a="http://schemas.openxmlformats.org/drawingml/2006/main" xmlns:p="http://schemas.openxmlformats.org/presentationml/2006/main" xmlns:r="http://schemas.openxmlformats.org/officeDocument/2006/relationships">
+  <p:cSld>
+    <p:spTree>
+      <p:nvGrpSpPr>
+        <p:cNvPr id="1" name=""/>
+        <p:cNvGrpSpPr/>
+        <p:nvPr/>
+      </p:nvGrpSpPr>
+      <p:grpSpPr>
+        <a:xfrm>
+          <a:off x="0" y="0"/>
+          <a:ext cx="0" cy="0"/>
+          <a:chOff x="0" y="0"/>
+          <a:chExt cx="0" cy="0"/>
+        </a:xfrm>
+      </p:grpSpPr>
+      <p:sp>
+        <p:nvSpPr>
+          <p:cNvPr id="2" name="Slide Image Placeholder 1"/>
+          <p:cNvSpPr>
+            <a:spLocks noGrp="1"/>
+          </p:cNvSpPr>
+          <p:nvPr>
+            <p:ph type="sldImg" idx="2"/>
+          </p:nvPr>
+        </p:nvSpPr>
+        <p:spPr/>
+      </p:sp>
+      <p:sp>
+        <p:nvSpPr>
+          <p:cNvPr id="3" name="Notes Placeholder 2"/>
+          <p:cNvSpPr>
+            <a:spLocks noGrp="1"/>
+          </p:cNvSpPr>
+          <p:nvPr>
+            <p:ph type="body" idx="3" sz="quarter"/>
+          </p:nvPr>
+        </p:nvSpPr>
+        <p:spPr/>
+        <p:txBody>
+          <a:bodyPr/>
+          <a:lstStyle/>
+          <a:p>
+            <a:r>
+              <a:t>[Let the text land for a beat.]</a:t>
+            </a:r>
+          </a:p>
+          <a:p/>
+          <a:p>
+            <a:r>
+              <a:t>Digital twins can see everything. They can't do anything about what they see. That's not a failure — that's a ceiling. And I think we're about to break through it.</a:t>
+            </a:r>
+          </a:p>
+        </p:txBody>
+      </p:sp>
+      <p:sp>
+        <p:nvSpPr>
+          <p:cNvPr id="4" name="Slide Number Placeholder 3"/>
+          <p:cNvSpPr>
+            <a:spLocks noGrp="1"/>
+          </p:cNvSpPr>
+          <p:nvPr>
+            <p:ph type="sldNum" idx="5" sz="quarter"/>
+          </p:nvPr>
+        </p:nvSpPr>
+        <p:spPr/>
+      </p:sp>
+    </p:spTree>
+  </p:cSld>
+  <p:clrMapOvr>
+    <a:masterClrMapping/>
+  </p:clrMapOvr>
+</p:notes>
+</file>
+
+<file path=ppt/notesSlides/notesSlide7.xml><?xml version="1.0" encoding="utf-8"?>
+<p:notes xmlns:a="http://schemas.openxmlformats.org/drawingml/2006/main" xmlns:p="http://schemas.openxmlformats.org/presentationml/2006/main" xmlns:r="http://schemas.openxmlformats.org/officeDocument/2006/relationships">
+  <p:cSld>
+    <p:spTree>
+      <p:nvGrpSpPr>
+        <p:cNvPr id="1" name=""/>
+        <p:cNvGrpSpPr/>
+        <p:nvPr/>
+      </p:nvGrpSpPr>
+      <p:grpSpPr>
+        <a:xfrm>
+          <a:off x="0" y="0"/>
+          <a:ext cx="0" cy="0"/>
+          <a:chOff x="0" y="0"/>
+          <a:chExt cx="0" cy="0"/>
+        </a:xfrm>
+      </p:grpSpPr>
+      <p:sp>
+        <p:nvSpPr>
+          <p:cNvPr id="2" name="Slide Image Placeholder 1"/>
+          <p:cNvSpPr>
+            <a:spLocks noGrp="1"/>
+          </p:cNvSpPr>
+          <p:nvPr>
+            <p:ph type="sldImg" idx="2"/>
+          </p:nvPr>
+        </p:nvSpPr>
+        <p:spPr/>
+      </p:sp>
+      <p:sp>
+        <p:nvSpPr>
+          <p:cNvPr id="3" name="Notes Placeholder 2"/>
+          <p:cNvSpPr>
+            <a:spLocks noGrp="1"/>
+          </p:cNvSpPr>
+          <p:nvPr>
+            <p:ph type="body" idx="3" sz="quarter"/>
+          </p:nvPr>
+        </p:nvSpPr>
+        <p:spPr/>
+        <p:txBody>
+          <a:bodyPr/>
+          <a:lstStyle/>
+          <a:p>
+            <a:r>
+              <a:t>[Slow. Conversational. Like you're telling a friend.]</a:t>
+            </a:r>
+          </a:p>
+          <a:p/>
+          <a:p>
+            <a:r>
+              <a:t>You're a process engineer at a fab. It's 2:14 AM. Something shifts — temperature drift, vibration spike. Your monitoring system catches it instantly. You? You're asleep. By the time you wake up, understand what happened, track down the part — five, six hours have passed.</a:t>
+            </a:r>
+          </a:p>
+          <a:p/>
+          <a:p>
+            <a:r>
+              <a:t>The system detected it in seconds. It took the better part of a shift. Detection and action are two completely different problems.</a:t>
+            </a:r>
+          </a:p>
+        </p:txBody>
+      </p:sp>
+      <p:sp>
+        <p:nvSpPr>
+          <p:cNvPr id="4" name="Slide Number Placeholder 3"/>
+          <p:cNvSpPr>
+            <a:spLocks noGrp="1"/>
+          </p:cNvSpPr>
+          <p:nvPr>
+            <p:ph type="sldNum" idx="5" sz="quarter"/>
+          </p:nvPr>
+        </p:nvSpPr>
+        <p:spPr/>
+      </p:sp>
+    </p:spTree>
+  </p:cSld>
+  <p:clrMapOvr>
+    <a:masterClrMapping/>
+  </p:clrMapOvr>
+</p:notes>
+</file>
+
+<file path=ppt/notesSlides/notesSlide8.xml><?xml version="1.0" encoding="utf-8"?>
+<p:notes xmlns:a="http://schemas.openxmlformats.org/drawingml/2006/main" xmlns:p="http://schemas.openxmlformats.org/presentationml/2006/main" xmlns:r="http://schemas.openxmlformats.org/officeDocument/2006/relationships">
+  <p:cSld>
+    <p:spTree>
+      <p:nvGrpSpPr>
+        <p:cNvPr id="1" name=""/>
+        <p:cNvGrpSpPr/>
+        <p:nvPr/>
+      </p:nvGrpSpPr>
+      <p:grpSpPr>
+        <a:xfrm>
+          <a:off x="0" y="0"/>
+          <a:ext cx="0" cy="0"/>
+          <a:chOff x="0" y="0"/>
+          <a:chExt cx="0" cy="0"/>
+        </a:xfrm>
+      </p:grpSpPr>
+      <p:sp>
+        <p:nvSpPr>
+          <p:cNvPr id="2" name="Slide Image Placeholder 1"/>
+          <p:cNvSpPr>
+            <a:spLocks noGrp="1"/>
+          </p:cNvSpPr>
+          <p:nvPr>
+            <p:ph type="sldImg" idx="2"/>
+          </p:nvPr>
+        </p:nvSpPr>
+        <p:spPr/>
+      </p:sp>
+      <p:sp>
+        <p:nvSpPr>
+          <p:cNvPr id="3" name="Notes Placeholder 2"/>
+          <p:cNvSpPr>
+            <a:spLocks noGrp="1"/>
+          </p:cNvSpPr>
+          <p:nvPr>
+            <p:ph type="body" idx="3" sz="quarter"/>
+          </p:nvPr>
+        </p:nvSpPr>
+        <p:spPr/>
+        <p:txBody>
+          <a:bodyPr/>
+          <a:lstStyle/>
+          <a:p>
+            <a:r>
+              <a:t>That was digital twins. Now let's talk about agents.</a:t>
+            </a:r>
+          </a:p>
+          <a:p/>
+          <a:p>
+            <a:r>
+              <a:t>I know — you've heard the word. It's been on keynote slides and LinkedIn posts for a year. But I've spent the last year building these systems, and they work. They've changed how my team solves problems and makes decisions.</a:t>
+            </a:r>
+          </a:p>
+        </p:txBody>
+      </p:sp>
+      <p:sp>
+        <p:nvSpPr>
+          <p:cNvPr id="4" name="Slide Number Placeholder 3"/>
+          <p:cNvSpPr>
+            <a:spLocks noGrp="1"/>
+          </p:cNvSpPr>
+          <p:nvPr>
+            <p:ph type="sldNum" idx="5" sz="quarter"/>
+          </p:nvPr>
+        </p:nvSpPr>
+        <p:spPr/>
+      </p:sp>
+    </p:spTree>
+  </p:cSld>
+  <p:clrMapOvr>
+    <a:masterClrMapping/>
+  </p:clrMapOvr>
+</p:notes>
+</file>
+
+<file path=ppt/notesSlides/notesSlide9.xml><?xml version="1.0" encoding="utf-8"?>
+<p:notes xmlns:a="http://schemas.openxmlformats.org/drawingml/2006/main" xmlns:p="http://schemas.openxmlformats.org/presentationml/2006/main" xmlns:r="http://schemas.openxmlformats.org/officeDocument/2006/relationships">
+  <p:cSld>
+    <p:spTree>
+      <p:nvGrpSpPr>
+        <p:cNvPr id="1" name=""/>
+        <p:cNvGrpSpPr/>
+        <p:nvPr/>
+      </p:nvGrpSpPr>
+      <p:grpSpPr>
+        <a:xfrm>
+          <a:off x="0" y="0"/>
+          <a:ext cx="0" cy="0"/>
+          <a:chOff x="0" y="0"/>
+          <a:chExt cx="0" cy="0"/>
+        </a:xfrm>
+      </p:grpSpPr>
+      <p:sp>
+        <p:nvSpPr>
+          <p:cNvPr id="2" name="Slide Image Placeholder 1"/>
+          <p:cNvSpPr>
+            <a:spLocks noGrp="1"/>
+          </p:cNvSpPr>
+          <p:nvPr>
+            <p:ph type="sldImg" idx="2"/>
+          </p:nvPr>
+        </p:nvSpPr>
+        <p:spPr/>
+      </p:sp>
+      <p:sp>
+        <p:nvSpPr>
+          <p:cNvPr id="3" name="Notes Placeholder 2"/>
+          <p:cNvSpPr>
+            <a:spLocks noGrp="1"/>
+          </p:cNvSpPr>
+          <p:nvPr>
+            <p:ph type="body" idx="3" sz="quarter"/>
+          </p:nvPr>
+        </p:nvSpPr>
+        <p:spPr/>
+        <p:txBody>
+          <a:bodyPr/>
+          <a:lstStyle/>
+          <a:p>
+            <a:r>
+              <a:t>[BUILD ANIMATION — click through capabilities one at a time.]</a:t>
+            </a:r>
+          </a:p>
+          <a:p/>
+          <a:p>
+            <a:r>
+              <a:t>Autonomy — it operates within boundaries you define, without waiting. Planning — it breaks complex problems into multi-step workflows. Tool use — it connects to real systems, APIs, databases. Reflection — it evaluates what it did and adjusts its approach.</a:t>
+            </a:r>
+          </a:p>
+          <a:p/>
+          <a:p>
+            <a:r>
+              <a:t>That last one is the one people underestimate.</a:t>
+            </a:r>
+          </a:p>
+        </p:txBody>
+      </p:sp>
+      <p:sp>
+        <p:nvSpPr>
+          <p:cNvPr id="4" name="Slide Number Placeholder 3"/>
+          <p:cNvSpPr>
+            <a:spLocks noGrp="1"/>
+          </p:cNvSpPr>
+          <p:nvPr>
+            <p:ph type="sldNum" idx="5" sz="quarter"/>
+          </p:nvPr>
+        </p:nvSpPr>
+        <p:spPr/>
+      </p:sp>
+    </p:spTree>
+  </p:cSld>
+  <p:clrMapOvr>
+    <a:masterClrMapping/>
+  </p:clrMapOvr>
+</p:notes>
 </file>
 
 <file path=ppt/slideLayouts/slideLayout1.xml><?xml version="1.0" encoding="utf-8"?>
@@ -8715,6 +10585,490 @@
   <p:clrMapOvr>
     <a:masterClrMapping/>
   </p:clrMapOvr>
+  <p:timing>
+    <p:tnLst>
+      <p:par>
+        <p:cTn id="1" dur="indefinite" restart="never" nodeType="tmRoot">
+          <p:childTnLst>
+            <p:seq concurrent="1" nextAc="seek">
+              <p:cTn id="2" dur="indefinite" nodeType="mainSeq">
+                <p:childTnLst>
+                  <p:par>
+                    <p:cTn id="3" fill="hold">
+                      <p:stCondLst>
+                        <p:cond delay="0"/>
+                      </p:stCondLst>
+                      <p:childTnLst>
+                        <p:par>
+                          <p:cTn id="4" fill="hold">
+                            <p:stCondLst>
+                              <p:cond delay="0"/>
+                            </p:stCondLst>
+                            <p:childTnLst>
+                              <p:par>
+                                <p:cTn id="5" presetID="1" presetClass="entr" presetSubtype="0" fill="hold" nodeType="clickEffect">
+                                  <p:stCondLst>
+                                    <p:cond delay="0"/>
+                                  </p:stCondLst>
+                                  <p:childTnLst>
+                                    <p:set>
+                                      <p:cBhvr>
+                                        <p:cTn id="6" dur="1" fill="hold">
+                                          <p:stCondLst>
+                                            <p:cond delay="0"/>
+                                          </p:stCondLst>
+                                        </p:cTn>
+                                        <p:tgtEl>
+                                          <p:spTgt spid="3"/>
+                                        </p:tgtEl>
+                                        <p:attrNameLst>
+                                          <p:attrName>style.visibility</p:attrName>
+                                        </p:attrNameLst>
+                                      </p:cBhvr>
+                                      <p:to>
+                                        <p:strVal val="visible"/>
+                                      </p:to>
+                                    </p:set>
+                                  </p:childTnLst>
+                                </p:cTn>
+                              </p:par>
+                            </p:childTnLst>
+                          </p:cTn>
+                        </p:par>
+                        <p:par>
+                          <p:cTn id="7" fill="hold">
+                            <p:stCondLst>
+                              <p:cond delay="0"/>
+                            </p:stCondLst>
+                            <p:childTnLst>
+                              <p:par>
+                                <p:cTn id="8" presetID="1" presetClass="entr" presetSubtype="0" fill="hold" nodeType="clickEffect">
+                                  <p:stCondLst>
+                                    <p:cond delay="0"/>
+                                  </p:stCondLst>
+                                  <p:childTnLst>
+                                    <p:set>
+                                      <p:cBhvr>
+                                        <p:cTn id="9" dur="1" fill="hold">
+                                          <p:stCondLst>
+                                            <p:cond delay="0"/>
+                                          </p:stCondLst>
+                                        </p:cTn>
+                                        <p:tgtEl>
+                                          <p:spTgt spid="4"/>
+                                        </p:tgtEl>
+                                        <p:attrNameLst>
+                                          <p:attrName>style.visibility</p:attrName>
+                                        </p:attrNameLst>
+                                      </p:cBhvr>
+                                      <p:to>
+                                        <p:strVal val="visible"/>
+                                      </p:to>
+                                    </p:set>
+                                  </p:childTnLst>
+                                </p:cTn>
+                              </p:par>
+                            </p:childTnLst>
+                          </p:cTn>
+                        </p:par>
+                        <p:par>
+                          <p:cTn id="10" fill="hold">
+                            <p:stCondLst>
+                              <p:cond delay="0"/>
+                            </p:stCondLst>
+                            <p:childTnLst>
+                              <p:par>
+                                <p:cTn id="11" presetID="1" presetClass="entr" presetSubtype="0" fill="hold" nodeType="clickEffect">
+                                  <p:stCondLst>
+                                    <p:cond delay="0"/>
+                                  </p:stCondLst>
+                                  <p:childTnLst>
+                                    <p:set>
+                                      <p:cBhvr>
+                                        <p:cTn id="12" dur="1" fill="hold">
+                                          <p:stCondLst>
+                                            <p:cond delay="0"/>
+                                          </p:stCondLst>
+                                        </p:cTn>
+                                        <p:tgtEl>
+                                          <p:spTgt spid="5"/>
+                                        </p:tgtEl>
+                                        <p:attrNameLst>
+                                          <p:attrName>style.visibility</p:attrName>
+                                        </p:attrNameLst>
+                                      </p:cBhvr>
+                                      <p:to>
+                                        <p:strVal val="visible"/>
+                                      </p:to>
+                                    </p:set>
+                                  </p:childTnLst>
+                                </p:cTn>
+                              </p:par>
+                            </p:childTnLst>
+                          </p:cTn>
+                        </p:par>
+                      </p:childTnLst>
+                    </p:cTn>
+                  </p:par>
+                  <p:par>
+                    <p:cTn id="13" fill="hold">
+                      <p:stCondLst>
+                        <p:cond delay="0"/>
+                      </p:stCondLst>
+                      <p:childTnLst>
+                        <p:par>
+                          <p:cTn id="14" fill="hold">
+                            <p:stCondLst>
+                              <p:cond delay="0"/>
+                            </p:stCondLst>
+                            <p:childTnLst>
+                              <p:par>
+                                <p:cTn id="15" presetID="1" presetClass="entr" presetSubtype="0" fill="hold" nodeType="clickEffect">
+                                  <p:stCondLst>
+                                    <p:cond delay="0"/>
+                                  </p:stCondLst>
+                                  <p:childTnLst>
+                                    <p:set>
+                                      <p:cBhvr>
+                                        <p:cTn id="16" dur="1" fill="hold">
+                                          <p:stCondLst>
+                                            <p:cond delay="0"/>
+                                          </p:stCondLst>
+                                        </p:cTn>
+                                        <p:tgtEl>
+                                          <p:spTgt spid="6"/>
+                                        </p:tgtEl>
+                                        <p:attrNameLst>
+                                          <p:attrName>style.visibility</p:attrName>
+                                        </p:attrNameLst>
+                                      </p:cBhvr>
+                                      <p:to>
+                                        <p:strVal val="visible"/>
+                                      </p:to>
+                                    </p:set>
+                                  </p:childTnLst>
+                                </p:cTn>
+                              </p:par>
+                            </p:childTnLst>
+                          </p:cTn>
+                        </p:par>
+                        <p:par>
+                          <p:cTn id="17" fill="hold">
+                            <p:stCondLst>
+                              <p:cond delay="0"/>
+                            </p:stCondLst>
+                            <p:childTnLst>
+                              <p:par>
+                                <p:cTn id="18" presetID="1" presetClass="entr" presetSubtype="0" fill="hold" nodeType="clickEffect">
+                                  <p:stCondLst>
+                                    <p:cond delay="0"/>
+                                  </p:stCondLst>
+                                  <p:childTnLst>
+                                    <p:set>
+                                      <p:cBhvr>
+                                        <p:cTn id="19" dur="1" fill="hold">
+                                          <p:stCondLst>
+                                            <p:cond delay="0"/>
+                                          </p:stCondLst>
+                                        </p:cTn>
+                                        <p:tgtEl>
+                                          <p:spTgt spid="7"/>
+                                        </p:tgtEl>
+                                        <p:attrNameLst>
+                                          <p:attrName>style.visibility</p:attrName>
+                                        </p:attrNameLst>
+                                      </p:cBhvr>
+                                      <p:to>
+                                        <p:strVal val="visible"/>
+                                      </p:to>
+                                    </p:set>
+                                  </p:childTnLst>
+                                </p:cTn>
+                              </p:par>
+                            </p:childTnLst>
+                          </p:cTn>
+                        </p:par>
+                        <p:par>
+                          <p:cTn id="20" fill="hold">
+                            <p:stCondLst>
+                              <p:cond delay="0"/>
+                            </p:stCondLst>
+                            <p:childTnLst>
+                              <p:par>
+                                <p:cTn id="21" presetID="1" presetClass="entr" presetSubtype="0" fill="hold" nodeType="clickEffect">
+                                  <p:stCondLst>
+                                    <p:cond delay="0"/>
+                                  </p:stCondLst>
+                                  <p:childTnLst>
+                                    <p:set>
+                                      <p:cBhvr>
+                                        <p:cTn id="22" dur="1" fill="hold">
+                                          <p:stCondLst>
+                                            <p:cond delay="0"/>
+                                          </p:stCondLst>
+                                        </p:cTn>
+                                        <p:tgtEl>
+                                          <p:spTgt spid="8"/>
+                                        </p:tgtEl>
+                                        <p:attrNameLst>
+                                          <p:attrName>style.visibility</p:attrName>
+                                        </p:attrNameLst>
+                                      </p:cBhvr>
+                                      <p:to>
+                                        <p:strVal val="visible"/>
+                                      </p:to>
+                                    </p:set>
+                                  </p:childTnLst>
+                                </p:cTn>
+                              </p:par>
+                            </p:childTnLst>
+                          </p:cTn>
+                        </p:par>
+                      </p:childTnLst>
+                    </p:cTn>
+                  </p:par>
+                  <p:par>
+                    <p:cTn id="23" fill="hold">
+                      <p:stCondLst>
+                        <p:cond delay="0"/>
+                      </p:stCondLst>
+                      <p:childTnLst>
+                        <p:par>
+                          <p:cTn id="24" fill="hold">
+                            <p:stCondLst>
+                              <p:cond delay="0"/>
+                            </p:stCondLst>
+                            <p:childTnLst>
+                              <p:par>
+                                <p:cTn id="25" presetID="1" presetClass="entr" presetSubtype="0" fill="hold" nodeType="clickEffect">
+                                  <p:stCondLst>
+                                    <p:cond delay="0"/>
+                                  </p:stCondLst>
+                                  <p:childTnLst>
+                                    <p:set>
+                                      <p:cBhvr>
+                                        <p:cTn id="26" dur="1" fill="hold">
+                                          <p:stCondLst>
+                                            <p:cond delay="0"/>
+                                          </p:stCondLst>
+                                        </p:cTn>
+                                        <p:tgtEl>
+                                          <p:spTgt spid="9"/>
+                                        </p:tgtEl>
+                                        <p:attrNameLst>
+                                          <p:attrName>style.visibility</p:attrName>
+                                        </p:attrNameLst>
+                                      </p:cBhvr>
+                                      <p:to>
+                                        <p:strVal val="visible"/>
+                                      </p:to>
+                                    </p:set>
+                                  </p:childTnLst>
+                                </p:cTn>
+                              </p:par>
+                            </p:childTnLst>
+                          </p:cTn>
+                        </p:par>
+                        <p:par>
+                          <p:cTn id="27" fill="hold">
+                            <p:stCondLst>
+                              <p:cond delay="0"/>
+                            </p:stCondLst>
+                            <p:childTnLst>
+                              <p:par>
+                                <p:cTn id="28" presetID="1" presetClass="entr" presetSubtype="0" fill="hold" nodeType="clickEffect">
+                                  <p:stCondLst>
+                                    <p:cond delay="0"/>
+                                  </p:stCondLst>
+                                  <p:childTnLst>
+                                    <p:set>
+                                      <p:cBhvr>
+                                        <p:cTn id="29" dur="1" fill="hold">
+                                          <p:stCondLst>
+                                            <p:cond delay="0"/>
+                                          </p:stCondLst>
+                                        </p:cTn>
+                                        <p:tgtEl>
+                                          <p:spTgt spid="10"/>
+                                        </p:tgtEl>
+                                        <p:attrNameLst>
+                                          <p:attrName>style.visibility</p:attrName>
+                                        </p:attrNameLst>
+                                      </p:cBhvr>
+                                      <p:to>
+                                        <p:strVal val="visible"/>
+                                      </p:to>
+                                    </p:set>
+                                  </p:childTnLst>
+                                </p:cTn>
+                              </p:par>
+                            </p:childTnLst>
+                          </p:cTn>
+                        </p:par>
+                        <p:par>
+                          <p:cTn id="30" fill="hold">
+                            <p:stCondLst>
+                              <p:cond delay="0"/>
+                            </p:stCondLst>
+                            <p:childTnLst>
+                              <p:par>
+                                <p:cTn id="31" presetID="1" presetClass="entr" presetSubtype="0" fill="hold" nodeType="clickEffect">
+                                  <p:stCondLst>
+                                    <p:cond delay="0"/>
+                                  </p:stCondLst>
+                                  <p:childTnLst>
+                                    <p:set>
+                                      <p:cBhvr>
+                                        <p:cTn id="32" dur="1" fill="hold">
+                                          <p:stCondLst>
+                                            <p:cond delay="0"/>
+                                          </p:stCondLst>
+                                        </p:cTn>
+                                        <p:tgtEl>
+                                          <p:spTgt spid="11"/>
+                                        </p:tgtEl>
+                                        <p:attrNameLst>
+                                          <p:attrName>style.visibility</p:attrName>
+                                        </p:attrNameLst>
+                                      </p:cBhvr>
+                                      <p:to>
+                                        <p:strVal val="visible"/>
+                                      </p:to>
+                                    </p:set>
+                                  </p:childTnLst>
+                                </p:cTn>
+                              </p:par>
+                            </p:childTnLst>
+                          </p:cTn>
+                        </p:par>
+                      </p:childTnLst>
+                    </p:cTn>
+                  </p:par>
+                  <p:par>
+                    <p:cTn id="33" fill="hold">
+                      <p:stCondLst>
+                        <p:cond delay="0"/>
+                      </p:stCondLst>
+                      <p:childTnLst>
+                        <p:par>
+                          <p:cTn id="34" fill="hold">
+                            <p:stCondLst>
+                              <p:cond delay="0"/>
+                            </p:stCondLst>
+                            <p:childTnLst>
+                              <p:par>
+                                <p:cTn id="35" presetID="1" presetClass="entr" presetSubtype="0" fill="hold" nodeType="clickEffect">
+                                  <p:stCondLst>
+                                    <p:cond delay="0"/>
+                                  </p:stCondLst>
+                                  <p:childTnLst>
+                                    <p:set>
+                                      <p:cBhvr>
+                                        <p:cTn id="36" dur="1" fill="hold">
+                                          <p:stCondLst>
+                                            <p:cond delay="0"/>
+                                          </p:stCondLst>
+                                        </p:cTn>
+                                        <p:tgtEl>
+                                          <p:spTgt spid="12"/>
+                                        </p:tgtEl>
+                                        <p:attrNameLst>
+                                          <p:attrName>style.visibility</p:attrName>
+                                        </p:attrNameLst>
+                                      </p:cBhvr>
+                                      <p:to>
+                                        <p:strVal val="visible"/>
+                                      </p:to>
+                                    </p:set>
+                                  </p:childTnLst>
+                                </p:cTn>
+                              </p:par>
+                            </p:childTnLst>
+                          </p:cTn>
+                        </p:par>
+                      </p:childTnLst>
+                    </p:cTn>
+                  </p:par>
+                  <p:par>
+                    <p:cTn id="37" fill="hold">
+                      <p:stCondLst>
+                        <p:cond delay="0"/>
+                      </p:stCondLst>
+                      <p:childTnLst>
+                        <p:par>
+                          <p:cTn id="38" fill="hold">
+                            <p:stCondLst>
+                              <p:cond delay="0"/>
+                            </p:stCondLst>
+                            <p:childTnLst>
+                              <p:par>
+                                <p:cTn id="39" presetID="1" presetClass="entr" presetSubtype="0" fill="hold" nodeType="clickEffect">
+                                  <p:stCondLst>
+                                    <p:cond delay="0"/>
+                                  </p:stCondLst>
+                                  <p:childTnLst>
+                                    <p:set>
+                                      <p:cBhvr>
+                                        <p:cTn id="40" dur="1" fill="hold">
+                                          <p:stCondLst>
+                                            <p:cond delay="0"/>
+                                          </p:stCondLst>
+                                        </p:cTn>
+                                        <p:tgtEl>
+                                          <p:spTgt spid="13"/>
+                                        </p:tgtEl>
+                                        <p:attrNameLst>
+                                          <p:attrName>style.visibility</p:attrName>
+                                        </p:attrNameLst>
+                                      </p:cBhvr>
+                                      <p:to>
+                                        <p:strVal val="visible"/>
+                                      </p:to>
+                                    </p:set>
+                                  </p:childTnLst>
+                                </p:cTn>
+                              </p:par>
+                            </p:childTnLst>
+                          </p:cTn>
+                        </p:par>
+                      </p:childTnLst>
+                    </p:cTn>
+                  </p:par>
+                </p:childTnLst>
+              </p:cTn>
+              <p:prevCondLst>
+                <p:cond evt="onPrev" delay="0">
+                  <p:tgtEl>
+                    <p:sldTgt/>
+                  </p:tgtEl>
+                </p:cond>
+              </p:prevCondLst>
+              <p:nextCondLst>
+                <p:cond evt="onNext" delay="0">
+                  <p:tgtEl>
+                    <p:sldTgt/>
+                  </p:tgtEl>
+                </p:cond>
+              </p:nextCondLst>
+            </p:seq>
+          </p:childTnLst>
+        </p:cTn>
+      </p:par>
+    </p:tnLst>
+    <p:bldLst>
+      <p:bldP spid="3" grpId="0" animBg="1"/>
+      <p:bldP spid="4" grpId="0" animBg="1"/>
+      <p:bldP spid="5" grpId="0" animBg="1"/>
+      <p:bldP spid="6" grpId="0" animBg="1"/>
+      <p:bldP spid="7" grpId="0" animBg="1"/>
+      <p:bldP spid="8" grpId="0" animBg="1"/>
+      <p:bldP spid="9" grpId="0" animBg="1"/>
+      <p:bldP spid="10" grpId="0" animBg="1"/>
+      <p:bldP spid="11" grpId="0" animBg="1"/>
+      <p:bldP spid="12" grpId="0" animBg="1"/>
+      <p:bldP spid="13" grpId="0" animBg="1"/>
+    </p:bldLst>
+  </p:timing>
 </p:sld>
 </file>
 
@@ -9442,6 +11796,370 @@
   <p:clrMapOvr>
     <a:masterClrMapping/>
   </p:clrMapOvr>
+  <p:timing>
+    <p:tnLst>
+      <p:par>
+        <p:cTn id="1" dur="indefinite" restart="never" nodeType="tmRoot">
+          <p:childTnLst>
+            <p:seq concurrent="1" nextAc="seek">
+              <p:cTn id="2" dur="indefinite" nodeType="mainSeq">
+                <p:childTnLst>
+                  <p:par>
+                    <p:cTn id="3" fill="hold">
+                      <p:stCondLst>
+                        <p:cond delay="0"/>
+                      </p:stCondLst>
+                      <p:childTnLst>
+                        <p:par>
+                          <p:cTn id="4" fill="hold">
+                            <p:stCondLst>
+                              <p:cond delay="0"/>
+                            </p:stCondLst>
+                            <p:childTnLst>
+                              <p:par>
+                                <p:cTn id="5" presetID="1" presetClass="entr" presetSubtype="0" fill="hold" nodeType="clickEffect">
+                                  <p:stCondLst>
+                                    <p:cond delay="0"/>
+                                  </p:stCondLst>
+                                  <p:childTnLst>
+                                    <p:set>
+                                      <p:cBhvr>
+                                        <p:cTn id="6" dur="1" fill="hold">
+                                          <p:stCondLst>
+                                            <p:cond delay="0"/>
+                                          </p:stCondLst>
+                                        </p:cTn>
+                                        <p:tgtEl>
+                                          <p:spTgt spid="3"/>
+                                        </p:tgtEl>
+                                        <p:attrNameLst>
+                                          <p:attrName>style.visibility</p:attrName>
+                                        </p:attrNameLst>
+                                      </p:cBhvr>
+                                      <p:to>
+                                        <p:strVal val="visible"/>
+                                      </p:to>
+                                    </p:set>
+                                  </p:childTnLst>
+                                </p:cTn>
+                              </p:par>
+                            </p:childTnLst>
+                          </p:cTn>
+                        </p:par>
+                        <p:par>
+                          <p:cTn id="7" fill="hold">
+                            <p:stCondLst>
+                              <p:cond delay="0"/>
+                            </p:stCondLst>
+                            <p:childTnLst>
+                              <p:par>
+                                <p:cTn id="8" presetID="1" presetClass="entr" presetSubtype="0" fill="hold" nodeType="clickEffect">
+                                  <p:stCondLst>
+                                    <p:cond delay="0"/>
+                                  </p:stCondLst>
+                                  <p:childTnLst>
+                                    <p:set>
+                                      <p:cBhvr>
+                                        <p:cTn id="9" dur="1" fill="hold">
+                                          <p:stCondLst>
+                                            <p:cond delay="0"/>
+                                          </p:stCondLst>
+                                        </p:cTn>
+                                        <p:tgtEl>
+                                          <p:spTgt spid="4"/>
+                                        </p:tgtEl>
+                                        <p:attrNameLst>
+                                          <p:attrName>style.visibility</p:attrName>
+                                        </p:attrNameLst>
+                                      </p:cBhvr>
+                                      <p:to>
+                                        <p:strVal val="visible"/>
+                                      </p:to>
+                                    </p:set>
+                                  </p:childTnLst>
+                                </p:cTn>
+                              </p:par>
+                            </p:childTnLst>
+                          </p:cTn>
+                        </p:par>
+                      </p:childTnLst>
+                    </p:cTn>
+                  </p:par>
+                  <p:par>
+                    <p:cTn id="10" fill="hold">
+                      <p:stCondLst>
+                        <p:cond delay="0"/>
+                      </p:stCondLst>
+                      <p:childTnLst>
+                        <p:par>
+                          <p:cTn id="11" fill="hold">
+                            <p:stCondLst>
+                              <p:cond delay="0"/>
+                            </p:stCondLst>
+                            <p:childTnLst>
+                              <p:par>
+                                <p:cTn id="12" presetID="1" presetClass="entr" presetSubtype="0" fill="hold" nodeType="clickEffect">
+                                  <p:stCondLst>
+                                    <p:cond delay="0"/>
+                                  </p:stCondLst>
+                                  <p:childTnLst>
+                                    <p:set>
+                                      <p:cBhvr>
+                                        <p:cTn id="13" dur="1" fill="hold">
+                                          <p:stCondLst>
+                                            <p:cond delay="0"/>
+                                          </p:stCondLst>
+                                        </p:cTn>
+                                        <p:tgtEl>
+                                          <p:spTgt spid="5"/>
+                                        </p:tgtEl>
+                                        <p:attrNameLst>
+                                          <p:attrName>style.visibility</p:attrName>
+                                        </p:attrNameLst>
+                                      </p:cBhvr>
+                                      <p:to>
+                                        <p:strVal val="visible"/>
+                                      </p:to>
+                                    </p:set>
+                                  </p:childTnLst>
+                                </p:cTn>
+                              </p:par>
+                            </p:childTnLst>
+                          </p:cTn>
+                        </p:par>
+                        <p:par>
+                          <p:cTn id="14" fill="hold">
+                            <p:stCondLst>
+                              <p:cond delay="0"/>
+                            </p:stCondLst>
+                            <p:childTnLst>
+                              <p:par>
+                                <p:cTn id="15" presetID="1" presetClass="entr" presetSubtype="0" fill="hold" nodeType="clickEffect">
+                                  <p:stCondLst>
+                                    <p:cond delay="0"/>
+                                  </p:stCondLst>
+                                  <p:childTnLst>
+                                    <p:set>
+                                      <p:cBhvr>
+                                        <p:cTn id="16" dur="1" fill="hold">
+                                          <p:stCondLst>
+                                            <p:cond delay="0"/>
+                                          </p:stCondLst>
+                                        </p:cTn>
+                                        <p:tgtEl>
+                                          <p:spTgt spid="6"/>
+                                        </p:tgtEl>
+                                        <p:attrNameLst>
+                                          <p:attrName>style.visibility</p:attrName>
+                                        </p:attrNameLst>
+                                      </p:cBhvr>
+                                      <p:to>
+                                        <p:strVal val="visible"/>
+                                      </p:to>
+                                    </p:set>
+                                  </p:childTnLst>
+                                </p:cTn>
+                              </p:par>
+                            </p:childTnLst>
+                          </p:cTn>
+                        </p:par>
+                      </p:childTnLst>
+                    </p:cTn>
+                  </p:par>
+                  <p:par>
+                    <p:cTn id="17" fill="hold">
+                      <p:stCondLst>
+                        <p:cond delay="0"/>
+                      </p:stCondLst>
+                      <p:childTnLst>
+                        <p:par>
+                          <p:cTn id="18" fill="hold">
+                            <p:stCondLst>
+                              <p:cond delay="0"/>
+                            </p:stCondLst>
+                            <p:childTnLst>
+                              <p:par>
+                                <p:cTn id="19" presetID="1" presetClass="entr" presetSubtype="0" fill="hold" nodeType="clickEffect">
+                                  <p:stCondLst>
+                                    <p:cond delay="0"/>
+                                  </p:stCondLst>
+                                  <p:childTnLst>
+                                    <p:set>
+                                      <p:cBhvr>
+                                        <p:cTn id="20" dur="1" fill="hold">
+                                          <p:stCondLst>
+                                            <p:cond delay="0"/>
+                                          </p:stCondLst>
+                                        </p:cTn>
+                                        <p:tgtEl>
+                                          <p:spTgt spid="7"/>
+                                        </p:tgtEl>
+                                        <p:attrNameLst>
+                                          <p:attrName>style.visibility</p:attrName>
+                                        </p:attrNameLst>
+                                      </p:cBhvr>
+                                      <p:to>
+                                        <p:strVal val="visible"/>
+                                      </p:to>
+                                    </p:set>
+                                  </p:childTnLst>
+                                </p:cTn>
+                              </p:par>
+                            </p:childTnLst>
+                          </p:cTn>
+                        </p:par>
+                        <p:par>
+                          <p:cTn id="21" fill="hold">
+                            <p:stCondLst>
+                              <p:cond delay="0"/>
+                            </p:stCondLst>
+                            <p:childTnLst>
+                              <p:par>
+                                <p:cTn id="22" presetID="1" presetClass="entr" presetSubtype="0" fill="hold" nodeType="clickEffect">
+                                  <p:stCondLst>
+                                    <p:cond delay="0"/>
+                                  </p:stCondLst>
+                                  <p:childTnLst>
+                                    <p:set>
+                                      <p:cBhvr>
+                                        <p:cTn id="23" dur="1" fill="hold">
+                                          <p:stCondLst>
+                                            <p:cond delay="0"/>
+                                          </p:stCondLst>
+                                        </p:cTn>
+                                        <p:tgtEl>
+                                          <p:spTgt spid="8"/>
+                                        </p:tgtEl>
+                                        <p:attrNameLst>
+                                          <p:attrName>style.visibility</p:attrName>
+                                        </p:attrNameLst>
+                                      </p:cBhvr>
+                                      <p:to>
+                                        <p:strVal val="visible"/>
+                                      </p:to>
+                                    </p:set>
+                                  </p:childTnLst>
+                                </p:cTn>
+                              </p:par>
+                            </p:childTnLst>
+                          </p:cTn>
+                        </p:par>
+                      </p:childTnLst>
+                    </p:cTn>
+                  </p:par>
+                  <p:par>
+                    <p:cTn id="24" fill="hold">
+                      <p:stCondLst>
+                        <p:cond delay="0"/>
+                      </p:stCondLst>
+                      <p:childTnLst>
+                        <p:par>
+                          <p:cTn id="25" fill="hold">
+                            <p:stCondLst>
+                              <p:cond delay="0"/>
+                            </p:stCondLst>
+                            <p:childTnLst>
+                              <p:par>
+                                <p:cTn id="26" presetID="1" presetClass="entr" presetSubtype="0" fill="hold" nodeType="clickEffect">
+                                  <p:stCondLst>
+                                    <p:cond delay="0"/>
+                                  </p:stCondLst>
+                                  <p:childTnLst>
+                                    <p:set>
+                                      <p:cBhvr>
+                                        <p:cTn id="27" dur="1" fill="hold">
+                                          <p:stCondLst>
+                                            <p:cond delay="0"/>
+                                          </p:stCondLst>
+                                        </p:cTn>
+                                        <p:tgtEl>
+                                          <p:spTgt spid="9"/>
+                                        </p:tgtEl>
+                                        <p:attrNameLst>
+                                          <p:attrName>style.visibility</p:attrName>
+                                        </p:attrNameLst>
+                                      </p:cBhvr>
+                                      <p:to>
+                                        <p:strVal val="visible"/>
+                                      </p:to>
+                                    </p:set>
+                                  </p:childTnLst>
+                                </p:cTn>
+                              </p:par>
+                            </p:childTnLst>
+                          </p:cTn>
+                        </p:par>
+                        <p:par>
+                          <p:cTn id="28" fill="hold">
+                            <p:stCondLst>
+                              <p:cond delay="0"/>
+                            </p:stCondLst>
+                            <p:childTnLst>
+                              <p:par>
+                                <p:cTn id="29" presetID="1" presetClass="entr" presetSubtype="0" fill="hold" nodeType="clickEffect">
+                                  <p:stCondLst>
+                                    <p:cond delay="0"/>
+                                  </p:stCondLst>
+                                  <p:childTnLst>
+                                    <p:set>
+                                      <p:cBhvr>
+                                        <p:cTn id="30" dur="1" fill="hold">
+                                          <p:stCondLst>
+                                            <p:cond delay="0"/>
+                                          </p:stCondLst>
+                                        </p:cTn>
+                                        <p:tgtEl>
+                                          <p:spTgt spid="10"/>
+                                        </p:tgtEl>
+                                        <p:attrNameLst>
+                                          <p:attrName>style.visibility</p:attrName>
+                                        </p:attrNameLst>
+                                      </p:cBhvr>
+                                      <p:to>
+                                        <p:strVal val="visible"/>
+                                      </p:to>
+                                    </p:set>
+                                  </p:childTnLst>
+                                </p:cTn>
+                              </p:par>
+                            </p:childTnLst>
+                          </p:cTn>
+                        </p:par>
+                      </p:childTnLst>
+                    </p:cTn>
+                  </p:par>
+                </p:childTnLst>
+              </p:cTn>
+              <p:prevCondLst>
+                <p:cond evt="onPrev" delay="0">
+                  <p:tgtEl>
+                    <p:sldTgt/>
+                  </p:tgtEl>
+                </p:cond>
+              </p:prevCondLst>
+              <p:nextCondLst>
+                <p:cond evt="onNext" delay="0">
+                  <p:tgtEl>
+                    <p:sldTgt/>
+                  </p:tgtEl>
+                </p:cond>
+              </p:nextCondLst>
+            </p:seq>
+          </p:childTnLst>
+        </p:cTn>
+      </p:par>
+    </p:tnLst>
+    <p:bldLst>
+      <p:bldP spid="3" grpId="0" animBg="1"/>
+      <p:bldP spid="4" grpId="0" animBg="1"/>
+      <p:bldP spid="5" grpId="0" animBg="1"/>
+      <p:bldP spid="6" grpId="0" animBg="1"/>
+      <p:bldP spid="7" grpId="0" animBg="1"/>
+      <p:bldP spid="8" grpId="0" animBg="1"/>
+      <p:bldP spid="9" grpId="0" animBg="1"/>
+      <p:bldP spid="10" grpId="0" animBg="1"/>
+    </p:bldLst>
+  </p:timing>
 </p:sld>
 </file>
 
@@ -9763,4 +12481,324 @@
   </a:objectDefaults>
   <a:extraClrSchemeLst/>
 </a:theme>
+</file>
+
+<file path=ppt/theme/theme2.xml><?xml version="1.0" encoding="utf-8"?>
+<a:theme xmlns:a="http://schemas.openxmlformats.org/drawingml/2006/main" name="Office Theme">
+  <a:themeElements>
+    <a:clrScheme name="Office">
+      <a:dk1>
+        <a:sysClr val="windowText" lastClr="000000"/>
+      </a:dk1>
+      <a:lt1>
+        <a:sysClr val="window" lastClr="FFFFFF"/>
+      </a:lt1>
+      <a:dk2>
+        <a:srgbClr val="1F497D"/>
+      </a:dk2>
+      <a:lt2>
+        <a:srgbClr val="EEECE1"/>
+      </a:lt2>
+      <a:accent1>
+        <a:srgbClr val="4F81BD"/>
+      </a:accent1>
+      <a:accent2>
+        <a:srgbClr val="C0504D"/>
+      </a:accent2>
+      <a:accent3>
+        <a:srgbClr val="9BBB59"/>
+      </a:accent3>
+      <a:accent4>
+        <a:srgbClr val="8064A2"/>
+      </a:accent4>
+      <a:accent5>
+        <a:srgbClr val="4BACC6"/>
+      </a:accent5>
+      <a:accent6>
+        <a:srgbClr val="F79646"/>
+      </a:accent6>
+      <a:hlink>
+        <a:srgbClr val="0000FF"/>
+      </a:hlink>
+      <a:folHlink>
+        <a:srgbClr val="800080"/>
+      </a:folHlink>
+    </a:clrScheme>
+    <a:fontScheme name="Office">
+      <a:majorFont>
+        <a:latin typeface="Calibri"/>
+        <a:ea typeface=""/>
+        <a:cs typeface=""/>
+        <a:font script="Jpan" typeface="ＭＳ Ｐゴシック"/>
+        <a:font script="Hang" typeface="맑은 고딕"/>
+        <a:font script="Hans" typeface="宋体"/>
+        <a:font script="Hant" typeface="新細明體"/>
+        <a:font script="Arab" typeface="Times New Roman"/>
+        <a:font script="Hebr" typeface="Times New Roman"/>
+        <a:font script="Thai" typeface="Angsana New"/>
+        <a:font script="Ethi" typeface="Nyala"/>
+        <a:font script="Beng" typeface="Vrinda"/>
+        <a:font script="Gujr" typeface="Shruti"/>
+        <a:font script="Khmr" typeface="MoolBoran"/>
+        <a:font script="Knda" typeface="Tunga"/>
+        <a:font script="Guru" typeface="Raavi"/>
+        <a:font script="Cans" typeface="Euphemia"/>
+        <a:font script="Cher" typeface="Plantagenet Cherokee"/>
+        <a:font script="Yiii" typeface="Microsoft Yi Baiti"/>
+        <a:font script="Tibt" typeface="Microsoft Himalaya"/>
+        <a:font script="Thaa" typeface="MV Boli"/>
+        <a:font script="Deva" typeface="Mangal"/>
+        <a:font script="Telu" typeface="Gautami"/>
+        <a:font script="Taml" typeface="Latha"/>
+        <a:font script="Syrc" typeface="Estrangelo Edessa"/>
+        <a:font script="Orya" typeface="Kalinga"/>
+        <a:font script="Mlym" typeface="Kartika"/>
+        <a:font script="Laoo" typeface="DokChampa"/>
+        <a:font script="Sinh" typeface="Iskoola Pota"/>
+        <a:font script="Mong" typeface="Mongolian Baiti"/>
+        <a:font script="Viet" typeface="Times New Roman"/>
+        <a:font script="Uigh" typeface="Microsoft Uighur"/>
+        <a:font script="Geor" typeface="Sylfaen"/>
+      </a:majorFont>
+      <a:minorFont>
+        <a:latin typeface="Calibri"/>
+        <a:ea typeface=""/>
+        <a:cs typeface=""/>
+        <a:font script="Jpan" typeface="ＭＳ Ｐゴシック"/>
+        <a:font script="Hang" typeface="맑은 고딕"/>
+        <a:font script="Hans" typeface="宋体"/>
+        <a:font script="Hant" typeface="新細明體"/>
+        <a:font script="Arab" typeface="Arial"/>
+        <a:font script="Hebr" typeface="Arial"/>
+        <a:font script="Thai" typeface="Cordia New"/>
+        <a:font script="Ethi" typeface="Nyala"/>
+        <a:font script="Beng" typeface="Vrinda"/>
+        <a:font script="Gujr" typeface="Shruti"/>
+        <a:font script="Khmr" typeface="DaunPenh"/>
+        <a:font script="Knda" typeface="Tunga"/>
+        <a:font script="Guru" typeface="Raavi"/>
+        <a:font script="Cans" typeface="Euphemia"/>
+        <a:font script="Cher" typeface="Plantagenet Cherokee"/>
+        <a:font script="Yiii" typeface="Microsoft Yi Baiti"/>
+        <a:font script="Tibt" typeface="Microsoft Himalaya"/>
+        <a:font script="Thaa" typeface="MV Boli"/>
+        <a:font script="Deva" typeface="Mangal"/>
+        <a:font script="Telu" typeface="Gautami"/>
+        <a:font script="Taml" typeface="Latha"/>
+        <a:font script="Syrc" typeface="Estrangelo Edessa"/>
+        <a:font script="Orya" typeface="Kalinga"/>
+        <a:font script="Mlym" typeface="Kartika"/>
+        <a:font script="Laoo" typeface="DokChampa"/>
+        <a:font script="Sinh" typeface="Iskoola Pota"/>
+        <a:font script="Mong" typeface="Mongolian Baiti"/>
+        <a:font script="Viet" typeface="Arial"/>
+        <a:font script="Uigh" typeface="Microsoft Uighur"/>
+        <a:font script="Geor" typeface="Sylfaen"/>
+      </a:minorFont>
+    </a:fontScheme>
+    <a:fmtScheme name="Office">
+      <a:fillStyleLst>
+        <a:solidFill>
+          <a:schemeClr val="phClr"/>
+        </a:solidFill>
+        <a:gradFill rotWithShape="1">
+          <a:gsLst>
+            <a:gs pos="0">
+              <a:schemeClr val="phClr">
+                <a:tint val="50000"/>
+                <a:satMod val="300000"/>
+              </a:schemeClr>
+            </a:gs>
+            <a:gs pos="35000">
+              <a:schemeClr val="phClr">
+                <a:tint val="37000"/>
+                <a:satMod val="300000"/>
+              </a:schemeClr>
+            </a:gs>
+            <a:gs pos="100000">
+              <a:schemeClr val="phClr">
+                <a:tint val="15000"/>
+                <a:satMod val="350000"/>
+              </a:schemeClr>
+            </a:gs>
+          </a:gsLst>
+          <a:lin ang="16200000" scaled="1"/>
+        </a:gradFill>
+        <a:gradFill rotWithShape="1">
+          <a:gsLst>
+            <a:gs pos="0">
+              <a:schemeClr val="phClr">
+                <a:tint val="100000"/>
+                <a:shade val="100000"/>
+                <a:satMod val="130000"/>
+              </a:schemeClr>
+            </a:gs>
+            <a:gs pos="100000">
+              <a:schemeClr val="phClr">
+                <a:tint val="50000"/>
+                <a:shade val="100000"/>
+                <a:satMod val="350000"/>
+              </a:schemeClr>
+            </a:gs>
+          </a:gsLst>
+          <a:lin ang="16200000" scaled="0"/>
+        </a:gradFill>
+      </a:fillStyleLst>
+      <a:lnStyleLst>
+        <a:ln w="9525" cap="flat" cmpd="sng" algn="ctr">
+          <a:solidFill>
+            <a:schemeClr val="phClr">
+              <a:shade val="95000"/>
+              <a:satMod val="105000"/>
+            </a:schemeClr>
+          </a:solidFill>
+          <a:prstDash val="solid"/>
+        </a:ln>
+        <a:ln w="25400" cap="flat" cmpd="sng" algn="ctr">
+          <a:solidFill>
+            <a:schemeClr val="phClr"/>
+          </a:solidFill>
+          <a:prstDash val="solid"/>
+        </a:ln>
+        <a:ln w="38100" cap="flat" cmpd="sng" algn="ctr">
+          <a:solidFill>
+            <a:schemeClr val="phClr"/>
+          </a:solidFill>
+          <a:prstDash val="solid"/>
+        </a:ln>
+      </a:lnStyleLst>
+      <a:effectStyleLst>
+        <a:effectStyle>
+          <a:effectLst>
+            <a:outerShdw blurRad="40000" dist="20000" dir="5400000" rotWithShape="0">
+              <a:srgbClr val="000000">
+                <a:alpha val="38000"/>
+              </a:srgbClr>
+            </a:outerShdw>
+          </a:effectLst>
+        </a:effectStyle>
+        <a:effectStyle>
+          <a:effectLst>
+            <a:outerShdw blurRad="40000" dist="23000" dir="5400000" rotWithShape="0">
+              <a:srgbClr val="000000">
+                <a:alpha val="35000"/>
+              </a:srgbClr>
+            </a:outerShdw>
+          </a:effectLst>
+        </a:effectStyle>
+        <a:effectStyle>
+          <a:effectLst>
+            <a:outerShdw blurRad="40000" dist="23000" dir="5400000" rotWithShape="0">
+              <a:srgbClr val="000000">
+                <a:alpha val="35000"/>
+              </a:srgbClr>
+            </a:outerShdw>
+          </a:effectLst>
+          <a:scene3d>
+            <a:camera prst="orthographicFront">
+              <a:rot lat="0" lon="0" rev="0"/>
+            </a:camera>
+            <a:lightRig rig="threePt" dir="t">
+              <a:rot lat="0" lon="0" rev="1200000"/>
+            </a:lightRig>
+          </a:scene3d>
+          <a:sp3d>
+            <a:bevelT w="63500" h="25400"/>
+          </a:sp3d>
+        </a:effectStyle>
+      </a:effectStyleLst>
+      <a:bgFillStyleLst>
+        <a:solidFill>
+          <a:schemeClr val="phClr"/>
+        </a:solidFill>
+        <a:gradFill rotWithShape="1">
+          <a:gsLst>
+            <a:gs pos="0">
+              <a:schemeClr val="phClr">
+                <a:tint val="40000"/>
+                <a:satMod val="350000"/>
+              </a:schemeClr>
+            </a:gs>
+            <a:gs pos="40000">
+              <a:schemeClr val="phClr">
+                <a:tint val="45000"/>
+                <a:shade val="99000"/>
+                <a:satMod val="350000"/>
+              </a:schemeClr>
+            </a:gs>
+            <a:gs pos="100000">
+              <a:schemeClr val="phClr">
+                <a:shade val="20000"/>
+                <a:satMod val="255000"/>
+              </a:schemeClr>
+            </a:gs>
+          </a:gsLst>
+          <a:path path="circle">
+            <a:fillToRect l="50000" t="-80000" r="50000" b="180000"/>
+          </a:path>
+        </a:gradFill>
+        <a:gradFill rotWithShape="1">
+          <a:gsLst>
+            <a:gs pos="0">
+              <a:schemeClr val="phClr">
+                <a:tint val="80000"/>
+                <a:satMod val="300000"/>
+              </a:schemeClr>
+            </a:gs>
+            <a:gs pos="100000">
+              <a:schemeClr val="phClr">
+                <a:shade val="30000"/>
+                <a:satMod val="200000"/>
+              </a:schemeClr>
+            </a:gs>
+          </a:gsLst>
+          <a:path path="circle">
+            <a:fillToRect l="50000" t="50000" r="50000" b="50000"/>
+          </a:path>
+        </a:gradFill>
+      </a:bgFillStyleLst>
+    </a:fmtScheme>
+  </a:themeElements>
+  <a:objectDefaults>
+    <a:spDef>
+      <a:spPr/>
+      <a:bodyPr/>
+      <a:lstStyle/>
+      <a:style>
+        <a:lnRef idx="1">
+          <a:schemeClr val="accent1"/>
+        </a:lnRef>
+        <a:fillRef idx="3">
+          <a:schemeClr val="accent1"/>
+        </a:fillRef>
+        <a:effectRef idx="2">
+          <a:schemeClr val="accent1"/>
+        </a:effectRef>
+        <a:fontRef idx="minor">
+          <a:schemeClr val="lt1"/>
+        </a:fontRef>
+      </a:style>
+    </a:spDef>
+    <a:lnDef>
+      <a:spPr/>
+      <a:bodyPr/>
+      <a:lstStyle/>
+      <a:style>
+        <a:lnRef idx="2">
+          <a:schemeClr val="accent1"/>
+        </a:lnRef>
+        <a:fillRef idx="0">
+          <a:schemeClr val="accent1"/>
+        </a:fillRef>
+        <a:effectRef idx="1">
+          <a:schemeClr val="accent1"/>
+        </a:effectRef>
+        <a:fontRef idx="minor">
+          <a:schemeClr val="tx1"/>
+        </a:fontRef>
+      </a:style>
+    </a:lnDef>
+  </a:objectDefaults>
+  <a:extraClrSchemeLst/>
+</a:theme>
 </file>
--- a/presentation/presentation-v4-gradient-noir.pptx
+++ b/presentation/presentation-v4-gradient-noir.pptx
@@ -4,29 +4,32 @@
   <p:sldMasterIdLst>
     <p:sldMasterId id="2147483648" r:id="rId1"/>
   </p:sldMasterIdLst>
+  <p:notesMasterIdLst>
+    <p:notesMasterId r:id="rId22"/>
+  </p:notesMasterIdLst>
   <p:sldIdLst>
-    <p:sldId id="256" r:id="rId7"/>
-    <p:sldId id="257" r:id="rId8"/>
-    <p:sldId id="258" r:id="rId9"/>
-    <p:sldId id="259" r:id="rId10"/>
-    <p:sldId id="260" r:id="rId11"/>
-    <p:sldId id="261" r:id="rId12"/>
-    <p:sldId id="262" r:id="rId13"/>
-    <p:sldId id="263" r:id="rId14"/>
-    <p:sldId id="264" r:id="rId15"/>
-    <p:sldId id="265" r:id="rId16"/>
-    <p:sldId id="266" r:id="rId17"/>
-    <p:sldId id="267" r:id="rId18"/>
-    <p:sldId id="268" r:id="rId19"/>
-    <p:sldId id="269" r:id="rId20"/>
-    <p:sldId id="270" r:id="rId21"/>
-    <p:sldId id="271" r:id="rId22"/>
-    <p:sldId id="272" r:id="rId23"/>
-    <p:sldId id="273" r:id="rId24"/>
-    <p:sldId id="274" r:id="rId25"/>
-    <p:sldId id="275" r:id="rId26"/>
+    <p:sldId id="256" r:id="rId2"/>
+    <p:sldId id="257" r:id="rId3"/>
+    <p:sldId id="258" r:id="rId4"/>
+    <p:sldId id="259" r:id="rId5"/>
+    <p:sldId id="260" r:id="rId6"/>
+    <p:sldId id="261" r:id="rId7"/>
+    <p:sldId id="262" r:id="rId8"/>
+    <p:sldId id="263" r:id="rId9"/>
+    <p:sldId id="264" r:id="rId10"/>
+    <p:sldId id="265" r:id="rId11"/>
+    <p:sldId id="266" r:id="rId12"/>
+    <p:sldId id="267" r:id="rId13"/>
+    <p:sldId id="268" r:id="rId14"/>
+    <p:sldId id="269" r:id="rId15"/>
+    <p:sldId id="270" r:id="rId16"/>
+    <p:sldId id="271" r:id="rId17"/>
+    <p:sldId id="272" r:id="rId18"/>
+    <p:sldId id="273" r:id="rId19"/>
+    <p:sldId id="274" r:id="rId20"/>
+    <p:sldId id="275" r:id="rId21"/>
   </p:sldIdLst>
-  <p:sldSz cx="12191695" cy="6858000" type="screen4x3"/>
+  <p:sldSz cx="12192000" cy="6858000"/>
   <p:notesSz cx="6858000" cy="9144000"/>
   <p:defaultTextStyle>
     <a:defPPr>
@@ -123,11 +126,27 @@
       </a:defRPr>
     </a:lvl9pPr>
   </p:defaultTextStyle>
+  <p:extLst>
+    <p:ext uri="{EFAFB233-063F-42B5-8137-9DF3F51BA10A}">
+      <p15:sldGuideLst xmlns:p15="http://schemas.microsoft.com/office/powerpoint/2012/main">
+        <p15:guide id="1" orient="horz" pos="2160">
+          <p15:clr>
+            <a:srgbClr val="A4A3A4"/>
+          </p15:clr>
+        </p15:guide>
+        <p15:guide id="2" pos="2880">
+          <p15:clr>
+            <a:srgbClr val="A4A3A4"/>
+          </p15:clr>
+        </p15:guide>
+      </p15:sldGuideLst>
+    </p:ext>
+  </p:extLst>
 </p:presentation>
 </file>
 
 <file path=ppt/notesMasters/notesMaster1.xml><?xml version="1.0" encoding="utf-8"?>
-<p:notesMaster xmlns:a="http://schemas.openxmlformats.org/drawingml/2006/main" xmlns:p="http://schemas.openxmlformats.org/presentationml/2006/main" xmlns:r="http://schemas.openxmlformats.org/officeDocument/2006/relationships">
+<p:notesMaster xmlns:a="http://schemas.openxmlformats.org/drawingml/2006/main" xmlns:r="http://schemas.openxmlformats.org/officeDocument/2006/relationships" xmlns:p="http://schemas.openxmlformats.org/presentationml/2006/main">
   <p:cSld>
     <p:bg>
       <p:bgRef idx="1001">
@@ -148,241 +167,16 @@
           <a:chExt cx="0" cy="0"/>
         </a:xfrm>
       </p:grpSpPr>
-      <p:sp>
-        <p:nvSpPr>
-          <p:cNvPr id="2" name="Header Placeholder 1"/>
-          <p:cNvSpPr>
-            <a:spLocks noGrp="1"/>
-          </p:cNvSpPr>
-          <p:nvPr>
-            <p:ph type="hdr" sz="quarter"/>
-          </p:nvPr>
-        </p:nvSpPr>
-        <p:spPr>
-          <a:xfrm>
-            <a:off x="0" y="0"/>
-            <a:ext cx="2971800" cy="457200"/>
-          </a:xfrm>
-          <a:prstGeom prst="rect">
-            <a:avLst/>
-          </a:prstGeom>
-        </p:spPr>
-        <p:txBody>
-          <a:bodyPr vert="horz" lIns="91440" tIns="45720" rIns="91440" bIns="45720" rtlCol="0"/>
-          <a:lstStyle>
-            <a:lvl1pPr algn="l">
-              <a:defRPr sz="1200"/>
-            </a:lvl1pPr>
-          </a:lstStyle>
-          <a:p>
-            <a:endParaRPr lang="en-US"/>
-          </a:p>
-        </p:txBody>
-      </p:sp>
-      <p:sp>
-        <p:nvSpPr>
-          <p:cNvPr id="3" name="Date Placeholder 2"/>
-          <p:cNvSpPr>
-            <a:spLocks noGrp="1"/>
-          </p:cNvSpPr>
-          <p:nvPr>
-            <p:ph type="dt" idx="1"/>
-          </p:nvPr>
-        </p:nvSpPr>
-        <p:spPr>
-          <a:xfrm>
-            <a:off x="3884613" y="0"/>
-            <a:ext cx="2971800" cy="457200"/>
-          </a:xfrm>
-          <a:prstGeom prst="rect">
-            <a:avLst/>
-          </a:prstGeom>
-        </p:spPr>
-        <p:txBody>
-          <a:bodyPr vert="horz" lIns="91440" tIns="45720" rIns="91440" bIns="45720" rtlCol="0"/>
-          <a:lstStyle>
-            <a:lvl1pPr algn="r">
-              <a:defRPr sz="1200"/>
-            </a:lvl1pPr>
-          </a:lstStyle>
-          <a:p>
-            <a:fld id="{0F89C1C7-3DCD-1040-A9CF-14679D8B5DDD}" type="datetimeFigureOut">
-              <a:rPr lang="en-US" smtClean="0"/>
-              <a:t>10/17/16</a:t>
-            </a:fld>
-            <a:endParaRPr lang="en-US"/>
-          </a:p>
-        </p:txBody>
-      </p:sp>
-      <p:sp>
-        <p:nvSpPr>
-          <p:cNvPr id="4" name="Slide Image Placeholder 3"/>
-          <p:cNvSpPr>
-            <a:spLocks noGrp="1" noRot="1" noChangeAspect="1"/>
-          </p:cNvSpPr>
-          <p:nvPr>
-            <p:ph type="sldImg" idx="2"/>
-          </p:nvPr>
-        </p:nvSpPr>
-        <p:spPr>
-          <a:xfrm>
-            <a:off x="1143000" y="685800"/>
-            <a:ext cx="4572000" cy="3429000"/>
-          </a:xfrm>
-          <a:prstGeom prst="rect">
-            <a:avLst/>
-          </a:prstGeom>
-          <a:noFill/>
-          <a:ln w="12700">
-            <a:solidFill>
-              <a:prstClr val="black"/>
-            </a:solidFill>
-          </a:ln>
-        </p:spPr>
-        <p:txBody>
-          <a:bodyPr vert="horz" lIns="91440" tIns="45720" rIns="91440" bIns="45720" rtlCol="0" anchor="ctr"/>
-          <a:lstStyle/>
-          <a:p>
-            <a:endParaRPr lang="en-US"/>
-          </a:p>
-        </p:txBody>
-      </p:sp>
-      <p:sp>
-        <p:nvSpPr>
-          <p:cNvPr id="5" name="Notes Placeholder 4"/>
-          <p:cNvSpPr>
-            <a:spLocks noGrp="1"/>
-          </p:cNvSpPr>
-          <p:nvPr>
-            <p:ph type="body" sz="quarter" idx="3"/>
-          </p:nvPr>
-        </p:nvSpPr>
-        <p:spPr>
-          <a:xfrm>
-            <a:off x="685800" y="4343400"/>
-            <a:ext cx="5486400" cy="4114800"/>
-          </a:xfrm>
-          <a:prstGeom prst="rect">
-            <a:avLst/>
-          </a:prstGeom>
-        </p:spPr>
-        <p:txBody>
-          <a:bodyPr vert="horz" lIns="91440" tIns="45720" rIns="91440" bIns="45720" rtlCol="0"/>
-          <a:lstStyle/>
-          <a:p>
-            <a:pPr lvl="0"/>
-            <a:r>
-              <a:rPr lang="en-US" smtClean="0"/>
-              <a:t>Click to edit Master text styles</a:t>
-            </a:r>
-          </a:p>
-          <a:p>
-            <a:pPr lvl="1"/>
-            <a:r>
-              <a:rPr lang="en-US" smtClean="0"/>
-              <a:t>Second level</a:t>
-            </a:r>
-          </a:p>
-          <a:p>
-            <a:pPr lvl="2"/>
-            <a:r>
-              <a:rPr lang="en-US" smtClean="0"/>
-              <a:t>Third level</a:t>
-            </a:r>
-          </a:p>
-          <a:p>
-            <a:pPr lvl="3"/>
-            <a:r>
-              <a:rPr lang="en-US" smtClean="0"/>
-              <a:t>Fourth level</a:t>
-            </a:r>
-          </a:p>
-          <a:p>
-            <a:pPr lvl="4"/>
-            <a:r>
-              <a:rPr lang="en-US" smtClean="0"/>
-              <a:t>Fifth level</a:t>
-            </a:r>
-            <a:endParaRPr lang="en-US"/>
-          </a:p>
-        </p:txBody>
-      </p:sp>
-      <p:sp>
-        <p:nvSpPr>
-          <p:cNvPr id="6" name="Footer Placeholder 5"/>
-          <p:cNvSpPr>
-            <a:spLocks noGrp="1"/>
-          </p:cNvSpPr>
-          <p:nvPr>
-            <p:ph type="ftr" sz="quarter" idx="4"/>
-          </p:nvPr>
-        </p:nvSpPr>
-        <p:spPr>
-          <a:xfrm>
-            <a:off x="0" y="8685213"/>
-            <a:ext cx="2971800" cy="457200"/>
-          </a:xfrm>
-          <a:prstGeom prst="rect">
-            <a:avLst/>
-          </a:prstGeom>
-        </p:spPr>
-        <p:txBody>
-          <a:bodyPr vert="horz" lIns="91440" tIns="45720" rIns="91440" bIns="45720" rtlCol="0" anchor="b"/>
-          <a:lstStyle>
-            <a:lvl1pPr algn="l">
-              <a:defRPr sz="1200"/>
-            </a:lvl1pPr>
-          </a:lstStyle>
-          <a:p>
-            <a:endParaRPr lang="en-US"/>
-          </a:p>
-        </p:txBody>
-      </p:sp>
-      <p:sp>
-        <p:nvSpPr>
-          <p:cNvPr id="7" name="Slide Number Placeholder 6"/>
-          <p:cNvSpPr>
-            <a:spLocks noGrp="1"/>
-          </p:cNvSpPr>
-          <p:nvPr>
-            <p:ph type="sldNum" sz="quarter" idx="5"/>
-          </p:nvPr>
-        </p:nvSpPr>
-        <p:spPr>
-          <a:xfrm>
-            <a:off x="3884613" y="8685213"/>
-            <a:ext cx="2971800" cy="457200"/>
-          </a:xfrm>
-          <a:prstGeom prst="rect">
-            <a:avLst/>
-          </a:prstGeom>
-        </p:spPr>
-        <p:txBody>
-          <a:bodyPr vert="horz" lIns="91440" tIns="45720" rIns="91440" bIns="45720" rtlCol="0" anchor="b"/>
-          <a:lstStyle>
-            <a:lvl1pPr algn="r">
-              <a:defRPr sz="1200"/>
-            </a:lvl1pPr>
-          </a:lstStyle>
-          <a:p>
-            <a:fld id="{BB5E49A5-4136-284D-997B-48E1D791AD67}" type="slidenum">
-              <a:rPr lang="en-US" smtClean="0"/>
-              <a:t>‹#›</a:t>
-            </a:fld>
-            <a:endParaRPr lang="en-US"/>
-          </a:p>
-        </p:txBody>
-      </p:sp>
     </p:spTree>
     <p:extLst>
       <p:ext uri="{BB962C8B-B14F-4D97-AF65-F5344CB8AC3E}">
-        <p14:creationId xmlns:p14="http://schemas.microsoft.com/office/powerpoint/2010/main" val="2623252185"/>
+        <p14:creationId xmlns:p14="http://schemas.microsoft.com/office/powerpoint/2010/main" val="2687896798"/>
       </p:ext>
     </p:extLst>
   </p:cSld>
   <p:clrMap bg1="lt1" tx1="dk1" bg2="lt2" tx2="dk2" accent1="accent1" accent2="accent2" accent3="accent3" accent4="accent4" accent5="accent5" accent6="accent6" hlink="hlink" folHlink="folHlink"/>
   <p:notesStyle>
-    <a:lvl1pPr marL="0" algn="l" defTabSz="457200" rtl="0" eaLnBrk="1" latinLnBrk="0" hangingPunct="1">
+    <a:lvl1pPr marL="0" algn="l" defTabSz="914400" rtl="0" eaLnBrk="1" latinLnBrk="0" hangingPunct="1">
       <a:defRPr sz="1200" kern="1200">
         <a:solidFill>
           <a:schemeClr val="tx1"/>
@@ -392,7 +186,7 @@
         <a:cs typeface="+mn-cs"/>
       </a:defRPr>
     </a:lvl1pPr>
-    <a:lvl2pPr marL="457200" algn="l" defTabSz="457200" rtl="0" eaLnBrk="1" latinLnBrk="0" hangingPunct="1">
+    <a:lvl2pPr marL="457200" algn="l" defTabSz="914400" rtl="0" eaLnBrk="1" latinLnBrk="0" hangingPunct="1">
       <a:defRPr sz="1200" kern="1200">
         <a:solidFill>
           <a:schemeClr val="tx1"/>
@@ -402,7 +196,7 @@
         <a:cs typeface="+mn-cs"/>
       </a:defRPr>
     </a:lvl2pPr>
-    <a:lvl3pPr marL="914400" algn="l" defTabSz="457200" rtl="0" eaLnBrk="1" latinLnBrk="0" hangingPunct="1">
+    <a:lvl3pPr marL="914400" algn="l" defTabSz="914400" rtl="0" eaLnBrk="1" latinLnBrk="0" hangingPunct="1">
       <a:defRPr sz="1200" kern="1200">
         <a:solidFill>
           <a:schemeClr val="tx1"/>
@@ -412,7 +206,7 @@
         <a:cs typeface="+mn-cs"/>
       </a:defRPr>
     </a:lvl3pPr>
-    <a:lvl4pPr marL="1371600" algn="l" defTabSz="457200" rtl="0" eaLnBrk="1" latinLnBrk="0" hangingPunct="1">
+    <a:lvl4pPr marL="1371600" algn="l" defTabSz="914400" rtl="0" eaLnBrk="1" latinLnBrk="0" hangingPunct="1">
       <a:defRPr sz="1200" kern="1200">
         <a:solidFill>
           <a:schemeClr val="tx1"/>
@@ -422,7 +216,7 @@
         <a:cs typeface="+mn-cs"/>
       </a:defRPr>
     </a:lvl4pPr>
-    <a:lvl5pPr marL="1828800" algn="l" defTabSz="457200" rtl="0" eaLnBrk="1" latinLnBrk="0" hangingPunct="1">
+    <a:lvl5pPr marL="1828800" algn="l" defTabSz="914400" rtl="0" eaLnBrk="1" latinLnBrk="0" hangingPunct="1">
       <a:defRPr sz="1200" kern="1200">
         <a:solidFill>
           <a:schemeClr val="tx1"/>
@@ -432,7 +226,7 @@
         <a:cs typeface="+mn-cs"/>
       </a:defRPr>
     </a:lvl5pPr>
-    <a:lvl6pPr marL="2286000" algn="l" defTabSz="457200" rtl="0" eaLnBrk="1" latinLnBrk="0" hangingPunct="1">
+    <a:lvl6pPr marL="2286000" algn="l" defTabSz="914400" rtl="0" eaLnBrk="1" latinLnBrk="0" hangingPunct="1">
       <a:defRPr sz="1200" kern="1200">
         <a:solidFill>
           <a:schemeClr val="tx1"/>
@@ -442,7 +236,7 @@
         <a:cs typeface="+mn-cs"/>
       </a:defRPr>
     </a:lvl6pPr>
-    <a:lvl7pPr marL="2743200" algn="l" defTabSz="457200" rtl="0" eaLnBrk="1" latinLnBrk="0" hangingPunct="1">
+    <a:lvl7pPr marL="2743200" algn="l" defTabSz="914400" rtl="0" eaLnBrk="1" latinLnBrk="0" hangingPunct="1">
       <a:defRPr sz="1200" kern="1200">
         <a:solidFill>
           <a:schemeClr val="tx1"/>
@@ -452,7 +246,7 @@
         <a:cs typeface="+mn-cs"/>
       </a:defRPr>
     </a:lvl7pPr>
-    <a:lvl8pPr marL="3200400" algn="l" defTabSz="457200" rtl="0" eaLnBrk="1" latinLnBrk="0" hangingPunct="1">
+    <a:lvl8pPr marL="3200400" algn="l" defTabSz="914400" rtl="0" eaLnBrk="1" latinLnBrk="0" hangingPunct="1">
       <a:defRPr sz="1200" kern="1200">
         <a:solidFill>
           <a:schemeClr val="tx1"/>
@@ -462,7 +256,7 @@
         <a:cs typeface="+mn-cs"/>
       </a:defRPr>
     </a:lvl8pPr>
-    <a:lvl9pPr marL="3657600" algn="l" defTabSz="457200" rtl="0" eaLnBrk="1" latinLnBrk="0" hangingPunct="1">
+    <a:lvl9pPr marL="3657600" algn="l" defTabSz="914400" rtl="0" eaLnBrk="1" latinLnBrk="0" hangingPunct="1">
       <a:defRPr sz="1200" kern="1200">
         <a:solidFill>
           <a:schemeClr val="tx1"/>
@@ -477,7 +271,7 @@
 </file>
 
 <file path=ppt/notesSlides/notesSlide1.xml><?xml version="1.0" encoding="utf-8"?>
-<p:notes xmlns:a="http://schemas.openxmlformats.org/drawingml/2006/main" xmlns:p="http://schemas.openxmlformats.org/presentationml/2006/main" xmlns:r="http://schemas.openxmlformats.org/officeDocument/2006/relationships">
+<p:notes xmlns:a="http://schemas.openxmlformats.org/drawingml/2006/main" xmlns:r="http://schemas.openxmlformats.org/officeDocument/2006/relationships" xmlns:p="http://schemas.openxmlformats.org/presentationml/2006/main">
   <p:cSld>
     <p:spTree>
       <p:nvGrpSpPr>
@@ -497,7 +291,7 @@
         <p:nvSpPr>
           <p:cNvPr id="2" name="Slide Image Placeholder 1"/>
           <p:cNvSpPr>
-            <a:spLocks noGrp="1"/>
+            <a:spLocks noGrp="1" noRot="1" noChangeAspect="1"/>
           </p:cNvSpPr>
           <p:nvPr>
             <p:ph type="sldImg" idx="2"/>
@@ -512,7 +306,7 @@
             <a:spLocks noGrp="1"/>
           </p:cNvSpPr>
           <p:nvPr>
-            <p:ph type="body" idx="3" sz="quarter"/>
+            <p:ph type="body" sz="quarter" idx="3"/>
           </p:nvPr>
         </p:nvSpPr>
         <p:spPr/>
@@ -533,7 +327,7 @@
             <a:spLocks noGrp="1"/>
           </p:cNvSpPr>
           <p:nvPr>
-            <p:ph type="sldNum" idx="5" sz="quarter"/>
+            <p:ph type="sldNum" sz="quarter" idx="5"/>
           </p:nvPr>
         </p:nvSpPr>
         <p:spPr/>
@@ -547,7 +341,7 @@
 </file>
 
 <file path=ppt/notesSlides/notesSlide10.xml><?xml version="1.0" encoding="utf-8"?>
-<p:notes xmlns:a="http://schemas.openxmlformats.org/drawingml/2006/main" xmlns:p="http://schemas.openxmlformats.org/presentationml/2006/main" xmlns:r="http://schemas.openxmlformats.org/officeDocument/2006/relationships">
+<p:notes xmlns:a="http://schemas.openxmlformats.org/drawingml/2006/main" xmlns:r="http://schemas.openxmlformats.org/officeDocument/2006/relationships" xmlns:p="http://schemas.openxmlformats.org/presentationml/2006/main">
   <p:cSld>
     <p:spTree>
       <p:nvGrpSpPr>
@@ -567,7 +361,7 @@
         <p:nvSpPr>
           <p:cNvPr id="2" name="Slide Image Placeholder 1"/>
           <p:cNvSpPr>
-            <a:spLocks noGrp="1"/>
+            <a:spLocks noGrp="1" noRot="1" noChangeAspect="1"/>
           </p:cNvSpPr>
           <p:nvPr>
             <p:ph type="sldImg" idx="2"/>
@@ -582,7 +376,7 @@
             <a:spLocks noGrp="1"/>
           </p:cNvSpPr>
           <p:nvPr>
-            <p:ph type="body" idx="3" sz="quarter"/>
+            <p:ph type="body" sz="quarter" idx="3"/>
           </p:nvPr>
         </p:nvSpPr>
         <p:spPr/>
@@ -603,7 +397,7 @@
             <a:spLocks noGrp="1"/>
           </p:cNvSpPr>
           <p:nvPr>
-            <p:ph type="sldNum" idx="5" sz="quarter"/>
+            <p:ph type="sldNum" sz="quarter" idx="5"/>
           </p:nvPr>
         </p:nvSpPr>
         <p:spPr/>
@@ -617,7 +411,7 @@
 </file>
 
 <file path=ppt/notesSlides/notesSlide11.xml><?xml version="1.0" encoding="utf-8"?>
-<p:notes xmlns:a="http://schemas.openxmlformats.org/drawingml/2006/main" xmlns:p="http://schemas.openxmlformats.org/presentationml/2006/main" xmlns:r="http://schemas.openxmlformats.org/officeDocument/2006/relationships">
+<p:notes xmlns:a="http://schemas.openxmlformats.org/drawingml/2006/main" xmlns:r="http://schemas.openxmlformats.org/officeDocument/2006/relationships" xmlns:p="http://schemas.openxmlformats.org/presentationml/2006/main">
   <p:cSld>
     <p:spTree>
       <p:nvGrpSpPr>
@@ -637,7 +431,7 @@
         <p:nvSpPr>
           <p:cNvPr id="2" name="Slide Image Placeholder 1"/>
           <p:cNvSpPr>
-            <a:spLocks noGrp="1"/>
+            <a:spLocks noGrp="1" noRot="1" noChangeAspect="1"/>
           </p:cNvSpPr>
           <p:nvPr>
             <p:ph type="sldImg" idx="2"/>
@@ -652,7 +446,7 @@
             <a:spLocks noGrp="1"/>
           </p:cNvSpPr>
           <p:nvPr>
-            <p:ph type="body" idx="3" sz="quarter"/>
+            <p:ph type="body" sz="quarter" idx="3"/>
           </p:nvPr>
         </p:nvSpPr>
         <p:spPr/>
@@ -664,7 +458,9 @@
               <a:t>[Let the slide breathe. A beat of silence before you speak.]</a:t>
             </a:r>
           </a:p>
-          <a:p/>
+          <a:p>
+            <a:endParaRPr/>
+          </a:p>
           <a:p>
             <a:r>
               <a:t>What if the twin could think? A digital twin that doesn't just mirror a system — it reasons about it. It plans. It acts. Not replacing the engineer. Giving the engineer a partner that never sleeps and never loses context.</a:t>
@@ -679,7 +475,7 @@
             <a:spLocks noGrp="1"/>
           </p:cNvSpPr>
           <p:nvPr>
-            <p:ph type="sldNum" idx="5" sz="quarter"/>
+            <p:ph type="sldNum" sz="quarter" idx="5"/>
           </p:nvPr>
         </p:nvSpPr>
         <p:spPr/>
@@ -693,7 +489,7 @@
 </file>
 
 <file path=ppt/notesSlides/notesSlide12.xml><?xml version="1.0" encoding="utf-8"?>
-<p:notes xmlns:a="http://schemas.openxmlformats.org/drawingml/2006/main" xmlns:p="http://schemas.openxmlformats.org/presentationml/2006/main" xmlns:r="http://schemas.openxmlformats.org/officeDocument/2006/relationships">
+<p:notes xmlns:a="http://schemas.openxmlformats.org/drawingml/2006/main" xmlns:r="http://schemas.openxmlformats.org/officeDocument/2006/relationships" xmlns:p="http://schemas.openxmlformats.org/presentationml/2006/main">
   <p:cSld>
     <p:spTree>
       <p:nvGrpSpPr>
@@ -713,7 +509,7 @@
         <p:nvSpPr>
           <p:cNvPr id="2" name="Slide Image Placeholder 1"/>
           <p:cNvSpPr>
-            <a:spLocks noGrp="1"/>
+            <a:spLocks noGrp="1" noRot="1" noChangeAspect="1"/>
           </p:cNvSpPr>
           <p:nvPr>
             <p:ph type="sldImg" idx="2"/>
@@ -728,7 +524,7 @@
             <a:spLocks noGrp="1"/>
           </p:cNvSpPr>
           <p:nvPr>
-            <p:ph type="body" idx="3" sz="quarter"/>
+            <p:ph type="body" sz="quarter" idx="3"/>
           </p:nvPr>
         </p:nvSpPr>
         <p:spPr/>
@@ -740,7 +536,9 @@
               <a:t>It's a control loop — something every engineer in this room already thinks in. Perceive — ingest data. Reason — identify what's happening and why. Plan — build a response. Act — execute through connected systems. Reflect — evaluate the outcome.</a:t>
             </a:r>
           </a:p>
-          <a:p/>
+          <a:p>
+            <a:endParaRPr/>
+          </a:p>
           <a:p>
             <a:r>
               <a:t>Remember that engineer at 2 AM? An agentic twin wouldn't have just detected the drift. It would have pulled historical patterns, identified the failing element, and scheduled the repair. Minutes, not hours.</a:t>
@@ -755,7 +553,7 @@
             <a:spLocks noGrp="1"/>
           </p:cNvSpPr>
           <p:nvPr>
-            <p:ph type="sldNum" idx="5" sz="quarter"/>
+            <p:ph type="sldNum" sz="quarter" idx="5"/>
           </p:nvPr>
         </p:nvSpPr>
         <p:spPr/>
@@ -769,7 +567,7 @@
 </file>
 
 <file path=ppt/notesSlides/notesSlide13.xml><?xml version="1.0" encoding="utf-8"?>
-<p:notes xmlns:a="http://schemas.openxmlformats.org/drawingml/2006/main" xmlns:p="http://schemas.openxmlformats.org/presentationml/2006/main" xmlns:r="http://schemas.openxmlformats.org/officeDocument/2006/relationships">
+<p:notes xmlns:a="http://schemas.openxmlformats.org/drawingml/2006/main" xmlns:r="http://schemas.openxmlformats.org/officeDocument/2006/relationships" xmlns:p="http://schemas.openxmlformats.org/presentationml/2006/main">
   <p:cSld>
     <p:spTree>
       <p:nvGrpSpPr>
@@ -789,7 +587,7 @@
         <p:nvSpPr>
           <p:cNvPr id="2" name="Slide Image Placeholder 1"/>
           <p:cNvSpPr>
-            <a:spLocks noGrp="1"/>
+            <a:spLocks noGrp="1" noRot="1" noChangeAspect="1"/>
           </p:cNvSpPr>
           <p:nvPr>
             <p:ph type="sldImg" idx="2"/>
@@ -804,7 +602,7 @@
             <a:spLocks noGrp="1"/>
           </p:cNvSpPr>
           <p:nvPr>
-            <p:ph type="body" idx="3" sz="quarter"/>
+            <p:ph type="body" sz="quarter" idx="3"/>
           </p:nvPr>
         </p:nvSpPr>
         <p:spPr/>
@@ -816,7 +614,9 @@
               <a:t>Architecturally, it's simpler than you'd think. Physical system at the bottom. Digital twin in the middle. And on top, a new cognitive layer — the reasoning and decision-making.</a:t>
             </a:r>
           </a:p>
-          <a:p/>
+          <a:p>
+            <a:endParaRPr/>
+          </a:p>
           <a:p>
             <a:r>
               <a:t>Two of those three layers? You already have them. The whole idea is one new layer on top of what you've already invested in.</a:t>
@@ -831,7 +631,7 @@
             <a:spLocks noGrp="1"/>
           </p:cNvSpPr>
           <p:nvPr>
-            <p:ph type="sldNum" idx="5" sz="quarter"/>
+            <p:ph type="sldNum" sz="quarter" idx="5"/>
           </p:nvPr>
         </p:nvSpPr>
         <p:spPr/>
@@ -845,7 +645,7 @@
 </file>
 
 <file path=ppt/notesSlides/notesSlide14.xml><?xml version="1.0" encoding="utf-8"?>
-<p:notes xmlns:a="http://schemas.openxmlformats.org/drawingml/2006/main" xmlns:p="http://schemas.openxmlformats.org/presentationml/2006/main" xmlns:r="http://schemas.openxmlformats.org/officeDocument/2006/relationships">
+<p:notes xmlns:a="http://schemas.openxmlformats.org/drawingml/2006/main" xmlns:r="http://schemas.openxmlformats.org/officeDocument/2006/relationships" xmlns:p="http://schemas.openxmlformats.org/presentationml/2006/main">
   <p:cSld>
     <p:spTree>
       <p:nvGrpSpPr>
@@ -865,7 +665,7 @@
         <p:nvSpPr>
           <p:cNvPr id="2" name="Slide Image Placeholder 1"/>
           <p:cNvSpPr>
-            <a:spLocks noGrp="1"/>
+            <a:spLocks noGrp="1" noRot="1" noChangeAspect="1"/>
           </p:cNvSpPr>
           <p:nvPr>
             <p:ph type="sldImg" idx="2"/>
@@ -880,7 +680,7 @@
             <a:spLocks noGrp="1"/>
           </p:cNvSpPr>
           <p:nvPr>
-            <p:ph type="body" idx="3" sz="quarter"/>
+            <p:ph type="body" sz="quarter" idx="3"/>
           </p:nvPr>
         </p:nvSpPr>
         <p:spPr/>
@@ -892,7 +692,9 @@
               <a:t>IBM published a paper at AAAI 2025 on agentic digital twins for shipping fleet management. XMPro has a multi-agent system in production — reporting 30–40% reductions in unplanned downtime. And Nature Computational Science published a formal evolutionary framework this year.</a:t>
             </a:r>
           </a:p>
-          <a:p/>
+          <a:p>
+            <a:endParaRPr/>
+          </a:p>
           <a:p>
             <a:r>
               <a:t>This went from idea to research to production faster than most people realize.</a:t>
@@ -907,7 +709,7 @@
             <a:spLocks noGrp="1"/>
           </p:cNvSpPr>
           <p:nvPr>
-            <p:ph type="sldNum" idx="5" sz="quarter"/>
+            <p:ph type="sldNum" sz="quarter" idx="5"/>
           </p:nvPr>
         </p:nvSpPr>
         <p:spPr/>
@@ -921,7 +723,7 @@
 </file>
 
 <file path=ppt/notesSlides/notesSlide15.xml><?xml version="1.0" encoding="utf-8"?>
-<p:notes xmlns:a="http://schemas.openxmlformats.org/drawingml/2006/main" xmlns:p="http://schemas.openxmlformats.org/presentationml/2006/main" xmlns:r="http://schemas.openxmlformats.org/officeDocument/2006/relationships">
+<p:notes xmlns:a="http://schemas.openxmlformats.org/drawingml/2006/main" xmlns:r="http://schemas.openxmlformats.org/officeDocument/2006/relationships" xmlns:p="http://schemas.openxmlformats.org/presentationml/2006/main">
   <p:cSld>
     <p:spTree>
       <p:nvGrpSpPr>
@@ -941,7 +743,7 @@
         <p:nvSpPr>
           <p:cNvPr id="2" name="Slide Image Placeholder 1"/>
           <p:cNvSpPr>
-            <a:spLocks noGrp="1"/>
+            <a:spLocks noGrp="1" noRot="1" noChangeAspect="1"/>
           </p:cNvSpPr>
           <p:nvPr>
             <p:ph type="sldImg" idx="2"/>
@@ -956,7 +758,7 @@
             <a:spLocks noGrp="1"/>
           </p:cNvSpPr>
           <p:nvPr>
-            <p:ph type="body" idx="3" sz="quarter"/>
+            <p:ph type="body" sz="quarter" idx="3"/>
           </p:nvPr>
         </p:nvSpPr>
         <p:spPr/>
@@ -968,7 +770,9 @@
               <a:t>The architecture that's emerging isn't one giant AI doing everything. It's specialized agents working together. A monitor that detects. An analyst that finds root causes. A planner that schedules the response. They collaborate — and critically — they check each other's work. The agent that proposes is never the one that approves.</a:t>
             </a:r>
           </a:p>
-          <a:p/>
+          <a:p>
+            <a:endParaRPr/>
+          </a:p>
           <a:p>
             <a:r>
               <a:t>If that sounds like how a good engineering team works — it is.</a:t>
@@ -983,7 +787,7 @@
             <a:spLocks noGrp="1"/>
           </p:cNvSpPr>
           <p:nvPr>
-            <p:ph type="sldNum" idx="5" sz="quarter"/>
+            <p:ph type="sldNum" sz="quarter" idx="5"/>
           </p:nvPr>
         </p:nvSpPr>
         <p:spPr/>
@@ -997,7 +801,7 @@
 </file>
 
 <file path=ppt/notesSlides/notesSlide16.xml><?xml version="1.0" encoding="utf-8"?>
-<p:notes xmlns:a="http://schemas.openxmlformats.org/drawingml/2006/main" xmlns:p="http://schemas.openxmlformats.org/presentationml/2006/main" xmlns:r="http://schemas.openxmlformats.org/officeDocument/2006/relationships">
+<p:notes xmlns:a="http://schemas.openxmlformats.org/drawingml/2006/main" xmlns:r="http://schemas.openxmlformats.org/officeDocument/2006/relationships" xmlns:p="http://schemas.openxmlformats.org/presentationml/2006/main">
   <p:cSld>
     <p:spTree>
       <p:nvGrpSpPr>
@@ -1017,7 +821,7 @@
         <p:nvSpPr>
           <p:cNvPr id="2" name="Slide Image Placeholder 1"/>
           <p:cNvSpPr>
-            <a:spLocks noGrp="1"/>
+            <a:spLocks noGrp="1" noRot="1" noChangeAspect="1"/>
           </p:cNvSpPr>
           <p:nvPr>
             <p:ph type="sldImg" idx="2"/>
@@ -1032,7 +836,7 @@
             <a:spLocks noGrp="1"/>
           </p:cNvSpPr>
           <p:nvPr>
-            <p:ph type="body" idx="3" sz="quarter"/>
+            <p:ph type="body" sz="quarter" idx="3"/>
           </p:nvPr>
         </p:nvSpPr>
         <p:spPr/>
@@ -1044,7 +848,9 @@
               <a:t>This isn't a solution for one industry. The same pattern applies everywhere. Edge AI device drifts? The twin diagnoses and retrains. Robotic arm shows bearing wear? The twin predicts and schedules maintenance. ADAS sensor gets conflicting data? The twin runs safety checks and adapts.</a:t>
             </a:r>
           </a:p>
-          <a:p/>
+          <a:p>
+            <a:endParaRPr/>
+          </a:p>
           <a:p>
             <a:r>
               <a:t>Different worlds. Same idea. That's how you know it's real.</a:t>
@@ -1059,7 +865,7 @@
             <a:spLocks noGrp="1"/>
           </p:cNvSpPr>
           <p:nvPr>
-            <p:ph type="sldNum" idx="5" sz="quarter"/>
+            <p:ph type="sldNum" sz="quarter" idx="5"/>
           </p:nvPr>
         </p:nvSpPr>
         <p:spPr/>
@@ -1073,7 +879,7 @@
 </file>
 
 <file path=ppt/notesSlides/notesSlide17.xml><?xml version="1.0" encoding="utf-8"?>
-<p:notes xmlns:a="http://schemas.openxmlformats.org/drawingml/2006/main" xmlns:p="http://schemas.openxmlformats.org/presentationml/2006/main" xmlns:r="http://schemas.openxmlformats.org/officeDocument/2006/relationships">
+<p:notes xmlns:a="http://schemas.openxmlformats.org/drawingml/2006/main" xmlns:r="http://schemas.openxmlformats.org/officeDocument/2006/relationships" xmlns:p="http://schemas.openxmlformats.org/presentationml/2006/main">
   <p:cSld>
     <p:spTree>
       <p:nvGrpSpPr>
@@ -1093,7 +899,7 @@
         <p:nvSpPr>
           <p:cNvPr id="2" name="Slide Image Placeholder 1"/>
           <p:cNvSpPr>
-            <a:spLocks noGrp="1"/>
+            <a:spLocks noGrp="1" noRot="1" noChangeAspect="1"/>
           </p:cNvSpPr>
           <p:nvPr>
             <p:ph type="sldImg" idx="2"/>
@@ -1108,7 +914,7 @@
             <a:spLocks noGrp="1"/>
           </p:cNvSpPr>
           <p:nvPr>
-            <p:ph type="body" idx="3" sz="quarter"/>
+            <p:ph type="body" sz="quarter" idx="3"/>
           </p:nvPr>
         </p:nvSpPr>
         <p:spPr/>
@@ -1120,7 +926,9 @@
               <a:t>When an agent makes a bad decision, who owns it? Can you trace why it made that call? These systems create attack surfaces we haven't fully mapped. And governance frameworks weren't built for tools that act on their own.</a:t>
             </a:r>
           </a:p>
-          <a:p/>
+          <a:p>
+            <a:endParaRPr/>
+          </a:p>
           <a:p>
             <a:r>
               <a:t>These are solvable problems. But they're real.</a:t>
@@ -1135,7 +943,7 @@
             <a:spLocks noGrp="1"/>
           </p:cNvSpPr>
           <p:nvPr>
-            <p:ph type="sldNum" idx="5" sz="quarter"/>
+            <p:ph type="sldNum" sz="quarter" idx="5"/>
           </p:nvPr>
         </p:nvSpPr>
         <p:spPr/>
@@ -1149,7 +957,7 @@
 </file>
 
 <file path=ppt/notesSlides/notesSlide18.xml><?xml version="1.0" encoding="utf-8"?>
-<p:notes xmlns:a="http://schemas.openxmlformats.org/drawingml/2006/main" xmlns:p="http://schemas.openxmlformats.org/presentationml/2006/main" xmlns:r="http://schemas.openxmlformats.org/officeDocument/2006/relationships">
+<p:notes xmlns:a="http://schemas.openxmlformats.org/drawingml/2006/main" xmlns:r="http://schemas.openxmlformats.org/officeDocument/2006/relationships" xmlns:p="http://schemas.openxmlformats.org/presentationml/2006/main">
   <p:cSld>
     <p:spTree>
       <p:nvGrpSpPr>
@@ -1169,7 +977,7 @@
         <p:nvSpPr>
           <p:cNvPr id="2" name="Slide Image Placeholder 1"/>
           <p:cNvSpPr>
-            <a:spLocks noGrp="1"/>
+            <a:spLocks noGrp="1" noRot="1" noChangeAspect="1"/>
           </p:cNvSpPr>
           <p:nvPr>
             <p:ph type="sldImg" idx="2"/>
@@ -1184,7 +992,7 @@
             <a:spLocks noGrp="1"/>
           </p:cNvSpPr>
           <p:nvPr>
-            <p:ph type="body" idx="3" sz="quarter"/>
+            <p:ph type="body" sz="quarter" idx="3"/>
           </p:nvPr>
         </p:nvSpPr>
         <p:spPr/>
@@ -1196,13 +1004,17 @@
               <a:t>I built something. Scan the QR code — you can talk to an agentic digital twin right now. Three of them: edge AI, robotic arm, ADAS. Ask what's wrong. Inject issues. Watch it reason.</a:t>
             </a:r>
           </a:p>
-          <a:p/>
+          <a:p>
+            <a:endParaRPr/>
+          </a:p>
           <a:p>
             <a:r>
               <a:t>[Give them 10–15 seconds to scan.]</a:t>
             </a:r>
           </a:p>
-          <a:p/>
+          <a:p>
+            <a:endParaRPr/>
+          </a:p>
           <a:p>
             <a:r>
               <a:t>The URL is at the bottom if you'd rather type. It'll be live after the talk too — no rush.</a:t>
@@ -1217,7 +1029,7 @@
             <a:spLocks noGrp="1"/>
           </p:cNvSpPr>
           <p:nvPr>
-            <p:ph type="sldNum" idx="5" sz="quarter"/>
+            <p:ph type="sldNum" sz="quarter" idx="5"/>
           </p:nvPr>
         </p:nvSpPr>
         <p:spPr/>
@@ -1231,7 +1043,7 @@
 </file>
 
 <file path=ppt/notesSlides/notesSlide19.xml><?xml version="1.0" encoding="utf-8"?>
-<p:notes xmlns:a="http://schemas.openxmlformats.org/drawingml/2006/main" xmlns:p="http://schemas.openxmlformats.org/presentationml/2006/main" xmlns:r="http://schemas.openxmlformats.org/officeDocument/2006/relationships">
+<p:notes xmlns:a="http://schemas.openxmlformats.org/drawingml/2006/main" xmlns:r="http://schemas.openxmlformats.org/officeDocument/2006/relationships" xmlns:p="http://schemas.openxmlformats.org/presentationml/2006/main">
   <p:cSld>
     <p:spTree>
       <p:nvGrpSpPr>
@@ -1251,7 +1063,7 @@
         <p:nvSpPr>
           <p:cNvPr id="2" name="Slide Image Placeholder 1"/>
           <p:cNvSpPr>
-            <a:spLocks noGrp="1"/>
+            <a:spLocks noGrp="1" noRot="1" noChangeAspect="1"/>
           </p:cNvSpPr>
           <p:nvPr>
             <p:ph type="sldImg" idx="2"/>
@@ -1266,7 +1078,7 @@
             <a:spLocks noGrp="1"/>
           </p:cNvSpPr>
           <p:nvPr>
-            <p:ph type="body" idx="3" sz="quarter"/>
+            <p:ph type="body" sz="quarter" idx="3"/>
           </p:nvPr>
         </p:nvSpPr>
         <p:spPr/>
@@ -1278,13 +1090,17 @@
               <a:t>Digital twins already have the data and models. Agentic AI gives them the ability to act on it. That's it. That's the whole idea. One new layer.</a:t>
             </a:r>
           </a:p>
-          <a:p/>
+          <a:p>
+            <a:endParaRPr/>
+          </a:p>
           <a:p>
             <a:r>
               <a:t>Thank you. Come find me or scan the QR for my site.</a:t>
             </a:r>
           </a:p>
-          <a:p/>
+          <a:p>
+            <a:endParaRPr/>
+          </a:p>
           <a:p>
             <a:r>
               <a:t>[This slide stays up during Q&amp;A — contact info and QR visible.]</a:t>
@@ -1299,7 +1115,7 @@
             <a:spLocks noGrp="1"/>
           </p:cNvSpPr>
           <p:nvPr>
-            <p:ph type="sldNum" idx="5" sz="quarter"/>
+            <p:ph type="sldNum" sz="quarter" idx="5"/>
           </p:nvPr>
         </p:nvSpPr>
         <p:spPr/>
@@ -1313,7 +1129,7 @@
 </file>
 
 <file path=ppt/notesSlides/notesSlide2.xml><?xml version="1.0" encoding="utf-8"?>
-<p:notes xmlns:a="http://schemas.openxmlformats.org/drawingml/2006/main" xmlns:p="http://schemas.openxmlformats.org/presentationml/2006/main" xmlns:r="http://schemas.openxmlformats.org/officeDocument/2006/relationships">
+<p:notes xmlns:a="http://schemas.openxmlformats.org/drawingml/2006/main" xmlns:r="http://schemas.openxmlformats.org/officeDocument/2006/relationships" xmlns:p="http://schemas.openxmlformats.org/presentationml/2006/main">
   <p:cSld>
     <p:spTree>
       <p:nvGrpSpPr>
@@ -1333,7 +1149,7 @@
         <p:nvSpPr>
           <p:cNvPr id="2" name="Slide Image Placeholder 1"/>
           <p:cNvSpPr>
-            <a:spLocks noGrp="1"/>
+            <a:spLocks noGrp="1" noRot="1" noChangeAspect="1"/>
           </p:cNvSpPr>
           <p:nvPr>
             <p:ph type="sldImg" idx="2"/>
@@ -1348,7 +1164,7 @@
             <a:spLocks noGrp="1"/>
           </p:cNvSpPr>
           <p:nvPr>
-            <p:ph type="body" idx="3" sz="quarter"/>
+            <p:ph type="body" sz="quarter" idx="3"/>
           </p:nvPr>
         </p:nvSpPr>
         <p:spPr/>
@@ -1369,7 +1185,7 @@
             <a:spLocks noGrp="1"/>
           </p:cNvSpPr>
           <p:nvPr>
-            <p:ph type="sldNum" idx="5" sz="quarter"/>
+            <p:ph type="sldNum" sz="quarter" idx="5"/>
           </p:nvPr>
         </p:nvSpPr>
         <p:spPr/>
@@ -1383,7 +1199,7 @@
 </file>
 
 <file path=ppt/notesSlides/notesSlide20.xml><?xml version="1.0" encoding="utf-8"?>
-<p:notes xmlns:a="http://schemas.openxmlformats.org/drawingml/2006/main" xmlns:p="http://schemas.openxmlformats.org/presentationml/2006/main" xmlns:r="http://schemas.openxmlformats.org/officeDocument/2006/relationships">
+<p:notes xmlns:a="http://schemas.openxmlformats.org/drawingml/2006/main" xmlns:r="http://schemas.openxmlformats.org/officeDocument/2006/relationships" xmlns:p="http://schemas.openxmlformats.org/presentationml/2006/main">
   <p:cSld>
     <p:spTree>
       <p:nvGrpSpPr>
@@ -1403,7 +1219,7 @@
         <p:nvSpPr>
           <p:cNvPr id="2" name="Slide Image Placeholder 1"/>
           <p:cNvSpPr>
-            <a:spLocks noGrp="1"/>
+            <a:spLocks noGrp="1" noRot="1" noChangeAspect="1"/>
           </p:cNvSpPr>
           <p:nvPr>
             <p:ph type="sldImg" idx="2"/>
@@ -1418,7 +1234,7 @@
             <a:spLocks noGrp="1"/>
           </p:cNvSpPr>
           <p:nvPr>
-            <p:ph type="body" idx="3" sz="quarter"/>
+            <p:ph type="body" sz="quarter" idx="3"/>
           </p:nvPr>
         </p:nvSpPr>
         <p:spPr/>
@@ -1427,12 +1243,16 @@
           <a:lstStyle/>
           <a:p>
             <a:r>
+              <a:rPr dirty="0"/>
               <a:t>[Click to this after Q&amp;A wraps, as your final word.]</a:t>
             </a:r>
           </a:p>
-          <a:p/>
-          <a:p>
-            <a:r>
+          <a:p>
+            <a:endParaRPr dirty="0"/>
+          </a:p>
+          <a:p>
+            <a:r>
+              <a:rPr dirty="0"/>
               <a:t>Thanks everyone.</a:t>
             </a:r>
           </a:p>
@@ -1445,7 +1265,7 @@
             <a:spLocks noGrp="1"/>
           </p:cNvSpPr>
           <p:nvPr>
-            <p:ph type="sldNum" idx="5" sz="quarter"/>
+            <p:ph type="sldNum" sz="quarter" idx="5"/>
           </p:nvPr>
         </p:nvSpPr>
         <p:spPr/>
@@ -1459,7 +1279,7 @@
 </file>
 
 <file path=ppt/notesSlides/notesSlide3.xml><?xml version="1.0" encoding="utf-8"?>
-<p:notes xmlns:a="http://schemas.openxmlformats.org/drawingml/2006/main" xmlns:p="http://schemas.openxmlformats.org/presentationml/2006/main" xmlns:r="http://schemas.openxmlformats.org/officeDocument/2006/relationships">
+<p:notes xmlns:a="http://schemas.openxmlformats.org/drawingml/2006/main" xmlns:r="http://schemas.openxmlformats.org/officeDocument/2006/relationships" xmlns:p="http://schemas.openxmlformats.org/presentationml/2006/main">
   <p:cSld>
     <p:spTree>
       <p:nvGrpSpPr>
@@ -1479,7 +1299,7 @@
         <p:nvSpPr>
           <p:cNvPr id="2" name="Slide Image Placeholder 1"/>
           <p:cNvSpPr>
-            <a:spLocks noGrp="1"/>
+            <a:spLocks noGrp="1" noRot="1" noChangeAspect="1"/>
           </p:cNvSpPr>
           <p:nvPr>
             <p:ph type="sldImg" idx="2"/>
@@ -1494,7 +1314,7 @@
             <a:spLocks noGrp="1"/>
           </p:cNvSpPr>
           <p:nvPr>
-            <p:ph type="body" idx="3" sz="quarter"/>
+            <p:ph type="body" sz="quarter" idx="3"/>
           </p:nvPr>
         </p:nvSpPr>
         <p:spPr/>
@@ -1515,7 +1335,7 @@
             <a:spLocks noGrp="1"/>
           </p:cNvSpPr>
           <p:nvPr>
-            <p:ph type="sldNum" idx="5" sz="quarter"/>
+            <p:ph type="sldNum" sz="quarter" idx="5"/>
           </p:nvPr>
         </p:nvSpPr>
         <p:spPr/>
@@ -1529,7 +1349,7 @@
 </file>
 
 <file path=ppt/notesSlides/notesSlide4.xml><?xml version="1.0" encoding="utf-8"?>
-<p:notes xmlns:a="http://schemas.openxmlformats.org/drawingml/2006/main" xmlns:p="http://schemas.openxmlformats.org/presentationml/2006/main" xmlns:r="http://schemas.openxmlformats.org/officeDocument/2006/relationships">
+<p:notes xmlns:a="http://schemas.openxmlformats.org/drawingml/2006/main" xmlns:r="http://schemas.openxmlformats.org/officeDocument/2006/relationships" xmlns:p="http://schemas.openxmlformats.org/presentationml/2006/main">
   <p:cSld>
     <p:spTree>
       <p:nvGrpSpPr>
@@ -1549,7 +1369,7 @@
         <p:nvSpPr>
           <p:cNvPr id="2" name="Slide Image Placeholder 1"/>
           <p:cNvSpPr>
-            <a:spLocks noGrp="1"/>
+            <a:spLocks noGrp="1" noRot="1" noChangeAspect="1"/>
           </p:cNvSpPr>
           <p:nvPr>
             <p:ph type="sldImg" idx="2"/>
@@ -1564,7 +1384,7 @@
             <a:spLocks noGrp="1"/>
           </p:cNvSpPr>
           <p:nvPr>
-            <p:ph type="body" idx="3" sz="quarter"/>
+            <p:ph type="body" sz="quarter" idx="3"/>
           </p:nvPr>
         </p:nvSpPr>
         <p:spPr/>
@@ -1573,6 +1393,7 @@
           <a:lstStyle/>
           <a:p>
             <a:r>
+              <a:rPr dirty="0"/>
               <a:t>In automotive manufacturing, unplanned downtime costs $22,000 a minute. In semiconductor fabs it can hit $5 million an hour. And at the electric grid level, U.S. power outages cost $121 billion last year alone. Here's the real problem: these systems are generating more data every minute than teams can act on in a week.</a:t>
             </a:r>
           </a:p>
@@ -1585,7 +1406,7 @@
             <a:spLocks noGrp="1"/>
           </p:cNvSpPr>
           <p:nvPr>
-            <p:ph type="sldNum" idx="5" sz="quarter"/>
+            <p:ph type="sldNum" sz="quarter" idx="5"/>
           </p:nvPr>
         </p:nvSpPr>
         <p:spPr/>
@@ -1599,7 +1420,7 @@
 </file>
 
 <file path=ppt/notesSlides/notesSlide5.xml><?xml version="1.0" encoding="utf-8"?>
-<p:notes xmlns:a="http://schemas.openxmlformats.org/drawingml/2006/main" xmlns:p="http://schemas.openxmlformats.org/presentationml/2006/main" xmlns:r="http://schemas.openxmlformats.org/officeDocument/2006/relationships">
+<p:notes xmlns:a="http://schemas.openxmlformats.org/drawingml/2006/main" xmlns:r="http://schemas.openxmlformats.org/officeDocument/2006/relationships" xmlns:p="http://schemas.openxmlformats.org/presentationml/2006/main">
   <p:cSld>
     <p:spTree>
       <p:nvGrpSpPr>
@@ -1619,7 +1440,7 @@
         <p:nvSpPr>
           <p:cNvPr id="2" name="Slide Image Placeholder 1"/>
           <p:cNvSpPr>
-            <a:spLocks noGrp="1"/>
+            <a:spLocks noGrp="1" noRot="1" noChangeAspect="1"/>
           </p:cNvSpPr>
           <p:nvPr>
             <p:ph type="sldImg" idx="2"/>
@@ -1634,7 +1455,7 @@
             <a:spLocks noGrp="1"/>
           </p:cNvSpPr>
           <p:nvPr>
-            <p:ph type="body" idx="3" sz="quarter"/>
+            <p:ph type="body" sz="quarter" idx="3"/>
           </p:nvPr>
         </p:nvSpPr>
         <p:spPr/>
@@ -1646,13 +1467,17 @@
               <a:t>[BUILD ANIMATION — click through generations one at a time.]</a:t>
             </a:r>
           </a:p>
-          <a:p/>
+          <a:p>
+            <a:endParaRPr/>
+          </a:p>
           <a:p>
             <a:r>
               <a:t>Digital twins have been evolving. Gen 1 was static — a 3D model, a schematic. Gen 2 was reactive — something went wrong, here's an alert. Gen 3 — where a lot of you are or are heading — is predictive.</a:t>
             </a:r>
           </a:p>
-          <a:p/>
+          <a:p>
+            <a:endParaRPr/>
+          </a:p>
           <a:p>
             <a:r>
               <a:t>But notice — every generation gets smarter about what's happening. None of them do anything about it.</a:t>
@@ -1667,7 +1492,7 @@
             <a:spLocks noGrp="1"/>
           </p:cNvSpPr>
           <p:nvPr>
-            <p:ph type="sldNum" idx="5" sz="quarter"/>
+            <p:ph type="sldNum" sz="quarter" idx="5"/>
           </p:nvPr>
         </p:nvSpPr>
         <p:spPr/>
@@ -1681,7 +1506,7 @@
 </file>
 
 <file path=ppt/notesSlides/notesSlide6.xml><?xml version="1.0" encoding="utf-8"?>
-<p:notes xmlns:a="http://schemas.openxmlformats.org/drawingml/2006/main" xmlns:p="http://schemas.openxmlformats.org/presentationml/2006/main" xmlns:r="http://schemas.openxmlformats.org/officeDocument/2006/relationships">
+<p:notes xmlns:a="http://schemas.openxmlformats.org/drawingml/2006/main" xmlns:r="http://schemas.openxmlformats.org/officeDocument/2006/relationships" xmlns:p="http://schemas.openxmlformats.org/presentationml/2006/main">
   <p:cSld>
     <p:spTree>
       <p:nvGrpSpPr>
@@ -1701,7 +1526,7 @@
         <p:nvSpPr>
           <p:cNvPr id="2" name="Slide Image Placeholder 1"/>
           <p:cNvSpPr>
-            <a:spLocks noGrp="1"/>
+            <a:spLocks noGrp="1" noRot="1" noChangeAspect="1"/>
           </p:cNvSpPr>
           <p:nvPr>
             <p:ph type="sldImg" idx="2"/>
@@ -1716,7 +1541,7 @@
             <a:spLocks noGrp="1"/>
           </p:cNvSpPr>
           <p:nvPr>
-            <p:ph type="body" idx="3" sz="quarter"/>
+            <p:ph type="body" sz="quarter" idx="3"/>
           </p:nvPr>
         </p:nvSpPr>
         <p:spPr/>
@@ -1728,7 +1553,9 @@
               <a:t>[Let the text land for a beat.]</a:t>
             </a:r>
           </a:p>
-          <a:p/>
+          <a:p>
+            <a:endParaRPr/>
+          </a:p>
           <a:p>
             <a:r>
               <a:t>Digital twins can see everything. They can't do anything about what they see. That's not a failure — that's a ceiling. And I think we're about to break through it.</a:t>
@@ -1743,7 +1570,7 @@
             <a:spLocks noGrp="1"/>
           </p:cNvSpPr>
           <p:nvPr>
-            <p:ph type="sldNum" idx="5" sz="quarter"/>
+            <p:ph type="sldNum" sz="quarter" idx="5"/>
           </p:nvPr>
         </p:nvSpPr>
         <p:spPr/>
@@ -1757,7 +1584,7 @@
 </file>
 
 <file path=ppt/notesSlides/notesSlide7.xml><?xml version="1.0" encoding="utf-8"?>
-<p:notes xmlns:a="http://schemas.openxmlformats.org/drawingml/2006/main" xmlns:p="http://schemas.openxmlformats.org/presentationml/2006/main" xmlns:r="http://schemas.openxmlformats.org/officeDocument/2006/relationships">
+<p:notes xmlns:a="http://schemas.openxmlformats.org/drawingml/2006/main" xmlns:r="http://schemas.openxmlformats.org/officeDocument/2006/relationships" xmlns:p="http://schemas.openxmlformats.org/presentationml/2006/main">
   <p:cSld>
     <p:spTree>
       <p:nvGrpSpPr>
@@ -1777,7 +1604,7 @@
         <p:nvSpPr>
           <p:cNvPr id="2" name="Slide Image Placeholder 1"/>
           <p:cNvSpPr>
-            <a:spLocks noGrp="1"/>
+            <a:spLocks noGrp="1" noRot="1" noChangeAspect="1"/>
           </p:cNvSpPr>
           <p:nvPr>
             <p:ph type="sldImg" idx="2"/>
@@ -1792,7 +1619,7 @@
             <a:spLocks noGrp="1"/>
           </p:cNvSpPr>
           <p:nvPr>
-            <p:ph type="body" idx="3" sz="quarter"/>
+            <p:ph type="body" sz="quarter" idx="3"/>
           </p:nvPr>
         </p:nvSpPr>
         <p:spPr/>
@@ -1801,18 +1628,25 @@
           <a:lstStyle/>
           <a:p>
             <a:r>
+              <a:rPr dirty="0"/>
               <a:t>[Slow. Conversational. Like you're telling a friend.]</a:t>
             </a:r>
           </a:p>
-          <a:p/>
-          <a:p>
-            <a:r>
+          <a:p>
+            <a:endParaRPr dirty="0"/>
+          </a:p>
+          <a:p>
+            <a:r>
+              <a:rPr dirty="0"/>
               <a:t>You're a process engineer at a fab. It's 2:14 AM. Something shifts — temperature drift, vibration spike. Your monitoring system catches it instantly. You? You're asleep. By the time you wake up, understand what happened, track down the part — five, six hours have passed.</a:t>
             </a:r>
           </a:p>
-          <a:p/>
-          <a:p>
-            <a:r>
+          <a:p>
+            <a:endParaRPr dirty="0"/>
+          </a:p>
+          <a:p>
+            <a:r>
+              <a:rPr dirty="0"/>
               <a:t>The system detected it in seconds. It took the better part of a shift. Detection and action are two completely different problems.</a:t>
             </a:r>
           </a:p>
@@ -1825,7 +1659,7 @@
             <a:spLocks noGrp="1"/>
           </p:cNvSpPr>
           <p:nvPr>
-            <p:ph type="sldNum" idx="5" sz="quarter"/>
+            <p:ph type="sldNum" sz="quarter" idx="5"/>
           </p:nvPr>
         </p:nvSpPr>
         <p:spPr/>
@@ -1839,7 +1673,7 @@
 </file>
 
 <file path=ppt/notesSlides/notesSlide8.xml><?xml version="1.0" encoding="utf-8"?>
-<p:notes xmlns:a="http://schemas.openxmlformats.org/drawingml/2006/main" xmlns:p="http://schemas.openxmlformats.org/presentationml/2006/main" xmlns:r="http://schemas.openxmlformats.org/officeDocument/2006/relationships">
+<p:notes xmlns:a="http://schemas.openxmlformats.org/drawingml/2006/main" xmlns:r="http://schemas.openxmlformats.org/officeDocument/2006/relationships" xmlns:p="http://schemas.openxmlformats.org/presentationml/2006/main">
   <p:cSld>
     <p:spTree>
       <p:nvGrpSpPr>
@@ -1859,7 +1693,7 @@
         <p:nvSpPr>
           <p:cNvPr id="2" name="Slide Image Placeholder 1"/>
           <p:cNvSpPr>
-            <a:spLocks noGrp="1"/>
+            <a:spLocks noGrp="1" noRot="1" noChangeAspect="1"/>
           </p:cNvSpPr>
           <p:nvPr>
             <p:ph type="sldImg" idx="2"/>
@@ -1874,7 +1708,7 @@
             <a:spLocks noGrp="1"/>
           </p:cNvSpPr>
           <p:nvPr>
-            <p:ph type="body" idx="3" sz="quarter"/>
+            <p:ph type="body" sz="quarter" idx="3"/>
           </p:nvPr>
         </p:nvSpPr>
         <p:spPr/>
@@ -1886,7 +1720,9 @@
               <a:t>That was digital twins. Now let's talk about agents.</a:t>
             </a:r>
           </a:p>
-          <a:p/>
+          <a:p>
+            <a:endParaRPr/>
+          </a:p>
           <a:p>
             <a:r>
               <a:t>I know — you've heard the word. It's been on keynote slides and LinkedIn posts for a year. But I've spent the last year building these systems, and they work. They've changed how my team solves problems and makes decisions.</a:t>
@@ -1901,7 +1737,7 @@
             <a:spLocks noGrp="1"/>
           </p:cNvSpPr>
           <p:nvPr>
-            <p:ph type="sldNum" idx="5" sz="quarter"/>
+            <p:ph type="sldNum" sz="quarter" idx="5"/>
           </p:nvPr>
         </p:nvSpPr>
         <p:spPr/>
@@ -1915,7 +1751,7 @@
 </file>
 
 <file path=ppt/notesSlides/notesSlide9.xml><?xml version="1.0" encoding="utf-8"?>
-<p:notes xmlns:a="http://schemas.openxmlformats.org/drawingml/2006/main" xmlns:p="http://schemas.openxmlformats.org/presentationml/2006/main" xmlns:r="http://schemas.openxmlformats.org/officeDocument/2006/relationships">
+<p:notes xmlns:a="http://schemas.openxmlformats.org/drawingml/2006/main" xmlns:r="http://schemas.openxmlformats.org/officeDocument/2006/relationships" xmlns:p="http://schemas.openxmlformats.org/presentationml/2006/main">
   <p:cSld>
     <p:spTree>
       <p:nvGrpSpPr>
@@ -1935,7 +1771,7 @@
         <p:nvSpPr>
           <p:cNvPr id="2" name="Slide Image Placeholder 1"/>
           <p:cNvSpPr>
-            <a:spLocks noGrp="1"/>
+            <a:spLocks noGrp="1" noRot="1" noChangeAspect="1"/>
           </p:cNvSpPr>
           <p:nvPr>
             <p:ph type="sldImg" idx="2"/>
@@ -1950,7 +1786,7 @@
             <a:spLocks noGrp="1"/>
           </p:cNvSpPr>
           <p:nvPr>
-            <p:ph type="body" idx="3" sz="quarter"/>
+            <p:ph type="body" sz="quarter" idx="3"/>
           </p:nvPr>
         </p:nvSpPr>
         <p:spPr/>
@@ -1962,13 +1798,17 @@
               <a:t>[BUILD ANIMATION — click through capabilities one at a time.]</a:t>
             </a:r>
           </a:p>
-          <a:p/>
+          <a:p>
+            <a:endParaRPr/>
+          </a:p>
           <a:p>
             <a:r>
               <a:t>Autonomy — it operates within boundaries you define, without waiting. Planning — it breaks complex problems into multi-step workflows. Tool use — it connects to real systems, APIs, databases. Reflection — it evaluates what it did and adjusts its approach.</a:t>
             </a:r>
           </a:p>
-          <a:p/>
+          <a:p>
+            <a:endParaRPr/>
+          </a:p>
           <a:p>
             <a:r>
               <a:t>That last one is the one people underestimate.</a:t>
@@ -1983,7 +1823,7 @@
             <a:spLocks noGrp="1"/>
           </p:cNvSpPr>
           <p:nvPr>
-            <p:ph type="sldNum" idx="5" sz="quarter"/>
+            <p:ph type="sldNum" sz="quarter" idx="5"/>
           </p:nvPr>
         </p:nvSpPr>
         <p:spPr/>
@@ -2034,10 +1874,9 @@
           <a:lstStyle/>
           <a:p>
             <a:r>
-              <a:rPr lang="en-US" smtClean="0"/>
+              <a:rPr lang="en-US"/>
               <a:t>Click to edit Master title style</a:t>
             </a:r>
-            <a:endParaRPr lang="en-US"/>
           </a:p>
         </p:txBody>
       </p:sp>
@@ -2153,10 +1992,9 @@
           </a:lstStyle>
           <a:p>
             <a:r>
-              <a:rPr lang="en-US" smtClean="0"/>
+              <a:rPr lang="en-US"/>
               <a:t>Click to edit Master subtitle style</a:t>
             </a:r>
-            <a:endParaRPr lang="en-US"/>
           </a:p>
         </p:txBody>
       </p:sp>
@@ -2177,7 +2015,7 @@
           <a:p>
             <a:fld id="{5BCAD085-E8A6-8845-BD4E-CB4CCA059FC4}" type="datetimeFigureOut">
               <a:rPr lang="en-US" smtClean="0"/>
-              <a:t>1/27/13</a:t>
+              <a:t>4/10/2026</a:t>
             </a:fld>
             <a:endParaRPr lang="en-US"/>
           </a:p>
@@ -2271,10 +2109,9 @@
           <a:lstStyle/>
           <a:p>
             <a:r>
-              <a:rPr lang="en-US" smtClean="0"/>
+              <a:rPr lang="en-US"/>
               <a:t>Click to edit Master title style</a:t>
             </a:r>
-            <a:endParaRPr lang="en-US"/>
           </a:p>
         </p:txBody>
       </p:sp>
@@ -2295,38 +2132,37 @@
           <a:p>
             <a:pPr lvl="0"/>
             <a:r>
-              <a:rPr lang="en-US" smtClean="0"/>
+              <a:rPr lang="en-US"/>
               <a:t>Click to edit Master text styles</a:t>
             </a:r>
           </a:p>
           <a:p>
             <a:pPr lvl="1"/>
             <a:r>
-              <a:rPr lang="en-US" smtClean="0"/>
+              <a:rPr lang="en-US"/>
               <a:t>Second level</a:t>
             </a:r>
           </a:p>
           <a:p>
             <a:pPr lvl="2"/>
             <a:r>
-              <a:rPr lang="en-US" smtClean="0"/>
+              <a:rPr lang="en-US"/>
               <a:t>Third level</a:t>
             </a:r>
           </a:p>
           <a:p>
             <a:pPr lvl="3"/>
             <a:r>
-              <a:rPr lang="en-US" smtClean="0"/>
+              <a:rPr lang="en-US"/>
               <a:t>Fourth level</a:t>
             </a:r>
           </a:p>
           <a:p>
             <a:pPr lvl="4"/>
             <a:r>
-              <a:rPr lang="en-US" smtClean="0"/>
+              <a:rPr lang="en-US"/>
               <a:t>Fifth level</a:t>
             </a:r>
-            <a:endParaRPr lang="en-US"/>
           </a:p>
         </p:txBody>
       </p:sp>
@@ -2347,7 +2183,7 @@
           <a:p>
             <a:fld id="{5BCAD085-E8A6-8845-BD4E-CB4CCA059FC4}" type="datetimeFigureOut">
               <a:rPr lang="en-US" smtClean="0"/>
-              <a:t>1/27/13</a:t>
+              <a:t>4/10/2026</a:t>
             </a:fld>
             <a:endParaRPr lang="en-US"/>
           </a:p>
@@ -2446,10 +2282,9 @@
           <a:lstStyle/>
           <a:p>
             <a:r>
-              <a:rPr lang="en-US" smtClean="0"/>
+              <a:rPr lang="en-US"/>
               <a:t>Click to edit Master title style</a:t>
             </a:r>
-            <a:endParaRPr lang="en-US"/>
           </a:p>
         </p:txBody>
       </p:sp>
@@ -2475,38 +2310,37 @@
           <a:p>
             <a:pPr lvl="0"/>
             <a:r>
-              <a:rPr lang="en-US" smtClean="0"/>
+              <a:rPr lang="en-US"/>
               <a:t>Click to edit Master text styles</a:t>
             </a:r>
           </a:p>
           <a:p>
             <a:pPr lvl="1"/>
             <a:r>
-              <a:rPr lang="en-US" smtClean="0"/>
+              <a:rPr lang="en-US"/>
               <a:t>Second level</a:t>
             </a:r>
           </a:p>
           <a:p>
             <a:pPr lvl="2"/>
             <a:r>
-              <a:rPr lang="en-US" smtClean="0"/>
+              <a:rPr lang="en-US"/>
               <a:t>Third level</a:t>
             </a:r>
           </a:p>
           <a:p>
             <a:pPr lvl="3"/>
             <a:r>
-              <a:rPr lang="en-US" smtClean="0"/>
+              <a:rPr lang="en-US"/>
               <a:t>Fourth level</a:t>
             </a:r>
           </a:p>
           <a:p>
             <a:pPr lvl="4"/>
             <a:r>
-              <a:rPr lang="en-US" smtClean="0"/>
+              <a:rPr lang="en-US"/>
               <a:t>Fifth level</a:t>
             </a:r>
-            <a:endParaRPr lang="en-US"/>
           </a:p>
         </p:txBody>
       </p:sp>
@@ -2527,7 +2361,7 @@
           <a:p>
             <a:fld id="{5BCAD085-E8A6-8845-BD4E-CB4CCA059FC4}" type="datetimeFigureOut">
               <a:rPr lang="en-US" smtClean="0"/>
-              <a:t>1/27/13</a:t>
+              <a:t>4/10/2026</a:t>
             </a:fld>
             <a:endParaRPr lang="en-US"/>
           </a:p>
@@ -2621,10 +2455,9 @@
           <a:lstStyle/>
           <a:p>
             <a:r>
-              <a:rPr lang="en-US" smtClean="0"/>
+              <a:rPr lang="en-US"/>
               <a:t>Click to edit Master title style</a:t>
             </a:r>
-            <a:endParaRPr lang="en-US"/>
           </a:p>
         </p:txBody>
       </p:sp>
@@ -2645,38 +2478,37 @@
           <a:p>
             <a:pPr lvl="0"/>
             <a:r>
-              <a:rPr lang="en-US" smtClean="0"/>
+              <a:rPr lang="en-US"/>
               <a:t>Click to edit Master text styles</a:t>
             </a:r>
           </a:p>
           <a:p>
             <a:pPr lvl="1"/>
             <a:r>
-              <a:rPr lang="en-US" smtClean="0"/>
+              <a:rPr lang="en-US"/>
               <a:t>Second level</a:t>
             </a:r>
           </a:p>
           <a:p>
             <a:pPr lvl="2"/>
             <a:r>
-              <a:rPr lang="en-US" smtClean="0"/>
+              <a:rPr lang="en-US"/>
               <a:t>Third level</a:t>
             </a:r>
           </a:p>
           <a:p>
             <a:pPr lvl="3"/>
             <a:r>
-              <a:rPr lang="en-US" smtClean="0"/>
+              <a:rPr lang="en-US"/>
               <a:t>Fourth level</a:t>
             </a:r>
           </a:p>
           <a:p>
             <a:pPr lvl="4"/>
             <a:r>
-              <a:rPr lang="en-US" smtClean="0"/>
+              <a:rPr lang="en-US"/>
               <a:t>Fifth level</a:t>
             </a:r>
-            <a:endParaRPr lang="en-US"/>
           </a:p>
         </p:txBody>
       </p:sp>
@@ -2697,7 +2529,7 @@
           <a:p>
             <a:fld id="{5BCAD085-E8A6-8845-BD4E-CB4CCA059FC4}" type="datetimeFigureOut">
               <a:rPr lang="en-US" smtClean="0"/>
-              <a:t>1/27/13</a:t>
+              <a:t>4/10/2026</a:t>
             </a:fld>
             <a:endParaRPr lang="en-US"/>
           </a:p>
@@ -2800,10 +2632,9 @@
           </a:lstStyle>
           <a:p>
             <a:r>
-              <a:rPr lang="en-US" smtClean="0"/>
+              <a:rPr lang="en-US"/>
               <a:t>Click to edit Master title style</a:t>
             </a:r>
-            <a:endParaRPr lang="en-US"/>
           </a:p>
         </p:txBody>
       </p:sp>
@@ -2920,7 +2751,7 @@
           <a:p>
             <a:pPr lvl="0"/>
             <a:r>
-              <a:rPr lang="en-US" smtClean="0"/>
+              <a:rPr lang="en-US"/>
               <a:t>Click to edit Master text styles</a:t>
             </a:r>
           </a:p>
@@ -2943,7 +2774,7 @@
           <a:p>
             <a:fld id="{5BCAD085-E8A6-8845-BD4E-CB4CCA059FC4}" type="datetimeFigureOut">
               <a:rPr lang="en-US" smtClean="0"/>
-              <a:t>1/27/13</a:t>
+              <a:t>4/10/2026</a:t>
             </a:fld>
             <a:endParaRPr lang="en-US"/>
           </a:p>
@@ -3037,10 +2868,9 @@
           <a:lstStyle/>
           <a:p>
             <a:r>
-              <a:rPr lang="en-US" smtClean="0"/>
+              <a:rPr lang="en-US"/>
               <a:t>Click to edit Master title style</a:t>
             </a:r>
-            <a:endParaRPr lang="en-US"/>
           </a:p>
         </p:txBody>
       </p:sp>
@@ -3094,38 +2924,37 @@
           <a:p>
             <a:pPr lvl="0"/>
             <a:r>
-              <a:rPr lang="en-US" smtClean="0"/>
+              <a:rPr lang="en-US"/>
               <a:t>Click to edit Master text styles</a:t>
             </a:r>
           </a:p>
           <a:p>
             <a:pPr lvl="1"/>
             <a:r>
-              <a:rPr lang="en-US" smtClean="0"/>
+              <a:rPr lang="en-US"/>
               <a:t>Second level</a:t>
             </a:r>
           </a:p>
           <a:p>
             <a:pPr lvl="2"/>
             <a:r>
-              <a:rPr lang="en-US" smtClean="0"/>
+              <a:rPr lang="en-US"/>
               <a:t>Third level</a:t>
             </a:r>
           </a:p>
           <a:p>
             <a:pPr lvl="3"/>
             <a:r>
-              <a:rPr lang="en-US" smtClean="0"/>
+              <a:rPr lang="en-US"/>
               <a:t>Fourth level</a:t>
             </a:r>
           </a:p>
           <a:p>
             <a:pPr lvl="4"/>
             <a:r>
-              <a:rPr lang="en-US" smtClean="0"/>
+              <a:rPr lang="en-US"/>
               <a:t>Fifth level</a:t>
             </a:r>
-            <a:endParaRPr lang="en-US"/>
           </a:p>
         </p:txBody>
       </p:sp>
@@ -3179,38 +3008,37 @@
           <a:p>
             <a:pPr lvl="0"/>
             <a:r>
-              <a:rPr lang="en-US" smtClean="0"/>
+              <a:rPr lang="en-US"/>
               <a:t>Click to edit Master text styles</a:t>
             </a:r>
           </a:p>
           <a:p>
             <a:pPr lvl="1"/>
             <a:r>
-              <a:rPr lang="en-US" smtClean="0"/>
+              <a:rPr lang="en-US"/>
               <a:t>Second level</a:t>
             </a:r>
           </a:p>
           <a:p>
             <a:pPr lvl="2"/>
             <a:r>
-              <a:rPr lang="en-US" smtClean="0"/>
+              <a:rPr lang="en-US"/>
               <a:t>Third level</a:t>
             </a:r>
           </a:p>
           <a:p>
             <a:pPr lvl="3"/>
             <a:r>
-              <a:rPr lang="en-US" smtClean="0"/>
+              <a:rPr lang="en-US"/>
               <a:t>Fourth level</a:t>
             </a:r>
           </a:p>
           <a:p>
             <a:pPr lvl="4"/>
             <a:r>
-              <a:rPr lang="en-US" smtClean="0"/>
+              <a:rPr lang="en-US"/>
               <a:t>Fifth level</a:t>
             </a:r>
-            <a:endParaRPr lang="en-US"/>
           </a:p>
         </p:txBody>
       </p:sp>
@@ -3231,7 +3059,7 @@
           <a:p>
             <a:fld id="{5BCAD085-E8A6-8845-BD4E-CB4CCA059FC4}" type="datetimeFigureOut">
               <a:rPr lang="en-US" smtClean="0"/>
-              <a:t>1/27/13</a:t>
+              <a:t>4/10/2026</a:t>
             </a:fld>
             <a:endParaRPr lang="en-US"/>
           </a:p>
@@ -3329,10 +3157,9 @@
           </a:lstStyle>
           <a:p>
             <a:r>
-              <a:rPr lang="en-US" smtClean="0"/>
+              <a:rPr lang="en-US"/>
               <a:t>Click to edit Master title style</a:t>
             </a:r>
-            <a:endParaRPr lang="en-US"/>
           </a:p>
         </p:txBody>
       </p:sp>
@@ -3395,7 +3222,7 @@
           <a:p>
             <a:pPr lvl="0"/>
             <a:r>
-              <a:rPr lang="en-US" smtClean="0"/>
+              <a:rPr lang="en-US"/>
               <a:t>Click to edit Master text styles</a:t>
             </a:r>
           </a:p>
@@ -3451,38 +3278,37 @@
           <a:p>
             <a:pPr lvl="0"/>
             <a:r>
-              <a:rPr lang="en-US" smtClean="0"/>
+              <a:rPr lang="en-US"/>
               <a:t>Click to edit Master text styles</a:t>
             </a:r>
           </a:p>
           <a:p>
             <a:pPr lvl="1"/>
             <a:r>
-              <a:rPr lang="en-US" smtClean="0"/>
+              <a:rPr lang="en-US"/>
               <a:t>Second level</a:t>
             </a:r>
           </a:p>
           <a:p>
             <a:pPr lvl="2"/>
             <a:r>
-              <a:rPr lang="en-US" smtClean="0"/>
+              <a:rPr lang="en-US"/>
               <a:t>Third level</a:t>
             </a:r>
           </a:p>
           <a:p>
             <a:pPr lvl="3"/>
             <a:r>
-              <a:rPr lang="en-US" smtClean="0"/>
+              <a:rPr lang="en-US"/>
               <a:t>Fourth level</a:t>
             </a:r>
           </a:p>
           <a:p>
             <a:pPr lvl="4"/>
             <a:r>
-              <a:rPr lang="en-US" smtClean="0"/>
+              <a:rPr lang="en-US"/>
               <a:t>Fifth level</a:t>
             </a:r>
-            <a:endParaRPr lang="en-US"/>
           </a:p>
         </p:txBody>
       </p:sp>
@@ -3545,7 +3371,7 @@
           <a:p>
             <a:pPr lvl="0"/>
             <a:r>
-              <a:rPr lang="en-US" smtClean="0"/>
+              <a:rPr lang="en-US"/>
               <a:t>Click to edit Master text styles</a:t>
             </a:r>
           </a:p>
@@ -3601,38 +3427,37 @@
           <a:p>
             <a:pPr lvl="0"/>
             <a:r>
-              <a:rPr lang="en-US" smtClean="0"/>
+              <a:rPr lang="en-US"/>
               <a:t>Click to edit Master text styles</a:t>
             </a:r>
           </a:p>
           <a:p>
             <a:pPr lvl="1"/>
             <a:r>
-              <a:rPr lang="en-US" smtClean="0"/>
+              <a:rPr lang="en-US"/>
               <a:t>Second level</a:t>
             </a:r>
           </a:p>
           <a:p>
             <a:pPr lvl="2"/>
             <a:r>
-              <a:rPr lang="en-US" smtClean="0"/>
+              <a:rPr lang="en-US"/>
               <a:t>Third level</a:t>
             </a:r>
           </a:p>
           <a:p>
             <a:pPr lvl="3"/>
             <a:r>
-              <a:rPr lang="en-US" smtClean="0"/>
+              <a:rPr lang="en-US"/>
               <a:t>Fourth level</a:t>
             </a:r>
           </a:p>
           <a:p>
             <a:pPr lvl="4"/>
             <a:r>
-              <a:rPr lang="en-US" smtClean="0"/>
+              <a:rPr lang="en-US"/>
               <a:t>Fifth level</a:t>
             </a:r>
-            <a:endParaRPr lang="en-US"/>
           </a:p>
         </p:txBody>
       </p:sp>
@@ -3653,7 +3478,7 @@
           <a:p>
             <a:fld id="{5BCAD085-E8A6-8845-BD4E-CB4CCA059FC4}" type="datetimeFigureOut">
               <a:rPr lang="en-US" smtClean="0"/>
-              <a:t>1/27/13</a:t>
+              <a:t>4/10/2026</a:t>
             </a:fld>
             <a:endParaRPr lang="en-US"/>
           </a:p>
@@ -3747,10 +3572,9 @@
           <a:lstStyle/>
           <a:p>
             <a:r>
-              <a:rPr lang="en-US" smtClean="0"/>
+              <a:rPr lang="en-US"/>
               <a:t>Click to edit Master title style</a:t>
             </a:r>
-            <a:endParaRPr lang="en-US"/>
           </a:p>
         </p:txBody>
       </p:sp>
@@ -3771,7 +3595,7 @@
           <a:p>
             <a:fld id="{5BCAD085-E8A6-8845-BD4E-CB4CCA059FC4}" type="datetimeFigureOut">
               <a:rPr lang="en-US" smtClean="0"/>
-              <a:t>1/27/13</a:t>
+              <a:t>4/10/2026</a:t>
             </a:fld>
             <a:endParaRPr lang="en-US"/>
           </a:p>
@@ -3866,7 +3690,7 @@
           <a:p>
             <a:fld id="{5BCAD085-E8A6-8845-BD4E-CB4CCA059FC4}" type="datetimeFigureOut">
               <a:rPr lang="en-US" smtClean="0"/>
-              <a:t>1/27/13</a:t>
+              <a:t>4/10/2026</a:t>
             </a:fld>
             <a:endParaRPr lang="en-US"/>
           </a:p>
@@ -3969,10 +3793,9 @@
           </a:lstStyle>
           <a:p>
             <a:r>
-              <a:rPr lang="en-US" smtClean="0"/>
+              <a:rPr lang="en-US"/>
               <a:t>Click to edit Master title style</a:t>
             </a:r>
-            <a:endParaRPr lang="en-US"/>
           </a:p>
         </p:txBody>
       </p:sp>
@@ -4026,38 +3849,37 @@
           <a:p>
             <a:pPr lvl="0"/>
             <a:r>
-              <a:rPr lang="en-US" smtClean="0"/>
+              <a:rPr lang="en-US"/>
               <a:t>Click to edit Master text styles</a:t>
             </a:r>
           </a:p>
           <a:p>
             <a:pPr lvl="1"/>
             <a:r>
-              <a:rPr lang="en-US" smtClean="0"/>
+              <a:rPr lang="en-US"/>
               <a:t>Second level</a:t>
             </a:r>
           </a:p>
           <a:p>
             <a:pPr lvl="2"/>
             <a:r>
-              <a:rPr lang="en-US" smtClean="0"/>
+              <a:rPr lang="en-US"/>
               <a:t>Third level</a:t>
             </a:r>
           </a:p>
           <a:p>
             <a:pPr lvl="3"/>
             <a:r>
-              <a:rPr lang="en-US" smtClean="0"/>
+              <a:rPr lang="en-US"/>
               <a:t>Fourth level</a:t>
             </a:r>
           </a:p>
           <a:p>
             <a:pPr lvl="4"/>
             <a:r>
-              <a:rPr lang="en-US" smtClean="0"/>
+              <a:rPr lang="en-US"/>
               <a:t>Fifth level</a:t>
             </a:r>
-            <a:endParaRPr lang="en-US"/>
           </a:p>
         </p:txBody>
       </p:sp>
@@ -4120,7 +3942,7 @@
           <a:p>
             <a:pPr lvl="0"/>
             <a:r>
-              <a:rPr lang="en-US" smtClean="0"/>
+              <a:rPr lang="en-US"/>
               <a:t>Click to edit Master text styles</a:t>
             </a:r>
           </a:p>
@@ -4143,7 +3965,7 @@
           <a:p>
             <a:fld id="{5BCAD085-E8A6-8845-BD4E-CB4CCA059FC4}" type="datetimeFigureOut">
               <a:rPr lang="en-US" smtClean="0"/>
-              <a:t>1/27/13</a:t>
+              <a:t>4/10/2026</a:t>
             </a:fld>
             <a:endParaRPr lang="en-US"/>
           </a:p>
@@ -4246,10 +4068,9 @@
           </a:lstStyle>
           <a:p>
             <a:r>
-              <a:rPr lang="en-US" smtClean="0"/>
+              <a:rPr lang="en-US"/>
               <a:t>Click to edit Master title style</a:t>
             </a:r>
-            <a:endParaRPr lang="en-US"/>
           </a:p>
         </p:txBody>
       </p:sp>
@@ -4373,7 +4194,7 @@
           <a:p>
             <a:pPr lvl="0"/>
             <a:r>
-              <a:rPr lang="en-US" smtClean="0"/>
+              <a:rPr lang="en-US"/>
               <a:t>Click to edit Master text styles</a:t>
             </a:r>
           </a:p>
@@ -4396,7 +4217,7 @@
           <a:p>
             <a:fld id="{5BCAD085-E8A6-8845-BD4E-CB4CCA059FC4}" type="datetimeFigureOut">
               <a:rPr lang="en-US" smtClean="0"/>
-              <a:t>1/27/13</a:t>
+              <a:t>4/10/2026</a:t>
             </a:fld>
             <a:endParaRPr lang="en-US"/>
           </a:p>
@@ -4505,10 +4326,9 @@
           <a:lstStyle/>
           <a:p>
             <a:r>
-              <a:rPr lang="en-US" smtClean="0"/>
+              <a:rPr lang="en-US"/>
               <a:t>Click to edit Master title style</a:t>
             </a:r>
-            <a:endParaRPr lang="en-US"/>
           </a:p>
         </p:txBody>
       </p:sp>
@@ -4539,38 +4359,37 @@
           <a:p>
             <a:pPr lvl="0"/>
             <a:r>
-              <a:rPr lang="en-US" smtClean="0"/>
+              <a:rPr lang="en-US"/>
               <a:t>Click to edit Master text styles</a:t>
             </a:r>
           </a:p>
           <a:p>
             <a:pPr lvl="1"/>
             <a:r>
-              <a:rPr lang="en-US" smtClean="0"/>
+              <a:rPr lang="en-US"/>
               <a:t>Second level</a:t>
             </a:r>
           </a:p>
           <a:p>
             <a:pPr lvl="2"/>
             <a:r>
-              <a:rPr lang="en-US" smtClean="0"/>
+              <a:rPr lang="en-US"/>
               <a:t>Third level</a:t>
             </a:r>
           </a:p>
           <a:p>
             <a:pPr lvl="3"/>
             <a:r>
-              <a:rPr lang="en-US" smtClean="0"/>
+              <a:rPr lang="en-US"/>
               <a:t>Fourth level</a:t>
             </a:r>
           </a:p>
           <a:p>
             <a:pPr lvl="4"/>
             <a:r>
-              <a:rPr lang="en-US" smtClean="0"/>
+              <a:rPr lang="en-US"/>
               <a:t>Fifth level</a:t>
             </a:r>
-            <a:endParaRPr lang="en-US"/>
           </a:p>
         </p:txBody>
       </p:sp>
@@ -4609,7 +4428,7 @@
           <a:p>
             <a:fld id="{5BCAD085-E8A6-8845-BD4E-CB4CCA059FC4}" type="datetimeFigureOut">
               <a:rPr lang="en-US" smtClean="0"/>
-              <a:t>1/27/13</a:t>
+              <a:t>4/10/2026</a:t>
             </a:fld>
             <a:endParaRPr lang="en-US"/>
           </a:p>
@@ -4968,7 +4787,7 @@
 </file>
 
 <file path=ppt/slides/slide1.xml><?xml version="1.0" encoding="utf-8"?>
-<p:sld xmlns:a="http://schemas.openxmlformats.org/drawingml/2006/main" xmlns:p="http://schemas.openxmlformats.org/presentationml/2006/main" xmlns:r="http://schemas.openxmlformats.org/officeDocument/2006/relationships">
+<p:sld xmlns:a="http://schemas.openxmlformats.org/drawingml/2006/main" xmlns:r="http://schemas.openxmlformats.org/officeDocument/2006/relationships" xmlns:p="http://schemas.openxmlformats.org/presentationml/2006/main">
   <p:cSld>
     <p:bg>
       <p:bgPr>
@@ -4992,7 +4811,14 @@
         <p:cNvGrpSpPr/>
         <p:nvPr/>
       </p:nvGrpSpPr>
-      <p:grpSpPr/>
+      <p:grpSpPr>
+        <a:xfrm>
+          <a:off x="0" y="0"/>
+          <a:ext cx="0" cy="0"/>
+          <a:chOff x="0" y="0"/>
+          <a:chExt cx="0" cy="0"/>
+        </a:xfrm>
+      </p:grpSpPr>
       <p:sp>
         <p:nvSpPr>
           <p:cNvPr id="2" name="TextBox 1"/>
@@ -5024,10 +4850,14 @@
               </a:defRPr>
             </a:pPr>
             <a:r>
+              <a:rPr dirty="0"/>
               <a:t>The Next Layer</a:t>
             </a:r>
-            <a:br/>
-            <a:r>
+            <a:br>
+              <a:rPr dirty="0"/>
+            </a:br>
+            <a:r>
+              <a:rPr dirty="0"/>
               <a:t>for Digital Twins</a:t>
             </a:r>
           </a:p>
@@ -5109,6 +4939,7 @@
           <a:lstStyle/>
           <a:p>
             <a:pPr algn="ctr"/>
+            <a:endParaRPr/>
           </a:p>
         </p:txBody>
       </p:sp>
@@ -5143,6 +4974,7 @@
               </a:defRPr>
             </a:pPr>
             <a:r>
+              <a:rPr dirty="0"/>
               <a:t>Anthony Poole  ·  Software Engineer, Microsoft</a:t>
             </a:r>
           </a:p>
@@ -5193,7 +5025,7 @@
 </file>
 
 <file path=ppt/slides/slide10.xml><?xml version="1.0" encoding="utf-8"?>
-<p:sld xmlns:a="http://schemas.openxmlformats.org/drawingml/2006/main" xmlns:p="http://schemas.openxmlformats.org/presentationml/2006/main" xmlns:r="http://schemas.openxmlformats.org/officeDocument/2006/relationships">
+<p:sld xmlns:a="http://schemas.openxmlformats.org/drawingml/2006/main" xmlns:r="http://schemas.openxmlformats.org/officeDocument/2006/relationships" xmlns:p="http://schemas.openxmlformats.org/presentationml/2006/main">
   <p:cSld>
     <p:bg>
       <p:bgPr>
@@ -5217,7 +5049,14 @@
         <p:cNvGrpSpPr/>
         <p:nvPr/>
       </p:nvGrpSpPr>
-      <p:grpSpPr/>
+      <p:grpSpPr>
+        <a:xfrm>
+          <a:off x="0" y="0"/>
+          <a:ext cx="0" cy="0"/>
+          <a:chOff x="0" y="0"/>
+          <a:chExt cx="0" cy="0"/>
+        </a:xfrm>
+      </p:grpSpPr>
       <p:sp>
         <p:nvSpPr>
           <p:cNvPr id="2" name="Oval 1"/>
@@ -5258,6 +5097,7 @@
           <a:lstStyle/>
           <a:p>
             <a:pPr algn="ctr"/>
+            <a:endParaRPr/>
           </a:p>
         </p:txBody>
       </p:sp>
@@ -5310,7 +5150,7 @@
         <p:spPr>
           <a:xfrm>
             <a:off x="2103120" y="4114800"/>
-            <a:ext cx="2926080" cy="914400"/>
+            <a:ext cx="2926080" cy="830997"/>
           </a:xfrm>
           <a:prstGeom prst="rect">
             <a:avLst/>
@@ -5332,15 +5172,34 @@
               </a:defRPr>
             </a:pPr>
             <a:r>
-              <a:t>The data</a:t>
-            </a:r>
-            <a:br/>
-            <a:r>
-              <a:t>The models</a:t>
-            </a:r>
-            <a:br/>
-            <a:r>
-              <a:t>The simulation</a:t>
+              <a:rPr lang="en-US" dirty="0"/>
+              <a:t>D</a:t>
+            </a:r>
+            <a:r>
+              <a:rPr dirty="0"/>
+              <a:t>ata</a:t>
+            </a:r>
+            <a:br>
+              <a:rPr dirty="0"/>
+            </a:br>
+            <a:r>
+              <a:rPr lang="en-US" dirty="0"/>
+              <a:t>M</a:t>
+            </a:r>
+            <a:r>
+              <a:rPr dirty="0"/>
+              <a:t>odels</a:t>
+            </a:r>
+            <a:br>
+              <a:rPr dirty="0"/>
+            </a:br>
+            <a:r>
+              <a:rPr lang="en-US" dirty="0"/>
+              <a:t>S</a:t>
+            </a:r>
+            <a:r>
+              <a:rPr dirty="0"/>
+              <a:t>imulation</a:t>
             </a:r>
           </a:p>
         </p:txBody>
@@ -5385,6 +5244,7 @@
           <a:lstStyle/>
           <a:p>
             <a:pPr algn="ctr"/>
+            <a:endParaRPr/>
           </a:p>
         </p:txBody>
       </p:sp>
@@ -5437,7 +5297,7 @@
         <p:spPr>
           <a:xfrm>
             <a:off x="7132320" y="4114800"/>
-            <a:ext cx="2926080" cy="914400"/>
+            <a:ext cx="2926080" cy="830997"/>
           </a:xfrm>
           <a:prstGeom prst="rect">
             <a:avLst/>
@@ -5459,15 +5319,34 @@
               </a:defRPr>
             </a:pPr>
             <a:r>
-              <a:t>The reasoning</a:t>
-            </a:r>
-            <a:br/>
-            <a:r>
-              <a:t>The planning</a:t>
-            </a:r>
-            <a:br/>
-            <a:r>
-              <a:t>The action</a:t>
+              <a:rPr lang="en-US" dirty="0"/>
+              <a:t>R</a:t>
+            </a:r>
+            <a:r>
+              <a:rPr dirty="0"/>
+              <a:t>easoning</a:t>
+            </a:r>
+            <a:br>
+              <a:rPr dirty="0"/>
+            </a:br>
+            <a:r>
+              <a:rPr lang="en-US" dirty="0"/>
+              <a:t>P</a:t>
+            </a:r>
+            <a:r>
+              <a:rPr dirty="0"/>
+              <a:t>lanning</a:t>
+            </a:r>
+            <a:br>
+              <a:rPr dirty="0"/>
+            </a:br>
+            <a:r>
+              <a:rPr lang="en-US" dirty="0"/>
+              <a:t>A</a:t>
+            </a:r>
+            <a:r>
+              <a:rPr dirty="0"/>
+              <a:t>ction</a:t>
             </a:r>
           </a:p>
         </p:txBody>
@@ -5517,7 +5396,7 @@
 </file>
 
 <file path=ppt/slides/slide11.xml><?xml version="1.0" encoding="utf-8"?>
-<p:sld xmlns:a="http://schemas.openxmlformats.org/drawingml/2006/main" xmlns:p="http://schemas.openxmlformats.org/presentationml/2006/main" xmlns:r="http://schemas.openxmlformats.org/officeDocument/2006/relationships">
+<p:sld xmlns:a="http://schemas.openxmlformats.org/drawingml/2006/main" xmlns:r="http://schemas.openxmlformats.org/officeDocument/2006/relationships" xmlns:p="http://schemas.openxmlformats.org/presentationml/2006/main">
   <p:cSld>
     <p:bg>
       <p:bgPr>
@@ -5541,7 +5420,14 @@
         <p:cNvGrpSpPr/>
         <p:nvPr/>
       </p:nvGrpSpPr>
-      <p:grpSpPr/>
+      <p:grpSpPr>
+        <a:xfrm>
+          <a:off x="0" y="0"/>
+          <a:ext cx="0" cy="0"/>
+          <a:chOff x="0" y="0"/>
+          <a:chExt cx="0" cy="0"/>
+        </a:xfrm>
+      </p:grpSpPr>
       <p:sp>
         <p:nvSpPr>
           <p:cNvPr id="2" name="TextBox 1"/>
@@ -5573,6 +5459,7 @@
               </a:defRPr>
             </a:pPr>
             <a:r>
+              <a:rPr dirty="0"/>
               <a:t>What if the twin could think?</a:t>
             </a:r>
           </a:p>
@@ -5587,7 +5474,7 @@
 </file>
 
 <file path=ppt/slides/slide12.xml><?xml version="1.0" encoding="utf-8"?>
-<p:sld xmlns:a="http://schemas.openxmlformats.org/drawingml/2006/main" xmlns:p="http://schemas.openxmlformats.org/presentationml/2006/main" xmlns:r="http://schemas.openxmlformats.org/officeDocument/2006/relationships">
+<p:sld xmlns:a="http://schemas.openxmlformats.org/drawingml/2006/main" xmlns:r="http://schemas.openxmlformats.org/officeDocument/2006/relationships" xmlns:p="http://schemas.openxmlformats.org/presentationml/2006/main">
   <p:cSld>
     <p:bg>
       <p:bgPr>
@@ -5611,7 +5498,14 @@
         <p:cNvGrpSpPr/>
         <p:nvPr/>
       </p:nvGrpSpPr>
-      <p:grpSpPr/>
+      <p:grpSpPr>
+        <a:xfrm>
+          <a:off x="0" y="0"/>
+          <a:ext cx="0" cy="0"/>
+          <a:chOff x="0" y="0"/>
+          <a:chExt cx="0" cy="0"/>
+        </a:xfrm>
+      </p:grpSpPr>
       <p:sp>
         <p:nvSpPr>
           <p:cNvPr id="2" name="TextBox 1"/>
@@ -5686,7 +5580,7 @@
           </a:fontRef>
         </p:style>
         <p:txBody>
-          <a:bodyPr rtlCol="0" anchor="ctr" wrap="square"/>
+          <a:bodyPr wrap="square" rtlCol="0" anchor="ctr"/>
           <a:lstStyle/>
           <a:p>
             <a:pPr algn="ctr">
@@ -5777,7 +5671,7 @@
           </a:fontRef>
         </p:style>
         <p:txBody>
-          <a:bodyPr rtlCol="0" anchor="ctr" wrap="square"/>
+          <a:bodyPr wrap="square" rtlCol="0" anchor="ctr"/>
           <a:lstStyle/>
           <a:p>
             <a:pPr algn="ctr">
@@ -5868,7 +5762,7 @@
           </a:fontRef>
         </p:style>
         <p:txBody>
-          <a:bodyPr rtlCol="0" anchor="ctr" wrap="square"/>
+          <a:bodyPr wrap="square" rtlCol="0" anchor="ctr"/>
           <a:lstStyle/>
           <a:p>
             <a:pPr algn="ctr">
@@ -5959,7 +5853,7 @@
           </a:fontRef>
         </p:style>
         <p:txBody>
-          <a:bodyPr rtlCol="0" anchor="ctr" wrap="square"/>
+          <a:bodyPr wrap="square" rtlCol="0" anchor="ctr"/>
           <a:lstStyle/>
           <a:p>
             <a:pPr algn="ctr">
@@ -6050,7 +5944,7 @@
           </a:fontRef>
         </p:style>
         <p:txBody>
-          <a:bodyPr rtlCol="0" anchor="ctr" wrap="square"/>
+          <a:bodyPr wrap="square" rtlCol="0" anchor="ctr"/>
           <a:lstStyle/>
           <a:p>
             <a:pPr algn="ctr">
@@ -6107,6 +6001,7 @@
           <a:lstStyle/>
           <a:p>
             <a:pPr algn="ctr"/>
+            <a:endParaRPr/>
           </a:p>
         </p:txBody>
       </p:sp>
@@ -6150,6 +6045,7 @@
           <a:lstStyle/>
           <a:p>
             <a:pPr algn="ctr"/>
+            <a:endParaRPr/>
           </a:p>
         </p:txBody>
       </p:sp>
@@ -6193,6 +6089,7 @@
           <a:lstStyle/>
           <a:p>
             <a:pPr algn="ctr"/>
+            <a:endParaRPr/>
           </a:p>
         </p:txBody>
       </p:sp>
@@ -6317,7 +6214,7 @@
 </file>
 
 <file path=ppt/slides/slide13.xml><?xml version="1.0" encoding="utf-8"?>
-<p:sld xmlns:a="http://schemas.openxmlformats.org/drawingml/2006/main" xmlns:p="http://schemas.openxmlformats.org/presentationml/2006/main" xmlns:r="http://schemas.openxmlformats.org/officeDocument/2006/relationships">
+<p:sld xmlns:a="http://schemas.openxmlformats.org/drawingml/2006/main" xmlns:r="http://schemas.openxmlformats.org/officeDocument/2006/relationships" xmlns:p="http://schemas.openxmlformats.org/presentationml/2006/main">
   <p:cSld>
     <p:bg>
       <p:bgPr>
@@ -6341,7 +6238,14 @@
         <p:cNvGrpSpPr/>
         <p:nvPr/>
       </p:nvGrpSpPr>
-      <p:grpSpPr/>
+      <p:grpSpPr>
+        <a:xfrm>
+          <a:off x="0" y="0"/>
+          <a:ext cx="0" cy="0"/>
+          <a:chOff x="0" y="0"/>
+          <a:chExt cx="0" cy="0"/>
+        </a:xfrm>
+      </p:grpSpPr>
       <p:sp>
         <p:nvSpPr>
           <p:cNvPr id="2" name="Rounded Rectangle 1"/>
@@ -6380,7 +6284,7 @@
           </a:fontRef>
         </p:style>
         <p:txBody>
-          <a:bodyPr rtlCol="0" anchor="ctr" wrap="square"/>
+          <a:bodyPr wrap="square" rtlCol="0" anchor="ctr"/>
           <a:lstStyle/>
           <a:p>
             <a:pPr algn="ctr">
@@ -6471,7 +6375,7 @@
           </a:fontRef>
         </p:style>
         <p:txBody>
-          <a:bodyPr rtlCol="0" anchor="ctr" wrap="square"/>
+          <a:bodyPr wrap="square" rtlCol="0" anchor="ctr"/>
           <a:lstStyle/>
           <a:p>
             <a:pPr algn="ctr">
@@ -6562,7 +6466,7 @@
           </a:fontRef>
         </p:style>
         <p:txBody>
-          <a:bodyPr rtlCol="0" anchor="ctr" wrap="square"/>
+          <a:bodyPr wrap="square" rtlCol="0" anchor="ctr"/>
           <a:lstStyle/>
           <a:p>
             <a:pPr algn="ctr">
@@ -6624,7 +6528,7 @@
 </file>
 
 <file path=ppt/slides/slide14.xml><?xml version="1.0" encoding="utf-8"?>
-<p:sld xmlns:a="http://schemas.openxmlformats.org/drawingml/2006/main" xmlns:p="http://schemas.openxmlformats.org/presentationml/2006/main" xmlns:r="http://schemas.openxmlformats.org/officeDocument/2006/relationships">
+<p:sld xmlns:a="http://schemas.openxmlformats.org/drawingml/2006/main" xmlns:r="http://schemas.openxmlformats.org/officeDocument/2006/relationships" xmlns:p="http://schemas.openxmlformats.org/presentationml/2006/main">
   <p:cSld>
     <p:bg>
       <p:bgPr>
@@ -6648,7 +6552,14 @@
         <p:cNvGrpSpPr/>
         <p:nvPr/>
       </p:nvGrpSpPr>
-      <p:grpSpPr/>
+      <p:grpSpPr>
+        <a:xfrm>
+          <a:off x="0" y="0"/>
+          <a:ext cx="0" cy="0"/>
+          <a:chOff x="0" y="0"/>
+          <a:chExt cx="0" cy="0"/>
+        </a:xfrm>
+      </p:grpSpPr>
       <p:sp>
         <p:nvSpPr>
           <p:cNvPr id="2" name="TextBox 1"/>
@@ -6725,6 +6636,7 @@
           <a:lstStyle/>
           <a:p>
             <a:pPr algn="ctr"/>
+            <a:endParaRPr/>
           </a:p>
         </p:txBody>
       </p:sp>
@@ -6848,6 +6760,7 @@
           <a:lstStyle/>
           <a:p>
             <a:pPr algn="ctr"/>
+            <a:endParaRPr/>
           </a:p>
         </p:txBody>
       </p:sp>
@@ -6967,6 +6880,7 @@
           <a:lstStyle/>
           <a:p>
             <a:pPr algn="ctr"/>
+            <a:endParaRPr/>
           </a:p>
         </p:txBody>
       </p:sp>
@@ -7059,7 +6973,7 @@
 </file>
 
 <file path=ppt/slides/slide15.xml><?xml version="1.0" encoding="utf-8"?>
-<p:sld xmlns:a="http://schemas.openxmlformats.org/drawingml/2006/main" xmlns:p="http://schemas.openxmlformats.org/presentationml/2006/main" xmlns:r="http://schemas.openxmlformats.org/officeDocument/2006/relationships">
+<p:sld xmlns:a="http://schemas.openxmlformats.org/drawingml/2006/main" xmlns:r="http://schemas.openxmlformats.org/officeDocument/2006/relationships" xmlns:p="http://schemas.openxmlformats.org/presentationml/2006/main">
   <p:cSld>
     <p:bg>
       <p:bgPr>
@@ -7083,7 +6997,14 @@
         <p:cNvGrpSpPr/>
         <p:nvPr/>
       </p:nvGrpSpPr>
-      <p:grpSpPr/>
+      <p:grpSpPr>
+        <a:xfrm>
+          <a:off x="0" y="0"/>
+          <a:ext cx="0" cy="0"/>
+          <a:chOff x="0" y="0"/>
+          <a:chExt cx="0" cy="0"/>
+        </a:xfrm>
+      </p:grpSpPr>
       <p:sp>
         <p:nvSpPr>
           <p:cNvPr id="2" name="TextBox 1"/>
@@ -7158,7 +7079,7 @@
           </a:fontRef>
         </p:style>
         <p:txBody>
-          <a:bodyPr rtlCol="0" anchor="ctr" wrap="square"/>
+          <a:bodyPr wrap="square" rtlCol="0" anchor="ctr"/>
           <a:lstStyle/>
           <a:p>
             <a:pPr algn="ctr">
@@ -7285,7 +7206,7 @@
           </a:fontRef>
         </p:style>
         <p:txBody>
-          <a:bodyPr rtlCol="0" anchor="ctr" wrap="square"/>
+          <a:bodyPr wrap="square" rtlCol="0" anchor="ctr"/>
           <a:lstStyle/>
           <a:p>
             <a:pPr algn="ctr">
@@ -7412,7 +7333,7 @@
           </a:fontRef>
         </p:style>
         <p:txBody>
-          <a:bodyPr rtlCol="0" anchor="ctr" wrap="square"/>
+          <a:bodyPr wrap="square" rtlCol="0" anchor="ctr"/>
           <a:lstStyle/>
           <a:p>
             <a:pPr algn="ctr">
@@ -7514,7 +7435,7 @@
 </file>
 
 <file path=ppt/slides/slide16.xml><?xml version="1.0" encoding="utf-8"?>
-<p:sld xmlns:a="http://schemas.openxmlformats.org/drawingml/2006/main" xmlns:p="http://schemas.openxmlformats.org/presentationml/2006/main" xmlns:r="http://schemas.openxmlformats.org/officeDocument/2006/relationships">
+<p:sld xmlns:a="http://schemas.openxmlformats.org/drawingml/2006/main" xmlns:r="http://schemas.openxmlformats.org/officeDocument/2006/relationships" xmlns:p="http://schemas.openxmlformats.org/presentationml/2006/main">
   <p:cSld>
     <p:bg>
       <p:bgPr>
@@ -7538,7 +7459,14 @@
         <p:cNvGrpSpPr/>
         <p:nvPr/>
       </p:nvGrpSpPr>
-      <p:grpSpPr/>
+      <p:grpSpPr>
+        <a:xfrm>
+          <a:off x="0" y="0"/>
+          <a:ext cx="0" cy="0"/>
+          <a:chOff x="0" y="0"/>
+          <a:chExt cx="0" cy="0"/>
+        </a:xfrm>
+      </p:grpSpPr>
       <p:sp>
         <p:nvSpPr>
           <p:cNvPr id="2" name="TextBox 1"/>
@@ -7613,7 +7541,7 @@
           </a:fontRef>
         </p:style>
         <p:txBody>
-          <a:bodyPr rtlCol="0" anchor="ctr" wrap="square"/>
+          <a:bodyPr wrap="square" rtlCol="0" anchor="ctr"/>
           <a:lstStyle/>
           <a:p>
             <a:pPr algn="ctr">
@@ -7712,7 +7640,7 @@
           </a:fontRef>
         </p:style>
         <p:txBody>
-          <a:bodyPr rtlCol="0" anchor="ctr" wrap="square"/>
+          <a:bodyPr wrap="square" rtlCol="0" anchor="ctr"/>
           <a:lstStyle/>
           <a:p>
             <a:pPr algn="ctr">
@@ -7811,7 +7739,7 @@
           </a:fontRef>
         </p:style>
         <p:txBody>
-          <a:bodyPr rtlCol="0" anchor="ctr" wrap="square"/>
+          <a:bodyPr wrap="square" rtlCol="0" anchor="ctr"/>
           <a:lstStyle/>
           <a:p>
             <a:pPr algn="ctr">
@@ -7921,7 +7849,7 @@
 </file>
 
 <file path=ppt/slides/slide17.xml><?xml version="1.0" encoding="utf-8"?>
-<p:sld xmlns:a="http://schemas.openxmlformats.org/drawingml/2006/main" xmlns:p="http://schemas.openxmlformats.org/presentationml/2006/main" xmlns:r="http://schemas.openxmlformats.org/officeDocument/2006/relationships">
+<p:sld xmlns:a="http://schemas.openxmlformats.org/drawingml/2006/main" xmlns:r="http://schemas.openxmlformats.org/officeDocument/2006/relationships" xmlns:p="http://schemas.openxmlformats.org/presentationml/2006/main">
   <p:cSld>
     <p:bg>
       <p:bgPr>
@@ -7945,7 +7873,14 @@
         <p:cNvGrpSpPr/>
         <p:nvPr/>
       </p:nvGrpSpPr>
-      <p:grpSpPr/>
+      <p:grpSpPr>
+        <a:xfrm>
+          <a:off x="0" y="0"/>
+          <a:ext cx="0" cy="0"/>
+          <a:chOff x="0" y="0"/>
+          <a:chExt cx="0" cy="0"/>
+        </a:xfrm>
+      </p:grpSpPr>
       <p:sp>
         <p:nvSpPr>
           <p:cNvPr id="2" name="TextBox 1"/>
@@ -8022,6 +7957,7 @@
           <a:lstStyle/>
           <a:p>
             <a:pPr algn="ctr"/>
+            <a:endParaRPr/>
           </a:p>
         </p:txBody>
       </p:sp>
@@ -8137,6 +8073,7 @@
           <a:lstStyle/>
           <a:p>
             <a:pPr algn="ctr"/>
+            <a:endParaRPr/>
           </a:p>
         </p:txBody>
       </p:sp>
@@ -8252,6 +8189,7 @@
           <a:lstStyle/>
           <a:p>
             <a:pPr algn="ctr"/>
+            <a:endParaRPr/>
           </a:p>
         </p:txBody>
       </p:sp>
@@ -8300,7 +8238,7 @@
         <p:spPr>
           <a:xfrm>
             <a:off x="1828800" y="4069080"/>
-            <a:ext cx="8229600" cy="457200"/>
+            <a:ext cx="8229600" cy="353943"/>
           </a:xfrm>
           <a:prstGeom prst="rect">
             <a:avLst/>
@@ -8322,7 +8260,16 @@
               </a:defRPr>
             </a:pPr>
             <a:r>
-              <a:t>New attack surfaces we haven't fully mapped.</a:t>
+              <a:rPr dirty="0"/>
+              <a:t>New attack surfaces </a:t>
+            </a:r>
+            <a:r>
+              <a:rPr lang="en-US" dirty="0"/>
+              <a:t>that </a:t>
+            </a:r>
+            <a:r>
+              <a:rPr dirty="0"/>
+              <a:t>we haven't fully mapped</a:t>
             </a:r>
           </a:p>
         </p:txBody>
@@ -8367,6 +8314,7 @@
           <a:lstStyle/>
           <a:p>
             <a:pPr algn="ctr"/>
+            <a:endParaRPr/>
           </a:p>
         </p:txBody>
       </p:sp>
@@ -8415,7 +8363,7 @@
         <p:spPr>
           <a:xfrm>
             <a:off x="1828800" y="5257800"/>
-            <a:ext cx="8229600" cy="457200"/>
+            <a:ext cx="8229600" cy="353943"/>
           </a:xfrm>
           <a:prstGeom prst="rect">
             <a:avLst/>
@@ -8437,7 +8385,8 @@
               </a:defRPr>
             </a:pPr>
             <a:r>
-              <a:t>Our frameworks weren't built for autonomous agents.</a:t>
+              <a:rPr dirty="0"/>
+              <a:t>Our frameworks weren't built for autonomous agents</a:t>
             </a:r>
           </a:p>
         </p:txBody>
@@ -8451,7 +8400,7 @@
 </file>
 
 <file path=ppt/slides/slide18.xml><?xml version="1.0" encoding="utf-8"?>
-<p:sld xmlns:a="http://schemas.openxmlformats.org/drawingml/2006/main" xmlns:p="http://schemas.openxmlformats.org/presentationml/2006/main" xmlns:r="http://schemas.openxmlformats.org/officeDocument/2006/relationships">
+<p:sld xmlns:a="http://schemas.openxmlformats.org/drawingml/2006/main" xmlns:r="http://schemas.openxmlformats.org/officeDocument/2006/relationships" xmlns:p="http://schemas.openxmlformats.org/presentationml/2006/main">
   <p:cSld>
     <p:bg>
       <p:bgPr>
@@ -8475,7 +8424,14 @@
         <p:cNvGrpSpPr/>
         <p:nvPr/>
       </p:nvGrpSpPr>
-      <p:grpSpPr/>
+      <p:grpSpPr>
+        <a:xfrm>
+          <a:off x="0" y="0"/>
+          <a:ext cx="0" cy="0"/>
+          <a:chOff x="0" y="0"/>
+          <a:chExt cx="0" cy="0"/>
+        </a:xfrm>
+      </p:grpSpPr>
       <p:sp>
         <p:nvSpPr>
           <p:cNvPr id="2" name="TextBox 1"/>
@@ -8485,7 +8441,7 @@
         <p:spPr>
           <a:xfrm>
             <a:off x="1371600" y="1097280"/>
-            <a:ext cx="9144000" cy="914400"/>
+            <a:ext cx="9144000" cy="646331"/>
           </a:xfrm>
           <a:prstGeom prst="rect">
             <a:avLst/>
@@ -8507,7 +8463,8 @@
               </a:defRPr>
             </a:pPr>
             <a:r>
-              <a:t>Talk to an agentic digital twin yourself.</a:t>
+              <a:rPr dirty="0"/>
+              <a:t>Talk to an agentic digital twin yourself</a:t>
             </a:r>
           </a:p>
         </p:txBody>
@@ -8521,7 +8478,7 @@
           <p:nvPr/>
         </p:nvPicPr>
         <p:blipFill>
-          <a:blip r:embed="rId2"/>
+          <a:blip r:embed="rId3"/>
           <a:stretch>
             <a:fillRect/>
           </a:stretch>
@@ -8574,7 +8531,7 @@
           </a:fontRef>
         </p:style>
         <p:txBody>
-          <a:bodyPr rtlCol="0" anchor="ctr" wrap="square"/>
+          <a:bodyPr wrap="square" rtlCol="0" anchor="ctr"/>
           <a:lstStyle/>
           <a:p>
             <a:pPr algn="ctr">
@@ -8629,7 +8586,7 @@
           </a:fontRef>
         </p:style>
         <p:txBody>
-          <a:bodyPr rtlCol="0" anchor="ctr" wrap="square"/>
+          <a:bodyPr wrap="square" rtlCol="0" anchor="ctr"/>
           <a:lstStyle/>
           <a:p>
             <a:pPr algn="ctr">
@@ -8684,7 +8641,7 @@
           </a:fontRef>
         </p:style>
         <p:txBody>
-          <a:bodyPr rtlCol="0" anchor="ctr" wrap="square"/>
+          <a:bodyPr wrap="square" rtlCol="0" anchor="ctr"/>
           <a:lstStyle/>
           <a:p>
             <a:pPr algn="ctr">
@@ -8746,7 +8703,7 @@
 </file>
 
 <file path=ppt/slides/slide19.xml><?xml version="1.0" encoding="utf-8"?>
-<p:sld xmlns:a="http://schemas.openxmlformats.org/drawingml/2006/main" xmlns:p="http://schemas.openxmlformats.org/presentationml/2006/main" xmlns:r="http://schemas.openxmlformats.org/officeDocument/2006/relationships">
+<p:sld xmlns:a="http://schemas.openxmlformats.org/drawingml/2006/main" xmlns:r="http://schemas.openxmlformats.org/officeDocument/2006/relationships" xmlns:p="http://schemas.openxmlformats.org/presentationml/2006/main">
   <p:cSld>
     <p:bg>
       <p:bgPr>
@@ -8770,7 +8727,14 @@
         <p:cNvGrpSpPr/>
         <p:nvPr/>
       </p:nvGrpSpPr>
-      <p:grpSpPr/>
+      <p:grpSpPr>
+        <a:xfrm>
+          <a:off x="0" y="0"/>
+          <a:ext cx="0" cy="0"/>
+          <a:chOff x="0" y="0"/>
+          <a:chExt cx="0" cy="0"/>
+        </a:xfrm>
+      </p:grpSpPr>
       <p:sp>
         <p:nvSpPr>
           <p:cNvPr id="2" name="TextBox 1"/>
@@ -8802,6 +8766,7 @@
               </a:defRPr>
             </a:pPr>
             <a:r>
+              <a:rPr dirty="0"/>
               <a:t>Questions?</a:t>
             </a:r>
           </a:p>
@@ -8847,6 +8812,7 @@
           <a:lstStyle/>
           <a:p>
             <a:pPr algn="ctr"/>
+            <a:endParaRPr/>
           </a:p>
         </p:txBody>
       </p:sp>
@@ -8881,6 +8847,7 @@
               </a:defRPr>
             </a:pPr>
             <a:r>
+              <a:rPr dirty="0"/>
               <a:t>Anthony Poole</a:t>
             </a:r>
           </a:p>
@@ -8917,6 +8884,7 @@
               </a:defRPr>
             </a:pPr>
             <a:r>
+              <a:rPr dirty="0"/>
               <a:t>Software Engineer, Microsoft</a:t>
             </a:r>
           </a:p>
@@ -9003,7 +8971,7 @@
           <p:nvPr/>
         </p:nvPicPr>
         <p:blipFill>
-          <a:blip r:embed="rId2"/>
+          <a:blip r:embed="rId3"/>
           <a:stretch>
             <a:fillRect/>
           </a:stretch>
@@ -9063,7 +9031,7 @@
 </file>
 
 <file path=ppt/slides/slide2.xml><?xml version="1.0" encoding="utf-8"?>
-<p:sld xmlns:a="http://schemas.openxmlformats.org/drawingml/2006/main" xmlns:p="http://schemas.openxmlformats.org/presentationml/2006/main" xmlns:r="http://schemas.openxmlformats.org/officeDocument/2006/relationships">
+<p:sld xmlns:a="http://schemas.openxmlformats.org/drawingml/2006/main" xmlns:r="http://schemas.openxmlformats.org/officeDocument/2006/relationships" xmlns:p="http://schemas.openxmlformats.org/presentationml/2006/main">
   <p:cSld>
     <p:bg>
       <p:bgPr>
@@ -9087,7 +9055,14 @@
         <p:cNvGrpSpPr/>
         <p:nvPr/>
       </p:nvGrpSpPr>
-      <p:grpSpPr/>
+      <p:grpSpPr>
+        <a:xfrm>
+          <a:off x="0" y="0"/>
+          <a:ext cx="0" cy="0"/>
+          <a:chOff x="0" y="0"/>
+          <a:chExt cx="0" cy="0"/>
+        </a:xfrm>
+      </p:grpSpPr>
       <p:sp>
         <p:nvSpPr>
           <p:cNvPr id="2" name="TextBox 1"/>
@@ -9119,6 +9094,7 @@
               </a:defRPr>
             </a:pPr>
             <a:r>
+              <a:rPr dirty="0"/>
               <a:t>Digital Twins</a:t>
             </a:r>
           </a:p>
@@ -9164,6 +9140,7 @@
           <a:lstStyle/>
           <a:p>
             <a:pPr algn="ctr"/>
+            <a:endParaRPr/>
           </a:p>
         </p:txBody>
       </p:sp>
@@ -9176,7 +9153,7 @@
 </file>
 
 <file path=ppt/slides/slide20.xml><?xml version="1.0" encoding="utf-8"?>
-<p:sld xmlns:a="http://schemas.openxmlformats.org/drawingml/2006/main" xmlns:p="http://schemas.openxmlformats.org/presentationml/2006/main" xmlns:r="http://schemas.openxmlformats.org/officeDocument/2006/relationships">
+<p:sld xmlns:a="http://schemas.openxmlformats.org/drawingml/2006/main" xmlns:r="http://schemas.openxmlformats.org/officeDocument/2006/relationships" xmlns:p="http://schemas.openxmlformats.org/presentationml/2006/main">
   <p:cSld>
     <p:bg>
       <p:bgPr>
@@ -9200,7 +9177,14 @@
         <p:cNvGrpSpPr/>
         <p:nvPr/>
       </p:nvGrpSpPr>
-      <p:grpSpPr/>
+      <p:grpSpPr>
+        <a:xfrm>
+          <a:off x="0" y="0"/>
+          <a:ext cx="0" cy="0"/>
+          <a:chOff x="0" y="0"/>
+          <a:chExt cx="0" cy="0"/>
+        </a:xfrm>
+      </p:grpSpPr>
       <p:sp>
         <p:nvSpPr>
           <p:cNvPr id="2" name="TextBox 1"/>
@@ -9210,7 +9194,7 @@
         <p:spPr>
           <a:xfrm>
             <a:off x="1371600" y="2286000"/>
-            <a:ext cx="9144000" cy="2286000"/>
+            <a:ext cx="9144000" cy="1077218"/>
           </a:xfrm>
           <a:prstGeom prst="rect">
             <a:avLst/>
@@ -9232,11 +9216,15 @@
               </a:defRPr>
             </a:pPr>
             <a:r>
-              <a:t>Digital twins give us the body.</a:t>
-            </a:r>
-            <a:br/>
-            <a:r>
-              <a:t>It's time to consider the mind.</a:t>
+              <a:rPr dirty="0"/>
+              <a:t>Digital twins give us the body</a:t>
+            </a:r>
+            <a:br>
+              <a:rPr dirty="0"/>
+            </a:br>
+            <a:r>
+              <a:rPr dirty="0"/>
+              <a:t>It's time to consider the mind</a:t>
             </a:r>
           </a:p>
         </p:txBody>
@@ -9281,6 +9269,7 @@
           <a:lstStyle/>
           <a:p>
             <a:pPr algn="ctr"/>
+            <a:endParaRPr/>
           </a:p>
         </p:txBody>
       </p:sp>
@@ -9293,7 +9282,7 @@
         <p:spPr>
           <a:xfrm>
             <a:off x="1371600" y="5120640"/>
-            <a:ext cx="5486400" cy="457200"/>
+            <a:ext cx="5486400" cy="430887"/>
           </a:xfrm>
           <a:prstGeom prst="rect">
             <a:avLst/>
@@ -9315,7 +9304,8 @@
               </a:defRPr>
             </a:pPr>
             <a:r>
-              <a:t>Thank you.</a:t>
+              <a:rPr dirty="0"/>
+              <a:t>Thank you</a:t>
             </a:r>
           </a:p>
         </p:txBody>
@@ -9329,7 +9319,7 @@
 </file>
 
 <file path=ppt/slides/slide3.xml><?xml version="1.0" encoding="utf-8"?>
-<p:sld xmlns:a="http://schemas.openxmlformats.org/drawingml/2006/main" xmlns:p="http://schemas.openxmlformats.org/presentationml/2006/main" xmlns:r="http://schemas.openxmlformats.org/officeDocument/2006/relationships">
+<p:sld xmlns:a="http://schemas.openxmlformats.org/drawingml/2006/main" xmlns:r="http://schemas.openxmlformats.org/officeDocument/2006/relationships" xmlns:p="http://schemas.openxmlformats.org/presentationml/2006/main">
   <p:cSld>
     <p:bg>
       <p:bgPr>
@@ -9353,7 +9343,14 @@
         <p:cNvGrpSpPr/>
         <p:nvPr/>
       </p:nvGrpSpPr>
-      <p:grpSpPr/>
+      <p:grpSpPr>
+        <a:xfrm>
+          <a:off x="0" y="0"/>
+          <a:ext cx="0" cy="0"/>
+          <a:chOff x="0" y="0"/>
+          <a:chExt cx="0" cy="0"/>
+        </a:xfrm>
+      </p:grpSpPr>
       <p:sp>
         <p:nvSpPr>
           <p:cNvPr id="2" name="TextBox 1"/>
@@ -9428,7 +9425,7 @@
           </a:fontRef>
         </p:style>
         <p:txBody>
-          <a:bodyPr rtlCol="0" anchor="ctr" wrap="square"/>
+          <a:bodyPr wrap="square" rtlCol="0" anchor="ctr"/>
           <a:lstStyle/>
           <a:p>
             <a:pPr algn="ctr">
@@ -9631,7 +9628,7 @@
           </a:fontRef>
         </p:style>
         <p:txBody>
-          <a:bodyPr rtlCol="0" anchor="ctr" wrap="square"/>
+          <a:bodyPr wrap="square" rtlCol="0" anchor="ctr"/>
           <a:lstStyle/>
           <a:p>
             <a:pPr algn="ctr">
@@ -9661,7 +9658,7 @@
         <p:spPr>
           <a:xfrm>
             <a:off x="1097280" y="5669280"/>
-            <a:ext cx="10058400" cy="731520"/>
+            <a:ext cx="10058400" cy="400110"/>
           </a:xfrm>
           <a:prstGeom prst="rect">
             <a:avLst/>
@@ -9683,7 +9680,8 @@
               </a:defRPr>
             </a:pPr>
             <a:r>
-              <a:t>A virtual model, continuously synced with a physical system.</a:t>
+              <a:rPr dirty="0"/>
+              <a:t>A virtual model, continuously synced with a physical system</a:t>
             </a:r>
           </a:p>
         </p:txBody>
@@ -9697,7 +9695,7 @@
 </file>
 
 <file path=ppt/slides/slide4.xml><?xml version="1.0" encoding="utf-8"?>
-<p:sld xmlns:a="http://schemas.openxmlformats.org/drawingml/2006/main" xmlns:p="http://schemas.openxmlformats.org/presentationml/2006/main" xmlns:r="http://schemas.openxmlformats.org/officeDocument/2006/relationships">
+<p:sld xmlns:a="http://schemas.openxmlformats.org/drawingml/2006/main" xmlns:r="http://schemas.openxmlformats.org/officeDocument/2006/relationships" xmlns:p="http://schemas.openxmlformats.org/presentationml/2006/main">
   <p:cSld>
     <p:bg>
       <p:bgPr>
@@ -9721,7 +9719,14 @@
         <p:cNvGrpSpPr/>
         <p:nvPr/>
       </p:nvGrpSpPr>
-      <p:grpSpPr/>
+      <p:grpSpPr>
+        <a:xfrm>
+          <a:off x="0" y="0"/>
+          <a:ext cx="0" cy="0"/>
+          <a:chOff x="0" y="0"/>
+          <a:chExt cx="0" cy="0"/>
+        </a:xfrm>
+      </p:grpSpPr>
       <p:sp>
         <p:nvSpPr>
           <p:cNvPr id="2" name="TextBox 1"/>
@@ -9834,6 +9839,7 @@
           <a:lstStyle/>
           <a:p>
             <a:pPr algn="ctr"/>
+            <a:endParaRPr/>
           </a:p>
         </p:txBody>
       </p:sp>
@@ -9949,6 +9955,7 @@
           <a:lstStyle/>
           <a:p>
             <a:pPr algn="ctr"/>
+            <a:endParaRPr/>
           </a:p>
         </p:txBody>
       </p:sp>
@@ -10033,7 +10040,7 @@
 </file>
 
 <file path=ppt/slides/slide5.xml><?xml version="1.0" encoding="utf-8"?>
-<p:sld xmlns:a="http://schemas.openxmlformats.org/drawingml/2006/main" xmlns:p="http://schemas.openxmlformats.org/presentationml/2006/main" xmlns:r="http://schemas.openxmlformats.org/officeDocument/2006/relationships">
+<p:sld xmlns:a="http://schemas.openxmlformats.org/drawingml/2006/main" xmlns:r="http://schemas.openxmlformats.org/officeDocument/2006/relationships" xmlns:p="http://schemas.openxmlformats.org/presentationml/2006/main">
   <p:cSld>
     <p:bg>
       <p:bgPr>
@@ -10057,7 +10064,14 @@
         <p:cNvGrpSpPr/>
         <p:nvPr/>
       </p:nvGrpSpPr>
-      <p:grpSpPr/>
+      <p:grpSpPr>
+        <a:xfrm>
+          <a:off x="0" y="0"/>
+          <a:ext cx="0" cy="0"/>
+          <a:chOff x="0" y="0"/>
+          <a:chExt cx="0" cy="0"/>
+        </a:xfrm>
+      </p:grpSpPr>
       <p:sp>
         <p:nvSpPr>
           <p:cNvPr id="2" name="TextBox 1"/>
@@ -10132,7 +10146,7 @@
           </a:fontRef>
         </p:style>
         <p:txBody>
-          <a:bodyPr rtlCol="0" anchor="ctr" wrap="square"/>
+          <a:bodyPr wrap="square" rtlCol="0" anchor="ctr"/>
           <a:lstStyle/>
           <a:p>
             <a:pPr algn="ctr">
@@ -10263,7 +10277,7 @@
           </a:fontRef>
         </p:style>
         <p:txBody>
-          <a:bodyPr rtlCol="0" anchor="ctr" wrap="square"/>
+          <a:bodyPr wrap="square" rtlCol="0" anchor="ctr"/>
           <a:lstStyle/>
           <a:p>
             <a:pPr algn="ctr">
@@ -10394,7 +10408,7 @@
           </a:fontRef>
         </p:style>
         <p:txBody>
-          <a:bodyPr rtlCol="0" anchor="ctr" wrap="square"/>
+          <a:bodyPr wrap="square" rtlCol="0" anchor="ctr"/>
           <a:lstStyle/>
           <a:p>
             <a:pPr algn="ctr">
@@ -10523,7 +10537,7 @@
           </a:fontRef>
         </p:style>
         <p:txBody>
-          <a:bodyPr rtlCol="0" anchor="ctr" wrap="square"/>
+          <a:bodyPr wrap="square" rtlCol="0" anchor="ctr"/>
           <a:lstStyle/>
           <a:p>
             <a:pPr algn="ctr">
@@ -10549,7 +10563,7 @@
         <p:spPr>
           <a:xfrm>
             <a:off x="914400" y="4754880"/>
-            <a:ext cx="10058400" cy="1371600"/>
+            <a:ext cx="10058400" cy="769441"/>
           </a:xfrm>
           <a:prstGeom prst="rect">
             <a:avLst/>
@@ -10571,1222 +10585,15 @@
               </a:defRPr>
             </a:pPr>
             <a:r>
-              <a:t>Each generation gets smarter about what's happening.</a:t>
-            </a:r>
-            <a:br/>
-            <a:r>
-              <a:t>But the human is still the one who decides what to do about it.</a:t>
-            </a:r>
-          </a:p>
-        </p:txBody>
-      </p:sp>
-    </p:spTree>
-  </p:cSld>
-  <p:clrMapOvr>
-    <a:masterClrMapping/>
-  </p:clrMapOvr>
-  <p:timing>
-    <p:tnLst>
-      <p:par>
-        <p:cTn id="1" dur="indefinite" restart="never" nodeType="tmRoot">
-          <p:childTnLst>
-            <p:seq concurrent="1" nextAc="seek">
-              <p:cTn id="2" dur="indefinite" nodeType="mainSeq">
-                <p:childTnLst>
-                  <p:par>
-                    <p:cTn id="3" fill="hold">
-                      <p:stCondLst>
-                        <p:cond delay="0"/>
-                      </p:stCondLst>
-                      <p:childTnLst>
-                        <p:par>
-                          <p:cTn id="4" fill="hold">
-                            <p:stCondLst>
-                              <p:cond delay="0"/>
-                            </p:stCondLst>
-                            <p:childTnLst>
-                              <p:par>
-                                <p:cTn id="5" presetID="1" presetClass="entr" presetSubtype="0" fill="hold" nodeType="clickEffect">
-                                  <p:stCondLst>
-                                    <p:cond delay="0"/>
-                                  </p:stCondLst>
-                                  <p:childTnLst>
-                                    <p:set>
-                                      <p:cBhvr>
-                                        <p:cTn id="6" dur="1" fill="hold">
-                                          <p:stCondLst>
-                                            <p:cond delay="0"/>
-                                          </p:stCondLst>
-                                        </p:cTn>
-                                        <p:tgtEl>
-                                          <p:spTgt spid="3"/>
-                                        </p:tgtEl>
-                                        <p:attrNameLst>
-                                          <p:attrName>style.visibility</p:attrName>
-                                        </p:attrNameLst>
-                                      </p:cBhvr>
-                                      <p:to>
-                                        <p:strVal val="visible"/>
-                                      </p:to>
-                                    </p:set>
-                                  </p:childTnLst>
-                                </p:cTn>
-                              </p:par>
-                            </p:childTnLst>
-                          </p:cTn>
-                        </p:par>
-                        <p:par>
-                          <p:cTn id="7" fill="hold">
-                            <p:stCondLst>
-                              <p:cond delay="0"/>
-                            </p:stCondLst>
-                            <p:childTnLst>
-                              <p:par>
-                                <p:cTn id="8" presetID="1" presetClass="entr" presetSubtype="0" fill="hold" nodeType="clickEffect">
-                                  <p:stCondLst>
-                                    <p:cond delay="0"/>
-                                  </p:stCondLst>
-                                  <p:childTnLst>
-                                    <p:set>
-                                      <p:cBhvr>
-                                        <p:cTn id="9" dur="1" fill="hold">
-                                          <p:stCondLst>
-                                            <p:cond delay="0"/>
-                                          </p:stCondLst>
-                                        </p:cTn>
-                                        <p:tgtEl>
-                                          <p:spTgt spid="4"/>
-                                        </p:tgtEl>
-                                        <p:attrNameLst>
-                                          <p:attrName>style.visibility</p:attrName>
-                                        </p:attrNameLst>
-                                      </p:cBhvr>
-                                      <p:to>
-                                        <p:strVal val="visible"/>
-                                      </p:to>
-                                    </p:set>
-                                  </p:childTnLst>
-                                </p:cTn>
-                              </p:par>
-                            </p:childTnLst>
-                          </p:cTn>
-                        </p:par>
-                        <p:par>
-                          <p:cTn id="10" fill="hold">
-                            <p:stCondLst>
-                              <p:cond delay="0"/>
-                            </p:stCondLst>
-                            <p:childTnLst>
-                              <p:par>
-                                <p:cTn id="11" presetID="1" presetClass="entr" presetSubtype="0" fill="hold" nodeType="clickEffect">
-                                  <p:stCondLst>
-                                    <p:cond delay="0"/>
-                                  </p:stCondLst>
-                                  <p:childTnLst>
-                                    <p:set>
-                                      <p:cBhvr>
-                                        <p:cTn id="12" dur="1" fill="hold">
-                                          <p:stCondLst>
-                                            <p:cond delay="0"/>
-                                          </p:stCondLst>
-                                        </p:cTn>
-                                        <p:tgtEl>
-                                          <p:spTgt spid="5"/>
-                                        </p:tgtEl>
-                                        <p:attrNameLst>
-                                          <p:attrName>style.visibility</p:attrName>
-                                        </p:attrNameLst>
-                                      </p:cBhvr>
-                                      <p:to>
-                                        <p:strVal val="visible"/>
-                                      </p:to>
-                                    </p:set>
-                                  </p:childTnLst>
-                                </p:cTn>
-                              </p:par>
-                            </p:childTnLst>
-                          </p:cTn>
-                        </p:par>
-                      </p:childTnLst>
-                    </p:cTn>
-                  </p:par>
-                  <p:par>
-                    <p:cTn id="13" fill="hold">
-                      <p:stCondLst>
-                        <p:cond delay="0"/>
-                      </p:stCondLst>
-                      <p:childTnLst>
-                        <p:par>
-                          <p:cTn id="14" fill="hold">
-                            <p:stCondLst>
-                              <p:cond delay="0"/>
-                            </p:stCondLst>
-                            <p:childTnLst>
-                              <p:par>
-                                <p:cTn id="15" presetID="1" presetClass="entr" presetSubtype="0" fill="hold" nodeType="clickEffect">
-                                  <p:stCondLst>
-                                    <p:cond delay="0"/>
-                                  </p:stCondLst>
-                                  <p:childTnLst>
-                                    <p:set>
-                                      <p:cBhvr>
-                                        <p:cTn id="16" dur="1" fill="hold">
-                                          <p:stCondLst>
-                                            <p:cond delay="0"/>
-                                          </p:stCondLst>
-                                        </p:cTn>
-                                        <p:tgtEl>
-                                          <p:spTgt spid="6"/>
-                                        </p:tgtEl>
-                                        <p:attrNameLst>
-                                          <p:attrName>style.visibility</p:attrName>
-                                        </p:attrNameLst>
-                                      </p:cBhvr>
-                                      <p:to>
-                                        <p:strVal val="visible"/>
-                                      </p:to>
-                                    </p:set>
-                                  </p:childTnLst>
-                                </p:cTn>
-                              </p:par>
-                            </p:childTnLst>
-                          </p:cTn>
-                        </p:par>
-                        <p:par>
-                          <p:cTn id="17" fill="hold">
-                            <p:stCondLst>
-                              <p:cond delay="0"/>
-                            </p:stCondLst>
-                            <p:childTnLst>
-                              <p:par>
-                                <p:cTn id="18" presetID="1" presetClass="entr" presetSubtype="0" fill="hold" nodeType="clickEffect">
-                                  <p:stCondLst>
-                                    <p:cond delay="0"/>
-                                  </p:stCondLst>
-                                  <p:childTnLst>
-                                    <p:set>
-                                      <p:cBhvr>
-                                        <p:cTn id="19" dur="1" fill="hold">
-                                          <p:stCondLst>
-                                            <p:cond delay="0"/>
-                                          </p:stCondLst>
-                                        </p:cTn>
-                                        <p:tgtEl>
-                                          <p:spTgt spid="7"/>
-                                        </p:tgtEl>
-                                        <p:attrNameLst>
-                                          <p:attrName>style.visibility</p:attrName>
-                                        </p:attrNameLst>
-                                      </p:cBhvr>
-                                      <p:to>
-                                        <p:strVal val="visible"/>
-                                      </p:to>
-                                    </p:set>
-                                  </p:childTnLst>
-                                </p:cTn>
-                              </p:par>
-                            </p:childTnLst>
-                          </p:cTn>
-                        </p:par>
-                        <p:par>
-                          <p:cTn id="20" fill="hold">
-                            <p:stCondLst>
-                              <p:cond delay="0"/>
-                            </p:stCondLst>
-                            <p:childTnLst>
-                              <p:par>
-                                <p:cTn id="21" presetID="1" presetClass="entr" presetSubtype="0" fill="hold" nodeType="clickEffect">
-                                  <p:stCondLst>
-                                    <p:cond delay="0"/>
-                                  </p:stCondLst>
-                                  <p:childTnLst>
-                                    <p:set>
-                                      <p:cBhvr>
-                                        <p:cTn id="22" dur="1" fill="hold">
-                                          <p:stCondLst>
-                                            <p:cond delay="0"/>
-                                          </p:stCondLst>
-                                        </p:cTn>
-                                        <p:tgtEl>
-                                          <p:spTgt spid="8"/>
-                                        </p:tgtEl>
-                                        <p:attrNameLst>
-                                          <p:attrName>style.visibility</p:attrName>
-                                        </p:attrNameLst>
-                                      </p:cBhvr>
-                                      <p:to>
-                                        <p:strVal val="visible"/>
-                                      </p:to>
-                                    </p:set>
-                                  </p:childTnLst>
-                                </p:cTn>
-                              </p:par>
-                            </p:childTnLst>
-                          </p:cTn>
-                        </p:par>
-                      </p:childTnLst>
-                    </p:cTn>
-                  </p:par>
-                  <p:par>
-                    <p:cTn id="23" fill="hold">
-                      <p:stCondLst>
-                        <p:cond delay="0"/>
-                      </p:stCondLst>
-                      <p:childTnLst>
-                        <p:par>
-                          <p:cTn id="24" fill="hold">
-                            <p:stCondLst>
-                              <p:cond delay="0"/>
-                            </p:stCondLst>
-                            <p:childTnLst>
-                              <p:par>
-                                <p:cTn id="25" presetID="1" presetClass="entr" presetSubtype="0" fill="hold" nodeType="clickEffect">
-                                  <p:stCondLst>
-                                    <p:cond delay="0"/>
-                                  </p:stCondLst>
-                                  <p:childTnLst>
-                                    <p:set>
-                                      <p:cBhvr>
-                                        <p:cTn id="26" dur="1" fill="hold">
-                                          <p:stCondLst>
-                                            <p:cond delay="0"/>
-                                          </p:stCondLst>
-                                        </p:cTn>
-                                        <p:tgtEl>
-                                          <p:spTgt spid="9"/>
-                                        </p:tgtEl>
-                                        <p:attrNameLst>
-                                          <p:attrName>style.visibility</p:attrName>
-                                        </p:attrNameLst>
-                                      </p:cBhvr>
-                                      <p:to>
-                                        <p:strVal val="visible"/>
-                                      </p:to>
-                                    </p:set>
-                                  </p:childTnLst>
-                                </p:cTn>
-                              </p:par>
-                            </p:childTnLst>
-                          </p:cTn>
-                        </p:par>
-                        <p:par>
-                          <p:cTn id="27" fill="hold">
-                            <p:stCondLst>
-                              <p:cond delay="0"/>
-                            </p:stCondLst>
-                            <p:childTnLst>
-                              <p:par>
-                                <p:cTn id="28" presetID="1" presetClass="entr" presetSubtype="0" fill="hold" nodeType="clickEffect">
-                                  <p:stCondLst>
-                                    <p:cond delay="0"/>
-                                  </p:stCondLst>
-                                  <p:childTnLst>
-                                    <p:set>
-                                      <p:cBhvr>
-                                        <p:cTn id="29" dur="1" fill="hold">
-                                          <p:stCondLst>
-                                            <p:cond delay="0"/>
-                                          </p:stCondLst>
-                                        </p:cTn>
-                                        <p:tgtEl>
-                                          <p:spTgt spid="10"/>
-                                        </p:tgtEl>
-                                        <p:attrNameLst>
-                                          <p:attrName>style.visibility</p:attrName>
-                                        </p:attrNameLst>
-                                      </p:cBhvr>
-                                      <p:to>
-                                        <p:strVal val="visible"/>
-                                      </p:to>
-                                    </p:set>
-                                  </p:childTnLst>
-                                </p:cTn>
-                              </p:par>
-                            </p:childTnLst>
-                          </p:cTn>
-                        </p:par>
-                        <p:par>
-                          <p:cTn id="30" fill="hold">
-                            <p:stCondLst>
-                              <p:cond delay="0"/>
-                            </p:stCondLst>
-                            <p:childTnLst>
-                              <p:par>
-                                <p:cTn id="31" presetID="1" presetClass="entr" presetSubtype="0" fill="hold" nodeType="clickEffect">
-                                  <p:stCondLst>
-                                    <p:cond delay="0"/>
-                                  </p:stCondLst>
-                                  <p:childTnLst>
-                                    <p:set>
-                                      <p:cBhvr>
-                                        <p:cTn id="32" dur="1" fill="hold">
-                                          <p:stCondLst>
-                                            <p:cond delay="0"/>
-                                          </p:stCondLst>
-                                        </p:cTn>
-                                        <p:tgtEl>
-                                          <p:spTgt spid="11"/>
-                                        </p:tgtEl>
-                                        <p:attrNameLst>
-                                          <p:attrName>style.visibility</p:attrName>
-                                        </p:attrNameLst>
-                                      </p:cBhvr>
-                                      <p:to>
-                                        <p:strVal val="visible"/>
-                                      </p:to>
-                                    </p:set>
-                                  </p:childTnLst>
-                                </p:cTn>
-                              </p:par>
-                            </p:childTnLst>
-                          </p:cTn>
-                        </p:par>
-                      </p:childTnLst>
-                    </p:cTn>
-                  </p:par>
-                  <p:par>
-                    <p:cTn id="33" fill="hold">
-                      <p:stCondLst>
-                        <p:cond delay="0"/>
-                      </p:stCondLst>
-                      <p:childTnLst>
-                        <p:par>
-                          <p:cTn id="34" fill="hold">
-                            <p:stCondLst>
-                              <p:cond delay="0"/>
-                            </p:stCondLst>
-                            <p:childTnLst>
-                              <p:par>
-                                <p:cTn id="35" presetID="1" presetClass="entr" presetSubtype="0" fill="hold" nodeType="clickEffect">
-                                  <p:stCondLst>
-                                    <p:cond delay="0"/>
-                                  </p:stCondLst>
-                                  <p:childTnLst>
-                                    <p:set>
-                                      <p:cBhvr>
-                                        <p:cTn id="36" dur="1" fill="hold">
-                                          <p:stCondLst>
-                                            <p:cond delay="0"/>
-                                          </p:stCondLst>
-                                        </p:cTn>
-                                        <p:tgtEl>
-                                          <p:spTgt spid="12"/>
-                                        </p:tgtEl>
-                                        <p:attrNameLst>
-                                          <p:attrName>style.visibility</p:attrName>
-                                        </p:attrNameLst>
-                                      </p:cBhvr>
-                                      <p:to>
-                                        <p:strVal val="visible"/>
-                                      </p:to>
-                                    </p:set>
-                                  </p:childTnLst>
-                                </p:cTn>
-                              </p:par>
-                            </p:childTnLst>
-                          </p:cTn>
-                        </p:par>
-                      </p:childTnLst>
-                    </p:cTn>
-                  </p:par>
-                  <p:par>
-                    <p:cTn id="37" fill="hold">
-                      <p:stCondLst>
-                        <p:cond delay="0"/>
-                      </p:stCondLst>
-                      <p:childTnLst>
-                        <p:par>
-                          <p:cTn id="38" fill="hold">
-                            <p:stCondLst>
-                              <p:cond delay="0"/>
-                            </p:stCondLst>
-                            <p:childTnLst>
-                              <p:par>
-                                <p:cTn id="39" presetID="1" presetClass="entr" presetSubtype="0" fill="hold" nodeType="clickEffect">
-                                  <p:stCondLst>
-                                    <p:cond delay="0"/>
-                                  </p:stCondLst>
-                                  <p:childTnLst>
-                                    <p:set>
-                                      <p:cBhvr>
-                                        <p:cTn id="40" dur="1" fill="hold">
-                                          <p:stCondLst>
-                                            <p:cond delay="0"/>
-                                          </p:stCondLst>
-                                        </p:cTn>
-                                        <p:tgtEl>
-                                          <p:spTgt spid="13"/>
-                                        </p:tgtEl>
-                                        <p:attrNameLst>
-                                          <p:attrName>style.visibility</p:attrName>
-                                        </p:attrNameLst>
-                                      </p:cBhvr>
-                                      <p:to>
-                                        <p:strVal val="visible"/>
-                                      </p:to>
-                                    </p:set>
-                                  </p:childTnLst>
-                                </p:cTn>
-                              </p:par>
-                            </p:childTnLst>
-                          </p:cTn>
-                        </p:par>
-                      </p:childTnLst>
-                    </p:cTn>
-                  </p:par>
-                </p:childTnLst>
-              </p:cTn>
-              <p:prevCondLst>
-                <p:cond evt="onPrev" delay="0">
-                  <p:tgtEl>
-                    <p:sldTgt/>
-                  </p:tgtEl>
-                </p:cond>
-              </p:prevCondLst>
-              <p:nextCondLst>
-                <p:cond evt="onNext" delay="0">
-                  <p:tgtEl>
-                    <p:sldTgt/>
-                  </p:tgtEl>
-                </p:cond>
-              </p:nextCondLst>
-            </p:seq>
-          </p:childTnLst>
-        </p:cTn>
-      </p:par>
-    </p:tnLst>
-    <p:bldLst>
-      <p:bldP spid="3" grpId="0" animBg="1"/>
-      <p:bldP spid="4" grpId="0" animBg="1"/>
-      <p:bldP spid="5" grpId="0" animBg="1"/>
-      <p:bldP spid="6" grpId="0" animBg="1"/>
-      <p:bldP spid="7" grpId="0" animBg="1"/>
-      <p:bldP spid="8" grpId="0" animBg="1"/>
-      <p:bldP spid="9" grpId="0" animBg="1"/>
-      <p:bldP spid="10" grpId="0" animBg="1"/>
-      <p:bldP spid="11" grpId="0" animBg="1"/>
-      <p:bldP spid="12" grpId="0" animBg="1"/>
-      <p:bldP spid="13" grpId="0" animBg="1"/>
-    </p:bldLst>
-  </p:timing>
-</p:sld>
-</file>
-
-<file path=ppt/slides/slide6.xml><?xml version="1.0" encoding="utf-8"?>
-<p:sld xmlns:a="http://schemas.openxmlformats.org/drawingml/2006/main" xmlns:p="http://schemas.openxmlformats.org/presentationml/2006/main" xmlns:r="http://schemas.openxmlformats.org/officeDocument/2006/relationships">
-  <p:cSld>
-    <p:bg>
-      <p:bgPr>
-        <a:gradFill rotWithShape="1">
-          <a:gsLst>
-            <a:gs pos="0">
-              <a:srgbClr val="0F172A"/>
-            </a:gs>
-            <a:gs pos="100000">
-              <a:srgbClr val="1E1E2E"/>
-            </a:gs>
-          </a:gsLst>
-          <a:lin scaled="0"/>
-        </a:gradFill>
-        <a:effectLst/>
-      </p:bgPr>
-    </p:bg>
-    <p:spTree>
-      <p:nvGrpSpPr>
-        <p:cNvPr id="1" name=""/>
-        <p:cNvGrpSpPr/>
-        <p:nvPr/>
-      </p:nvGrpSpPr>
-      <p:grpSpPr/>
-      <p:sp>
-        <p:nvSpPr>
-          <p:cNvPr id="2" name="TextBox 1"/>
-          <p:cNvSpPr txBox="1"/>
-          <p:nvPr/>
-        </p:nvSpPr>
-        <p:spPr>
-          <a:xfrm>
-            <a:off x="1371600" y="2286000"/>
-            <a:ext cx="9144000" cy="2743200"/>
-          </a:xfrm>
-          <a:prstGeom prst="rect">
-            <a:avLst/>
-          </a:prstGeom>
-          <a:noFill/>
-        </p:spPr>
-        <p:txBody>
-          <a:bodyPr wrap="square">
-            <a:spAutoFit/>
-          </a:bodyPr>
-          <a:lstStyle/>
-          <a:p>
-            <a:pPr algn="l">
-              <a:defRPr sz="4200" b="1" i="0">
-                <a:solidFill>
-                  <a:srgbClr val="E8E4D9"/>
-                </a:solidFill>
-                <a:latin typeface="Segoe UI"/>
-              </a:defRPr>
-            </a:pPr>
-            <a:r>
-              <a:t>Digital twins can see everything.</a:t>
-            </a:r>
-            <a:br/>
-            <a:r>
-              <a:t>They can't do anything</a:t>
-            </a:r>
-            <a:br/>
-            <a:r>
-              <a:t>about what they see.</a:t>
-            </a:r>
-          </a:p>
-        </p:txBody>
-      </p:sp>
-    </p:spTree>
-  </p:cSld>
-  <p:clrMapOvr>
-    <a:masterClrMapping/>
-  </p:clrMapOvr>
-</p:sld>
-</file>
-
-<file path=ppt/slides/slide7.xml><?xml version="1.0" encoding="utf-8"?>
-<p:sld xmlns:a="http://schemas.openxmlformats.org/drawingml/2006/main" xmlns:p="http://schemas.openxmlformats.org/presentationml/2006/main" xmlns:r="http://schemas.openxmlformats.org/officeDocument/2006/relationships">
-  <p:cSld>
-    <p:bg>
-      <p:bgPr>
-        <a:gradFill rotWithShape="1">
-          <a:gsLst>
-            <a:gs pos="0">
-              <a:srgbClr val="0F172A"/>
-            </a:gs>
-            <a:gs pos="100000">
-              <a:srgbClr val="1E1E2E"/>
-            </a:gs>
-          </a:gsLst>
-          <a:lin scaled="0"/>
-        </a:gradFill>
-        <a:effectLst/>
-      </p:bgPr>
-    </p:bg>
-    <p:spTree>
-      <p:nvGrpSpPr>
-        <p:cNvPr id="1" name=""/>
-        <p:cNvGrpSpPr/>
-        <p:nvPr/>
-      </p:nvGrpSpPr>
-      <p:grpSpPr/>
-      <p:sp>
-        <p:nvSpPr>
-          <p:cNvPr id="2" name="TextBox 1"/>
-          <p:cNvSpPr txBox="1"/>
-          <p:nvPr/>
-        </p:nvSpPr>
-        <p:spPr>
-          <a:xfrm>
-            <a:off x="0" y="2286000"/>
-            <a:ext cx="12191695" cy="2286000"/>
-          </a:xfrm>
-          <a:prstGeom prst="rect">
-            <a:avLst/>
-          </a:prstGeom>
-          <a:noFill/>
-        </p:spPr>
-        <p:txBody>
-          <a:bodyPr wrap="square">
-            <a:spAutoFit/>
-          </a:bodyPr>
-          <a:lstStyle/>
-          <a:p>
-            <a:pPr algn="ctr">
-              <a:defRPr sz="7200" b="1" i="0">
-                <a:solidFill>
-                  <a:srgbClr val="F5F5F0"/>
-                </a:solidFill>
-                <a:latin typeface="Segoe UI"/>
-              </a:defRPr>
-            </a:pPr>
-            <a:r>
-              <a:t>2:14 AM</a:t>
-            </a:r>
-          </a:p>
-        </p:txBody>
-      </p:sp>
-    </p:spTree>
-  </p:cSld>
-  <p:clrMapOvr>
-    <a:masterClrMapping/>
-  </p:clrMapOvr>
-</p:sld>
-</file>
-
-<file path=ppt/slides/slide8.xml><?xml version="1.0" encoding="utf-8"?>
-<p:sld xmlns:a="http://schemas.openxmlformats.org/drawingml/2006/main" xmlns:p="http://schemas.openxmlformats.org/presentationml/2006/main" xmlns:r="http://schemas.openxmlformats.org/officeDocument/2006/relationships">
-  <p:cSld>
-    <p:bg>
-      <p:bgPr>
-        <a:gradFill rotWithShape="1">
-          <a:gsLst>
-            <a:gs pos="0">
-              <a:srgbClr val="0F172A"/>
-            </a:gs>
-            <a:gs pos="100000">
-              <a:srgbClr val="1E1E2E"/>
-            </a:gs>
-          </a:gsLst>
-          <a:lin scaled="0"/>
-        </a:gradFill>
-        <a:effectLst/>
-      </p:bgPr>
-    </p:bg>
-    <p:spTree>
-      <p:nvGrpSpPr>
-        <p:cNvPr id="1" name=""/>
-        <p:cNvGrpSpPr/>
-        <p:nvPr/>
-      </p:nvGrpSpPr>
-      <p:grpSpPr/>
-      <p:sp>
-        <p:nvSpPr>
-          <p:cNvPr id="2" name="TextBox 1"/>
-          <p:cNvSpPr txBox="1"/>
-          <p:nvPr/>
-        </p:nvSpPr>
-        <p:spPr>
-          <a:xfrm>
-            <a:off x="1371600" y="2286000"/>
-            <a:ext cx="9144000" cy="1371600"/>
-          </a:xfrm>
-          <a:prstGeom prst="rect">
-            <a:avLst/>
-          </a:prstGeom>
-          <a:noFill/>
-        </p:spPr>
-        <p:txBody>
-          <a:bodyPr wrap="square">
-            <a:spAutoFit/>
-          </a:bodyPr>
-          <a:lstStyle/>
-          <a:p>
-            <a:pPr algn="l">
-              <a:defRPr sz="7200" b="1" i="0">
-                <a:solidFill>
-                  <a:srgbClr val="F5F5F0"/>
-                </a:solidFill>
-                <a:latin typeface="Segoe UI"/>
-              </a:defRPr>
-            </a:pPr>
-            <a:r>
-              <a:t>Agents</a:t>
-            </a:r>
-          </a:p>
-        </p:txBody>
-      </p:sp>
-      <p:sp>
-        <p:nvSpPr>
-          <p:cNvPr id="3" name="Rectangle 2"/>
-          <p:cNvSpPr/>
-          <p:nvPr/>
-        </p:nvSpPr>
-        <p:spPr>
-          <a:xfrm>
-            <a:off x="1371600" y="3931920"/>
-            <a:ext cx="2743200" cy="10972"/>
-          </a:xfrm>
-          <a:prstGeom prst="rect">
-            <a:avLst/>
-          </a:prstGeom>
-          <a:solidFill>
-            <a:srgbClr val="D4D0C8"/>
-          </a:solidFill>
-          <a:ln>
-            <a:noFill/>
-          </a:ln>
-        </p:spPr>
-        <p:style>
-          <a:lnRef idx="1">
-            <a:schemeClr val="accent1"/>
-          </a:lnRef>
-          <a:fillRef idx="3">
-            <a:schemeClr val="accent1"/>
-          </a:fillRef>
-          <a:effectRef idx="2">
-            <a:schemeClr val="accent1"/>
-          </a:effectRef>
-          <a:fontRef idx="minor">
-            <a:schemeClr val="lt1"/>
-          </a:fontRef>
-        </p:style>
-        <p:txBody>
-          <a:bodyPr rtlCol="0" anchor="ctr"/>
-          <a:lstStyle/>
-          <a:p>
-            <a:pPr algn="ctr"/>
-          </a:p>
-        </p:txBody>
-      </p:sp>
-    </p:spTree>
-  </p:cSld>
-  <p:clrMapOvr>
-    <a:masterClrMapping/>
-  </p:clrMapOvr>
-</p:sld>
-</file>
-
-<file path=ppt/slides/slide9.xml><?xml version="1.0" encoding="utf-8"?>
-<p:sld xmlns:a="http://schemas.openxmlformats.org/drawingml/2006/main" xmlns:p="http://schemas.openxmlformats.org/presentationml/2006/main" xmlns:r="http://schemas.openxmlformats.org/officeDocument/2006/relationships">
-  <p:cSld>
-    <p:bg>
-      <p:bgPr>
-        <a:gradFill rotWithShape="1">
-          <a:gsLst>
-            <a:gs pos="0">
-              <a:srgbClr val="0F172A"/>
-            </a:gs>
-            <a:gs pos="100000">
-              <a:srgbClr val="1E1E2E"/>
-            </a:gs>
-          </a:gsLst>
-          <a:lin scaled="0"/>
-        </a:gradFill>
-        <a:effectLst/>
-      </p:bgPr>
-    </p:bg>
-    <p:spTree>
-      <p:nvGrpSpPr>
-        <p:cNvPr id="1" name=""/>
-        <p:cNvGrpSpPr/>
-        <p:nvPr/>
-      </p:nvGrpSpPr>
-      <p:grpSpPr/>
-      <p:sp>
-        <p:nvSpPr>
-          <p:cNvPr id="2" name="TextBox 1"/>
-          <p:cNvSpPr txBox="1"/>
-          <p:nvPr/>
-        </p:nvSpPr>
-        <p:spPr>
-          <a:xfrm>
-            <a:off x="1097280" y="457200"/>
-            <a:ext cx="4572000" cy="457200"/>
-          </a:xfrm>
-          <a:prstGeom prst="rect">
-            <a:avLst/>
-          </a:prstGeom>
-          <a:noFill/>
-        </p:spPr>
-        <p:txBody>
-          <a:bodyPr wrap="square">
-            <a:spAutoFit/>
-          </a:bodyPr>
-          <a:lstStyle/>
-          <a:p>
-            <a:pPr algn="l">
-              <a:defRPr sz="2000" b="0" i="0">
-                <a:solidFill>
-                  <a:srgbClr val="8B919C"/>
-                </a:solidFill>
-                <a:latin typeface="Segoe UI"/>
-              </a:defRPr>
-            </a:pPr>
-            <a:r>
-              <a:t>What Makes an Agent</a:t>
-            </a:r>
-          </a:p>
-        </p:txBody>
-      </p:sp>
-      <p:sp>
-        <p:nvSpPr>
-          <p:cNvPr id="3" name="Rounded Rectangle 2"/>
-          <p:cNvSpPr/>
-          <p:nvPr/>
-        </p:nvSpPr>
-        <p:spPr>
-          <a:xfrm>
-            <a:off x="746607" y="1828800"/>
-            <a:ext cx="2468880" cy="1097280"/>
-          </a:xfrm>
-          <a:prstGeom prst="roundRect">
-            <a:avLst/>
-          </a:prstGeom>
-          <a:solidFill>
-            <a:srgbClr val="151D30"/>
-          </a:solidFill>
-          <a:ln w="19050">
-            <a:solidFill>
-              <a:srgbClr val="D4D0C8"/>
-            </a:solidFill>
-          </a:ln>
-        </p:spPr>
-        <p:style>
-          <a:lnRef idx="1">
-            <a:schemeClr val="accent1"/>
-          </a:lnRef>
-          <a:fillRef idx="3">
-            <a:schemeClr val="accent1"/>
-          </a:fillRef>
-          <a:effectRef idx="2">
-            <a:schemeClr val="accent1"/>
-          </a:effectRef>
-          <a:fontRef idx="minor">
-            <a:schemeClr val="lt1"/>
-          </a:fontRef>
-        </p:style>
-        <p:txBody>
-          <a:bodyPr rtlCol="0" anchor="ctr" wrap="square"/>
-          <a:lstStyle/>
-          <a:p>
-            <a:pPr algn="ctr">
-              <a:defRPr sz="2200" b="1">
-                <a:solidFill>
-                  <a:srgbClr val="F5F5F0"/>
-                </a:solidFill>
-                <a:latin typeface="Segoe UI"/>
-              </a:defRPr>
-            </a:pPr>
-            <a:r>
-              <a:t>Autonomy</a:t>
-            </a:r>
-          </a:p>
-        </p:txBody>
-      </p:sp>
-      <p:sp>
-        <p:nvSpPr>
-          <p:cNvPr id="4" name="TextBox 3"/>
-          <p:cNvSpPr txBox="1"/>
-          <p:nvPr/>
-        </p:nvSpPr>
-        <p:spPr>
-          <a:xfrm>
-            <a:off x="883767" y="3200400"/>
-            <a:ext cx="2286000" cy="1645920"/>
-          </a:xfrm>
-          <a:prstGeom prst="rect">
-            <a:avLst/>
-          </a:prstGeom>
-          <a:noFill/>
-        </p:spPr>
-        <p:txBody>
-          <a:bodyPr wrap="square">
-            <a:spAutoFit/>
-          </a:bodyPr>
-          <a:lstStyle/>
-          <a:p>
-            <a:pPr algn="ctr">
-              <a:defRPr sz="1500" b="0" i="0">
-                <a:solidFill>
-                  <a:srgbClr val="8B919C"/>
-                </a:solidFill>
-                <a:latin typeface="Segoe UI"/>
-              </a:defRPr>
-            </a:pPr>
-            <a:r>
-              <a:t>Acts within defined</a:t>
-            </a:r>
-            <a:br/>
-            <a:r>
-              <a:t>boundaries without</a:t>
-            </a:r>
-            <a:br/>
-            <a:r>
-              <a:t>prompting</a:t>
-            </a:r>
-          </a:p>
-        </p:txBody>
-      </p:sp>
-      <p:sp>
-        <p:nvSpPr>
-          <p:cNvPr id="5" name="Rounded Rectangle 4"/>
-          <p:cNvSpPr/>
-          <p:nvPr/>
-        </p:nvSpPr>
-        <p:spPr>
-          <a:xfrm>
-            <a:off x="3489807" y="1828800"/>
-            <a:ext cx="2468880" cy="1097280"/>
-          </a:xfrm>
-          <a:prstGeom prst="roundRect">
-            <a:avLst/>
-          </a:prstGeom>
-          <a:solidFill>
-            <a:srgbClr val="151D30"/>
-          </a:solidFill>
-          <a:ln w="19050">
-            <a:solidFill>
-              <a:srgbClr val="D4D0C8"/>
-            </a:solidFill>
-          </a:ln>
-        </p:spPr>
-        <p:style>
-          <a:lnRef idx="1">
-            <a:schemeClr val="accent1"/>
-          </a:lnRef>
-          <a:fillRef idx="3">
-            <a:schemeClr val="accent1"/>
-          </a:fillRef>
-          <a:effectRef idx="2">
-            <a:schemeClr val="accent1"/>
-          </a:effectRef>
-          <a:fontRef idx="minor">
-            <a:schemeClr val="lt1"/>
-          </a:fontRef>
-        </p:style>
-        <p:txBody>
-          <a:bodyPr rtlCol="0" anchor="ctr" wrap="square"/>
-          <a:lstStyle/>
-          <a:p>
-            <a:pPr algn="ctr">
-              <a:defRPr sz="2200" b="1">
-                <a:solidFill>
-                  <a:srgbClr val="F5F5F0"/>
-                </a:solidFill>
-                <a:latin typeface="Segoe UI"/>
-              </a:defRPr>
-            </a:pPr>
-            <a:r>
-              <a:t>Planning</a:t>
-            </a:r>
-          </a:p>
-        </p:txBody>
-      </p:sp>
-      <p:sp>
-        <p:nvSpPr>
-          <p:cNvPr id="6" name="TextBox 5"/>
-          <p:cNvSpPr txBox="1"/>
-          <p:nvPr/>
-        </p:nvSpPr>
-        <p:spPr>
-          <a:xfrm>
-            <a:off x="3626967" y="3200400"/>
-            <a:ext cx="2286000" cy="1645920"/>
-          </a:xfrm>
-          <a:prstGeom prst="rect">
-            <a:avLst/>
-          </a:prstGeom>
-          <a:noFill/>
-        </p:spPr>
-        <p:txBody>
-          <a:bodyPr wrap="square">
-            <a:spAutoFit/>
-          </a:bodyPr>
-          <a:lstStyle/>
-          <a:p>
-            <a:pPr algn="ctr">
-              <a:defRPr sz="1500" b="0" i="0">
-                <a:solidFill>
-                  <a:srgbClr val="8B919C"/>
-                </a:solidFill>
-                <a:latin typeface="Segoe UI"/>
-              </a:defRPr>
-            </a:pPr>
-            <a:r>
-              <a:t>Breaks complex problems</a:t>
-            </a:r>
-            <a:br/>
-            <a:r>
-              <a:t>into multi-step</a:t>
-            </a:r>
-            <a:br/>
-            <a:r>
-              <a:t>workflows</a:t>
-            </a:r>
-          </a:p>
-        </p:txBody>
-      </p:sp>
-      <p:sp>
-        <p:nvSpPr>
-          <p:cNvPr id="7" name="Rounded Rectangle 6"/>
-          <p:cNvSpPr/>
-          <p:nvPr/>
-        </p:nvSpPr>
-        <p:spPr>
-          <a:xfrm>
-            <a:off x="6233007" y="1828800"/>
-            <a:ext cx="2468880" cy="1097280"/>
-          </a:xfrm>
-          <a:prstGeom prst="roundRect">
-            <a:avLst/>
-          </a:prstGeom>
-          <a:solidFill>
-            <a:srgbClr val="151D30"/>
-          </a:solidFill>
-          <a:ln w="19050">
-            <a:solidFill>
-              <a:srgbClr val="D4D0C8"/>
-            </a:solidFill>
-          </a:ln>
-        </p:spPr>
-        <p:style>
-          <a:lnRef idx="1">
-            <a:schemeClr val="accent1"/>
-          </a:lnRef>
-          <a:fillRef idx="3">
-            <a:schemeClr val="accent1"/>
-          </a:fillRef>
-          <a:effectRef idx="2">
-            <a:schemeClr val="accent1"/>
-          </a:effectRef>
-          <a:fontRef idx="minor">
-            <a:schemeClr val="lt1"/>
-          </a:fontRef>
-        </p:style>
-        <p:txBody>
-          <a:bodyPr rtlCol="0" anchor="ctr" wrap="square"/>
-          <a:lstStyle/>
-          <a:p>
-            <a:pPr algn="ctr">
-              <a:defRPr sz="2200" b="1">
-                <a:solidFill>
-                  <a:srgbClr val="F5F5F0"/>
-                </a:solidFill>
-                <a:latin typeface="Segoe UI"/>
-              </a:defRPr>
-            </a:pPr>
-            <a:r>
-              <a:t>Tool Use</a:t>
-            </a:r>
-          </a:p>
-        </p:txBody>
-      </p:sp>
-      <p:sp>
-        <p:nvSpPr>
-          <p:cNvPr id="8" name="TextBox 7"/>
-          <p:cNvSpPr txBox="1"/>
-          <p:nvPr/>
-        </p:nvSpPr>
-        <p:spPr>
-          <a:xfrm>
-            <a:off x="6370167" y="3200400"/>
-            <a:ext cx="2286000" cy="1645920"/>
-          </a:xfrm>
-          <a:prstGeom prst="rect">
-            <a:avLst/>
-          </a:prstGeom>
-          <a:noFill/>
-        </p:spPr>
-        <p:txBody>
-          <a:bodyPr wrap="square">
-            <a:spAutoFit/>
-          </a:bodyPr>
-          <a:lstStyle/>
-          <a:p>
-            <a:pPr algn="ctr">
-              <a:defRPr sz="1500" b="0" i="0">
-                <a:solidFill>
-                  <a:srgbClr val="8B919C"/>
-                </a:solidFill>
-                <a:latin typeface="Segoe UI"/>
-              </a:defRPr>
-            </a:pPr>
-            <a:r>
-              <a:t>Connects to real</a:t>
-            </a:r>
-            <a:br/>
-            <a:r>
-              <a:t>systems, APIs,</a:t>
-            </a:r>
-            <a:br/>
-            <a:r>
-              <a:t>and databases</a:t>
-            </a:r>
-          </a:p>
-        </p:txBody>
-      </p:sp>
-      <p:sp>
-        <p:nvSpPr>
-          <p:cNvPr id="9" name="Rounded Rectangle 8"/>
-          <p:cNvSpPr/>
-          <p:nvPr/>
-        </p:nvSpPr>
-        <p:spPr>
-          <a:xfrm>
-            <a:off x="8976207" y="1828800"/>
-            <a:ext cx="2468880" cy="1097280"/>
-          </a:xfrm>
-          <a:prstGeom prst="roundRect">
-            <a:avLst/>
-          </a:prstGeom>
-          <a:solidFill>
-            <a:srgbClr val="151D30"/>
-          </a:solidFill>
-          <a:ln w="19050">
-            <a:solidFill>
-              <a:srgbClr val="D4D0C8"/>
-            </a:solidFill>
-          </a:ln>
-        </p:spPr>
-        <p:style>
-          <a:lnRef idx="1">
-            <a:schemeClr val="accent1"/>
-          </a:lnRef>
-          <a:fillRef idx="3">
-            <a:schemeClr val="accent1"/>
-          </a:fillRef>
-          <a:effectRef idx="2">
-            <a:schemeClr val="accent1"/>
-          </a:effectRef>
-          <a:fontRef idx="minor">
-            <a:schemeClr val="lt1"/>
-          </a:fontRef>
-        </p:style>
-        <p:txBody>
-          <a:bodyPr rtlCol="0" anchor="ctr" wrap="square"/>
-          <a:lstStyle/>
-          <a:p>
-            <a:pPr algn="ctr">
-              <a:defRPr sz="2200" b="1">
-                <a:solidFill>
-                  <a:srgbClr val="F5F5F0"/>
-                </a:solidFill>
-                <a:latin typeface="Segoe UI"/>
-              </a:defRPr>
-            </a:pPr>
-            <a:r>
-              <a:t>Reflection</a:t>
-            </a:r>
-          </a:p>
-        </p:txBody>
-      </p:sp>
-      <p:sp>
-        <p:nvSpPr>
-          <p:cNvPr id="10" name="TextBox 9"/>
-          <p:cNvSpPr txBox="1"/>
-          <p:nvPr/>
-        </p:nvSpPr>
-        <p:spPr>
-          <a:xfrm>
-            <a:off x="9113367" y="3200400"/>
-            <a:ext cx="2286000" cy="1645920"/>
-          </a:xfrm>
-          <a:prstGeom prst="rect">
-            <a:avLst/>
-          </a:prstGeom>
-          <a:noFill/>
-        </p:spPr>
-        <p:txBody>
-          <a:bodyPr wrap="square">
-            <a:spAutoFit/>
-          </a:bodyPr>
-          <a:lstStyle/>
-          <a:p>
-            <a:pPr algn="ctr">
-              <a:defRPr sz="1500" b="0" i="0">
-                <a:solidFill>
-                  <a:srgbClr val="8B919C"/>
-                </a:solidFill>
-                <a:latin typeface="Segoe UI"/>
-              </a:defRPr>
-            </a:pPr>
-            <a:r>
-              <a:t>Evaluates its own</a:t>
-            </a:r>
-            <a:br/>
-            <a:r>
-              <a:t>actions and adjusts</a:t>
-            </a:r>
-            <a:br/>
-            <a:r>
-              <a:t>strategy</a:t>
+              <a:rPr dirty="0"/>
+              <a:t>Each generation gets smarter about what's happening</a:t>
+            </a:r>
+            <a:br>
+              <a:rPr dirty="0"/>
+            </a:br>
+            <a:r>
+              <a:rPr dirty="0"/>
+              <a:t>But the human is still the one who decides what to do about it</a:t>
             </a:r>
           </a:p>
         </p:txBody>
@@ -11888,7 +10695,7 @@
                   <p:par>
                     <p:cTn id="10" fill="hold">
                       <p:stCondLst>
-                        <p:cond delay="0"/>
+                        <p:cond delay="indefinite"/>
                       </p:stCondLst>
                       <p:childTnLst>
                         <p:par>
@@ -11911,6 +10718,33 @@
                                           </p:stCondLst>
                                         </p:cTn>
                                         <p:tgtEl>
+                                          <p:spTgt spid="6"/>
+                                        </p:tgtEl>
+                                        <p:attrNameLst>
+                                          <p:attrName>style.visibility</p:attrName>
+                                        </p:attrNameLst>
+                                      </p:cBhvr>
+                                      <p:to>
+                                        <p:strVal val="visible"/>
+                                      </p:to>
+                                    </p:set>
+                                  </p:childTnLst>
+                                </p:cTn>
+                              </p:par>
+                              <p:par>
+                                <p:cTn id="14" presetID="1" presetClass="entr" presetSubtype="0" fill="hold" nodeType="withEffect">
+                                  <p:stCondLst>
+                                    <p:cond delay="0"/>
+                                  </p:stCondLst>
+                                  <p:childTnLst>
+                                    <p:set>
+                                      <p:cBhvr>
+                                        <p:cTn id="15" dur="1" fill="hold">
+                                          <p:stCondLst>
+                                            <p:cond delay="0"/>
+                                          </p:stCondLst>
+                                        </p:cTn>
+                                        <p:tgtEl>
                                           <p:spTgt spid="5"/>
                                         </p:tgtEl>
                                         <p:attrNameLst>
@@ -11924,69 +10758,15 @@
                                   </p:childTnLst>
                                 </p:cTn>
                               </p:par>
-                            </p:childTnLst>
-                          </p:cTn>
-                        </p:par>
-                        <p:par>
-                          <p:cTn id="14" fill="hold">
-                            <p:stCondLst>
-                              <p:cond delay="0"/>
-                            </p:stCondLst>
-                            <p:childTnLst>
                               <p:par>
-                                <p:cTn id="15" presetID="1" presetClass="entr" presetSubtype="0" fill="hold" nodeType="clickEffect">
+                                <p:cTn id="16" presetID="1" presetClass="entr" presetSubtype="0" fill="hold" nodeType="withEffect">
                                   <p:stCondLst>
                                     <p:cond delay="0"/>
                                   </p:stCondLst>
                                   <p:childTnLst>
                                     <p:set>
                                       <p:cBhvr>
-                                        <p:cTn id="16" dur="1" fill="hold">
-                                          <p:stCondLst>
-                                            <p:cond delay="0"/>
-                                          </p:stCondLst>
-                                        </p:cTn>
-                                        <p:tgtEl>
-                                          <p:spTgt spid="6"/>
-                                        </p:tgtEl>
-                                        <p:attrNameLst>
-                                          <p:attrName>style.visibility</p:attrName>
-                                        </p:attrNameLst>
-                                      </p:cBhvr>
-                                      <p:to>
-                                        <p:strVal val="visible"/>
-                                      </p:to>
-                                    </p:set>
-                                  </p:childTnLst>
-                                </p:cTn>
-                              </p:par>
-                            </p:childTnLst>
-                          </p:cTn>
-                        </p:par>
-                      </p:childTnLst>
-                    </p:cTn>
-                  </p:par>
-                  <p:par>
-                    <p:cTn id="17" fill="hold">
-                      <p:stCondLst>
-                        <p:cond delay="0"/>
-                      </p:stCondLst>
-                      <p:childTnLst>
-                        <p:par>
-                          <p:cTn id="18" fill="hold">
-                            <p:stCondLst>
-                              <p:cond delay="0"/>
-                            </p:stCondLst>
-                            <p:childTnLst>
-                              <p:par>
-                                <p:cTn id="19" presetID="1" presetClass="entr" presetSubtype="0" fill="hold" nodeType="clickEffect">
-                                  <p:stCondLst>
-                                    <p:cond delay="0"/>
-                                  </p:stCondLst>
-                                  <p:childTnLst>
-                                    <p:set>
-                                      <p:cBhvr>
-                                        <p:cTn id="20" dur="1" fill="hold">
+                                        <p:cTn id="17" dur="1" fill="hold">
                                           <p:stCondLst>
                                             <p:cond delay="0"/>
                                           </p:stCondLst>
@@ -12008,14 +10788,50 @@
                             </p:childTnLst>
                           </p:cTn>
                         </p:par>
+                      </p:childTnLst>
+                    </p:cTn>
+                  </p:par>
+                  <p:par>
+                    <p:cTn id="18" fill="hold">
+                      <p:stCondLst>
+                        <p:cond delay="indefinite"/>
+                      </p:stCondLst>
+                      <p:childTnLst>
                         <p:par>
-                          <p:cTn id="21" fill="hold">
+                          <p:cTn id="19" fill="hold">
                             <p:stCondLst>
                               <p:cond delay="0"/>
                             </p:stCondLst>
                             <p:childTnLst>
                               <p:par>
-                                <p:cTn id="22" presetID="1" presetClass="entr" presetSubtype="0" fill="hold" nodeType="clickEffect">
+                                <p:cTn id="20" presetID="1" presetClass="entr" presetSubtype="0" fill="hold" nodeType="clickEffect">
+                                  <p:stCondLst>
+                                    <p:cond delay="0"/>
+                                  </p:stCondLst>
+                                  <p:childTnLst>
+                                    <p:set>
+                                      <p:cBhvr>
+                                        <p:cTn id="21" dur="1" fill="hold">
+                                          <p:stCondLst>
+                                            <p:cond delay="0"/>
+                                          </p:stCondLst>
+                                        </p:cTn>
+                                        <p:tgtEl>
+                                          <p:spTgt spid="9"/>
+                                        </p:tgtEl>
+                                        <p:attrNameLst>
+                                          <p:attrName>style.visibility</p:attrName>
+                                        </p:attrNameLst>
+                                      </p:cBhvr>
+                                      <p:to>
+                                        <p:strVal val="visible"/>
+                                      </p:to>
+                                    </p:set>
+                                  </p:childTnLst>
+                                </p:cTn>
+                              </p:par>
+                              <p:par>
+                                <p:cTn id="22" presetID="1" presetClass="entr" presetSubtype="0" fill="hold" nodeType="withEffect">
                                   <p:stCondLst>
                                     <p:cond delay="0"/>
                                   </p:stCondLst>
@@ -12023,6 +10839,33 @@
                                     <p:set>
                                       <p:cBhvr>
                                         <p:cTn id="23" dur="1" fill="hold">
+                                          <p:stCondLst>
+                                            <p:cond delay="0"/>
+                                          </p:stCondLst>
+                                        </p:cTn>
+                                        <p:tgtEl>
+                                          <p:spTgt spid="10"/>
+                                        </p:tgtEl>
+                                        <p:attrNameLst>
+                                          <p:attrName>style.visibility</p:attrName>
+                                        </p:attrNameLst>
+                                      </p:cBhvr>
+                                      <p:to>
+                                        <p:strVal val="visible"/>
+                                      </p:to>
+                                    </p:set>
+                                  </p:childTnLst>
+                                </p:cTn>
+                              </p:par>
+                              <p:par>
+                                <p:cTn id="24" presetID="1" presetClass="entr" presetSubtype="0" fill="hold" nodeType="withEffect">
+                                  <p:stCondLst>
+                                    <p:cond delay="0"/>
+                                  </p:stCondLst>
+                                  <p:childTnLst>
+                                    <p:set>
+                                      <p:cBhvr>
+                                        <p:cTn id="25" dur="1" fill="hold">
                                           <p:stCondLst>
                                             <p:cond delay="0"/>
                                           </p:stCondLst>
@@ -12048,26 +10891,1245 @@
                     </p:cTn>
                   </p:par>
                   <p:par>
-                    <p:cTn id="24" fill="hold">
+                    <p:cTn id="26" fill="hold">
                       <p:stCondLst>
-                        <p:cond delay="0"/>
+                        <p:cond delay="indefinite"/>
                       </p:stCondLst>
                       <p:childTnLst>
                         <p:par>
-                          <p:cTn id="25" fill="hold">
+                          <p:cTn id="27" fill="hold">
                             <p:stCondLst>
                               <p:cond delay="0"/>
                             </p:stCondLst>
                             <p:childTnLst>
                               <p:par>
-                                <p:cTn id="26" presetID="1" presetClass="entr" presetSubtype="0" fill="hold" nodeType="clickEffect">
+                                <p:cTn id="28" presetID="1" presetClass="entr" presetSubtype="0" fill="hold" nodeType="clickEffect">
                                   <p:stCondLst>
                                     <p:cond delay="0"/>
                                   </p:stCondLst>
                                   <p:childTnLst>
                                     <p:set>
                                       <p:cBhvr>
-                                        <p:cTn id="27" dur="1" fill="hold">
+                                        <p:cTn id="29" dur="1" fill="hold">
+                                          <p:stCondLst>
+                                            <p:cond delay="0"/>
+                                          </p:stCondLst>
+                                        </p:cTn>
+                                        <p:tgtEl>
+                                          <p:spTgt spid="12"/>
+                                        </p:tgtEl>
+                                        <p:attrNameLst>
+                                          <p:attrName>style.visibility</p:attrName>
+                                        </p:attrNameLst>
+                                      </p:cBhvr>
+                                      <p:to>
+                                        <p:strVal val="visible"/>
+                                      </p:to>
+                                    </p:set>
+                                  </p:childTnLst>
+                                </p:cTn>
+                              </p:par>
+                              <p:par>
+                                <p:cTn id="30" presetID="1" presetClass="entr" presetSubtype="0" fill="hold" nodeType="withEffect">
+                                  <p:stCondLst>
+                                    <p:cond delay="0"/>
+                                  </p:stCondLst>
+                                  <p:childTnLst>
+                                    <p:set>
+                                      <p:cBhvr>
+                                        <p:cTn id="31" dur="1" fill="hold">
+                                          <p:stCondLst>
+                                            <p:cond delay="0"/>
+                                          </p:stCondLst>
+                                        </p:cTn>
+                                        <p:tgtEl>
+                                          <p:spTgt spid="11"/>
+                                        </p:tgtEl>
+                                        <p:attrNameLst>
+                                          <p:attrName>style.visibility</p:attrName>
+                                        </p:attrNameLst>
+                                      </p:cBhvr>
+                                      <p:to>
+                                        <p:strVal val="visible"/>
+                                      </p:to>
+                                    </p:set>
+                                  </p:childTnLst>
+                                </p:cTn>
+                              </p:par>
+                            </p:childTnLst>
+                          </p:cTn>
+                        </p:par>
+                      </p:childTnLst>
+                    </p:cTn>
+                  </p:par>
+                  <p:par>
+                    <p:cTn id="32" fill="hold">
+                      <p:stCondLst>
+                        <p:cond delay="indefinite"/>
+                      </p:stCondLst>
+                      <p:childTnLst>
+                        <p:par>
+                          <p:cTn id="33" fill="hold">
+                            <p:stCondLst>
+                              <p:cond delay="0"/>
+                            </p:stCondLst>
+                            <p:childTnLst>
+                              <p:par>
+                                <p:cTn id="34" presetID="1" presetClass="entr" presetSubtype="0" fill="hold" nodeType="clickEffect">
+                                  <p:stCondLst>
+                                    <p:cond delay="0"/>
+                                  </p:stCondLst>
+                                  <p:childTnLst>
+                                    <p:set>
+                                      <p:cBhvr>
+                                        <p:cTn id="35" dur="1" fill="hold">
+                                          <p:stCondLst>
+                                            <p:cond delay="0"/>
+                                          </p:stCondLst>
+                                        </p:cTn>
+                                        <p:tgtEl>
+                                          <p:spTgt spid="13"/>
+                                        </p:tgtEl>
+                                        <p:attrNameLst>
+                                          <p:attrName>style.visibility</p:attrName>
+                                        </p:attrNameLst>
+                                      </p:cBhvr>
+                                      <p:to>
+                                        <p:strVal val="visible"/>
+                                      </p:to>
+                                    </p:set>
+                                  </p:childTnLst>
+                                </p:cTn>
+                              </p:par>
+                            </p:childTnLst>
+                          </p:cTn>
+                        </p:par>
+                      </p:childTnLst>
+                    </p:cTn>
+                  </p:par>
+                </p:childTnLst>
+              </p:cTn>
+              <p:prevCondLst>
+                <p:cond evt="onPrev" delay="0">
+                  <p:tgtEl>
+                    <p:sldTgt/>
+                  </p:tgtEl>
+                </p:cond>
+              </p:prevCondLst>
+              <p:nextCondLst>
+                <p:cond evt="onNext" delay="0">
+                  <p:tgtEl>
+                    <p:sldTgt/>
+                  </p:tgtEl>
+                </p:cond>
+              </p:nextCondLst>
+            </p:seq>
+          </p:childTnLst>
+        </p:cTn>
+      </p:par>
+    </p:tnLst>
+    <p:bldLst>
+      <p:bldP spid="3" grpId="0" animBg="1"/>
+      <p:bldP spid="4" grpId="0" animBg="1"/>
+      <p:bldP spid="5" grpId="0" animBg="1"/>
+      <p:bldP spid="6" grpId="0" animBg="1"/>
+      <p:bldP spid="7" grpId="0" animBg="1"/>
+      <p:bldP spid="8" grpId="0" animBg="1"/>
+      <p:bldP spid="9" grpId="0" animBg="1"/>
+      <p:bldP spid="10" grpId="0" animBg="1"/>
+      <p:bldP spid="11" grpId="0" animBg="1"/>
+      <p:bldP spid="12" grpId="0" animBg="1"/>
+      <p:bldP spid="13" grpId="0" animBg="1"/>
+    </p:bldLst>
+  </p:timing>
+</p:sld>
+</file>
+
+<file path=ppt/slides/slide6.xml><?xml version="1.0" encoding="utf-8"?>
+<p:sld xmlns:a="http://schemas.openxmlformats.org/drawingml/2006/main" xmlns:r="http://schemas.openxmlformats.org/officeDocument/2006/relationships" xmlns:p="http://schemas.openxmlformats.org/presentationml/2006/main">
+  <p:cSld>
+    <p:bg>
+      <p:bgPr>
+        <a:gradFill rotWithShape="1">
+          <a:gsLst>
+            <a:gs pos="0">
+              <a:srgbClr val="0F172A"/>
+            </a:gs>
+            <a:gs pos="100000">
+              <a:srgbClr val="1E1E2E"/>
+            </a:gs>
+          </a:gsLst>
+          <a:lin scaled="0"/>
+        </a:gradFill>
+        <a:effectLst/>
+      </p:bgPr>
+    </p:bg>
+    <p:spTree>
+      <p:nvGrpSpPr>
+        <p:cNvPr id="1" name=""/>
+        <p:cNvGrpSpPr/>
+        <p:nvPr/>
+      </p:nvGrpSpPr>
+      <p:grpSpPr>
+        <a:xfrm>
+          <a:off x="0" y="0"/>
+          <a:ext cx="0" cy="0"/>
+          <a:chOff x="0" y="0"/>
+          <a:chExt cx="0" cy="0"/>
+        </a:xfrm>
+      </p:grpSpPr>
+      <p:sp>
+        <p:nvSpPr>
+          <p:cNvPr id="2" name="TextBox 1"/>
+          <p:cNvSpPr txBox="1"/>
+          <p:nvPr/>
+        </p:nvSpPr>
+        <p:spPr>
+          <a:xfrm>
+            <a:off x="1524000" y="2413337"/>
+            <a:ext cx="9144000" cy="2123658"/>
+          </a:xfrm>
+          <a:prstGeom prst="rect">
+            <a:avLst/>
+          </a:prstGeom>
+          <a:noFill/>
+        </p:spPr>
+        <p:txBody>
+          <a:bodyPr wrap="square">
+            <a:spAutoFit/>
+          </a:bodyPr>
+          <a:lstStyle/>
+          <a:p>
+            <a:pPr algn="ctr">
+              <a:defRPr sz="4200" b="1" i="0">
+                <a:solidFill>
+                  <a:srgbClr val="E8E4D9"/>
+                </a:solidFill>
+                <a:latin typeface="Segoe UI"/>
+              </a:defRPr>
+            </a:pPr>
+            <a:r>
+              <a:rPr sz="4400" dirty="0"/>
+              <a:t>Digital twins can see everythin</a:t>
+            </a:r>
+            <a:r>
+              <a:rPr lang="en-US" sz="4400" dirty="0"/>
+              <a:t>g</a:t>
+            </a:r>
+          </a:p>
+          <a:p>
+            <a:pPr algn="ctr">
+              <a:defRPr sz="4200" b="1" i="0">
+                <a:solidFill>
+                  <a:srgbClr val="E8E4D9"/>
+                </a:solidFill>
+                <a:latin typeface="Segoe UI"/>
+              </a:defRPr>
+            </a:pPr>
+            <a:br>
+              <a:rPr sz="4400" dirty="0"/>
+            </a:br>
+            <a:r>
+              <a:rPr sz="4400" dirty="0"/>
+              <a:t>They can’t </a:t>
+            </a:r>
+            <a:r>
+              <a:rPr lang="en-US" sz="4400" dirty="0"/>
+              <a:t>act</a:t>
+            </a:r>
+            <a:r>
+              <a:rPr sz="4400" dirty="0"/>
+              <a:t> </a:t>
+            </a:r>
+            <a:r>
+              <a:rPr lang="en-US" sz="4400" dirty="0"/>
+              <a:t>on </a:t>
+            </a:r>
+            <a:r>
+              <a:rPr sz="4400" dirty="0"/>
+              <a:t>what they see</a:t>
+            </a:r>
+          </a:p>
+        </p:txBody>
+      </p:sp>
+    </p:spTree>
+  </p:cSld>
+  <p:clrMapOvr>
+    <a:masterClrMapping/>
+  </p:clrMapOvr>
+</p:sld>
+</file>
+
+<file path=ppt/slides/slide7.xml><?xml version="1.0" encoding="utf-8"?>
+<p:sld xmlns:a="http://schemas.openxmlformats.org/drawingml/2006/main" xmlns:r="http://schemas.openxmlformats.org/officeDocument/2006/relationships" xmlns:p="http://schemas.openxmlformats.org/presentationml/2006/main">
+  <p:cSld>
+    <p:bg>
+      <p:bgPr>
+        <a:gradFill rotWithShape="1">
+          <a:gsLst>
+            <a:gs pos="0">
+              <a:srgbClr val="0F172A"/>
+            </a:gs>
+            <a:gs pos="100000">
+              <a:srgbClr val="1E1E2E"/>
+            </a:gs>
+          </a:gsLst>
+          <a:lin scaled="0"/>
+        </a:gradFill>
+        <a:effectLst/>
+      </p:bgPr>
+    </p:bg>
+    <p:spTree>
+      <p:nvGrpSpPr>
+        <p:cNvPr id="1" name=""/>
+        <p:cNvGrpSpPr/>
+        <p:nvPr/>
+      </p:nvGrpSpPr>
+      <p:grpSpPr>
+        <a:xfrm>
+          <a:off x="0" y="0"/>
+          <a:ext cx="0" cy="0"/>
+          <a:chOff x="0" y="0"/>
+          <a:chExt cx="0" cy="0"/>
+        </a:xfrm>
+      </p:grpSpPr>
+      <p:sp>
+        <p:nvSpPr>
+          <p:cNvPr id="2" name="TextBox 1"/>
+          <p:cNvSpPr txBox="1"/>
+          <p:nvPr/>
+        </p:nvSpPr>
+        <p:spPr>
+          <a:xfrm>
+            <a:off x="0" y="2286000"/>
+            <a:ext cx="12191695" cy="2286000"/>
+          </a:xfrm>
+          <a:prstGeom prst="rect">
+            <a:avLst/>
+          </a:prstGeom>
+          <a:noFill/>
+        </p:spPr>
+        <p:txBody>
+          <a:bodyPr wrap="square">
+            <a:spAutoFit/>
+          </a:bodyPr>
+          <a:lstStyle/>
+          <a:p>
+            <a:pPr algn="ctr">
+              <a:defRPr sz="7200" b="1" i="0">
+                <a:solidFill>
+                  <a:srgbClr val="F5F5F0"/>
+                </a:solidFill>
+                <a:latin typeface="Segoe UI"/>
+              </a:defRPr>
+            </a:pPr>
+            <a:r>
+              <a:rPr dirty="0"/>
+              <a:t>2:14 AM</a:t>
+            </a:r>
+          </a:p>
+        </p:txBody>
+      </p:sp>
+    </p:spTree>
+  </p:cSld>
+  <p:clrMapOvr>
+    <a:masterClrMapping/>
+  </p:clrMapOvr>
+</p:sld>
+</file>
+
+<file path=ppt/slides/slide8.xml><?xml version="1.0" encoding="utf-8"?>
+<p:sld xmlns:a="http://schemas.openxmlformats.org/drawingml/2006/main" xmlns:r="http://schemas.openxmlformats.org/officeDocument/2006/relationships" xmlns:p="http://schemas.openxmlformats.org/presentationml/2006/main">
+  <p:cSld>
+    <p:bg>
+      <p:bgPr>
+        <a:gradFill rotWithShape="1">
+          <a:gsLst>
+            <a:gs pos="0">
+              <a:srgbClr val="0F172A"/>
+            </a:gs>
+            <a:gs pos="100000">
+              <a:srgbClr val="1E1E2E"/>
+            </a:gs>
+          </a:gsLst>
+          <a:lin scaled="0"/>
+        </a:gradFill>
+        <a:effectLst/>
+      </p:bgPr>
+    </p:bg>
+    <p:spTree>
+      <p:nvGrpSpPr>
+        <p:cNvPr id="1" name=""/>
+        <p:cNvGrpSpPr/>
+        <p:nvPr/>
+      </p:nvGrpSpPr>
+      <p:grpSpPr>
+        <a:xfrm>
+          <a:off x="0" y="0"/>
+          <a:ext cx="0" cy="0"/>
+          <a:chOff x="0" y="0"/>
+          <a:chExt cx="0" cy="0"/>
+        </a:xfrm>
+      </p:grpSpPr>
+      <p:sp>
+        <p:nvSpPr>
+          <p:cNvPr id="2" name="TextBox 1"/>
+          <p:cNvSpPr txBox="1"/>
+          <p:nvPr/>
+        </p:nvSpPr>
+        <p:spPr>
+          <a:xfrm>
+            <a:off x="1371600" y="2286000"/>
+            <a:ext cx="9144000" cy="1371600"/>
+          </a:xfrm>
+          <a:prstGeom prst="rect">
+            <a:avLst/>
+          </a:prstGeom>
+          <a:noFill/>
+        </p:spPr>
+        <p:txBody>
+          <a:bodyPr wrap="square">
+            <a:spAutoFit/>
+          </a:bodyPr>
+          <a:lstStyle/>
+          <a:p>
+            <a:pPr algn="l">
+              <a:defRPr sz="7200" b="1" i="0">
+                <a:solidFill>
+                  <a:srgbClr val="F5F5F0"/>
+                </a:solidFill>
+                <a:latin typeface="Segoe UI"/>
+              </a:defRPr>
+            </a:pPr>
+            <a:r>
+              <a:t>Agents</a:t>
+            </a:r>
+          </a:p>
+        </p:txBody>
+      </p:sp>
+      <p:sp>
+        <p:nvSpPr>
+          <p:cNvPr id="3" name="Rectangle 2"/>
+          <p:cNvSpPr/>
+          <p:nvPr/>
+        </p:nvSpPr>
+        <p:spPr>
+          <a:xfrm>
+            <a:off x="1371600" y="3931920"/>
+            <a:ext cx="2743200" cy="10972"/>
+          </a:xfrm>
+          <a:prstGeom prst="rect">
+            <a:avLst/>
+          </a:prstGeom>
+          <a:solidFill>
+            <a:srgbClr val="D4D0C8"/>
+          </a:solidFill>
+          <a:ln>
+            <a:noFill/>
+          </a:ln>
+        </p:spPr>
+        <p:style>
+          <a:lnRef idx="1">
+            <a:schemeClr val="accent1"/>
+          </a:lnRef>
+          <a:fillRef idx="3">
+            <a:schemeClr val="accent1"/>
+          </a:fillRef>
+          <a:effectRef idx="2">
+            <a:schemeClr val="accent1"/>
+          </a:effectRef>
+          <a:fontRef idx="minor">
+            <a:schemeClr val="lt1"/>
+          </a:fontRef>
+        </p:style>
+        <p:txBody>
+          <a:bodyPr rtlCol="0" anchor="ctr"/>
+          <a:lstStyle/>
+          <a:p>
+            <a:pPr algn="ctr"/>
+            <a:endParaRPr/>
+          </a:p>
+        </p:txBody>
+      </p:sp>
+    </p:spTree>
+  </p:cSld>
+  <p:clrMapOvr>
+    <a:masterClrMapping/>
+  </p:clrMapOvr>
+</p:sld>
+</file>
+
+<file path=ppt/slides/slide9.xml><?xml version="1.0" encoding="utf-8"?>
+<p:sld xmlns:a="http://schemas.openxmlformats.org/drawingml/2006/main" xmlns:r="http://schemas.openxmlformats.org/officeDocument/2006/relationships" xmlns:p="http://schemas.openxmlformats.org/presentationml/2006/main">
+  <p:cSld>
+    <p:bg>
+      <p:bgPr>
+        <a:gradFill rotWithShape="1">
+          <a:gsLst>
+            <a:gs pos="0">
+              <a:srgbClr val="0F172A"/>
+            </a:gs>
+            <a:gs pos="100000">
+              <a:srgbClr val="1E1E2E"/>
+            </a:gs>
+          </a:gsLst>
+          <a:lin scaled="0"/>
+        </a:gradFill>
+        <a:effectLst/>
+      </p:bgPr>
+    </p:bg>
+    <p:spTree>
+      <p:nvGrpSpPr>
+        <p:cNvPr id="1" name=""/>
+        <p:cNvGrpSpPr/>
+        <p:nvPr/>
+      </p:nvGrpSpPr>
+      <p:grpSpPr>
+        <a:xfrm>
+          <a:off x="0" y="0"/>
+          <a:ext cx="0" cy="0"/>
+          <a:chOff x="0" y="0"/>
+          <a:chExt cx="0" cy="0"/>
+        </a:xfrm>
+      </p:grpSpPr>
+      <p:sp>
+        <p:nvSpPr>
+          <p:cNvPr id="2" name="TextBox 1"/>
+          <p:cNvSpPr txBox="1"/>
+          <p:nvPr/>
+        </p:nvSpPr>
+        <p:spPr>
+          <a:xfrm>
+            <a:off x="1097280" y="457200"/>
+            <a:ext cx="4572000" cy="457200"/>
+          </a:xfrm>
+          <a:prstGeom prst="rect">
+            <a:avLst/>
+          </a:prstGeom>
+          <a:noFill/>
+        </p:spPr>
+        <p:txBody>
+          <a:bodyPr wrap="square">
+            <a:spAutoFit/>
+          </a:bodyPr>
+          <a:lstStyle/>
+          <a:p>
+            <a:pPr algn="l">
+              <a:defRPr sz="2000" b="0" i="0">
+                <a:solidFill>
+                  <a:srgbClr val="8B919C"/>
+                </a:solidFill>
+                <a:latin typeface="Segoe UI"/>
+              </a:defRPr>
+            </a:pPr>
+            <a:r>
+              <a:t>What Makes an Agent</a:t>
+            </a:r>
+          </a:p>
+        </p:txBody>
+      </p:sp>
+      <p:sp>
+        <p:nvSpPr>
+          <p:cNvPr id="3" name="Rounded Rectangle 2"/>
+          <p:cNvSpPr/>
+          <p:nvPr/>
+        </p:nvSpPr>
+        <p:spPr>
+          <a:xfrm>
+            <a:off x="746607" y="1828800"/>
+            <a:ext cx="2468880" cy="1097280"/>
+          </a:xfrm>
+          <a:prstGeom prst="roundRect">
+            <a:avLst/>
+          </a:prstGeom>
+          <a:solidFill>
+            <a:srgbClr val="151D30"/>
+          </a:solidFill>
+          <a:ln w="19050">
+            <a:solidFill>
+              <a:srgbClr val="D4D0C8"/>
+            </a:solidFill>
+          </a:ln>
+        </p:spPr>
+        <p:style>
+          <a:lnRef idx="1">
+            <a:schemeClr val="accent1"/>
+          </a:lnRef>
+          <a:fillRef idx="3">
+            <a:schemeClr val="accent1"/>
+          </a:fillRef>
+          <a:effectRef idx="2">
+            <a:schemeClr val="accent1"/>
+          </a:effectRef>
+          <a:fontRef idx="minor">
+            <a:schemeClr val="lt1"/>
+          </a:fontRef>
+        </p:style>
+        <p:txBody>
+          <a:bodyPr wrap="square" rtlCol="0" anchor="ctr"/>
+          <a:lstStyle/>
+          <a:p>
+            <a:pPr algn="ctr">
+              <a:defRPr sz="2200" b="1">
+                <a:solidFill>
+                  <a:srgbClr val="F5F5F0"/>
+                </a:solidFill>
+                <a:latin typeface="Segoe UI"/>
+              </a:defRPr>
+            </a:pPr>
+            <a:r>
+              <a:t>Autonomy</a:t>
+            </a:r>
+          </a:p>
+        </p:txBody>
+      </p:sp>
+      <p:sp>
+        <p:nvSpPr>
+          <p:cNvPr id="4" name="TextBox 3"/>
+          <p:cNvSpPr txBox="1"/>
+          <p:nvPr/>
+        </p:nvSpPr>
+        <p:spPr>
+          <a:xfrm>
+            <a:off x="883767" y="3200400"/>
+            <a:ext cx="2286000" cy="1645920"/>
+          </a:xfrm>
+          <a:prstGeom prst="rect">
+            <a:avLst/>
+          </a:prstGeom>
+          <a:noFill/>
+        </p:spPr>
+        <p:txBody>
+          <a:bodyPr wrap="square">
+            <a:spAutoFit/>
+          </a:bodyPr>
+          <a:lstStyle/>
+          <a:p>
+            <a:pPr algn="ctr">
+              <a:defRPr sz="1500" b="0" i="0">
+                <a:solidFill>
+                  <a:srgbClr val="8B919C"/>
+                </a:solidFill>
+                <a:latin typeface="Segoe UI"/>
+              </a:defRPr>
+            </a:pPr>
+            <a:r>
+              <a:rPr dirty="0"/>
+              <a:t>Acts within defined</a:t>
+            </a:r>
+            <a:br>
+              <a:rPr dirty="0"/>
+            </a:br>
+            <a:r>
+              <a:rPr dirty="0"/>
+              <a:t>boundaries without</a:t>
+            </a:r>
+            <a:br>
+              <a:rPr dirty="0"/>
+            </a:br>
+            <a:r>
+              <a:rPr dirty="0"/>
+              <a:t>prompting</a:t>
+            </a:r>
+          </a:p>
+        </p:txBody>
+      </p:sp>
+      <p:sp>
+        <p:nvSpPr>
+          <p:cNvPr id="5" name="Rounded Rectangle 4"/>
+          <p:cNvSpPr/>
+          <p:nvPr/>
+        </p:nvSpPr>
+        <p:spPr>
+          <a:xfrm>
+            <a:off x="3489807" y="1828800"/>
+            <a:ext cx="2468880" cy="1097280"/>
+          </a:xfrm>
+          <a:prstGeom prst="roundRect">
+            <a:avLst/>
+          </a:prstGeom>
+          <a:solidFill>
+            <a:srgbClr val="151D30"/>
+          </a:solidFill>
+          <a:ln w="19050">
+            <a:solidFill>
+              <a:srgbClr val="D4D0C8"/>
+            </a:solidFill>
+          </a:ln>
+        </p:spPr>
+        <p:style>
+          <a:lnRef idx="1">
+            <a:schemeClr val="accent1"/>
+          </a:lnRef>
+          <a:fillRef idx="3">
+            <a:schemeClr val="accent1"/>
+          </a:fillRef>
+          <a:effectRef idx="2">
+            <a:schemeClr val="accent1"/>
+          </a:effectRef>
+          <a:fontRef idx="minor">
+            <a:schemeClr val="lt1"/>
+          </a:fontRef>
+        </p:style>
+        <p:txBody>
+          <a:bodyPr wrap="square" rtlCol="0" anchor="ctr"/>
+          <a:lstStyle/>
+          <a:p>
+            <a:pPr algn="ctr">
+              <a:defRPr sz="2200" b="1">
+                <a:solidFill>
+                  <a:srgbClr val="F5F5F0"/>
+                </a:solidFill>
+                <a:latin typeface="Segoe UI"/>
+              </a:defRPr>
+            </a:pPr>
+            <a:r>
+              <a:rPr dirty="0"/>
+              <a:t>Planning</a:t>
+            </a:r>
+          </a:p>
+        </p:txBody>
+      </p:sp>
+      <p:sp>
+        <p:nvSpPr>
+          <p:cNvPr id="6" name="TextBox 5"/>
+          <p:cNvSpPr txBox="1"/>
+          <p:nvPr/>
+        </p:nvSpPr>
+        <p:spPr>
+          <a:xfrm>
+            <a:off x="3626967" y="3200400"/>
+            <a:ext cx="2286000" cy="1645920"/>
+          </a:xfrm>
+          <a:prstGeom prst="rect">
+            <a:avLst/>
+          </a:prstGeom>
+          <a:noFill/>
+        </p:spPr>
+        <p:txBody>
+          <a:bodyPr wrap="square">
+            <a:spAutoFit/>
+          </a:bodyPr>
+          <a:lstStyle/>
+          <a:p>
+            <a:pPr algn="ctr">
+              <a:defRPr sz="1500" b="0" i="0">
+                <a:solidFill>
+                  <a:srgbClr val="8B919C"/>
+                </a:solidFill>
+                <a:latin typeface="Segoe UI"/>
+              </a:defRPr>
+            </a:pPr>
+            <a:r>
+              <a:t>Breaks complex problems</a:t>
+            </a:r>
+            <a:br/>
+            <a:r>
+              <a:t>into multi-step</a:t>
+            </a:r>
+            <a:br/>
+            <a:r>
+              <a:t>workflows</a:t>
+            </a:r>
+          </a:p>
+        </p:txBody>
+      </p:sp>
+      <p:sp>
+        <p:nvSpPr>
+          <p:cNvPr id="7" name="Rounded Rectangle 6"/>
+          <p:cNvSpPr/>
+          <p:nvPr/>
+        </p:nvSpPr>
+        <p:spPr>
+          <a:xfrm>
+            <a:off x="6233007" y="1828800"/>
+            <a:ext cx="2468880" cy="1097280"/>
+          </a:xfrm>
+          <a:prstGeom prst="roundRect">
+            <a:avLst/>
+          </a:prstGeom>
+          <a:solidFill>
+            <a:srgbClr val="151D30"/>
+          </a:solidFill>
+          <a:ln w="19050">
+            <a:solidFill>
+              <a:srgbClr val="D4D0C8"/>
+            </a:solidFill>
+          </a:ln>
+        </p:spPr>
+        <p:style>
+          <a:lnRef idx="1">
+            <a:schemeClr val="accent1"/>
+          </a:lnRef>
+          <a:fillRef idx="3">
+            <a:schemeClr val="accent1"/>
+          </a:fillRef>
+          <a:effectRef idx="2">
+            <a:schemeClr val="accent1"/>
+          </a:effectRef>
+          <a:fontRef idx="minor">
+            <a:schemeClr val="lt1"/>
+          </a:fontRef>
+        </p:style>
+        <p:txBody>
+          <a:bodyPr wrap="square" rtlCol="0" anchor="ctr"/>
+          <a:lstStyle/>
+          <a:p>
+            <a:pPr algn="ctr">
+              <a:defRPr sz="2200" b="1">
+                <a:solidFill>
+                  <a:srgbClr val="F5F5F0"/>
+                </a:solidFill>
+                <a:latin typeface="Segoe UI"/>
+              </a:defRPr>
+            </a:pPr>
+            <a:r>
+              <a:t>Tool Use</a:t>
+            </a:r>
+          </a:p>
+        </p:txBody>
+      </p:sp>
+      <p:sp>
+        <p:nvSpPr>
+          <p:cNvPr id="8" name="TextBox 7"/>
+          <p:cNvSpPr txBox="1"/>
+          <p:nvPr/>
+        </p:nvSpPr>
+        <p:spPr>
+          <a:xfrm>
+            <a:off x="6370167" y="3200400"/>
+            <a:ext cx="2286000" cy="1645920"/>
+          </a:xfrm>
+          <a:prstGeom prst="rect">
+            <a:avLst/>
+          </a:prstGeom>
+          <a:noFill/>
+        </p:spPr>
+        <p:txBody>
+          <a:bodyPr wrap="square">
+            <a:spAutoFit/>
+          </a:bodyPr>
+          <a:lstStyle/>
+          <a:p>
+            <a:pPr algn="ctr">
+              <a:defRPr sz="1500" b="0" i="0">
+                <a:solidFill>
+                  <a:srgbClr val="8B919C"/>
+                </a:solidFill>
+                <a:latin typeface="Segoe UI"/>
+              </a:defRPr>
+            </a:pPr>
+            <a:r>
+              <a:t>Connects to real</a:t>
+            </a:r>
+            <a:br/>
+            <a:r>
+              <a:t>systems, APIs,</a:t>
+            </a:r>
+            <a:br/>
+            <a:r>
+              <a:t>and databases</a:t>
+            </a:r>
+          </a:p>
+        </p:txBody>
+      </p:sp>
+      <p:sp>
+        <p:nvSpPr>
+          <p:cNvPr id="9" name="Rounded Rectangle 8"/>
+          <p:cNvSpPr/>
+          <p:nvPr/>
+        </p:nvSpPr>
+        <p:spPr>
+          <a:xfrm>
+            <a:off x="8976207" y="1828800"/>
+            <a:ext cx="2468880" cy="1097280"/>
+          </a:xfrm>
+          <a:prstGeom prst="roundRect">
+            <a:avLst/>
+          </a:prstGeom>
+          <a:solidFill>
+            <a:srgbClr val="151D30"/>
+          </a:solidFill>
+          <a:ln w="19050">
+            <a:solidFill>
+              <a:srgbClr val="D4D0C8"/>
+            </a:solidFill>
+          </a:ln>
+        </p:spPr>
+        <p:style>
+          <a:lnRef idx="1">
+            <a:schemeClr val="accent1"/>
+          </a:lnRef>
+          <a:fillRef idx="3">
+            <a:schemeClr val="accent1"/>
+          </a:fillRef>
+          <a:effectRef idx="2">
+            <a:schemeClr val="accent1"/>
+          </a:effectRef>
+          <a:fontRef idx="minor">
+            <a:schemeClr val="lt1"/>
+          </a:fontRef>
+        </p:style>
+        <p:txBody>
+          <a:bodyPr wrap="square" rtlCol="0" anchor="ctr"/>
+          <a:lstStyle/>
+          <a:p>
+            <a:pPr algn="ctr">
+              <a:defRPr sz="2200" b="1">
+                <a:solidFill>
+                  <a:srgbClr val="F5F5F0"/>
+                </a:solidFill>
+                <a:latin typeface="Segoe UI"/>
+              </a:defRPr>
+            </a:pPr>
+            <a:r>
+              <a:t>Reflection</a:t>
+            </a:r>
+          </a:p>
+        </p:txBody>
+      </p:sp>
+      <p:sp>
+        <p:nvSpPr>
+          <p:cNvPr id="10" name="TextBox 9"/>
+          <p:cNvSpPr txBox="1"/>
+          <p:nvPr/>
+        </p:nvSpPr>
+        <p:spPr>
+          <a:xfrm>
+            <a:off x="9113367" y="3200400"/>
+            <a:ext cx="2286000" cy="1645920"/>
+          </a:xfrm>
+          <a:prstGeom prst="rect">
+            <a:avLst/>
+          </a:prstGeom>
+          <a:noFill/>
+        </p:spPr>
+        <p:txBody>
+          <a:bodyPr wrap="square">
+            <a:spAutoFit/>
+          </a:bodyPr>
+          <a:lstStyle/>
+          <a:p>
+            <a:pPr algn="ctr">
+              <a:defRPr sz="1500" b="0" i="0">
+                <a:solidFill>
+                  <a:srgbClr val="8B919C"/>
+                </a:solidFill>
+                <a:latin typeface="Segoe UI"/>
+              </a:defRPr>
+            </a:pPr>
+            <a:r>
+              <a:t>Evaluates its own</a:t>
+            </a:r>
+            <a:br/>
+            <a:r>
+              <a:t>actions and adjusts</a:t>
+            </a:r>
+            <a:br/>
+            <a:r>
+              <a:t>strategy</a:t>
+            </a:r>
+          </a:p>
+        </p:txBody>
+      </p:sp>
+    </p:spTree>
+  </p:cSld>
+  <p:clrMapOvr>
+    <a:masterClrMapping/>
+  </p:clrMapOvr>
+  <p:timing>
+    <p:tnLst>
+      <p:par>
+        <p:cTn id="1" dur="indefinite" restart="never" nodeType="tmRoot">
+          <p:childTnLst>
+            <p:seq concurrent="1" nextAc="seek">
+              <p:cTn id="2" dur="indefinite" nodeType="mainSeq">
+                <p:childTnLst>
+                  <p:par>
+                    <p:cTn id="3" fill="hold">
+                      <p:stCondLst>
+                        <p:cond delay="0"/>
+                      </p:stCondLst>
+                      <p:childTnLst>
+                        <p:par>
+                          <p:cTn id="4" fill="hold">
+                            <p:stCondLst>
+                              <p:cond delay="0"/>
+                            </p:stCondLst>
+                            <p:childTnLst>
+                              <p:par>
+                                <p:cTn id="5" presetID="10" presetClass="entr" presetSubtype="0" fill="hold" nodeType="clickEffect">
+                                  <p:stCondLst>
+                                    <p:cond delay="0"/>
+                                  </p:stCondLst>
+                                  <p:childTnLst>
+                                    <p:set>
+                                      <p:cBhvr>
+                                        <p:cTn id="6" dur="1" fill="hold">
+                                          <p:stCondLst>
+                                            <p:cond delay="0"/>
+                                          </p:stCondLst>
+                                        </p:cTn>
+                                        <p:tgtEl>
+                                          <p:spTgt spid="3"/>
+                                        </p:tgtEl>
+                                        <p:attrNameLst>
+                                          <p:attrName>style.visibility</p:attrName>
+                                        </p:attrNameLst>
+                                      </p:cBhvr>
+                                      <p:to>
+                                        <p:strVal val="visible"/>
+                                      </p:to>
+                                    </p:set>
+                                    <p:animEffect transition="in" filter="fade">
+                                      <p:cBhvr>
+                                        <p:cTn id="7" dur="500"/>
+                                        <p:tgtEl>
+                                          <p:spTgt spid="3"/>
+                                        </p:tgtEl>
+                                      </p:cBhvr>
+                                    </p:animEffect>
+                                  </p:childTnLst>
+                                </p:cTn>
+                              </p:par>
+                              <p:par>
+                                <p:cTn id="8" presetID="10" presetClass="entr" presetSubtype="0" fill="hold" nodeType="withEffect">
+                                  <p:stCondLst>
+                                    <p:cond delay="0"/>
+                                  </p:stCondLst>
+                                  <p:childTnLst>
+                                    <p:set>
+                                      <p:cBhvr>
+                                        <p:cTn id="9" dur="1" fill="hold">
+                                          <p:stCondLst>
+                                            <p:cond delay="0"/>
+                                          </p:stCondLst>
+                                        </p:cTn>
+                                        <p:tgtEl>
+                                          <p:spTgt spid="4"/>
+                                        </p:tgtEl>
+                                        <p:attrNameLst>
+                                          <p:attrName>style.visibility</p:attrName>
+                                        </p:attrNameLst>
+                                      </p:cBhvr>
+                                      <p:to>
+                                        <p:strVal val="visible"/>
+                                      </p:to>
+                                    </p:set>
+                                    <p:animEffect transition="in" filter="fade">
+                                      <p:cBhvr>
+                                        <p:cTn id="10" dur="500"/>
+                                        <p:tgtEl>
+                                          <p:spTgt spid="4"/>
+                                        </p:tgtEl>
+                                      </p:cBhvr>
+                                    </p:animEffect>
+                                  </p:childTnLst>
+                                </p:cTn>
+                              </p:par>
+                            </p:childTnLst>
+                          </p:cTn>
+                        </p:par>
+                      </p:childTnLst>
+                    </p:cTn>
+                  </p:par>
+                  <p:par>
+                    <p:cTn id="11" fill="hold">
+                      <p:stCondLst>
+                        <p:cond delay="indefinite"/>
+                      </p:stCondLst>
+                      <p:childTnLst>
+                        <p:par>
+                          <p:cTn id="12" fill="hold">
+                            <p:stCondLst>
+                              <p:cond delay="0"/>
+                            </p:stCondLst>
+                            <p:childTnLst>
+                              <p:par>
+                                <p:cTn id="13" presetID="10" presetClass="entr" presetSubtype="0" fill="hold" nodeType="clickEffect">
+                                  <p:stCondLst>
+                                    <p:cond delay="0"/>
+                                  </p:stCondLst>
+                                  <p:childTnLst>
+                                    <p:set>
+                                      <p:cBhvr>
+                                        <p:cTn id="14" dur="1" fill="hold">
+                                          <p:stCondLst>
+                                            <p:cond delay="0"/>
+                                          </p:stCondLst>
+                                        </p:cTn>
+                                        <p:tgtEl>
+                                          <p:spTgt spid="5"/>
+                                        </p:tgtEl>
+                                        <p:attrNameLst>
+                                          <p:attrName>style.visibility</p:attrName>
+                                        </p:attrNameLst>
+                                      </p:cBhvr>
+                                      <p:to>
+                                        <p:strVal val="visible"/>
+                                      </p:to>
+                                    </p:set>
+                                    <p:animEffect transition="in" filter="fade">
+                                      <p:cBhvr>
+                                        <p:cTn id="15" dur="500"/>
+                                        <p:tgtEl>
+                                          <p:spTgt spid="5"/>
+                                        </p:tgtEl>
+                                      </p:cBhvr>
+                                    </p:animEffect>
+                                  </p:childTnLst>
+                                </p:cTn>
+                              </p:par>
+                              <p:par>
+                                <p:cTn id="16" presetID="10" presetClass="entr" presetSubtype="0" fill="hold" nodeType="withEffect">
+                                  <p:stCondLst>
+                                    <p:cond delay="0"/>
+                                  </p:stCondLst>
+                                  <p:childTnLst>
+                                    <p:set>
+                                      <p:cBhvr>
+                                        <p:cTn id="17" dur="1" fill="hold">
+                                          <p:stCondLst>
+                                            <p:cond delay="0"/>
+                                          </p:stCondLst>
+                                        </p:cTn>
+                                        <p:tgtEl>
+                                          <p:spTgt spid="6"/>
+                                        </p:tgtEl>
+                                        <p:attrNameLst>
+                                          <p:attrName>style.visibility</p:attrName>
+                                        </p:attrNameLst>
+                                      </p:cBhvr>
+                                      <p:to>
+                                        <p:strVal val="visible"/>
+                                      </p:to>
+                                    </p:set>
+                                    <p:animEffect transition="in" filter="fade">
+                                      <p:cBhvr>
+                                        <p:cTn id="18" dur="500"/>
+                                        <p:tgtEl>
+                                          <p:spTgt spid="6"/>
+                                        </p:tgtEl>
+                                      </p:cBhvr>
+                                    </p:animEffect>
+                                  </p:childTnLst>
+                                </p:cTn>
+                              </p:par>
+                            </p:childTnLst>
+                          </p:cTn>
+                        </p:par>
+                      </p:childTnLst>
+                    </p:cTn>
+                  </p:par>
+                  <p:par>
+                    <p:cTn id="19" fill="hold">
+                      <p:stCondLst>
+                        <p:cond delay="indefinite"/>
+                      </p:stCondLst>
+                      <p:childTnLst>
+                        <p:par>
+                          <p:cTn id="20" fill="hold">
+                            <p:stCondLst>
+                              <p:cond delay="0"/>
+                            </p:stCondLst>
+                            <p:childTnLst>
+                              <p:par>
+                                <p:cTn id="21" presetID="10" presetClass="entr" presetSubtype="0" fill="hold" nodeType="clickEffect">
+                                  <p:stCondLst>
+                                    <p:cond delay="0"/>
+                                  </p:stCondLst>
+                                  <p:childTnLst>
+                                    <p:set>
+                                      <p:cBhvr>
+                                        <p:cTn id="22" dur="1" fill="hold">
+                                          <p:stCondLst>
+                                            <p:cond delay="0"/>
+                                          </p:stCondLst>
+                                        </p:cTn>
+                                        <p:tgtEl>
+                                          <p:spTgt spid="7"/>
+                                        </p:tgtEl>
+                                        <p:attrNameLst>
+                                          <p:attrName>style.visibility</p:attrName>
+                                        </p:attrNameLst>
+                                      </p:cBhvr>
+                                      <p:to>
+                                        <p:strVal val="visible"/>
+                                      </p:to>
+                                    </p:set>
+                                    <p:animEffect transition="in" filter="fade">
+                                      <p:cBhvr>
+                                        <p:cTn id="23" dur="500"/>
+                                        <p:tgtEl>
+                                          <p:spTgt spid="7"/>
+                                        </p:tgtEl>
+                                      </p:cBhvr>
+                                    </p:animEffect>
+                                  </p:childTnLst>
+                                </p:cTn>
+                              </p:par>
+                              <p:par>
+                                <p:cTn id="24" presetID="10" presetClass="entr" presetSubtype="0" fill="hold" nodeType="withEffect">
+                                  <p:stCondLst>
+                                    <p:cond delay="0"/>
+                                  </p:stCondLst>
+                                  <p:childTnLst>
+                                    <p:set>
+                                      <p:cBhvr>
+                                        <p:cTn id="25" dur="1" fill="hold">
+                                          <p:stCondLst>
+                                            <p:cond delay="0"/>
+                                          </p:stCondLst>
+                                        </p:cTn>
+                                        <p:tgtEl>
+                                          <p:spTgt spid="8"/>
+                                        </p:tgtEl>
+                                        <p:attrNameLst>
+                                          <p:attrName>style.visibility</p:attrName>
+                                        </p:attrNameLst>
+                                      </p:cBhvr>
+                                      <p:to>
+                                        <p:strVal val="visible"/>
+                                      </p:to>
+                                    </p:set>
+                                    <p:animEffect transition="in" filter="fade">
+                                      <p:cBhvr>
+                                        <p:cTn id="26" dur="500"/>
+                                        <p:tgtEl>
+                                          <p:spTgt spid="8"/>
+                                        </p:tgtEl>
+                                      </p:cBhvr>
+                                    </p:animEffect>
+                                  </p:childTnLst>
+                                </p:cTn>
+                              </p:par>
+                            </p:childTnLst>
+                          </p:cTn>
+                        </p:par>
+                      </p:childTnLst>
+                    </p:cTn>
+                  </p:par>
+                  <p:par>
+                    <p:cTn id="27" fill="hold">
+                      <p:stCondLst>
+                        <p:cond delay="indefinite"/>
+                      </p:stCondLst>
+                      <p:childTnLst>
+                        <p:par>
+                          <p:cTn id="28" fill="hold">
+                            <p:stCondLst>
+                              <p:cond delay="0"/>
+                            </p:stCondLst>
+                            <p:childTnLst>
+                              <p:par>
+                                <p:cTn id="29" presetID="10" presetClass="entr" presetSubtype="0" fill="hold" nodeType="clickEffect">
+                                  <p:stCondLst>
+                                    <p:cond delay="0"/>
+                                  </p:stCondLst>
+                                  <p:childTnLst>
+                                    <p:set>
+                                      <p:cBhvr>
+                                        <p:cTn id="30" dur="1" fill="hold">
                                           <p:stCondLst>
                                             <p:cond delay="0"/>
                                           </p:stCondLst>
@@ -12083,27 +12145,26 @@
                                         <p:strVal val="visible"/>
                                       </p:to>
                                     </p:set>
+                                    <p:animEffect transition="in" filter="fade">
+                                      <p:cBhvr>
+                                        <p:cTn id="31" dur="500"/>
+                                        <p:tgtEl>
+                                          <p:spTgt spid="9"/>
+                                        </p:tgtEl>
+                                      </p:cBhvr>
+                                    </p:animEffect>
                                   </p:childTnLst>
                                 </p:cTn>
                               </p:par>
-                            </p:childTnLst>
-                          </p:cTn>
-                        </p:par>
-                        <p:par>
-                          <p:cTn id="28" fill="hold">
-                            <p:stCondLst>
-                              <p:cond delay="0"/>
-                            </p:stCondLst>
-                            <p:childTnLst>
                               <p:par>
-                                <p:cTn id="29" presetID="1" presetClass="entr" presetSubtype="0" fill="hold" nodeType="clickEffect">
+                                <p:cTn id="32" presetID="10" presetClass="entr" presetSubtype="0" fill="hold" nodeType="withEffect">
                                   <p:stCondLst>
                                     <p:cond delay="0"/>
                                   </p:stCondLst>
                                   <p:childTnLst>
                                     <p:set>
                                       <p:cBhvr>
-                                        <p:cTn id="30" dur="1" fill="hold">
+                                        <p:cTn id="33" dur="1" fill="hold">
                                           <p:stCondLst>
                                             <p:cond delay="0"/>
                                           </p:stCondLst>
@@ -12119,6 +12180,14 @@
                                         <p:strVal val="visible"/>
                                       </p:to>
                                     </p:set>
+                                    <p:animEffect transition="in" filter="fade">
+                                      <p:cBhvr>
+                                        <p:cTn id="34" dur="500"/>
+                                        <p:tgtEl>
+                                          <p:spTgt spid="10"/>
+                                        </p:tgtEl>
+                                      </p:cBhvr>
+                                    </p:animEffect>
                                   </p:childTnLst>
                                 </p:cTn>
                               </p:par>
@@ -12494,44 +12563,44 @@
         <a:sysClr val="window" lastClr="FFFFFF"/>
       </a:lt1>
       <a:dk2>
-        <a:srgbClr val="1F497D"/>
+        <a:srgbClr val="0E2841"/>
       </a:dk2>
       <a:lt2>
-        <a:srgbClr val="EEECE1"/>
+        <a:srgbClr val="E8E8E8"/>
       </a:lt2>
       <a:accent1>
-        <a:srgbClr val="4F81BD"/>
+        <a:srgbClr val="156082"/>
       </a:accent1>
       <a:accent2>
-        <a:srgbClr val="C0504D"/>
+        <a:srgbClr val="E97132"/>
       </a:accent2>
       <a:accent3>
-        <a:srgbClr val="9BBB59"/>
+        <a:srgbClr val="196B24"/>
       </a:accent3>
       <a:accent4>
-        <a:srgbClr val="8064A2"/>
+        <a:srgbClr val="0F9ED5"/>
       </a:accent4>
       <a:accent5>
-        <a:srgbClr val="4BACC6"/>
+        <a:srgbClr val="A02B93"/>
       </a:accent5>
       <a:accent6>
-        <a:srgbClr val="F79646"/>
+        <a:srgbClr val="4EA72E"/>
       </a:accent6>
       <a:hlink>
-        <a:srgbClr val="0000FF"/>
+        <a:srgbClr val="467886"/>
       </a:hlink>
       <a:folHlink>
-        <a:srgbClr val="800080"/>
+        <a:srgbClr val="96607D"/>
       </a:folHlink>
     </a:clrScheme>
     <a:fontScheme name="Office">
       <a:majorFont>
-        <a:latin typeface="Calibri"/>
+        <a:latin typeface="Aptos Display" panose="02110004020202020204"/>
         <a:ea typeface=""/>
         <a:cs typeface=""/>
-        <a:font script="Jpan" typeface="ＭＳ Ｐゴシック"/>
+        <a:font script="Jpan" typeface="游ゴシック Light"/>
         <a:font script="Hang" typeface="맑은 고딕"/>
-        <a:font script="Hans" typeface="宋体"/>
+        <a:font script="Hans" typeface="等线 Light"/>
         <a:font script="Hant" typeface="新細明體"/>
         <a:font script="Arab" typeface="Times New Roman"/>
         <a:font script="Hebr" typeface="Times New Roman"/>
@@ -12559,14 +12628,31 @@
         <a:font script="Viet" typeface="Times New Roman"/>
         <a:font script="Uigh" typeface="Microsoft Uighur"/>
         <a:font script="Geor" typeface="Sylfaen"/>
+        <a:font script="Armn" typeface="Arial"/>
+        <a:font script="Bugi" typeface="Leelawadee UI"/>
+        <a:font script="Bopo" typeface="Microsoft JhengHei"/>
+        <a:font script="Java" typeface="Javanese Text"/>
+        <a:font script="Lisu" typeface="Segoe UI"/>
+        <a:font script="Mymr" typeface="Myanmar Text"/>
+        <a:font script="Nkoo" typeface="Ebrima"/>
+        <a:font script="Olck" typeface="Nirmala UI"/>
+        <a:font script="Osma" typeface="Ebrima"/>
+        <a:font script="Phag" typeface="Phagspa"/>
+        <a:font script="Syrn" typeface="Estrangelo Edessa"/>
+        <a:font script="Syrj" typeface="Estrangelo Edessa"/>
+        <a:font script="Syre" typeface="Estrangelo Edessa"/>
+        <a:font script="Sora" typeface="Nirmala UI"/>
+        <a:font script="Tale" typeface="Microsoft Tai Le"/>
+        <a:font script="Talu" typeface="Microsoft New Tai Lue"/>
+        <a:font script="Tfng" typeface="Ebrima"/>
       </a:majorFont>
       <a:minorFont>
-        <a:latin typeface="Calibri"/>
+        <a:latin typeface="Aptos" panose="02110004020202020204"/>
         <a:ea typeface=""/>
         <a:cs typeface=""/>
-        <a:font script="Jpan" typeface="ＭＳ Ｐゴシック"/>
+        <a:font script="Jpan" typeface="游ゴシック"/>
         <a:font script="Hang" typeface="맑은 고딕"/>
-        <a:font script="Hans" typeface="宋体"/>
+        <a:font script="Hans" typeface="等线"/>
         <a:font script="Hant" typeface="新細明體"/>
         <a:font script="Arab" typeface="Arial"/>
         <a:font script="Hebr" typeface="Arial"/>
@@ -12594,6 +12680,23 @@
         <a:font script="Viet" typeface="Arial"/>
         <a:font script="Uigh" typeface="Microsoft Uighur"/>
         <a:font script="Geor" typeface="Sylfaen"/>
+        <a:font script="Armn" typeface="Arial"/>
+        <a:font script="Bugi" typeface="Leelawadee UI"/>
+        <a:font script="Bopo" typeface="Microsoft JhengHei"/>
+        <a:font script="Java" typeface="Javanese Text"/>
+        <a:font script="Lisu" typeface="Segoe UI"/>
+        <a:font script="Mymr" typeface="Myanmar Text"/>
+        <a:font script="Nkoo" typeface="Ebrima"/>
+        <a:font script="Olck" typeface="Nirmala UI"/>
+        <a:font script="Osma" typeface="Ebrima"/>
+        <a:font script="Phag" typeface="Phagspa"/>
+        <a:font script="Syrn" typeface="Estrangelo Edessa"/>
+        <a:font script="Syrj" typeface="Estrangelo Edessa"/>
+        <a:font script="Syre" typeface="Estrangelo Edessa"/>
+        <a:font script="Sora" typeface="Nirmala UI"/>
+        <a:font script="Tale" typeface="Microsoft Tai Le"/>
+        <a:font script="Talu" typeface="Microsoft New Tai Lue"/>
+        <a:font script="Tfng" typeface="Ebrima"/>
       </a:minorFont>
     </a:fontScheme>
     <a:fmtScheme name="Office">
@@ -12605,180 +12708,136 @@
           <a:gsLst>
             <a:gs pos="0">
               <a:schemeClr val="phClr">
-                <a:tint val="50000"/>
-                <a:satMod val="300000"/>
+                <a:lumMod val="110000"/>
+                <a:satMod val="105000"/>
+                <a:tint val="67000"/>
               </a:schemeClr>
             </a:gs>
-            <a:gs pos="35000">
+            <a:gs pos="50000">
               <a:schemeClr val="phClr">
-                <a:tint val="37000"/>
-                <a:satMod val="300000"/>
+                <a:lumMod val="105000"/>
+                <a:satMod val="103000"/>
+                <a:tint val="73000"/>
               </a:schemeClr>
             </a:gs>
             <a:gs pos="100000">
               <a:schemeClr val="phClr">
-                <a:tint val="15000"/>
-                <a:satMod val="350000"/>
+                <a:lumMod val="105000"/>
+                <a:satMod val="109000"/>
+                <a:tint val="81000"/>
               </a:schemeClr>
             </a:gs>
           </a:gsLst>
-          <a:lin ang="16200000" scaled="1"/>
+          <a:lin ang="5400000" scaled="0"/>
         </a:gradFill>
         <a:gradFill rotWithShape="1">
           <a:gsLst>
             <a:gs pos="0">
               <a:schemeClr val="phClr">
-                <a:tint val="100000"/>
+                <a:satMod val="103000"/>
+                <a:lumMod val="102000"/>
+                <a:tint val="94000"/>
+              </a:schemeClr>
+            </a:gs>
+            <a:gs pos="50000">
+              <a:schemeClr val="phClr">
+                <a:satMod val="110000"/>
+                <a:lumMod val="100000"/>
                 <a:shade val="100000"/>
-                <a:satMod val="130000"/>
               </a:schemeClr>
             </a:gs>
             <a:gs pos="100000">
               <a:schemeClr val="phClr">
-                <a:tint val="50000"/>
-                <a:shade val="100000"/>
-                <a:satMod val="350000"/>
+                <a:lumMod val="99000"/>
+                <a:satMod val="120000"/>
+                <a:shade val="78000"/>
               </a:schemeClr>
             </a:gs>
           </a:gsLst>
-          <a:lin ang="16200000" scaled="0"/>
+          <a:lin ang="5400000" scaled="0"/>
         </a:gradFill>
       </a:fillStyleLst>
       <a:lnStyleLst>
-        <a:ln w="9525" cap="flat" cmpd="sng" algn="ctr">
+        <a:ln w="12700" cap="flat" cmpd="sng" algn="ctr">
           <a:solidFill>
-            <a:schemeClr val="phClr">
-              <a:shade val="95000"/>
-              <a:satMod val="105000"/>
-            </a:schemeClr>
+            <a:schemeClr val="phClr"/>
           </a:solidFill>
           <a:prstDash val="solid"/>
+          <a:miter lim="800000"/>
+        </a:ln>
+        <a:ln w="19050" cap="flat" cmpd="sng" algn="ctr">
+          <a:solidFill>
+            <a:schemeClr val="phClr"/>
+          </a:solidFill>
+          <a:prstDash val="solid"/>
+          <a:miter lim="800000"/>
         </a:ln>
         <a:ln w="25400" cap="flat" cmpd="sng" algn="ctr">
           <a:solidFill>
             <a:schemeClr val="phClr"/>
           </a:solidFill>
           <a:prstDash val="solid"/>
-        </a:ln>
-        <a:ln w="38100" cap="flat" cmpd="sng" algn="ctr">
-          <a:solidFill>
-            <a:schemeClr val="phClr"/>
-          </a:solidFill>
-          <a:prstDash val="solid"/>
+          <a:miter lim="800000"/>
         </a:ln>
       </a:lnStyleLst>
       <a:effectStyleLst>
         <a:effectStyle>
+          <a:effectLst/>
+        </a:effectStyle>
+        <a:effectStyle>
+          <a:effectLst/>
+        </a:effectStyle>
+        <a:effectStyle>
           <a:effectLst>
-            <a:outerShdw blurRad="40000" dist="20000" dir="5400000" rotWithShape="0">
+            <a:outerShdw blurRad="57150" dist="19050" dir="5400000" algn="ctr" rotWithShape="0">
               <a:srgbClr val="000000">
-                <a:alpha val="38000"/>
+                <a:alpha val="63000"/>
               </a:srgbClr>
             </a:outerShdw>
           </a:effectLst>
-        </a:effectStyle>
-        <a:effectStyle>
-          <a:effectLst>
-            <a:outerShdw blurRad="40000" dist="23000" dir="5400000" rotWithShape="0">
-              <a:srgbClr val="000000">
-                <a:alpha val="35000"/>
-              </a:srgbClr>
-            </a:outerShdw>
-          </a:effectLst>
-        </a:effectStyle>
-        <a:effectStyle>
-          <a:effectLst>
-            <a:outerShdw blurRad="40000" dist="23000" dir="5400000" rotWithShape="0">
-              <a:srgbClr val="000000">
-                <a:alpha val="35000"/>
-              </a:srgbClr>
-            </a:outerShdw>
-          </a:effectLst>
-          <a:scene3d>
-            <a:camera prst="orthographicFront">
-              <a:rot lat="0" lon="0" rev="0"/>
-            </a:camera>
-            <a:lightRig rig="threePt" dir="t">
-              <a:rot lat="0" lon="0" rev="1200000"/>
-            </a:lightRig>
-          </a:scene3d>
-          <a:sp3d>
-            <a:bevelT w="63500" h="25400"/>
-          </a:sp3d>
         </a:effectStyle>
       </a:effectStyleLst>
       <a:bgFillStyleLst>
         <a:solidFill>
           <a:schemeClr val="phClr"/>
         </a:solidFill>
+        <a:solidFill>
+          <a:schemeClr val="phClr">
+            <a:tint val="95000"/>
+            <a:satMod val="170000"/>
+          </a:schemeClr>
+        </a:solidFill>
         <a:gradFill rotWithShape="1">
           <a:gsLst>
             <a:gs pos="0">
               <a:schemeClr val="phClr">
-                <a:tint val="40000"/>
-                <a:satMod val="350000"/>
+                <a:tint val="93000"/>
+                <a:satMod val="150000"/>
+                <a:shade val="98000"/>
+                <a:lumMod val="102000"/>
               </a:schemeClr>
             </a:gs>
-            <a:gs pos="40000">
+            <a:gs pos="50000">
               <a:schemeClr val="phClr">
-                <a:tint val="45000"/>
-                <a:shade val="99000"/>
-                <a:satMod val="350000"/>
+                <a:tint val="98000"/>
+                <a:satMod val="130000"/>
+                <a:shade val="90000"/>
+                <a:lumMod val="103000"/>
               </a:schemeClr>
             </a:gs>
             <a:gs pos="100000">
               <a:schemeClr val="phClr">
-                <a:shade val="20000"/>
-                <a:satMod val="255000"/>
+                <a:shade val="63000"/>
+                <a:satMod val="120000"/>
               </a:schemeClr>
             </a:gs>
           </a:gsLst>
-          <a:path path="circle">
-            <a:fillToRect l="50000" t="-80000" r="50000" b="180000"/>
-          </a:path>
-        </a:gradFill>
-        <a:gradFill rotWithShape="1">
-          <a:gsLst>
-            <a:gs pos="0">
-              <a:schemeClr val="phClr">
-                <a:tint val="80000"/>
-                <a:satMod val="300000"/>
-              </a:schemeClr>
-            </a:gs>
-            <a:gs pos="100000">
-              <a:schemeClr val="phClr">
-                <a:shade val="30000"/>
-                <a:satMod val="200000"/>
-              </a:schemeClr>
-            </a:gs>
-          </a:gsLst>
-          <a:path path="circle">
-            <a:fillToRect l="50000" t="50000" r="50000" b="50000"/>
-          </a:path>
+          <a:lin ang="5400000" scaled="0"/>
         </a:gradFill>
       </a:bgFillStyleLst>
     </a:fmtScheme>
   </a:themeElements>
   <a:objectDefaults>
-    <a:spDef>
-      <a:spPr/>
-      <a:bodyPr/>
-      <a:lstStyle/>
-      <a:style>
-        <a:lnRef idx="1">
-          <a:schemeClr val="accent1"/>
-        </a:lnRef>
-        <a:fillRef idx="3">
-          <a:schemeClr val="accent1"/>
-        </a:fillRef>
-        <a:effectRef idx="2">
-          <a:schemeClr val="accent1"/>
-        </a:effectRef>
-        <a:fontRef idx="minor">
-          <a:schemeClr val="lt1"/>
-        </a:fontRef>
-      </a:style>
-    </a:spDef>
     <a:lnDef>
       <a:spPr/>
       <a:bodyPr/>
@@ -12800,5 +12859,16 @@
     </a:lnDef>
   </a:objectDefaults>
   <a:extraClrSchemeLst/>
+  <a:extLst>
+    <a:ext uri="{05A4C25C-085E-4340-85A3-A5531E510DB2}">
+      <thm15:themeFamily xmlns:thm15="http://schemas.microsoft.com/office/thememl/2012/main" name="Office Theme" id="{2E142A2C-CD16-42D6-873A-C26D2A0506FA}" vid="{1BDDFF52-6CD6-40A5-AB3C-68EB2F1E4D0A}"/>
+    </a:ext>
+  </a:extLst>
 </a:theme>
+</file>
+
+<file path=docMetadata/LabelInfo.xml><?xml version="1.0" encoding="utf-8"?>
+<clbl:labelList xmlns:clbl="http://schemas.microsoft.com/office/2020/mipLabelMetadata">
+  <clbl:label id="{f42aa342-8706-4288-bd11-ebb85995028c}" enabled="1" method="Standard" siteId="{72f988bf-86f1-41af-91ab-2d7cd011db47}" contentBits="0" removed="0"/>
+</clbl:labelList>
 </file>